--- a/HW개발팀_AI활용방안_요약.pptx
+++ b/HW개발팀_AI활용방안_요약.pptx
@@ -3224,7 +3224,7 @@
                 </a:solidFill>
                 <a:latin typeface="Apple SD Gothic Neo"/>
               </a:rPr>
-              <a:t>삼성전자 스마트폰 HW 개발팀 AI 활용 방안  (1/4)</a:t>
+              <a:t>NC HW 개발팀  |  사내 AI 환경 (VS Code · Cline SR · Gauss · Ollama · GitHub Enterprise)  (1/4)</a:t>
             </a:r>
           </a:p>
         </p:txBody>
@@ -3266,65 +3266,21 @@
                 </a:solidFill>
                 <a:latin typeface="Apple SD Gothic Neo"/>
               </a:rPr>
-              <a:t>왜 지금 AI 도구를 검토하는가</a:t>
-            </a:r>
-          </a:p>
-        </p:txBody>
-      </p:sp>
-      <p:sp>
-        <p:nvSpPr>
-          <p:cNvPr id="6" name="Rectangle 5"/>
-          <p:cNvSpPr/>
-          <p:nvPr/>
-        </p:nvSpPr>
-        <p:spPr>
-          <a:xfrm>
-            <a:off x="502920" y="1115568"/>
-            <a:ext cx="63500" cy="292608"/>
-          </a:xfrm>
-          <a:prstGeom prst="rect">
-            <a:avLst/>
-          </a:prstGeom>
-          <a:solidFill>
-            <a:srgbClr val="1F6FB2"/>
-          </a:solidFill>
-          <a:ln>
-            <a:noFill/>
-          </a:ln>
-          <a:effectLst/>
-        </p:spPr>
-        <p:style>
-          <a:lnRef idx="1">
-            <a:schemeClr val="accent1"/>
-          </a:lnRef>
-          <a:fillRef idx="3">
-            <a:schemeClr val="accent1"/>
-          </a:fillRef>
-          <a:effectRef idx="2">
-            <a:schemeClr val="accent1"/>
-          </a:effectRef>
-          <a:fontRef idx="minor">
-            <a:schemeClr val="lt1"/>
-          </a:fontRef>
-        </p:style>
-        <p:txBody>
-          <a:bodyPr rtlCol="0" anchor="ctr"/>
-          <a:lstStyle/>
-          <a:p>
-            <a:pPr algn="ctr"/>
-          </a:p>
-        </p:txBody>
-      </p:sp>
-      <p:sp>
-        <p:nvSpPr>
-          <p:cNvPr id="7" name="TextBox 6"/>
+              <a:t>HW 개발 업무 — 사내 AI 환경 활용 범위</a:t>
+            </a:r>
+          </a:p>
+        </p:txBody>
+      </p:sp>
+      <p:sp>
+        <p:nvSpPr>
+          <p:cNvPr id="6" name="TextBox 5"/>
           <p:cNvSpPr txBox="1"/>
           <p:nvPr/>
         </p:nvSpPr>
         <p:spPr>
           <a:xfrm>
-            <a:off x="612648" y="1097280"/>
-            <a:ext cx="5486400" cy="329184"/>
+            <a:off x="502920" y="1051560"/>
+            <a:ext cx="11155680" cy="347472"/>
           </a:xfrm>
           <a:prstGeom prst="rect">
             <a:avLst/>
@@ -3346,37 +3302,37 @@
               </a:spcAft>
             </a:pPr>
             <a:r>
-              <a:rPr sz="1450" b="1">
-                <a:solidFill>
-                  <a:srgbClr val="142A4A"/>
+              <a:rPr sz="1150" b="0">
+                <a:solidFill>
+                  <a:srgbClr val="444A55"/>
                 </a:solidFill>
                 <a:latin typeface="Apple SD Gothic Neo"/>
               </a:rPr>
-              <a:t>1. 우리 팀 업무와 AI가 도울 수 있는 부분</a:t>
-            </a:r>
-          </a:p>
-        </p:txBody>
-      </p:sp>
-      <p:sp>
-        <p:nvSpPr>
-          <p:cNvPr id="8" name="Rounded Rectangle 7"/>
+              <a:t>목표: 정형·반복 업무를 AI가 직접 수행하도록 확대하고, 엔지니어는 설계·검증·판단에 집중</a:t>
+            </a:r>
+          </a:p>
+        </p:txBody>
+      </p:sp>
+      <p:sp>
+        <p:nvSpPr>
+          <p:cNvPr id="7" name="Rectangle 6"/>
           <p:cNvSpPr/>
           <p:nvPr/>
         </p:nvSpPr>
         <p:spPr>
           <a:xfrm>
-            <a:off x="502920" y="1572768"/>
-            <a:ext cx="5532120" cy="1078992"/>
-          </a:xfrm>
-          <a:prstGeom prst="roundRect">
+            <a:off x="411480" y="1444752"/>
+            <a:ext cx="2148840" cy="475488"/>
+          </a:xfrm>
+          <a:prstGeom prst="rect">
             <a:avLst/>
           </a:prstGeom>
           <a:solidFill>
-            <a:srgbClr val="E8F1FA"/>
+            <a:srgbClr val="1F6FB2"/>
           </a:solidFill>
           <a:ln w="12700">
             <a:solidFill>
-              <a:srgbClr val="D5DDE6"/>
+              <a:srgbClr val="FFFFFF"/>
             </a:solidFill>
           </a:ln>
           <a:effectLst/>
@@ -3405,58 +3361,14 @@
       </p:sp>
       <p:sp>
         <p:nvSpPr>
-          <p:cNvPr id="9" name="Rectangle 8"/>
-          <p:cNvSpPr/>
-          <p:nvPr/>
-        </p:nvSpPr>
-        <p:spPr>
-          <a:xfrm>
-            <a:off x="502920" y="1572768"/>
-            <a:ext cx="76200" cy="1078992"/>
-          </a:xfrm>
-          <a:prstGeom prst="rect">
-            <a:avLst/>
-          </a:prstGeom>
-          <a:solidFill>
-            <a:srgbClr val="1F6FB2"/>
-          </a:solidFill>
-          <a:ln>
-            <a:noFill/>
-          </a:ln>
-          <a:effectLst/>
-        </p:spPr>
-        <p:style>
-          <a:lnRef idx="1">
-            <a:schemeClr val="accent1"/>
-          </a:lnRef>
-          <a:fillRef idx="3">
-            <a:schemeClr val="accent1"/>
-          </a:fillRef>
-          <a:effectRef idx="2">
-            <a:schemeClr val="accent1"/>
-          </a:effectRef>
-          <a:fontRef idx="minor">
-            <a:schemeClr val="lt1"/>
-          </a:fontRef>
-        </p:style>
-        <p:txBody>
-          <a:bodyPr rtlCol="0" anchor="ctr"/>
-          <a:lstStyle/>
-          <a:p>
-            <a:pPr algn="ctr"/>
-          </a:p>
-        </p:txBody>
-      </p:sp>
-      <p:sp>
-        <p:nvSpPr>
-          <p:cNvPr id="10" name="TextBox 9"/>
+          <p:cNvPr id="8" name="TextBox 7"/>
           <p:cNvSpPr txBox="1"/>
           <p:nvPr/>
         </p:nvSpPr>
         <p:spPr>
           <a:xfrm>
-            <a:off x="749808" y="1664208"/>
-            <a:ext cx="5074920" cy="320040"/>
+            <a:off x="411480" y="1444752"/>
+            <a:ext cx="2148840" cy="475488"/>
           </a:xfrm>
           <a:prstGeom prst="rect">
             <a:avLst/>
@@ -3464,12 +3376,12 @@
           <a:noFill/>
         </p:spPr>
         <p:txBody>
-          <a:bodyPr wrap="square" anchor="t" lIns="25400" rIns="25400" tIns="25400" bIns="25400">
+          <a:bodyPr wrap="square" anchor="ctr" lIns="25400" rIns="25400" tIns="25400" bIns="25400">
             <a:spAutoFit/>
           </a:bodyPr>
           <a:lstStyle/>
           <a:p>
-            <a:pPr algn="l">
+            <a:pPr algn="ctr">
               <a:lnSpc>
                 <a:spcPct val="100000"/>
               </a:lnSpc>
@@ -3478,79 +3390,37 @@
               </a:spcAft>
             </a:pPr>
             <a:r>
-              <a:rPr sz="1350" b="1">
-                <a:solidFill>
-                  <a:srgbClr val="1F6FB2"/>
+              <a:rPr sz="1100" b="1">
+                <a:solidFill>
+                  <a:srgbClr val="FFFFFF"/>
                 </a:solidFill>
                 <a:latin typeface="Apple SD Gothic Neo"/>
               </a:rPr>
-              <a:t>우리 팀 업무</a:t>
-            </a:r>
-          </a:p>
-        </p:txBody>
-      </p:sp>
-      <p:sp>
-        <p:nvSpPr>
-          <p:cNvPr id="11" name="TextBox 10"/>
-          <p:cNvSpPr txBox="1"/>
-          <p:nvPr/>
-        </p:nvSpPr>
-        <p:spPr>
-          <a:xfrm>
-            <a:off x="749808" y="1965960"/>
-            <a:ext cx="5074920" cy="594360"/>
-          </a:xfrm>
-          <a:prstGeom prst="rect">
-            <a:avLst/>
-          </a:prstGeom>
-          <a:noFill/>
-        </p:spPr>
-        <p:txBody>
-          <a:bodyPr wrap="square" anchor="t" lIns="25400" rIns="25400" tIns="25400" bIns="25400">
-            <a:spAutoFit/>
-          </a:bodyPr>
-          <a:lstStyle/>
-          <a:p>
-            <a:pPr algn="l">
-              <a:lnSpc>
-                <a:spcPct val="105000"/>
-              </a:lnSpc>
-              <a:spcAft>
-                <a:spcPts val="400"/>
-              </a:spcAft>
-            </a:pPr>
-            <a:r>
-              <a:rPr sz="1170" b="0">
-                <a:solidFill>
-                  <a:srgbClr val="444A55"/>
-                </a:solidFill>
-                <a:latin typeface="Apple SD Gothic Neo"/>
-              </a:rPr>
-              <a:t>스마트폰 안의 회로, 센서, 전원, 충전, 통신 부품이 안정적으로 동작하도록 개발·검증합니다.</a:t>
-            </a:r>
-          </a:p>
-        </p:txBody>
-      </p:sp>
-      <p:sp>
-        <p:nvSpPr>
-          <p:cNvPr id="12" name="Rounded Rectangle 11"/>
+              <a:t>업무 영역</a:t>
+            </a:r>
+          </a:p>
+        </p:txBody>
+      </p:sp>
+      <p:sp>
+        <p:nvSpPr>
+          <p:cNvPr id="9" name="Rectangle 8"/>
           <p:cNvSpPr/>
           <p:nvPr/>
         </p:nvSpPr>
         <p:spPr>
           <a:xfrm>
-            <a:off x="502920" y="2788920"/>
-            <a:ext cx="5532120" cy="1078992"/>
-          </a:xfrm>
-          <a:prstGeom prst="roundRect">
+            <a:off x="2560320" y="1444752"/>
+            <a:ext cx="5806440" cy="475488"/>
+          </a:xfrm>
+          <a:prstGeom prst="rect">
             <a:avLst/>
           </a:prstGeom>
           <a:solidFill>
-            <a:srgbClr val="E8F1FA"/>
+            <a:srgbClr val="1F6FB2"/>
           </a:solidFill>
           <a:ln w="12700">
             <a:solidFill>
-              <a:srgbClr val="D5DDE6"/>
+              <a:srgbClr val="FFFFFF"/>
             </a:solidFill>
           </a:ln>
           <a:effectLst/>
@@ -3579,58 +3449,14 @@
       </p:sp>
       <p:sp>
         <p:nvSpPr>
-          <p:cNvPr id="13" name="Rectangle 12"/>
-          <p:cNvSpPr/>
-          <p:nvPr/>
-        </p:nvSpPr>
-        <p:spPr>
-          <a:xfrm>
-            <a:off x="502920" y="2788920"/>
-            <a:ext cx="76200" cy="1078992"/>
-          </a:xfrm>
-          <a:prstGeom prst="rect">
-            <a:avLst/>
-          </a:prstGeom>
-          <a:solidFill>
-            <a:srgbClr val="1F6FB2"/>
-          </a:solidFill>
-          <a:ln>
-            <a:noFill/>
-          </a:ln>
-          <a:effectLst/>
-        </p:spPr>
-        <p:style>
-          <a:lnRef idx="1">
-            <a:schemeClr val="accent1"/>
-          </a:lnRef>
-          <a:fillRef idx="3">
-            <a:schemeClr val="accent1"/>
-          </a:fillRef>
-          <a:effectRef idx="2">
-            <a:schemeClr val="accent1"/>
-          </a:effectRef>
-          <a:fontRef idx="minor">
-            <a:schemeClr val="lt1"/>
-          </a:fontRef>
-        </p:style>
-        <p:txBody>
-          <a:bodyPr rtlCol="0" anchor="ctr"/>
-          <a:lstStyle/>
-          <a:p>
-            <a:pPr algn="ctr"/>
-          </a:p>
-        </p:txBody>
-      </p:sp>
-      <p:sp>
-        <p:nvSpPr>
-          <p:cNvPr id="14" name="TextBox 13"/>
+          <p:cNvPr id="10" name="TextBox 9"/>
           <p:cNvSpPr txBox="1"/>
           <p:nvPr/>
         </p:nvSpPr>
         <p:spPr>
           <a:xfrm>
-            <a:off x="749808" y="2880360"/>
-            <a:ext cx="5074920" cy="320040"/>
+            <a:off x="2560320" y="1444752"/>
+            <a:ext cx="5806440" cy="475488"/>
           </a:xfrm>
           <a:prstGeom prst="rect">
             <a:avLst/>
@@ -3638,12 +3464,12 @@
           <a:noFill/>
         </p:spPr>
         <p:txBody>
-          <a:bodyPr wrap="square" anchor="t" lIns="25400" rIns="25400" tIns="25400" bIns="25400">
+          <a:bodyPr wrap="square" anchor="ctr" lIns="25400" rIns="25400" tIns="25400" bIns="25400">
             <a:spAutoFit/>
           </a:bodyPr>
           <a:lstStyle/>
           <a:p>
-            <a:pPr algn="l">
+            <a:pPr algn="ctr">
               <a:lnSpc>
                 <a:spcPct val="100000"/>
               </a:lnSpc>
@@ -3652,79 +3478,37 @@
               </a:spcAft>
             </a:pPr>
             <a:r>
-              <a:rPr sz="1350" b="1">
-                <a:solidFill>
-                  <a:srgbClr val="1F6FB2"/>
+              <a:rPr sz="1100" b="1">
+                <a:solidFill>
+                  <a:srgbClr val="FFFFFF"/>
                 </a:solidFill>
                 <a:latin typeface="Apple SD Gothic Neo"/>
               </a:rPr>
-              <a:t>AI가 잘 돕는 일</a:t>
-            </a:r>
-          </a:p>
-        </p:txBody>
-      </p:sp>
-      <p:sp>
-        <p:nvSpPr>
-          <p:cNvPr id="15" name="TextBox 14"/>
-          <p:cNvSpPr txBox="1"/>
-          <p:nvPr/>
-        </p:nvSpPr>
-        <p:spPr>
-          <a:xfrm>
-            <a:off x="749808" y="3182112"/>
-            <a:ext cx="5074920" cy="594360"/>
-          </a:xfrm>
-          <a:prstGeom prst="rect">
-            <a:avLst/>
-          </a:prstGeom>
-          <a:noFill/>
-        </p:spPr>
-        <p:txBody>
-          <a:bodyPr wrap="square" anchor="t" lIns="25400" rIns="25400" tIns="25400" bIns="25400">
-            <a:spAutoFit/>
-          </a:bodyPr>
-          <a:lstStyle/>
-          <a:p>
-            <a:pPr algn="l">
-              <a:lnSpc>
-                <a:spcPct val="105000"/>
-              </a:lnSpc>
-              <a:spcAft>
-                <a:spcPts val="400"/>
-              </a:spcAft>
-            </a:pPr>
-            <a:r>
-              <a:rPr sz="1170" b="0">
-                <a:solidFill>
-                  <a:srgbClr val="444A55"/>
-                </a:solidFill>
-                <a:latin typeface="Apple SD Gothic Neo"/>
-              </a:rPr>
-              <a:t>회로 자체를 대신 설계하기보다, 코드 초안·문서 정리·로그 분석·측정 데이터 정리처럼 반복되는 일을 도와줍니다.</a:t>
-            </a:r>
-          </a:p>
-        </p:txBody>
-      </p:sp>
-      <p:sp>
-        <p:nvSpPr>
-          <p:cNvPr id="16" name="Rounded Rectangle 15"/>
+              <a:t>활용 내용</a:t>
+            </a:r>
+          </a:p>
+        </p:txBody>
+      </p:sp>
+      <p:sp>
+        <p:nvSpPr>
+          <p:cNvPr id="11" name="Rectangle 10"/>
           <p:cNvSpPr/>
           <p:nvPr/>
         </p:nvSpPr>
         <p:spPr>
           <a:xfrm>
-            <a:off x="502920" y="4005072"/>
-            <a:ext cx="5532120" cy="1078992"/>
-          </a:xfrm>
-          <a:prstGeom prst="roundRect">
+            <a:off x="8366760" y="1444752"/>
+            <a:ext cx="3794760" cy="475488"/>
+          </a:xfrm>
+          <a:prstGeom prst="rect">
             <a:avLst/>
           </a:prstGeom>
           <a:solidFill>
-            <a:srgbClr val="E8F1FA"/>
+            <a:srgbClr val="1F6FB2"/>
           </a:solidFill>
           <a:ln w="12700">
             <a:solidFill>
-              <a:srgbClr val="D5DDE6"/>
+              <a:srgbClr val="FFFFFF"/>
             </a:solidFill>
           </a:ln>
           <a:effectLst/>
@@ -3753,58 +3537,14 @@
       </p:sp>
       <p:sp>
         <p:nvSpPr>
-          <p:cNvPr id="17" name="Rectangle 16"/>
-          <p:cNvSpPr/>
-          <p:nvPr/>
-        </p:nvSpPr>
-        <p:spPr>
-          <a:xfrm>
-            <a:off x="502920" y="4005072"/>
-            <a:ext cx="76200" cy="1078992"/>
-          </a:xfrm>
-          <a:prstGeom prst="rect">
-            <a:avLst/>
-          </a:prstGeom>
-          <a:solidFill>
-            <a:srgbClr val="1F6FB2"/>
-          </a:solidFill>
-          <a:ln>
-            <a:noFill/>
-          </a:ln>
-          <a:effectLst/>
-        </p:spPr>
-        <p:style>
-          <a:lnRef idx="1">
-            <a:schemeClr val="accent1"/>
-          </a:lnRef>
-          <a:fillRef idx="3">
-            <a:schemeClr val="accent1"/>
-          </a:fillRef>
-          <a:effectRef idx="2">
-            <a:schemeClr val="accent1"/>
-          </a:effectRef>
-          <a:fontRef idx="minor">
-            <a:schemeClr val="lt1"/>
-          </a:fontRef>
-        </p:style>
-        <p:txBody>
-          <a:bodyPr rtlCol="0" anchor="ctr"/>
-          <a:lstStyle/>
-          <a:p>
-            <a:pPr algn="ctr"/>
-          </a:p>
-        </p:txBody>
-      </p:sp>
-      <p:sp>
-        <p:nvSpPr>
-          <p:cNvPr id="18" name="TextBox 17"/>
+          <p:cNvPr id="12" name="TextBox 11"/>
           <p:cNvSpPr txBox="1"/>
           <p:nvPr/>
         </p:nvSpPr>
         <p:spPr>
           <a:xfrm>
-            <a:off x="749808" y="4096512"/>
-            <a:ext cx="5074920" cy="320040"/>
+            <a:off x="8366760" y="1444752"/>
+            <a:ext cx="3794760" cy="475488"/>
           </a:xfrm>
           <a:prstGeom prst="rect">
             <a:avLst/>
@@ -3812,12 +3552,12 @@
           <a:noFill/>
         </p:spPr>
         <p:txBody>
-          <a:bodyPr wrap="square" anchor="t" lIns="25400" rIns="25400" tIns="25400" bIns="25400">
+          <a:bodyPr wrap="square" anchor="ctr" lIns="25400" rIns="25400" tIns="25400" bIns="25400">
             <a:spAutoFit/>
           </a:bodyPr>
           <a:lstStyle/>
           <a:p>
-            <a:pPr algn="l">
+            <a:pPr algn="ctr">
               <a:lnSpc>
                 <a:spcPct val="100000"/>
               </a:lnSpc>
@@ -3826,27 +3566,73 @@
               </a:spcAft>
             </a:pPr>
             <a:r>
-              <a:rPr sz="1350" b="1">
-                <a:solidFill>
-                  <a:srgbClr val="1F6FB2"/>
+              <a:rPr sz="1100" b="1">
+                <a:solidFill>
+                  <a:srgbClr val="FFFFFF"/>
                 </a:solidFill>
                 <a:latin typeface="Apple SD Gothic Neo"/>
               </a:rPr>
-              <a:t>보고 목적</a:t>
-            </a:r>
-          </a:p>
-        </p:txBody>
-      </p:sp>
-      <p:sp>
-        <p:nvSpPr>
-          <p:cNvPr id="19" name="TextBox 18"/>
+              <a:t>주요 도구</a:t>
+            </a:r>
+          </a:p>
+        </p:txBody>
+      </p:sp>
+      <p:sp>
+        <p:nvSpPr>
+          <p:cNvPr id="13" name="Rectangle 12"/>
+          <p:cNvSpPr/>
+          <p:nvPr/>
+        </p:nvSpPr>
+        <p:spPr>
+          <a:xfrm>
+            <a:off x="411480" y="1920240"/>
+            <a:ext cx="2148840" cy="475488"/>
+          </a:xfrm>
+          <a:prstGeom prst="rect">
+            <a:avLst/>
+          </a:prstGeom>
+          <a:solidFill>
+            <a:srgbClr val="FFFFFF"/>
+          </a:solidFill>
+          <a:ln w="9525">
+            <a:solidFill>
+              <a:srgbClr val="D5DDE6"/>
+            </a:solidFill>
+          </a:ln>
+          <a:effectLst/>
+        </p:spPr>
+        <p:style>
+          <a:lnRef idx="1">
+            <a:schemeClr val="accent1"/>
+          </a:lnRef>
+          <a:fillRef idx="3">
+            <a:schemeClr val="accent1"/>
+          </a:fillRef>
+          <a:effectRef idx="2">
+            <a:schemeClr val="accent1"/>
+          </a:effectRef>
+          <a:fontRef idx="minor">
+            <a:schemeClr val="lt1"/>
+          </a:fontRef>
+        </p:style>
+        <p:txBody>
+          <a:bodyPr rtlCol="0" anchor="ctr"/>
+          <a:lstStyle/>
+          <a:p>
+            <a:pPr algn="ctr"/>
+          </a:p>
+        </p:txBody>
+      </p:sp>
+      <p:sp>
+        <p:nvSpPr>
+          <p:cNvPr id="14" name="TextBox 13"/>
           <p:cNvSpPr txBox="1"/>
           <p:nvPr/>
         </p:nvSpPr>
         <p:spPr>
           <a:xfrm>
-            <a:off x="749808" y="4398264"/>
-            <a:ext cx="5074920" cy="594360"/>
+            <a:off x="449580" y="1920240"/>
+            <a:ext cx="2072640" cy="475488"/>
           </a:xfrm>
           <a:prstGeom prst="rect">
             <a:avLst/>
@@ -3854,47 +3640,2071 @@
           <a:noFill/>
         </p:spPr>
         <p:txBody>
-          <a:bodyPr wrap="square" anchor="t" lIns="25400" rIns="25400" tIns="25400" bIns="25400">
+          <a:bodyPr wrap="square" anchor="ctr" lIns="25400" rIns="25400" tIns="25400" bIns="25400">
             <a:spAutoFit/>
           </a:bodyPr>
           <a:lstStyle/>
           <a:p>
-            <a:pPr algn="l">
+            <a:pPr algn="ctr">
               <a:lnSpc>
-                <a:spcPct val="105000"/>
+                <a:spcPct val="92000"/>
               </a:lnSpc>
               <a:spcAft>
                 <a:spcPts val="400"/>
               </a:spcAft>
             </a:pPr>
             <a:r>
-              <a:rPr sz="1170" b="0">
+              <a:rPr sz="1019" b="0">
                 <a:solidFill>
                   <a:srgbClr val="444A55"/>
                 </a:solidFill>
                 <a:latin typeface="Apple SD Gothic Neo"/>
               </a:rPr>
-              <a:t>현재 사내 도구로 지금 당장 할 수 있는 일과, 현재 조건 때문에 어려운 일을 구분해 보고드립니다.</a:t>
-            </a:r>
-          </a:p>
-        </p:txBody>
-      </p:sp>
-      <p:sp>
-        <p:nvSpPr>
-          <p:cNvPr id="20" name="Rectangle 19"/>
+              <a:t>펌웨어·드라이버</a:t>
+            </a:r>
+          </a:p>
+        </p:txBody>
+      </p:sp>
+      <p:sp>
+        <p:nvSpPr>
+          <p:cNvPr id="15" name="Rectangle 14"/>
           <p:cNvSpPr/>
           <p:nvPr/>
         </p:nvSpPr>
         <p:spPr>
           <a:xfrm>
-            <a:off x="6400800" y="1115568"/>
-            <a:ext cx="63500" cy="292608"/>
+            <a:off x="2560320" y="1920240"/>
+            <a:ext cx="5806440" cy="475488"/>
           </a:xfrm>
           <a:prstGeom prst="rect">
             <a:avLst/>
           </a:prstGeom>
           <a:solidFill>
-            <a:srgbClr val="1F6FB2"/>
+            <a:srgbClr val="FFFFFF"/>
+          </a:solidFill>
+          <a:ln w="9525">
+            <a:solidFill>
+              <a:srgbClr val="D5DDE6"/>
+            </a:solidFill>
+          </a:ln>
+          <a:effectLst/>
+        </p:spPr>
+        <p:style>
+          <a:lnRef idx="1">
+            <a:schemeClr val="accent1"/>
+          </a:lnRef>
+          <a:fillRef idx="3">
+            <a:schemeClr val="accent1"/>
+          </a:fillRef>
+          <a:effectRef idx="2">
+            <a:schemeClr val="accent1"/>
+          </a:effectRef>
+          <a:fontRef idx="minor">
+            <a:schemeClr val="lt1"/>
+          </a:fontRef>
+        </p:style>
+        <p:txBody>
+          <a:bodyPr rtlCol="0" anchor="ctr"/>
+          <a:lstStyle/>
+          <a:p>
+            <a:pPr algn="ctr"/>
+          </a:p>
+        </p:txBody>
+      </p:sp>
+      <p:sp>
+        <p:nvSpPr>
+          <p:cNvPr id="16" name="TextBox 15"/>
+          <p:cNvSpPr txBox="1"/>
+          <p:nvPr/>
+        </p:nvSpPr>
+        <p:spPr>
+          <a:xfrm>
+            <a:off x="2598420" y="1920240"/>
+            <a:ext cx="5730240" cy="475488"/>
+          </a:xfrm>
+          <a:prstGeom prst="rect">
+            <a:avLst/>
+          </a:prstGeom>
+          <a:noFill/>
+        </p:spPr>
+        <p:txBody>
+          <a:bodyPr wrap="square" anchor="ctr" lIns="25400" rIns="25400" tIns="25400" bIns="25400">
+            <a:spAutoFit/>
+          </a:bodyPr>
+          <a:lstStyle/>
+          <a:p>
+            <a:pPr algn="ctr">
+              <a:lnSpc>
+                <a:spcPct val="92000"/>
+              </a:lnSpc>
+              <a:spcAft>
+                <a:spcPts val="400"/>
+              </a:spcAft>
+            </a:pPr>
+            <a:r>
+              <a:rPr sz="1019" b="0">
+                <a:solidFill>
+                  <a:srgbClr val="444A55"/>
+                </a:solidFill>
+                <a:latin typeface="Apple SD Gothic Neo"/>
+              </a:rPr>
+              <a:t>C/HAL·I2C/SPI/UART 코드 초안·리팩터링</a:t>
+            </a:r>
+          </a:p>
+        </p:txBody>
+      </p:sp>
+      <p:sp>
+        <p:nvSpPr>
+          <p:cNvPr id="17" name="Rectangle 16"/>
+          <p:cNvSpPr/>
+          <p:nvPr/>
+        </p:nvSpPr>
+        <p:spPr>
+          <a:xfrm>
+            <a:off x="8366760" y="1920240"/>
+            <a:ext cx="3794760" cy="475488"/>
+          </a:xfrm>
+          <a:prstGeom prst="rect">
+            <a:avLst/>
+          </a:prstGeom>
+          <a:solidFill>
+            <a:srgbClr val="FFFFFF"/>
+          </a:solidFill>
+          <a:ln w="9525">
+            <a:solidFill>
+              <a:srgbClr val="D5DDE6"/>
+            </a:solidFill>
+          </a:ln>
+          <a:effectLst/>
+        </p:spPr>
+        <p:style>
+          <a:lnRef idx="1">
+            <a:schemeClr val="accent1"/>
+          </a:lnRef>
+          <a:fillRef idx="3">
+            <a:schemeClr val="accent1"/>
+          </a:fillRef>
+          <a:effectRef idx="2">
+            <a:schemeClr val="accent1"/>
+          </a:effectRef>
+          <a:fontRef idx="minor">
+            <a:schemeClr val="lt1"/>
+          </a:fontRef>
+        </p:style>
+        <p:txBody>
+          <a:bodyPr rtlCol="0" anchor="ctr"/>
+          <a:lstStyle/>
+          <a:p>
+            <a:pPr algn="ctr"/>
+          </a:p>
+        </p:txBody>
+      </p:sp>
+      <p:sp>
+        <p:nvSpPr>
+          <p:cNvPr id="18" name="TextBox 17"/>
+          <p:cNvSpPr txBox="1"/>
+          <p:nvPr/>
+        </p:nvSpPr>
+        <p:spPr>
+          <a:xfrm>
+            <a:off x="8404860" y="1920240"/>
+            <a:ext cx="3718560" cy="475488"/>
+          </a:xfrm>
+          <a:prstGeom prst="rect">
+            <a:avLst/>
+          </a:prstGeom>
+          <a:noFill/>
+        </p:spPr>
+        <p:txBody>
+          <a:bodyPr wrap="square" anchor="ctr" lIns="25400" rIns="25400" tIns="25400" bIns="25400">
+            <a:spAutoFit/>
+          </a:bodyPr>
+          <a:lstStyle/>
+          <a:p>
+            <a:pPr algn="ctr">
+              <a:lnSpc>
+                <a:spcPct val="92000"/>
+              </a:lnSpc>
+              <a:spcAft>
+                <a:spcPts val="400"/>
+              </a:spcAft>
+            </a:pPr>
+            <a:r>
+              <a:rPr sz="1019" b="0">
+                <a:solidFill>
+                  <a:srgbClr val="444A55"/>
+                </a:solidFill>
+                <a:latin typeface="Apple SD Gothic Neo"/>
+              </a:rPr>
+              <a:t>VS Code + Cline SR + Gauss</a:t>
+            </a:r>
+          </a:p>
+        </p:txBody>
+      </p:sp>
+      <p:sp>
+        <p:nvSpPr>
+          <p:cNvPr id="19" name="Rectangle 18"/>
+          <p:cNvSpPr/>
+          <p:nvPr/>
+        </p:nvSpPr>
+        <p:spPr>
+          <a:xfrm>
+            <a:off x="411480" y="2395728"/>
+            <a:ext cx="2148840" cy="475488"/>
+          </a:xfrm>
+          <a:prstGeom prst="rect">
+            <a:avLst/>
+          </a:prstGeom>
+          <a:solidFill>
+            <a:srgbClr val="E8F1FA"/>
+          </a:solidFill>
+          <a:ln w="9525">
+            <a:solidFill>
+              <a:srgbClr val="D5DDE6"/>
+            </a:solidFill>
+          </a:ln>
+          <a:effectLst/>
+        </p:spPr>
+        <p:style>
+          <a:lnRef idx="1">
+            <a:schemeClr val="accent1"/>
+          </a:lnRef>
+          <a:fillRef idx="3">
+            <a:schemeClr val="accent1"/>
+          </a:fillRef>
+          <a:effectRef idx="2">
+            <a:schemeClr val="accent1"/>
+          </a:effectRef>
+          <a:fontRef idx="minor">
+            <a:schemeClr val="lt1"/>
+          </a:fontRef>
+        </p:style>
+        <p:txBody>
+          <a:bodyPr rtlCol="0" anchor="ctr"/>
+          <a:lstStyle/>
+          <a:p>
+            <a:pPr algn="ctr"/>
+          </a:p>
+        </p:txBody>
+      </p:sp>
+      <p:sp>
+        <p:nvSpPr>
+          <p:cNvPr id="20" name="TextBox 19"/>
+          <p:cNvSpPr txBox="1"/>
+          <p:nvPr/>
+        </p:nvSpPr>
+        <p:spPr>
+          <a:xfrm>
+            <a:off x="449580" y="2395728"/>
+            <a:ext cx="2072640" cy="475488"/>
+          </a:xfrm>
+          <a:prstGeom prst="rect">
+            <a:avLst/>
+          </a:prstGeom>
+          <a:noFill/>
+        </p:spPr>
+        <p:txBody>
+          <a:bodyPr wrap="square" anchor="ctr" lIns="25400" rIns="25400" tIns="25400" bIns="25400">
+            <a:spAutoFit/>
+          </a:bodyPr>
+          <a:lstStyle/>
+          <a:p>
+            <a:pPr algn="ctr">
+              <a:lnSpc>
+                <a:spcPct val="92000"/>
+              </a:lnSpc>
+              <a:spcAft>
+                <a:spcPts val="400"/>
+              </a:spcAft>
+            </a:pPr>
+            <a:r>
+              <a:rPr sz="1019" b="0">
+                <a:solidFill>
+                  <a:srgbClr val="444A55"/>
+                </a:solidFill>
+                <a:latin typeface="Apple SD Gothic Neo"/>
+              </a:rPr>
+              <a:t>레지스터·설정</a:t>
+            </a:r>
+          </a:p>
+        </p:txBody>
+      </p:sp>
+      <p:sp>
+        <p:nvSpPr>
+          <p:cNvPr id="21" name="Rectangle 20"/>
+          <p:cNvSpPr/>
+          <p:nvPr/>
+        </p:nvSpPr>
+        <p:spPr>
+          <a:xfrm>
+            <a:off x="2560320" y="2395728"/>
+            <a:ext cx="5806440" cy="475488"/>
+          </a:xfrm>
+          <a:prstGeom prst="rect">
+            <a:avLst/>
+          </a:prstGeom>
+          <a:solidFill>
+            <a:srgbClr val="E8F1FA"/>
+          </a:solidFill>
+          <a:ln w="9525">
+            <a:solidFill>
+              <a:srgbClr val="D5DDE6"/>
+            </a:solidFill>
+          </a:ln>
+          <a:effectLst/>
+        </p:spPr>
+        <p:style>
+          <a:lnRef idx="1">
+            <a:schemeClr val="accent1"/>
+          </a:lnRef>
+          <a:fillRef idx="3">
+            <a:schemeClr val="accent1"/>
+          </a:fillRef>
+          <a:effectRef idx="2">
+            <a:schemeClr val="accent1"/>
+          </a:effectRef>
+          <a:fontRef idx="minor">
+            <a:schemeClr val="lt1"/>
+          </a:fontRef>
+        </p:style>
+        <p:txBody>
+          <a:bodyPr rtlCol="0" anchor="ctr"/>
+          <a:lstStyle/>
+          <a:p>
+            <a:pPr algn="ctr"/>
+          </a:p>
+        </p:txBody>
+      </p:sp>
+      <p:sp>
+        <p:nvSpPr>
+          <p:cNvPr id="22" name="TextBox 21"/>
+          <p:cNvSpPr txBox="1"/>
+          <p:nvPr/>
+        </p:nvSpPr>
+        <p:spPr>
+          <a:xfrm>
+            <a:off x="2598420" y="2395728"/>
+            <a:ext cx="5730240" cy="475488"/>
+          </a:xfrm>
+          <a:prstGeom prst="rect">
+            <a:avLst/>
+          </a:prstGeom>
+          <a:noFill/>
+        </p:spPr>
+        <p:txBody>
+          <a:bodyPr wrap="square" anchor="ctr" lIns="25400" rIns="25400" tIns="25400" bIns="25400">
+            <a:spAutoFit/>
+          </a:bodyPr>
+          <a:lstStyle/>
+          <a:p>
+            <a:pPr algn="ctr">
+              <a:lnSpc>
+                <a:spcPct val="92000"/>
+              </a:lnSpc>
+              <a:spcAft>
+                <a:spcPts val="400"/>
+              </a:spcAft>
+            </a:pPr>
+            <a:r>
+              <a:rPr sz="1019" b="0">
+                <a:solidFill>
+                  <a:srgbClr val="444A55"/>
+                </a:solidFill>
+                <a:latin typeface="Apple SD Gothic Neo"/>
+              </a:rPr>
+              <a:t>데이터시트 기반 헤더·초기화 코드 생성</a:t>
+            </a:r>
+          </a:p>
+        </p:txBody>
+      </p:sp>
+      <p:sp>
+        <p:nvSpPr>
+          <p:cNvPr id="23" name="Rectangle 22"/>
+          <p:cNvSpPr/>
+          <p:nvPr/>
+        </p:nvSpPr>
+        <p:spPr>
+          <a:xfrm>
+            <a:off x="8366760" y="2395728"/>
+            <a:ext cx="3794760" cy="475488"/>
+          </a:xfrm>
+          <a:prstGeom prst="rect">
+            <a:avLst/>
+          </a:prstGeom>
+          <a:solidFill>
+            <a:srgbClr val="E8F1FA"/>
+          </a:solidFill>
+          <a:ln w="9525">
+            <a:solidFill>
+              <a:srgbClr val="D5DDE6"/>
+            </a:solidFill>
+          </a:ln>
+          <a:effectLst/>
+        </p:spPr>
+        <p:style>
+          <a:lnRef idx="1">
+            <a:schemeClr val="accent1"/>
+          </a:lnRef>
+          <a:fillRef idx="3">
+            <a:schemeClr val="accent1"/>
+          </a:fillRef>
+          <a:effectRef idx="2">
+            <a:schemeClr val="accent1"/>
+          </a:effectRef>
+          <a:fontRef idx="minor">
+            <a:schemeClr val="lt1"/>
+          </a:fontRef>
+        </p:style>
+        <p:txBody>
+          <a:bodyPr rtlCol="0" anchor="ctr"/>
+          <a:lstStyle/>
+          <a:p>
+            <a:pPr algn="ctr"/>
+          </a:p>
+        </p:txBody>
+      </p:sp>
+      <p:sp>
+        <p:nvSpPr>
+          <p:cNvPr id="24" name="TextBox 23"/>
+          <p:cNvSpPr txBox="1"/>
+          <p:nvPr/>
+        </p:nvSpPr>
+        <p:spPr>
+          <a:xfrm>
+            <a:off x="8404860" y="2395728"/>
+            <a:ext cx="3718560" cy="475488"/>
+          </a:xfrm>
+          <a:prstGeom prst="rect">
+            <a:avLst/>
+          </a:prstGeom>
+          <a:noFill/>
+        </p:spPr>
+        <p:txBody>
+          <a:bodyPr wrap="square" anchor="ctr" lIns="25400" rIns="25400" tIns="25400" bIns="25400">
+            <a:spAutoFit/>
+          </a:bodyPr>
+          <a:lstStyle/>
+          <a:p>
+            <a:pPr algn="ctr">
+              <a:lnSpc>
+                <a:spcPct val="92000"/>
+              </a:lnSpc>
+              <a:spcAft>
+                <a:spcPts val="400"/>
+              </a:spcAft>
+            </a:pPr>
+            <a:r>
+              <a:rPr sz="1019" b="0">
+                <a:solidFill>
+                  <a:srgbClr val="444A55"/>
+                </a:solidFill>
+                <a:latin typeface="Apple SD Gothic Neo"/>
+              </a:rPr>
+              <a:t>Cline SR + Gauss</a:t>
+            </a:r>
+          </a:p>
+        </p:txBody>
+      </p:sp>
+      <p:sp>
+        <p:nvSpPr>
+          <p:cNvPr id="25" name="Rectangle 24"/>
+          <p:cNvSpPr/>
+          <p:nvPr/>
+        </p:nvSpPr>
+        <p:spPr>
+          <a:xfrm>
+            <a:off x="411480" y="2871216"/>
+            <a:ext cx="2148840" cy="475488"/>
+          </a:xfrm>
+          <a:prstGeom prst="rect">
+            <a:avLst/>
+          </a:prstGeom>
+          <a:solidFill>
+            <a:srgbClr val="FFFFFF"/>
+          </a:solidFill>
+          <a:ln w="9525">
+            <a:solidFill>
+              <a:srgbClr val="D5DDE6"/>
+            </a:solidFill>
+          </a:ln>
+          <a:effectLst/>
+        </p:spPr>
+        <p:style>
+          <a:lnRef idx="1">
+            <a:schemeClr val="accent1"/>
+          </a:lnRef>
+          <a:fillRef idx="3">
+            <a:schemeClr val="accent1"/>
+          </a:fillRef>
+          <a:effectRef idx="2">
+            <a:schemeClr val="accent1"/>
+          </a:effectRef>
+          <a:fontRef idx="minor">
+            <a:schemeClr val="lt1"/>
+          </a:fontRef>
+        </p:style>
+        <p:txBody>
+          <a:bodyPr rtlCol="0" anchor="ctr"/>
+          <a:lstStyle/>
+          <a:p>
+            <a:pPr algn="ctr"/>
+          </a:p>
+        </p:txBody>
+      </p:sp>
+      <p:sp>
+        <p:nvSpPr>
+          <p:cNvPr id="26" name="TextBox 25"/>
+          <p:cNvSpPr txBox="1"/>
+          <p:nvPr/>
+        </p:nvSpPr>
+        <p:spPr>
+          <a:xfrm>
+            <a:off x="449580" y="2871216"/>
+            <a:ext cx="2072640" cy="475488"/>
+          </a:xfrm>
+          <a:prstGeom prst="rect">
+            <a:avLst/>
+          </a:prstGeom>
+          <a:noFill/>
+        </p:spPr>
+        <p:txBody>
+          <a:bodyPr wrap="square" anchor="ctr" lIns="25400" rIns="25400" tIns="25400" bIns="25400">
+            <a:spAutoFit/>
+          </a:bodyPr>
+          <a:lstStyle/>
+          <a:p>
+            <a:pPr algn="ctr">
+              <a:lnSpc>
+                <a:spcPct val="92000"/>
+              </a:lnSpc>
+              <a:spcAft>
+                <a:spcPts val="400"/>
+              </a:spcAft>
+            </a:pPr>
+            <a:r>
+              <a:rPr sz="1019" b="0">
+                <a:solidFill>
+                  <a:srgbClr val="444A55"/>
+                </a:solidFill>
+                <a:latin typeface="Apple SD Gothic Neo"/>
+              </a:rPr>
+              <a:t>측정·검증 자동화</a:t>
+            </a:r>
+          </a:p>
+        </p:txBody>
+      </p:sp>
+      <p:sp>
+        <p:nvSpPr>
+          <p:cNvPr id="27" name="Rectangle 26"/>
+          <p:cNvSpPr/>
+          <p:nvPr/>
+        </p:nvSpPr>
+        <p:spPr>
+          <a:xfrm>
+            <a:off x="2560320" y="2871216"/>
+            <a:ext cx="5806440" cy="475488"/>
+          </a:xfrm>
+          <a:prstGeom prst="rect">
+            <a:avLst/>
+          </a:prstGeom>
+          <a:solidFill>
+            <a:srgbClr val="FFFFFF"/>
+          </a:solidFill>
+          <a:ln w="9525">
+            <a:solidFill>
+              <a:srgbClr val="D5DDE6"/>
+            </a:solidFill>
+          </a:ln>
+          <a:effectLst/>
+        </p:spPr>
+        <p:style>
+          <a:lnRef idx="1">
+            <a:schemeClr val="accent1"/>
+          </a:lnRef>
+          <a:fillRef idx="3">
+            <a:schemeClr val="accent1"/>
+          </a:fillRef>
+          <a:effectRef idx="2">
+            <a:schemeClr val="accent1"/>
+          </a:effectRef>
+          <a:fontRef idx="minor">
+            <a:schemeClr val="lt1"/>
+          </a:fontRef>
+        </p:style>
+        <p:txBody>
+          <a:bodyPr rtlCol="0" anchor="ctr"/>
+          <a:lstStyle/>
+          <a:p>
+            <a:pPr algn="ctr"/>
+          </a:p>
+        </p:txBody>
+      </p:sp>
+      <p:sp>
+        <p:nvSpPr>
+          <p:cNvPr id="28" name="TextBox 27"/>
+          <p:cNvSpPr txBox="1"/>
+          <p:nvPr/>
+        </p:nvSpPr>
+        <p:spPr>
+          <a:xfrm>
+            <a:off x="2598420" y="2871216"/>
+            <a:ext cx="5730240" cy="475488"/>
+          </a:xfrm>
+          <a:prstGeom prst="rect">
+            <a:avLst/>
+          </a:prstGeom>
+          <a:noFill/>
+        </p:spPr>
+        <p:txBody>
+          <a:bodyPr wrap="square" anchor="ctr" lIns="25400" rIns="25400" tIns="25400" bIns="25400">
+            <a:spAutoFit/>
+          </a:bodyPr>
+          <a:lstStyle/>
+          <a:p>
+            <a:pPr algn="ctr">
+              <a:lnSpc>
+                <a:spcPct val="92000"/>
+              </a:lnSpc>
+              <a:spcAft>
+                <a:spcPts val="400"/>
+              </a:spcAft>
+            </a:pPr>
+            <a:r>
+              <a:rPr sz="1019" b="0">
+                <a:solidFill>
+                  <a:srgbClr val="444A55"/>
+                </a:solidFill>
+                <a:latin typeface="Apple SD Gothic Neo"/>
+              </a:rPr>
+              <a:t>계측기 제어·로그 수집 Python 스크립트</a:t>
+            </a:r>
+          </a:p>
+        </p:txBody>
+      </p:sp>
+      <p:sp>
+        <p:nvSpPr>
+          <p:cNvPr id="29" name="Rectangle 28"/>
+          <p:cNvSpPr/>
+          <p:nvPr/>
+        </p:nvSpPr>
+        <p:spPr>
+          <a:xfrm>
+            <a:off x="8366760" y="2871216"/>
+            <a:ext cx="3794760" cy="475488"/>
+          </a:xfrm>
+          <a:prstGeom prst="rect">
+            <a:avLst/>
+          </a:prstGeom>
+          <a:solidFill>
+            <a:srgbClr val="FFFFFF"/>
+          </a:solidFill>
+          <a:ln w="9525">
+            <a:solidFill>
+              <a:srgbClr val="D5DDE6"/>
+            </a:solidFill>
+          </a:ln>
+          <a:effectLst/>
+        </p:spPr>
+        <p:style>
+          <a:lnRef idx="1">
+            <a:schemeClr val="accent1"/>
+          </a:lnRef>
+          <a:fillRef idx="3">
+            <a:schemeClr val="accent1"/>
+          </a:fillRef>
+          <a:effectRef idx="2">
+            <a:schemeClr val="accent1"/>
+          </a:effectRef>
+          <a:fontRef idx="minor">
+            <a:schemeClr val="lt1"/>
+          </a:fontRef>
+        </p:style>
+        <p:txBody>
+          <a:bodyPr rtlCol="0" anchor="ctr"/>
+          <a:lstStyle/>
+          <a:p>
+            <a:pPr algn="ctr"/>
+          </a:p>
+        </p:txBody>
+      </p:sp>
+      <p:sp>
+        <p:nvSpPr>
+          <p:cNvPr id="30" name="TextBox 29"/>
+          <p:cNvSpPr txBox="1"/>
+          <p:nvPr/>
+        </p:nvSpPr>
+        <p:spPr>
+          <a:xfrm>
+            <a:off x="8404860" y="2871216"/>
+            <a:ext cx="3718560" cy="475488"/>
+          </a:xfrm>
+          <a:prstGeom prst="rect">
+            <a:avLst/>
+          </a:prstGeom>
+          <a:noFill/>
+        </p:spPr>
+        <p:txBody>
+          <a:bodyPr wrap="square" anchor="ctr" lIns="25400" rIns="25400" tIns="25400" bIns="25400">
+            <a:spAutoFit/>
+          </a:bodyPr>
+          <a:lstStyle/>
+          <a:p>
+            <a:pPr algn="ctr">
+              <a:lnSpc>
+                <a:spcPct val="92000"/>
+              </a:lnSpc>
+              <a:spcAft>
+                <a:spcPts val="400"/>
+              </a:spcAft>
+            </a:pPr>
+            <a:r>
+              <a:rPr sz="1019" b="0">
+                <a:solidFill>
+                  <a:srgbClr val="444A55"/>
+                </a:solidFill>
+                <a:latin typeface="Apple SD Gothic Neo"/>
+              </a:rPr>
+              <a:t>Cline SR + Gauss / Ollama</a:t>
+            </a:r>
+          </a:p>
+        </p:txBody>
+      </p:sp>
+      <p:sp>
+        <p:nvSpPr>
+          <p:cNvPr id="31" name="Rectangle 30"/>
+          <p:cNvSpPr/>
+          <p:nvPr/>
+        </p:nvSpPr>
+        <p:spPr>
+          <a:xfrm>
+            <a:off x="411480" y="3346704"/>
+            <a:ext cx="2148840" cy="475488"/>
+          </a:xfrm>
+          <a:prstGeom prst="rect">
+            <a:avLst/>
+          </a:prstGeom>
+          <a:solidFill>
+            <a:srgbClr val="E8F1FA"/>
+          </a:solidFill>
+          <a:ln w="9525">
+            <a:solidFill>
+              <a:srgbClr val="D5DDE6"/>
+            </a:solidFill>
+          </a:ln>
+          <a:effectLst/>
+        </p:spPr>
+        <p:style>
+          <a:lnRef idx="1">
+            <a:schemeClr val="accent1"/>
+          </a:lnRef>
+          <a:fillRef idx="3">
+            <a:schemeClr val="accent1"/>
+          </a:fillRef>
+          <a:effectRef idx="2">
+            <a:schemeClr val="accent1"/>
+          </a:effectRef>
+          <a:fontRef idx="minor">
+            <a:schemeClr val="lt1"/>
+          </a:fontRef>
+        </p:style>
+        <p:txBody>
+          <a:bodyPr rtlCol="0" anchor="ctr"/>
+          <a:lstStyle/>
+          <a:p>
+            <a:pPr algn="ctr"/>
+          </a:p>
+        </p:txBody>
+      </p:sp>
+      <p:sp>
+        <p:nvSpPr>
+          <p:cNvPr id="32" name="TextBox 31"/>
+          <p:cNvSpPr txBox="1"/>
+          <p:nvPr/>
+        </p:nvSpPr>
+        <p:spPr>
+          <a:xfrm>
+            <a:off x="449580" y="3346704"/>
+            <a:ext cx="2072640" cy="475488"/>
+          </a:xfrm>
+          <a:prstGeom prst="rect">
+            <a:avLst/>
+          </a:prstGeom>
+          <a:noFill/>
+        </p:spPr>
+        <p:txBody>
+          <a:bodyPr wrap="square" anchor="ctr" lIns="25400" rIns="25400" tIns="25400" bIns="25400">
+            <a:spAutoFit/>
+          </a:bodyPr>
+          <a:lstStyle/>
+          <a:p>
+            <a:pPr algn="ctr">
+              <a:lnSpc>
+                <a:spcPct val="92000"/>
+              </a:lnSpc>
+              <a:spcAft>
+                <a:spcPts val="400"/>
+              </a:spcAft>
+            </a:pPr>
+            <a:r>
+              <a:rPr sz="1019" b="0">
+                <a:solidFill>
+                  <a:srgbClr val="444A55"/>
+                </a:solidFill>
+                <a:latin typeface="Apple SD Gothic Neo"/>
+              </a:rPr>
+              <a:t>데이터·로그 분석</a:t>
+            </a:r>
+          </a:p>
+        </p:txBody>
+      </p:sp>
+      <p:sp>
+        <p:nvSpPr>
+          <p:cNvPr id="33" name="Rectangle 32"/>
+          <p:cNvSpPr/>
+          <p:nvPr/>
+        </p:nvSpPr>
+        <p:spPr>
+          <a:xfrm>
+            <a:off x="2560320" y="3346704"/>
+            <a:ext cx="5806440" cy="475488"/>
+          </a:xfrm>
+          <a:prstGeom prst="rect">
+            <a:avLst/>
+          </a:prstGeom>
+          <a:solidFill>
+            <a:srgbClr val="E8F1FA"/>
+          </a:solidFill>
+          <a:ln w="9525">
+            <a:solidFill>
+              <a:srgbClr val="D5DDE6"/>
+            </a:solidFill>
+          </a:ln>
+          <a:effectLst/>
+        </p:spPr>
+        <p:style>
+          <a:lnRef idx="1">
+            <a:schemeClr val="accent1"/>
+          </a:lnRef>
+          <a:fillRef idx="3">
+            <a:schemeClr val="accent1"/>
+          </a:fillRef>
+          <a:effectRef idx="2">
+            <a:schemeClr val="accent1"/>
+          </a:effectRef>
+          <a:fontRef idx="minor">
+            <a:schemeClr val="lt1"/>
+          </a:fontRef>
+        </p:style>
+        <p:txBody>
+          <a:bodyPr rtlCol="0" anchor="ctr"/>
+          <a:lstStyle/>
+          <a:p>
+            <a:pPr algn="ctr"/>
+          </a:p>
+        </p:txBody>
+      </p:sp>
+      <p:sp>
+        <p:nvSpPr>
+          <p:cNvPr id="34" name="TextBox 33"/>
+          <p:cNvSpPr txBox="1"/>
+          <p:nvPr/>
+        </p:nvSpPr>
+        <p:spPr>
+          <a:xfrm>
+            <a:off x="2598420" y="3346704"/>
+            <a:ext cx="5730240" cy="475488"/>
+          </a:xfrm>
+          <a:prstGeom prst="rect">
+            <a:avLst/>
+          </a:prstGeom>
+          <a:noFill/>
+        </p:spPr>
+        <p:txBody>
+          <a:bodyPr wrap="square" anchor="ctr" lIns="25400" rIns="25400" tIns="25400" bIns="25400">
+            <a:spAutoFit/>
+          </a:bodyPr>
+          <a:lstStyle/>
+          <a:p>
+            <a:pPr algn="ctr">
+              <a:lnSpc>
+                <a:spcPct val="92000"/>
+              </a:lnSpc>
+              <a:spcAft>
+                <a:spcPts val="400"/>
+              </a:spcAft>
+            </a:pPr>
+            <a:r>
+              <a:rPr sz="1019" b="0">
+                <a:solidFill>
+                  <a:srgbClr val="444A55"/>
+                </a:solidFill>
+                <a:latin typeface="Apple SD Gothic Neo"/>
+              </a:rPr>
+              <a:t>측정값 파싱·표·그래프·이상 패턴 정리</a:t>
+            </a:r>
+          </a:p>
+        </p:txBody>
+      </p:sp>
+      <p:sp>
+        <p:nvSpPr>
+          <p:cNvPr id="35" name="Rectangle 34"/>
+          <p:cNvSpPr/>
+          <p:nvPr/>
+        </p:nvSpPr>
+        <p:spPr>
+          <a:xfrm>
+            <a:off x="8366760" y="3346704"/>
+            <a:ext cx="3794760" cy="475488"/>
+          </a:xfrm>
+          <a:prstGeom prst="rect">
+            <a:avLst/>
+          </a:prstGeom>
+          <a:solidFill>
+            <a:srgbClr val="E8F1FA"/>
+          </a:solidFill>
+          <a:ln w="9525">
+            <a:solidFill>
+              <a:srgbClr val="D5DDE6"/>
+            </a:solidFill>
+          </a:ln>
+          <a:effectLst/>
+        </p:spPr>
+        <p:style>
+          <a:lnRef idx="1">
+            <a:schemeClr val="accent1"/>
+          </a:lnRef>
+          <a:fillRef idx="3">
+            <a:schemeClr val="accent1"/>
+          </a:fillRef>
+          <a:effectRef idx="2">
+            <a:schemeClr val="accent1"/>
+          </a:effectRef>
+          <a:fontRef idx="minor">
+            <a:schemeClr val="lt1"/>
+          </a:fontRef>
+        </p:style>
+        <p:txBody>
+          <a:bodyPr rtlCol="0" anchor="ctr"/>
+          <a:lstStyle/>
+          <a:p>
+            <a:pPr algn="ctr"/>
+          </a:p>
+        </p:txBody>
+      </p:sp>
+      <p:sp>
+        <p:nvSpPr>
+          <p:cNvPr id="36" name="TextBox 35"/>
+          <p:cNvSpPr txBox="1"/>
+          <p:nvPr/>
+        </p:nvSpPr>
+        <p:spPr>
+          <a:xfrm>
+            <a:off x="8404860" y="3346704"/>
+            <a:ext cx="3718560" cy="475488"/>
+          </a:xfrm>
+          <a:prstGeom prst="rect">
+            <a:avLst/>
+          </a:prstGeom>
+          <a:noFill/>
+        </p:spPr>
+        <p:txBody>
+          <a:bodyPr wrap="square" anchor="ctr" lIns="25400" rIns="25400" tIns="25400" bIns="25400">
+            <a:spAutoFit/>
+          </a:bodyPr>
+          <a:lstStyle/>
+          <a:p>
+            <a:pPr algn="ctr">
+              <a:lnSpc>
+                <a:spcPct val="92000"/>
+              </a:lnSpc>
+              <a:spcAft>
+                <a:spcPts val="400"/>
+              </a:spcAft>
+            </a:pPr>
+            <a:r>
+              <a:rPr sz="1019" b="0">
+                <a:solidFill>
+                  <a:srgbClr val="444A55"/>
+                </a:solidFill>
+                <a:latin typeface="Apple SD Gothic Neo"/>
+              </a:rPr>
+              <a:t>Cline SR + Gauss</a:t>
+            </a:r>
+          </a:p>
+        </p:txBody>
+      </p:sp>
+      <p:sp>
+        <p:nvSpPr>
+          <p:cNvPr id="37" name="Rectangle 36"/>
+          <p:cNvSpPr/>
+          <p:nvPr/>
+        </p:nvSpPr>
+        <p:spPr>
+          <a:xfrm>
+            <a:off x="411480" y="3822192"/>
+            <a:ext cx="2148840" cy="475488"/>
+          </a:xfrm>
+          <a:prstGeom prst="rect">
+            <a:avLst/>
+          </a:prstGeom>
+          <a:solidFill>
+            <a:srgbClr val="FFFFFF"/>
+          </a:solidFill>
+          <a:ln w="9525">
+            <a:solidFill>
+              <a:srgbClr val="D5DDE6"/>
+            </a:solidFill>
+          </a:ln>
+          <a:effectLst/>
+        </p:spPr>
+        <p:style>
+          <a:lnRef idx="1">
+            <a:schemeClr val="accent1"/>
+          </a:lnRef>
+          <a:fillRef idx="3">
+            <a:schemeClr val="accent1"/>
+          </a:fillRef>
+          <a:effectRef idx="2">
+            <a:schemeClr val="accent1"/>
+          </a:effectRef>
+          <a:fontRef idx="minor">
+            <a:schemeClr val="lt1"/>
+          </a:fontRef>
+        </p:style>
+        <p:txBody>
+          <a:bodyPr rtlCol="0" anchor="ctr"/>
+          <a:lstStyle/>
+          <a:p>
+            <a:pPr algn="ctr"/>
+          </a:p>
+        </p:txBody>
+      </p:sp>
+      <p:sp>
+        <p:nvSpPr>
+          <p:cNvPr id="38" name="TextBox 37"/>
+          <p:cNvSpPr txBox="1"/>
+          <p:nvPr/>
+        </p:nvSpPr>
+        <p:spPr>
+          <a:xfrm>
+            <a:off x="449580" y="3822192"/>
+            <a:ext cx="2072640" cy="475488"/>
+          </a:xfrm>
+          <a:prstGeom prst="rect">
+            <a:avLst/>
+          </a:prstGeom>
+          <a:noFill/>
+        </p:spPr>
+        <p:txBody>
+          <a:bodyPr wrap="square" anchor="ctr" lIns="25400" rIns="25400" tIns="25400" bIns="25400">
+            <a:spAutoFit/>
+          </a:bodyPr>
+          <a:lstStyle/>
+          <a:p>
+            <a:pPr algn="ctr">
+              <a:lnSpc>
+                <a:spcPct val="92000"/>
+              </a:lnSpc>
+              <a:spcAft>
+                <a:spcPts val="400"/>
+              </a:spcAft>
+            </a:pPr>
+            <a:r>
+              <a:rPr sz="1019" b="0">
+                <a:solidFill>
+                  <a:srgbClr val="444A55"/>
+                </a:solidFill>
+                <a:latin typeface="Apple SD Gothic Neo"/>
+              </a:rPr>
+              <a:t>문서·보고</a:t>
+            </a:r>
+          </a:p>
+        </p:txBody>
+      </p:sp>
+      <p:sp>
+        <p:nvSpPr>
+          <p:cNvPr id="39" name="Rectangle 38"/>
+          <p:cNvSpPr/>
+          <p:nvPr/>
+        </p:nvSpPr>
+        <p:spPr>
+          <a:xfrm>
+            <a:off x="2560320" y="3822192"/>
+            <a:ext cx="5806440" cy="475488"/>
+          </a:xfrm>
+          <a:prstGeom prst="rect">
+            <a:avLst/>
+          </a:prstGeom>
+          <a:solidFill>
+            <a:srgbClr val="FFFFFF"/>
+          </a:solidFill>
+          <a:ln w="9525">
+            <a:solidFill>
+              <a:srgbClr val="D5DDE6"/>
+            </a:solidFill>
+          </a:ln>
+          <a:effectLst/>
+        </p:spPr>
+        <p:style>
+          <a:lnRef idx="1">
+            <a:schemeClr val="accent1"/>
+          </a:lnRef>
+          <a:fillRef idx="3">
+            <a:schemeClr val="accent1"/>
+          </a:fillRef>
+          <a:effectRef idx="2">
+            <a:schemeClr val="accent1"/>
+          </a:effectRef>
+          <a:fontRef idx="minor">
+            <a:schemeClr val="lt1"/>
+          </a:fontRef>
+        </p:style>
+        <p:txBody>
+          <a:bodyPr rtlCol="0" anchor="ctr"/>
+          <a:lstStyle/>
+          <a:p>
+            <a:pPr algn="ctr"/>
+          </a:p>
+        </p:txBody>
+      </p:sp>
+      <p:sp>
+        <p:nvSpPr>
+          <p:cNvPr id="40" name="TextBox 39"/>
+          <p:cNvSpPr txBox="1"/>
+          <p:nvPr/>
+        </p:nvSpPr>
+        <p:spPr>
+          <a:xfrm>
+            <a:off x="2598420" y="3822192"/>
+            <a:ext cx="5730240" cy="475488"/>
+          </a:xfrm>
+          <a:prstGeom prst="rect">
+            <a:avLst/>
+          </a:prstGeom>
+          <a:noFill/>
+        </p:spPr>
+        <p:txBody>
+          <a:bodyPr wrap="square" anchor="ctr" lIns="25400" rIns="25400" tIns="25400" bIns="25400">
+            <a:spAutoFit/>
+          </a:bodyPr>
+          <a:lstStyle/>
+          <a:p>
+            <a:pPr algn="ctr">
+              <a:lnSpc>
+                <a:spcPct val="92000"/>
+              </a:lnSpc>
+              <a:spcAft>
+                <a:spcPts val="400"/>
+              </a:spcAft>
+            </a:pPr>
+            <a:r>
+              <a:rPr sz="1019" b="0">
+                <a:solidFill>
+                  <a:srgbClr val="444A55"/>
+                </a:solidFill>
+                <a:latin typeface="Apple SD Gothic Neo"/>
+              </a:rPr>
+              <a:t>시험·이슈·회의·인수인계 문서 초안</a:t>
+            </a:r>
+          </a:p>
+        </p:txBody>
+      </p:sp>
+      <p:sp>
+        <p:nvSpPr>
+          <p:cNvPr id="41" name="Rectangle 40"/>
+          <p:cNvSpPr/>
+          <p:nvPr/>
+        </p:nvSpPr>
+        <p:spPr>
+          <a:xfrm>
+            <a:off x="8366760" y="3822192"/>
+            <a:ext cx="3794760" cy="475488"/>
+          </a:xfrm>
+          <a:prstGeom prst="rect">
+            <a:avLst/>
+          </a:prstGeom>
+          <a:solidFill>
+            <a:srgbClr val="FFFFFF"/>
+          </a:solidFill>
+          <a:ln w="9525">
+            <a:solidFill>
+              <a:srgbClr val="D5DDE6"/>
+            </a:solidFill>
+          </a:ln>
+          <a:effectLst/>
+        </p:spPr>
+        <p:style>
+          <a:lnRef idx="1">
+            <a:schemeClr val="accent1"/>
+          </a:lnRef>
+          <a:fillRef idx="3">
+            <a:schemeClr val="accent1"/>
+          </a:fillRef>
+          <a:effectRef idx="2">
+            <a:schemeClr val="accent1"/>
+          </a:effectRef>
+          <a:fontRef idx="minor">
+            <a:schemeClr val="lt1"/>
+          </a:fontRef>
+        </p:style>
+        <p:txBody>
+          <a:bodyPr rtlCol="0" anchor="ctr"/>
+          <a:lstStyle/>
+          <a:p>
+            <a:pPr algn="ctr"/>
+          </a:p>
+        </p:txBody>
+      </p:sp>
+      <p:sp>
+        <p:nvSpPr>
+          <p:cNvPr id="42" name="TextBox 41"/>
+          <p:cNvSpPr txBox="1"/>
+          <p:nvPr/>
+        </p:nvSpPr>
+        <p:spPr>
+          <a:xfrm>
+            <a:off x="8404860" y="3822192"/>
+            <a:ext cx="3718560" cy="475488"/>
+          </a:xfrm>
+          <a:prstGeom prst="rect">
+            <a:avLst/>
+          </a:prstGeom>
+          <a:noFill/>
+        </p:spPr>
+        <p:txBody>
+          <a:bodyPr wrap="square" anchor="ctr" lIns="25400" rIns="25400" tIns="25400" bIns="25400">
+            <a:spAutoFit/>
+          </a:bodyPr>
+          <a:lstStyle/>
+          <a:p>
+            <a:pPr algn="ctr">
+              <a:lnSpc>
+                <a:spcPct val="92000"/>
+              </a:lnSpc>
+              <a:spcAft>
+                <a:spcPts val="400"/>
+              </a:spcAft>
+            </a:pPr>
+            <a:r>
+              <a:rPr sz="1019" b="0">
+                <a:solidFill>
+                  <a:srgbClr val="444A55"/>
+                </a:solidFill>
+                <a:latin typeface="Apple SD Gothic Neo"/>
+              </a:rPr>
+              <a:t>Gauss / Cline SR</a:t>
+            </a:r>
+          </a:p>
+        </p:txBody>
+      </p:sp>
+      <p:sp>
+        <p:nvSpPr>
+          <p:cNvPr id="43" name="Rectangle 42"/>
+          <p:cNvSpPr/>
+          <p:nvPr/>
+        </p:nvSpPr>
+        <p:spPr>
+          <a:xfrm>
+            <a:off x="411480" y="4297680"/>
+            <a:ext cx="2148840" cy="475488"/>
+          </a:xfrm>
+          <a:prstGeom prst="rect">
+            <a:avLst/>
+          </a:prstGeom>
+          <a:solidFill>
+            <a:srgbClr val="E8F1FA"/>
+          </a:solidFill>
+          <a:ln w="9525">
+            <a:solidFill>
+              <a:srgbClr val="D5DDE6"/>
+            </a:solidFill>
+          </a:ln>
+          <a:effectLst/>
+        </p:spPr>
+        <p:style>
+          <a:lnRef idx="1">
+            <a:schemeClr val="accent1"/>
+          </a:lnRef>
+          <a:fillRef idx="3">
+            <a:schemeClr val="accent1"/>
+          </a:fillRef>
+          <a:effectRef idx="2">
+            <a:schemeClr val="accent1"/>
+          </a:effectRef>
+          <a:fontRef idx="minor">
+            <a:schemeClr val="lt1"/>
+          </a:fontRef>
+        </p:style>
+        <p:txBody>
+          <a:bodyPr rtlCol="0" anchor="ctr"/>
+          <a:lstStyle/>
+          <a:p>
+            <a:pPr algn="ctr"/>
+          </a:p>
+        </p:txBody>
+      </p:sp>
+      <p:sp>
+        <p:nvSpPr>
+          <p:cNvPr id="44" name="TextBox 43"/>
+          <p:cNvSpPr txBox="1"/>
+          <p:nvPr/>
+        </p:nvSpPr>
+        <p:spPr>
+          <a:xfrm>
+            <a:off x="449580" y="4297680"/>
+            <a:ext cx="2072640" cy="475488"/>
+          </a:xfrm>
+          <a:prstGeom prst="rect">
+            <a:avLst/>
+          </a:prstGeom>
+          <a:noFill/>
+        </p:spPr>
+        <p:txBody>
+          <a:bodyPr wrap="square" anchor="ctr" lIns="25400" rIns="25400" tIns="25400" bIns="25400">
+            <a:spAutoFit/>
+          </a:bodyPr>
+          <a:lstStyle/>
+          <a:p>
+            <a:pPr algn="ctr">
+              <a:lnSpc>
+                <a:spcPct val="92000"/>
+              </a:lnSpc>
+              <a:spcAft>
+                <a:spcPts val="400"/>
+              </a:spcAft>
+            </a:pPr>
+            <a:r>
+              <a:rPr sz="1019" b="0">
+                <a:solidFill>
+                  <a:srgbClr val="444A55"/>
+                </a:solidFill>
+                <a:latin typeface="Apple SD Gothic Neo"/>
+              </a:rPr>
+              <a:t>코드 리뷰·품질</a:t>
+            </a:r>
+          </a:p>
+        </p:txBody>
+      </p:sp>
+      <p:sp>
+        <p:nvSpPr>
+          <p:cNvPr id="45" name="Rectangle 44"/>
+          <p:cNvSpPr/>
+          <p:nvPr/>
+        </p:nvSpPr>
+        <p:spPr>
+          <a:xfrm>
+            <a:off x="2560320" y="4297680"/>
+            <a:ext cx="5806440" cy="475488"/>
+          </a:xfrm>
+          <a:prstGeom prst="rect">
+            <a:avLst/>
+          </a:prstGeom>
+          <a:solidFill>
+            <a:srgbClr val="E8F1FA"/>
+          </a:solidFill>
+          <a:ln w="9525">
+            <a:solidFill>
+              <a:srgbClr val="D5DDE6"/>
+            </a:solidFill>
+          </a:ln>
+          <a:effectLst/>
+        </p:spPr>
+        <p:style>
+          <a:lnRef idx="1">
+            <a:schemeClr val="accent1"/>
+          </a:lnRef>
+          <a:fillRef idx="3">
+            <a:schemeClr val="accent1"/>
+          </a:fillRef>
+          <a:effectRef idx="2">
+            <a:schemeClr val="accent1"/>
+          </a:effectRef>
+          <a:fontRef idx="minor">
+            <a:schemeClr val="lt1"/>
+          </a:fontRef>
+        </p:style>
+        <p:txBody>
+          <a:bodyPr rtlCol="0" anchor="ctr"/>
+          <a:lstStyle/>
+          <a:p>
+            <a:pPr algn="ctr"/>
+          </a:p>
+        </p:txBody>
+      </p:sp>
+      <p:sp>
+        <p:nvSpPr>
+          <p:cNvPr id="46" name="TextBox 45"/>
+          <p:cNvSpPr txBox="1"/>
+          <p:nvPr/>
+        </p:nvSpPr>
+        <p:spPr>
+          <a:xfrm>
+            <a:off x="2598420" y="4297680"/>
+            <a:ext cx="5730240" cy="475488"/>
+          </a:xfrm>
+          <a:prstGeom prst="rect">
+            <a:avLst/>
+          </a:prstGeom>
+          <a:noFill/>
+        </p:spPr>
+        <p:txBody>
+          <a:bodyPr wrap="square" anchor="ctr" lIns="25400" rIns="25400" tIns="25400" bIns="25400">
+            <a:spAutoFit/>
+          </a:bodyPr>
+          <a:lstStyle/>
+          <a:p>
+            <a:pPr algn="ctr">
+              <a:lnSpc>
+                <a:spcPct val="92000"/>
+              </a:lnSpc>
+              <a:spcAft>
+                <a:spcPts val="400"/>
+              </a:spcAft>
+            </a:pPr>
+            <a:r>
+              <a:rPr sz="1019" b="0">
+                <a:solidFill>
+                  <a:srgbClr val="444A55"/>
+                </a:solidFill>
+                <a:latin typeface="Apple SD Gothic Neo"/>
+              </a:rPr>
+              <a:t>MISRA-C 스타일·예외처리·위험 구간 점검</a:t>
+            </a:r>
+          </a:p>
+        </p:txBody>
+      </p:sp>
+      <p:sp>
+        <p:nvSpPr>
+          <p:cNvPr id="47" name="Rectangle 46"/>
+          <p:cNvSpPr/>
+          <p:nvPr/>
+        </p:nvSpPr>
+        <p:spPr>
+          <a:xfrm>
+            <a:off x="8366760" y="4297680"/>
+            <a:ext cx="3794760" cy="475488"/>
+          </a:xfrm>
+          <a:prstGeom prst="rect">
+            <a:avLst/>
+          </a:prstGeom>
+          <a:solidFill>
+            <a:srgbClr val="E8F1FA"/>
+          </a:solidFill>
+          <a:ln w="9525">
+            <a:solidFill>
+              <a:srgbClr val="D5DDE6"/>
+            </a:solidFill>
+          </a:ln>
+          <a:effectLst/>
+        </p:spPr>
+        <p:style>
+          <a:lnRef idx="1">
+            <a:schemeClr val="accent1"/>
+          </a:lnRef>
+          <a:fillRef idx="3">
+            <a:schemeClr val="accent1"/>
+          </a:fillRef>
+          <a:effectRef idx="2">
+            <a:schemeClr val="accent1"/>
+          </a:effectRef>
+          <a:fontRef idx="minor">
+            <a:schemeClr val="lt1"/>
+          </a:fontRef>
+        </p:style>
+        <p:txBody>
+          <a:bodyPr rtlCol="0" anchor="ctr"/>
+          <a:lstStyle/>
+          <a:p>
+            <a:pPr algn="ctr"/>
+          </a:p>
+        </p:txBody>
+      </p:sp>
+      <p:sp>
+        <p:nvSpPr>
+          <p:cNvPr id="48" name="TextBox 47"/>
+          <p:cNvSpPr txBox="1"/>
+          <p:nvPr/>
+        </p:nvSpPr>
+        <p:spPr>
+          <a:xfrm>
+            <a:off x="8404860" y="4297680"/>
+            <a:ext cx="3718560" cy="475488"/>
+          </a:xfrm>
+          <a:prstGeom prst="rect">
+            <a:avLst/>
+          </a:prstGeom>
+          <a:noFill/>
+        </p:spPr>
+        <p:txBody>
+          <a:bodyPr wrap="square" anchor="ctr" lIns="25400" rIns="25400" tIns="25400" bIns="25400">
+            <a:spAutoFit/>
+          </a:bodyPr>
+          <a:lstStyle/>
+          <a:p>
+            <a:pPr algn="ctr">
+              <a:lnSpc>
+                <a:spcPct val="92000"/>
+              </a:lnSpc>
+              <a:spcAft>
+                <a:spcPts val="400"/>
+              </a:spcAft>
+            </a:pPr>
+            <a:r>
+              <a:rPr sz="1019" b="0">
+                <a:solidFill>
+                  <a:srgbClr val="444A55"/>
+                </a:solidFill>
+                <a:latin typeface="Apple SD Gothic Neo"/>
+              </a:rPr>
+              <a:t>Cline SR + Gauss</a:t>
+            </a:r>
+          </a:p>
+        </p:txBody>
+      </p:sp>
+      <p:sp>
+        <p:nvSpPr>
+          <p:cNvPr id="49" name="Rectangle 48"/>
+          <p:cNvSpPr/>
+          <p:nvPr/>
+        </p:nvSpPr>
+        <p:spPr>
+          <a:xfrm>
+            <a:off x="411480" y="4773168"/>
+            <a:ext cx="2148840" cy="475488"/>
+          </a:xfrm>
+          <a:prstGeom prst="rect">
+            <a:avLst/>
+          </a:prstGeom>
+          <a:solidFill>
+            <a:srgbClr val="FFFFFF"/>
+          </a:solidFill>
+          <a:ln w="9525">
+            <a:solidFill>
+              <a:srgbClr val="D5DDE6"/>
+            </a:solidFill>
+          </a:ln>
+          <a:effectLst/>
+        </p:spPr>
+        <p:style>
+          <a:lnRef idx="1">
+            <a:schemeClr val="accent1"/>
+          </a:lnRef>
+          <a:fillRef idx="3">
+            <a:schemeClr val="accent1"/>
+          </a:fillRef>
+          <a:effectRef idx="2">
+            <a:schemeClr val="accent1"/>
+          </a:effectRef>
+          <a:fontRef idx="minor">
+            <a:schemeClr val="lt1"/>
+          </a:fontRef>
+        </p:style>
+        <p:txBody>
+          <a:bodyPr rtlCol="0" anchor="ctr"/>
+          <a:lstStyle/>
+          <a:p>
+            <a:pPr algn="ctr"/>
+          </a:p>
+        </p:txBody>
+      </p:sp>
+      <p:sp>
+        <p:nvSpPr>
+          <p:cNvPr id="50" name="TextBox 49"/>
+          <p:cNvSpPr txBox="1"/>
+          <p:nvPr/>
+        </p:nvSpPr>
+        <p:spPr>
+          <a:xfrm>
+            <a:off x="449580" y="4773168"/>
+            <a:ext cx="2072640" cy="475488"/>
+          </a:xfrm>
+          <a:prstGeom prst="rect">
+            <a:avLst/>
+          </a:prstGeom>
+          <a:noFill/>
+        </p:spPr>
+        <p:txBody>
+          <a:bodyPr wrap="square" anchor="ctr" lIns="25400" rIns="25400" tIns="25400" bIns="25400">
+            <a:spAutoFit/>
+          </a:bodyPr>
+          <a:lstStyle/>
+          <a:p>
+            <a:pPr algn="ctr">
+              <a:lnSpc>
+                <a:spcPct val="92000"/>
+              </a:lnSpc>
+              <a:spcAft>
+                <a:spcPts val="400"/>
+              </a:spcAft>
+            </a:pPr>
+            <a:r>
+              <a:rPr sz="1019" b="0">
+                <a:solidFill>
+                  <a:srgbClr val="444A55"/>
+                </a:solidFill>
+                <a:latin typeface="Apple SD Gothic Neo"/>
+              </a:rPr>
+              <a:t>저장소·협업</a:t>
+            </a:r>
+          </a:p>
+        </p:txBody>
+      </p:sp>
+      <p:sp>
+        <p:nvSpPr>
+          <p:cNvPr id="51" name="Rectangle 50"/>
+          <p:cNvSpPr/>
+          <p:nvPr/>
+        </p:nvSpPr>
+        <p:spPr>
+          <a:xfrm>
+            <a:off x="2560320" y="4773168"/>
+            <a:ext cx="5806440" cy="475488"/>
+          </a:xfrm>
+          <a:prstGeom prst="rect">
+            <a:avLst/>
+          </a:prstGeom>
+          <a:solidFill>
+            <a:srgbClr val="FFFFFF"/>
+          </a:solidFill>
+          <a:ln w="9525">
+            <a:solidFill>
+              <a:srgbClr val="D5DDE6"/>
+            </a:solidFill>
+          </a:ln>
+          <a:effectLst/>
+        </p:spPr>
+        <p:style>
+          <a:lnRef idx="1">
+            <a:schemeClr val="accent1"/>
+          </a:lnRef>
+          <a:fillRef idx="3">
+            <a:schemeClr val="accent1"/>
+          </a:fillRef>
+          <a:effectRef idx="2">
+            <a:schemeClr val="accent1"/>
+          </a:effectRef>
+          <a:fontRef idx="minor">
+            <a:schemeClr val="lt1"/>
+          </a:fontRef>
+        </p:style>
+        <p:txBody>
+          <a:bodyPr rtlCol="0" anchor="ctr"/>
+          <a:lstStyle/>
+          <a:p>
+            <a:pPr algn="ctr"/>
+          </a:p>
+        </p:txBody>
+      </p:sp>
+      <p:sp>
+        <p:nvSpPr>
+          <p:cNvPr id="52" name="TextBox 51"/>
+          <p:cNvSpPr txBox="1"/>
+          <p:nvPr/>
+        </p:nvSpPr>
+        <p:spPr>
+          <a:xfrm>
+            <a:off x="2598420" y="4773168"/>
+            <a:ext cx="5730240" cy="475488"/>
+          </a:xfrm>
+          <a:prstGeom prst="rect">
+            <a:avLst/>
+          </a:prstGeom>
+          <a:noFill/>
+        </p:spPr>
+        <p:txBody>
+          <a:bodyPr wrap="square" anchor="ctr" lIns="25400" rIns="25400" tIns="25400" bIns="25400">
+            <a:spAutoFit/>
+          </a:bodyPr>
+          <a:lstStyle/>
+          <a:p>
+            <a:pPr algn="ctr">
+              <a:lnSpc>
+                <a:spcPct val="92000"/>
+              </a:lnSpc>
+              <a:spcAft>
+                <a:spcPts val="400"/>
+              </a:spcAft>
+            </a:pPr>
+            <a:r>
+              <a:rPr sz="1019" b="0">
+                <a:solidFill>
+                  <a:srgbClr val="444A55"/>
+                </a:solidFill>
+                <a:latin typeface="Apple SD Gothic Neo"/>
+              </a:rPr>
+              <a:t>브랜치·PR·이슈·코드 검색·리뷰 워크플로</a:t>
+            </a:r>
+          </a:p>
+        </p:txBody>
+      </p:sp>
+      <p:sp>
+        <p:nvSpPr>
+          <p:cNvPr id="53" name="Rectangle 52"/>
+          <p:cNvSpPr/>
+          <p:nvPr/>
+        </p:nvSpPr>
+        <p:spPr>
+          <a:xfrm>
+            <a:off x="8366760" y="4773168"/>
+            <a:ext cx="3794760" cy="475488"/>
+          </a:xfrm>
+          <a:prstGeom prst="rect">
+            <a:avLst/>
+          </a:prstGeom>
+          <a:solidFill>
+            <a:srgbClr val="FFFFFF"/>
+          </a:solidFill>
+          <a:ln w="9525">
+            <a:solidFill>
+              <a:srgbClr val="D5DDE6"/>
+            </a:solidFill>
+          </a:ln>
+          <a:effectLst/>
+        </p:spPr>
+        <p:style>
+          <a:lnRef idx="1">
+            <a:schemeClr val="accent1"/>
+          </a:lnRef>
+          <a:fillRef idx="3">
+            <a:schemeClr val="accent1"/>
+          </a:fillRef>
+          <a:effectRef idx="2">
+            <a:schemeClr val="accent1"/>
+          </a:effectRef>
+          <a:fontRef idx="minor">
+            <a:schemeClr val="lt1"/>
+          </a:fontRef>
+        </p:style>
+        <p:txBody>
+          <a:bodyPr rtlCol="0" anchor="ctr"/>
+          <a:lstStyle/>
+          <a:p>
+            <a:pPr algn="ctr"/>
+          </a:p>
+        </p:txBody>
+      </p:sp>
+      <p:sp>
+        <p:nvSpPr>
+          <p:cNvPr id="54" name="TextBox 53"/>
+          <p:cNvSpPr txBox="1"/>
+          <p:nvPr/>
+        </p:nvSpPr>
+        <p:spPr>
+          <a:xfrm>
+            <a:off x="8404860" y="4773168"/>
+            <a:ext cx="3718560" cy="475488"/>
+          </a:xfrm>
+          <a:prstGeom prst="rect">
+            <a:avLst/>
+          </a:prstGeom>
+          <a:noFill/>
+        </p:spPr>
+        <p:txBody>
+          <a:bodyPr wrap="square" anchor="ctr" lIns="25400" rIns="25400" tIns="25400" bIns="25400">
+            <a:spAutoFit/>
+          </a:bodyPr>
+          <a:lstStyle/>
+          <a:p>
+            <a:pPr algn="ctr">
+              <a:lnSpc>
+                <a:spcPct val="92000"/>
+              </a:lnSpc>
+              <a:spcAft>
+                <a:spcPts val="400"/>
+              </a:spcAft>
+            </a:pPr>
+            <a:r>
+              <a:rPr sz="1019" b="0">
+                <a:solidFill>
+                  <a:srgbClr val="444A55"/>
+                </a:solidFill>
+                <a:latin typeface="Apple SD Gothic Neo"/>
+              </a:rPr>
+              <a:t>GitHub Enterprise</a:t>
+            </a:r>
+          </a:p>
+        </p:txBody>
+      </p:sp>
+      <p:sp>
+        <p:nvSpPr>
+          <p:cNvPr id="55" name="Rectangle 54"/>
+          <p:cNvSpPr/>
+          <p:nvPr/>
+        </p:nvSpPr>
+        <p:spPr>
+          <a:xfrm>
+            <a:off x="411480" y="5248656"/>
+            <a:ext cx="2148840" cy="475488"/>
+          </a:xfrm>
+          <a:prstGeom prst="rect">
+            <a:avLst/>
+          </a:prstGeom>
+          <a:solidFill>
+            <a:srgbClr val="E8F1FA"/>
+          </a:solidFill>
+          <a:ln w="9525">
+            <a:solidFill>
+              <a:srgbClr val="D5DDE6"/>
+            </a:solidFill>
+          </a:ln>
+          <a:effectLst/>
+        </p:spPr>
+        <p:style>
+          <a:lnRef idx="1">
+            <a:schemeClr val="accent1"/>
+          </a:lnRef>
+          <a:fillRef idx="3">
+            <a:schemeClr val="accent1"/>
+          </a:fillRef>
+          <a:effectRef idx="2">
+            <a:schemeClr val="accent1"/>
+          </a:effectRef>
+          <a:fontRef idx="minor">
+            <a:schemeClr val="lt1"/>
+          </a:fontRef>
+        </p:style>
+        <p:txBody>
+          <a:bodyPr rtlCol="0" anchor="ctr"/>
+          <a:lstStyle/>
+          <a:p>
+            <a:pPr algn="ctr"/>
+          </a:p>
+        </p:txBody>
+      </p:sp>
+      <p:sp>
+        <p:nvSpPr>
+          <p:cNvPr id="56" name="TextBox 55"/>
+          <p:cNvSpPr txBox="1"/>
+          <p:nvPr/>
+        </p:nvSpPr>
+        <p:spPr>
+          <a:xfrm>
+            <a:off x="449580" y="5248656"/>
+            <a:ext cx="2072640" cy="475488"/>
+          </a:xfrm>
+          <a:prstGeom prst="rect">
+            <a:avLst/>
+          </a:prstGeom>
+          <a:noFill/>
+        </p:spPr>
+        <p:txBody>
+          <a:bodyPr wrap="square" anchor="ctr" lIns="25400" rIns="25400" tIns="25400" bIns="25400">
+            <a:spAutoFit/>
+          </a:bodyPr>
+          <a:lstStyle/>
+          <a:p>
+            <a:pPr algn="ctr">
+              <a:lnSpc>
+                <a:spcPct val="92000"/>
+              </a:lnSpc>
+              <a:spcAft>
+                <a:spcPts val="400"/>
+              </a:spcAft>
+            </a:pPr>
+            <a:r>
+              <a:rPr sz="1019" b="0">
+                <a:solidFill>
+                  <a:srgbClr val="444A55"/>
+                </a:solidFill>
+                <a:latin typeface="Apple SD Gothic Neo"/>
+              </a:rPr>
+              <a:t>레거시·HDL 보조</a:t>
+            </a:r>
+          </a:p>
+        </p:txBody>
+      </p:sp>
+      <p:sp>
+        <p:nvSpPr>
+          <p:cNvPr id="57" name="Rectangle 56"/>
+          <p:cNvSpPr/>
+          <p:nvPr/>
+        </p:nvSpPr>
+        <p:spPr>
+          <a:xfrm>
+            <a:off x="2560320" y="5248656"/>
+            <a:ext cx="5806440" cy="475488"/>
+          </a:xfrm>
+          <a:prstGeom prst="rect">
+            <a:avLst/>
+          </a:prstGeom>
+          <a:solidFill>
+            <a:srgbClr val="E8F1FA"/>
+          </a:solidFill>
+          <a:ln w="9525">
+            <a:solidFill>
+              <a:srgbClr val="D5DDE6"/>
+            </a:solidFill>
+          </a:ln>
+          <a:effectLst/>
+        </p:spPr>
+        <p:style>
+          <a:lnRef idx="1">
+            <a:schemeClr val="accent1"/>
+          </a:lnRef>
+          <a:fillRef idx="3">
+            <a:schemeClr val="accent1"/>
+          </a:fillRef>
+          <a:effectRef idx="2">
+            <a:schemeClr val="accent1"/>
+          </a:effectRef>
+          <a:fontRef idx="minor">
+            <a:schemeClr val="lt1"/>
+          </a:fontRef>
+        </p:style>
+        <p:txBody>
+          <a:bodyPr rtlCol="0" anchor="ctr"/>
+          <a:lstStyle/>
+          <a:p>
+            <a:pPr algn="ctr"/>
+          </a:p>
+        </p:txBody>
+      </p:sp>
+      <p:sp>
+        <p:nvSpPr>
+          <p:cNvPr id="58" name="TextBox 57"/>
+          <p:cNvSpPr txBox="1"/>
+          <p:nvPr/>
+        </p:nvSpPr>
+        <p:spPr>
+          <a:xfrm>
+            <a:off x="2598420" y="5248656"/>
+            <a:ext cx="5730240" cy="475488"/>
+          </a:xfrm>
+          <a:prstGeom prst="rect">
+            <a:avLst/>
+          </a:prstGeom>
+          <a:noFill/>
+        </p:spPr>
+        <p:txBody>
+          <a:bodyPr wrap="square" anchor="ctr" lIns="25400" rIns="25400" tIns="25400" bIns="25400">
+            <a:spAutoFit/>
+          </a:bodyPr>
+          <a:lstStyle/>
+          <a:p>
+            <a:pPr algn="ctr">
+              <a:lnSpc>
+                <a:spcPct val="92000"/>
+              </a:lnSpc>
+              <a:spcAft>
+                <a:spcPts val="400"/>
+              </a:spcAft>
+            </a:pPr>
+            <a:r>
+              <a:rPr sz="1019" b="0">
+                <a:solidFill>
+                  <a:srgbClr val="444A55"/>
+                </a:solidFill>
+                <a:latin typeface="Apple SD Gothic Neo"/>
+              </a:rPr>
+              <a:t>구형 펌웨어 설명·testbench 초안</a:t>
+            </a:r>
+          </a:p>
+        </p:txBody>
+      </p:sp>
+      <p:sp>
+        <p:nvSpPr>
+          <p:cNvPr id="59" name="Rectangle 58"/>
+          <p:cNvSpPr/>
+          <p:nvPr/>
+        </p:nvSpPr>
+        <p:spPr>
+          <a:xfrm>
+            <a:off x="8366760" y="5248656"/>
+            <a:ext cx="3794760" cy="475488"/>
+          </a:xfrm>
+          <a:prstGeom prst="rect">
+            <a:avLst/>
+          </a:prstGeom>
+          <a:solidFill>
+            <a:srgbClr val="E8F1FA"/>
+          </a:solidFill>
+          <a:ln w="9525">
+            <a:solidFill>
+              <a:srgbClr val="D5DDE6"/>
+            </a:solidFill>
+          </a:ln>
+          <a:effectLst/>
+        </p:spPr>
+        <p:style>
+          <a:lnRef idx="1">
+            <a:schemeClr val="accent1"/>
+          </a:lnRef>
+          <a:fillRef idx="3">
+            <a:schemeClr val="accent1"/>
+          </a:fillRef>
+          <a:effectRef idx="2">
+            <a:schemeClr val="accent1"/>
+          </a:effectRef>
+          <a:fontRef idx="minor">
+            <a:schemeClr val="lt1"/>
+          </a:fontRef>
+        </p:style>
+        <p:txBody>
+          <a:bodyPr rtlCol="0" anchor="ctr"/>
+          <a:lstStyle/>
+          <a:p>
+            <a:pPr algn="ctr"/>
+          </a:p>
+        </p:txBody>
+      </p:sp>
+      <p:sp>
+        <p:nvSpPr>
+          <p:cNvPr id="60" name="TextBox 59"/>
+          <p:cNvSpPr txBox="1"/>
+          <p:nvPr/>
+        </p:nvSpPr>
+        <p:spPr>
+          <a:xfrm>
+            <a:off x="8404860" y="5248656"/>
+            <a:ext cx="3718560" cy="475488"/>
+          </a:xfrm>
+          <a:prstGeom prst="rect">
+            <a:avLst/>
+          </a:prstGeom>
+          <a:noFill/>
+        </p:spPr>
+        <p:txBody>
+          <a:bodyPr wrap="square" anchor="ctr" lIns="25400" rIns="25400" tIns="25400" bIns="25400">
+            <a:spAutoFit/>
+          </a:bodyPr>
+          <a:lstStyle/>
+          <a:p>
+            <a:pPr algn="ctr">
+              <a:lnSpc>
+                <a:spcPct val="92000"/>
+              </a:lnSpc>
+              <a:spcAft>
+                <a:spcPts val="400"/>
+              </a:spcAft>
+            </a:pPr>
+            <a:r>
+              <a:rPr sz="1019" b="0">
+                <a:solidFill>
+                  <a:srgbClr val="444A55"/>
+                </a:solidFill>
+                <a:latin typeface="Apple SD Gothic Neo"/>
+              </a:rPr>
+              <a:t>Cline SR + Gauss / Ollama</a:t>
+            </a:r>
+          </a:p>
+        </p:txBody>
+      </p:sp>
+      <p:sp>
+        <p:nvSpPr>
+          <p:cNvPr id="61" name="Rounded Rectangle 60"/>
+          <p:cNvSpPr/>
+          <p:nvPr/>
+        </p:nvSpPr>
+        <p:spPr>
+          <a:xfrm>
+            <a:off x="411480" y="5440680"/>
+            <a:ext cx="11338560" cy="960120"/>
+          </a:xfrm>
+          <a:prstGeom prst="roundRect">
+            <a:avLst/>
+          </a:prstGeom>
+          <a:solidFill>
+            <a:srgbClr val="142A4A"/>
           </a:solidFill>
           <a:ln>
             <a:noFill/>
@@ -3925,14 +5735,14 @@
       </p:sp>
       <p:sp>
         <p:nvSpPr>
-          <p:cNvPr id="21" name="TextBox 20"/>
+          <p:cNvPr id="62" name="TextBox 61"/>
           <p:cNvSpPr txBox="1"/>
           <p:nvPr/>
         </p:nvSpPr>
         <p:spPr>
           <a:xfrm>
-            <a:off x="6510528" y="1097280"/>
-            <a:ext cx="5486400" cy="329184"/>
+            <a:off x="640080" y="5440680"/>
+            <a:ext cx="10881360" cy="960120"/>
           </a:xfrm>
           <a:prstGeom prst="rect">
             <a:avLst/>
@@ -3940,624 +5750,14 @@
           <a:noFill/>
         </p:spPr>
         <p:txBody>
-          <a:bodyPr wrap="square" anchor="t" lIns="25400" rIns="25400" tIns="25400" bIns="25400">
+          <a:bodyPr wrap="square" anchor="ctr" lIns="25400" rIns="25400" tIns="25400" bIns="25400">
             <a:spAutoFit/>
           </a:bodyPr>
           <a:lstStyle/>
           <a:p>
             <a:pPr algn="l">
               <a:lnSpc>
-                <a:spcPct val="100000"/>
-              </a:lnSpc>
-              <a:spcAft>
-                <a:spcPts val="400"/>
-              </a:spcAft>
-            </a:pPr>
-            <a:r>
-              <a:rPr sz="1450" b="1">
-                <a:solidFill>
-                  <a:srgbClr val="142A4A"/>
-                </a:solidFill>
-                <a:latin typeface="Apple SD Gothic Neo"/>
-              </a:rPr>
-              <a:t>2. 현재 사용 가능한 도구</a:t>
-            </a:r>
-          </a:p>
-        </p:txBody>
-      </p:sp>
-      <p:sp>
-        <p:nvSpPr>
-          <p:cNvPr id="22" name="Rounded Rectangle 21"/>
-          <p:cNvSpPr/>
-          <p:nvPr/>
-        </p:nvSpPr>
-        <p:spPr>
-          <a:xfrm>
-            <a:off x="6400800" y="1572768"/>
-            <a:ext cx="5257800" cy="1033271"/>
-          </a:xfrm>
-          <a:prstGeom prst="roundRect">
-            <a:avLst/>
-          </a:prstGeom>
-          <a:solidFill>
-            <a:srgbClr val="FFFFFF"/>
-          </a:solidFill>
-          <a:ln w="12700">
-            <a:solidFill>
-              <a:srgbClr val="D5DDE6"/>
-            </a:solidFill>
-          </a:ln>
-          <a:effectLst/>
-        </p:spPr>
-        <p:style>
-          <a:lnRef idx="1">
-            <a:schemeClr val="accent1"/>
-          </a:lnRef>
-          <a:fillRef idx="3">
-            <a:schemeClr val="accent1"/>
-          </a:fillRef>
-          <a:effectRef idx="2">
-            <a:schemeClr val="accent1"/>
-          </a:effectRef>
-          <a:fontRef idx="minor">
-            <a:schemeClr val="lt1"/>
-          </a:fontRef>
-        </p:style>
-        <p:txBody>
-          <a:bodyPr rtlCol="0" anchor="ctr"/>
-          <a:lstStyle/>
-          <a:p>
-            <a:pPr algn="ctr"/>
-          </a:p>
-        </p:txBody>
-      </p:sp>
-      <p:sp>
-        <p:nvSpPr>
-          <p:cNvPr id="23" name="Rectangle 22"/>
-          <p:cNvSpPr/>
-          <p:nvPr/>
-        </p:nvSpPr>
-        <p:spPr>
-          <a:xfrm>
-            <a:off x="6400800" y="1572768"/>
-            <a:ext cx="76200" cy="1033271"/>
-          </a:xfrm>
-          <a:prstGeom prst="rect">
-            <a:avLst/>
-          </a:prstGeom>
-          <a:solidFill>
-            <a:srgbClr val="1F6FB2"/>
-          </a:solidFill>
-          <a:ln>
-            <a:noFill/>
-          </a:ln>
-          <a:effectLst/>
-        </p:spPr>
-        <p:style>
-          <a:lnRef idx="1">
-            <a:schemeClr val="accent1"/>
-          </a:lnRef>
-          <a:fillRef idx="3">
-            <a:schemeClr val="accent1"/>
-          </a:fillRef>
-          <a:effectRef idx="2">
-            <a:schemeClr val="accent1"/>
-          </a:effectRef>
-          <a:fontRef idx="minor">
-            <a:schemeClr val="lt1"/>
-          </a:fontRef>
-        </p:style>
-        <p:txBody>
-          <a:bodyPr rtlCol="0" anchor="ctr"/>
-          <a:lstStyle/>
-          <a:p>
-            <a:pPr algn="ctr"/>
-          </a:p>
-        </p:txBody>
-      </p:sp>
-      <p:sp>
-        <p:nvSpPr>
-          <p:cNvPr id="24" name="TextBox 23"/>
-          <p:cNvSpPr txBox="1"/>
-          <p:nvPr/>
-        </p:nvSpPr>
-        <p:spPr>
-          <a:xfrm>
-            <a:off x="6629400" y="1645920"/>
-            <a:ext cx="4800600" cy="310896"/>
-          </a:xfrm>
-          <a:prstGeom prst="rect">
-            <a:avLst/>
-          </a:prstGeom>
-          <a:noFill/>
-        </p:spPr>
-        <p:txBody>
-          <a:bodyPr wrap="square" anchor="t" lIns="25400" rIns="25400" tIns="25400" bIns="25400">
-            <a:spAutoFit/>
-          </a:bodyPr>
-          <a:lstStyle/>
-          <a:p>
-            <a:pPr algn="l">
-              <a:lnSpc>
-                <a:spcPct val="100000"/>
-              </a:lnSpc>
-              <a:spcAft>
-                <a:spcPts val="400"/>
-              </a:spcAft>
-            </a:pPr>
-            <a:r>
-              <a:rPr sz="1300" b="1">
-                <a:solidFill>
-                  <a:srgbClr val="142A4A"/>
-                </a:solidFill>
-                <a:latin typeface="Apple SD Gothic Neo"/>
-              </a:rPr>
-              <a:t>Cline SR : VS Code 안에서 일하는 AI 도우미</a:t>
-            </a:r>
-          </a:p>
-        </p:txBody>
-      </p:sp>
-      <p:sp>
-        <p:nvSpPr>
-          <p:cNvPr id="25" name="TextBox 24"/>
-          <p:cNvSpPr txBox="1"/>
-          <p:nvPr/>
-        </p:nvSpPr>
-        <p:spPr>
-          <a:xfrm>
-            <a:off x="6629400" y="1965960"/>
-            <a:ext cx="4800600" cy="566928"/>
-          </a:xfrm>
-          <a:prstGeom prst="rect">
-            <a:avLst/>
-          </a:prstGeom>
-          <a:noFill/>
-        </p:spPr>
-        <p:txBody>
-          <a:bodyPr wrap="square" anchor="t" lIns="25400" rIns="25400" tIns="25400" bIns="25400">
-            <a:spAutoFit/>
-          </a:bodyPr>
-          <a:lstStyle/>
-          <a:p>
-            <a:pPr algn="l">
-              <a:lnSpc>
-                <a:spcPct val="100000"/>
-              </a:lnSpc>
-              <a:spcAft>
-                <a:spcPts val="400"/>
-              </a:spcAft>
-            </a:pPr>
-            <a:r>
-              <a:rPr sz="1120" b="0">
-                <a:solidFill>
-                  <a:srgbClr val="444A55"/>
-                </a:solidFill>
-                <a:latin typeface="Apple SD Gothic Neo"/>
-              </a:rPr>
-              <a:t>개발자가 시키면 코드를 읽고, 고치고, 설명하고, 간단한 명령도 실행합니다.</a:t>
-            </a:r>
-          </a:p>
-        </p:txBody>
-      </p:sp>
-      <p:sp>
-        <p:nvSpPr>
-          <p:cNvPr id="26" name="Rounded Rectangle 25"/>
-          <p:cNvSpPr/>
-          <p:nvPr/>
-        </p:nvSpPr>
-        <p:spPr>
-          <a:xfrm>
-            <a:off x="6400800" y="2715768"/>
-            <a:ext cx="5257800" cy="1033271"/>
-          </a:xfrm>
-          <a:prstGeom prst="roundRect">
-            <a:avLst/>
-          </a:prstGeom>
-          <a:solidFill>
-            <a:srgbClr val="FFFFFF"/>
-          </a:solidFill>
-          <a:ln w="12700">
-            <a:solidFill>
-              <a:srgbClr val="D5DDE6"/>
-            </a:solidFill>
-          </a:ln>
-          <a:effectLst/>
-        </p:spPr>
-        <p:style>
-          <a:lnRef idx="1">
-            <a:schemeClr val="accent1"/>
-          </a:lnRef>
-          <a:fillRef idx="3">
-            <a:schemeClr val="accent1"/>
-          </a:fillRef>
-          <a:effectRef idx="2">
-            <a:schemeClr val="accent1"/>
-          </a:effectRef>
-          <a:fontRef idx="minor">
-            <a:schemeClr val="lt1"/>
-          </a:fontRef>
-        </p:style>
-        <p:txBody>
-          <a:bodyPr rtlCol="0" anchor="ctr"/>
-          <a:lstStyle/>
-          <a:p>
-            <a:pPr algn="ctr"/>
-          </a:p>
-        </p:txBody>
-      </p:sp>
-      <p:sp>
-        <p:nvSpPr>
-          <p:cNvPr id="27" name="Rectangle 26"/>
-          <p:cNvSpPr/>
-          <p:nvPr/>
-        </p:nvSpPr>
-        <p:spPr>
-          <a:xfrm>
-            <a:off x="6400800" y="2715768"/>
-            <a:ext cx="76200" cy="1033271"/>
-          </a:xfrm>
-          <a:prstGeom prst="rect">
-            <a:avLst/>
-          </a:prstGeom>
-          <a:solidFill>
-            <a:srgbClr val="1F6FB2"/>
-          </a:solidFill>
-          <a:ln>
-            <a:noFill/>
-          </a:ln>
-          <a:effectLst/>
-        </p:spPr>
-        <p:style>
-          <a:lnRef idx="1">
-            <a:schemeClr val="accent1"/>
-          </a:lnRef>
-          <a:fillRef idx="3">
-            <a:schemeClr val="accent1"/>
-          </a:fillRef>
-          <a:effectRef idx="2">
-            <a:schemeClr val="accent1"/>
-          </a:effectRef>
-          <a:fontRef idx="minor">
-            <a:schemeClr val="lt1"/>
-          </a:fontRef>
-        </p:style>
-        <p:txBody>
-          <a:bodyPr rtlCol="0" anchor="ctr"/>
-          <a:lstStyle/>
-          <a:p>
-            <a:pPr algn="ctr"/>
-          </a:p>
-        </p:txBody>
-      </p:sp>
-      <p:sp>
-        <p:nvSpPr>
-          <p:cNvPr id="28" name="TextBox 27"/>
-          <p:cNvSpPr txBox="1"/>
-          <p:nvPr/>
-        </p:nvSpPr>
-        <p:spPr>
-          <a:xfrm>
-            <a:off x="6629400" y="2788920"/>
-            <a:ext cx="4800600" cy="310896"/>
-          </a:xfrm>
-          <a:prstGeom prst="rect">
-            <a:avLst/>
-          </a:prstGeom>
-          <a:noFill/>
-        </p:spPr>
-        <p:txBody>
-          <a:bodyPr wrap="square" anchor="t" lIns="25400" rIns="25400" tIns="25400" bIns="25400">
-            <a:spAutoFit/>
-          </a:bodyPr>
-          <a:lstStyle/>
-          <a:p>
-            <a:pPr algn="l">
-              <a:lnSpc>
-                <a:spcPct val="100000"/>
-              </a:lnSpc>
-              <a:spcAft>
-                <a:spcPts val="400"/>
-              </a:spcAft>
-            </a:pPr>
-            <a:r>
-              <a:rPr sz="1300" b="1">
-                <a:solidFill>
-                  <a:srgbClr val="142A4A"/>
-                </a:solidFill>
-                <a:latin typeface="Apple SD Gothic Neo"/>
-              </a:rPr>
-              <a:t>Gauss : 회사 안에서 쓰는 AI 두뇌</a:t>
-            </a:r>
-          </a:p>
-        </p:txBody>
-      </p:sp>
-      <p:sp>
-        <p:nvSpPr>
-          <p:cNvPr id="29" name="TextBox 28"/>
-          <p:cNvSpPr txBox="1"/>
-          <p:nvPr/>
-        </p:nvSpPr>
-        <p:spPr>
-          <a:xfrm>
-            <a:off x="6629400" y="3108960"/>
-            <a:ext cx="4800600" cy="566928"/>
-          </a:xfrm>
-          <a:prstGeom prst="rect">
-            <a:avLst/>
-          </a:prstGeom>
-          <a:noFill/>
-        </p:spPr>
-        <p:txBody>
-          <a:bodyPr wrap="square" anchor="t" lIns="25400" rIns="25400" tIns="25400" bIns="25400">
-            <a:spAutoFit/>
-          </a:bodyPr>
-          <a:lstStyle/>
-          <a:p>
-            <a:pPr algn="l">
-              <a:lnSpc>
-                <a:spcPct val="100000"/>
-              </a:lnSpc>
-              <a:spcAft>
-                <a:spcPts val="400"/>
-              </a:spcAft>
-            </a:pPr>
-            <a:r>
-              <a:rPr sz="1120" b="0">
-                <a:solidFill>
-                  <a:srgbClr val="444A55"/>
-                </a:solidFill>
-                <a:latin typeface="Apple SD Gothic Neo"/>
-              </a:rPr>
-              <a:t>외부 유출 부담은 낮지만, 호출 횟수 제한이 있어 속도에 한계가 있습니다.</a:t>
-            </a:r>
-          </a:p>
-        </p:txBody>
-      </p:sp>
-      <p:sp>
-        <p:nvSpPr>
-          <p:cNvPr id="30" name="Rounded Rectangle 29"/>
-          <p:cNvSpPr/>
-          <p:nvPr/>
-        </p:nvSpPr>
-        <p:spPr>
-          <a:xfrm>
-            <a:off x="6400800" y="3858768"/>
-            <a:ext cx="5257800" cy="1033271"/>
-          </a:xfrm>
-          <a:prstGeom prst="roundRect">
-            <a:avLst/>
-          </a:prstGeom>
-          <a:solidFill>
-            <a:srgbClr val="FFFFFF"/>
-          </a:solidFill>
-          <a:ln w="12700">
-            <a:solidFill>
-              <a:srgbClr val="D5DDE6"/>
-            </a:solidFill>
-          </a:ln>
-          <a:effectLst/>
-        </p:spPr>
-        <p:style>
-          <a:lnRef idx="1">
-            <a:schemeClr val="accent1"/>
-          </a:lnRef>
-          <a:fillRef idx="3">
-            <a:schemeClr val="accent1"/>
-          </a:fillRef>
-          <a:effectRef idx="2">
-            <a:schemeClr val="accent1"/>
-          </a:effectRef>
-          <a:fontRef idx="minor">
-            <a:schemeClr val="lt1"/>
-          </a:fontRef>
-        </p:style>
-        <p:txBody>
-          <a:bodyPr rtlCol="0" anchor="ctr"/>
-          <a:lstStyle/>
-          <a:p>
-            <a:pPr algn="ctr"/>
-          </a:p>
-        </p:txBody>
-      </p:sp>
-      <p:sp>
-        <p:nvSpPr>
-          <p:cNvPr id="31" name="Rectangle 30"/>
-          <p:cNvSpPr/>
-          <p:nvPr/>
-        </p:nvSpPr>
-        <p:spPr>
-          <a:xfrm>
-            <a:off x="6400800" y="3858768"/>
-            <a:ext cx="76200" cy="1033271"/>
-          </a:xfrm>
-          <a:prstGeom prst="rect">
-            <a:avLst/>
-          </a:prstGeom>
-          <a:solidFill>
-            <a:srgbClr val="F27E2E"/>
-          </a:solidFill>
-          <a:ln>
-            <a:noFill/>
-          </a:ln>
-          <a:effectLst/>
-        </p:spPr>
-        <p:style>
-          <a:lnRef idx="1">
-            <a:schemeClr val="accent1"/>
-          </a:lnRef>
-          <a:fillRef idx="3">
-            <a:schemeClr val="accent1"/>
-          </a:fillRef>
-          <a:effectRef idx="2">
-            <a:schemeClr val="accent1"/>
-          </a:effectRef>
-          <a:fontRef idx="minor">
-            <a:schemeClr val="lt1"/>
-          </a:fontRef>
-        </p:style>
-        <p:txBody>
-          <a:bodyPr rtlCol="0" anchor="ctr"/>
-          <a:lstStyle/>
-          <a:p>
-            <a:pPr algn="ctr"/>
-          </a:p>
-        </p:txBody>
-      </p:sp>
-      <p:sp>
-        <p:nvSpPr>
-          <p:cNvPr id="32" name="TextBox 31"/>
-          <p:cNvSpPr txBox="1"/>
-          <p:nvPr/>
-        </p:nvSpPr>
-        <p:spPr>
-          <a:xfrm>
-            <a:off x="6629400" y="3931920"/>
-            <a:ext cx="4800600" cy="310896"/>
-          </a:xfrm>
-          <a:prstGeom prst="rect">
-            <a:avLst/>
-          </a:prstGeom>
-          <a:noFill/>
-        </p:spPr>
-        <p:txBody>
-          <a:bodyPr wrap="square" anchor="t" lIns="25400" rIns="25400" tIns="25400" bIns="25400">
-            <a:spAutoFit/>
-          </a:bodyPr>
-          <a:lstStyle/>
-          <a:p>
-            <a:pPr algn="l">
-              <a:lnSpc>
-                <a:spcPct val="100000"/>
-              </a:lnSpc>
-              <a:spcAft>
-                <a:spcPts val="400"/>
-              </a:spcAft>
-            </a:pPr>
-            <a:r>
-              <a:rPr sz="1300" b="1">
-                <a:solidFill>
-                  <a:srgbClr val="142A4A"/>
-                </a:solidFill>
-                <a:latin typeface="Apple SD Gothic Neo"/>
-              </a:rPr>
-              <a:t>API 호출 제한 : AI에게 질문할 수 있는 횟수 제한</a:t>
-            </a:r>
-          </a:p>
-        </p:txBody>
-      </p:sp>
-      <p:sp>
-        <p:nvSpPr>
-          <p:cNvPr id="33" name="TextBox 32"/>
-          <p:cNvSpPr txBox="1"/>
-          <p:nvPr/>
-        </p:nvSpPr>
-        <p:spPr>
-          <a:xfrm>
-            <a:off x="6629400" y="4251960"/>
-            <a:ext cx="4800600" cy="566928"/>
-          </a:xfrm>
-          <a:prstGeom prst="rect">
-            <a:avLst/>
-          </a:prstGeom>
-          <a:noFill/>
-        </p:spPr>
-        <p:txBody>
-          <a:bodyPr wrap="square" anchor="t" lIns="25400" rIns="25400" tIns="25400" bIns="25400">
-            <a:spAutoFit/>
-          </a:bodyPr>
-          <a:lstStyle/>
-          <a:p>
-            <a:pPr algn="l">
-              <a:lnSpc>
-                <a:spcPct val="100000"/>
-              </a:lnSpc>
-              <a:spcAft>
-                <a:spcPts val="400"/>
-              </a:spcAft>
-            </a:pPr>
-            <a:r>
-              <a:rPr sz="1120" b="0">
-                <a:solidFill>
-                  <a:srgbClr val="444A55"/>
-                </a:solidFill>
-                <a:latin typeface="Apple SD Gothic Neo"/>
-              </a:rPr>
-              <a:t>현재 분당 약 3~4회 수준이라 긴 작업은 중간에 기다리는 시간이 생깁니다.</a:t>
-            </a:r>
-          </a:p>
-        </p:txBody>
-      </p:sp>
-      <p:sp>
-        <p:nvSpPr>
-          <p:cNvPr id="34" name="Rounded Rectangle 33"/>
-          <p:cNvSpPr/>
-          <p:nvPr/>
-        </p:nvSpPr>
-        <p:spPr>
-          <a:xfrm>
-            <a:off x="6400800" y="5166360"/>
-            <a:ext cx="5257800" cy="1005840"/>
-          </a:xfrm>
-          <a:prstGeom prst="roundRect">
-            <a:avLst/>
-          </a:prstGeom>
-          <a:solidFill>
-            <a:srgbClr val="FEF1E6"/>
-          </a:solidFill>
-          <a:ln w="15240">
-            <a:solidFill>
-              <a:srgbClr val="F27E2E"/>
-            </a:solidFill>
-          </a:ln>
-          <a:effectLst/>
-        </p:spPr>
-        <p:style>
-          <a:lnRef idx="1">
-            <a:schemeClr val="accent1"/>
-          </a:lnRef>
-          <a:fillRef idx="3">
-            <a:schemeClr val="accent1"/>
-          </a:fillRef>
-          <a:effectRef idx="2">
-            <a:schemeClr val="accent1"/>
-          </a:effectRef>
-          <a:fontRef idx="minor">
-            <a:schemeClr val="lt1"/>
-          </a:fontRef>
-        </p:style>
-        <p:txBody>
-          <a:bodyPr rtlCol="0" anchor="ctr"/>
-          <a:lstStyle/>
-          <a:p>
-            <a:pPr algn="ctr"/>
-          </a:p>
-        </p:txBody>
-      </p:sp>
-      <p:sp>
-        <p:nvSpPr>
-          <p:cNvPr id="35" name="TextBox 34"/>
-          <p:cNvSpPr txBox="1"/>
-          <p:nvPr/>
-        </p:nvSpPr>
-        <p:spPr>
-          <a:xfrm>
-            <a:off x="6629400" y="5257800"/>
-            <a:ext cx="4800600" cy="777240"/>
-          </a:xfrm>
-          <a:prstGeom prst="rect">
-            <a:avLst/>
-          </a:prstGeom>
-          <a:noFill/>
-        </p:spPr>
-        <p:txBody>
-          <a:bodyPr wrap="square" anchor="t" lIns="25400" rIns="25400" tIns="25400" bIns="25400">
-            <a:spAutoFit/>
-          </a:bodyPr>
-          <a:lstStyle/>
-          <a:p>
-            <a:pPr algn="l">
-              <a:lnSpc>
-                <a:spcPct val="105000"/>
+                <a:spcPct val="112000"/>
               </a:lnSpc>
               <a:spcAft>
                 <a:spcPts val="200"/>
@@ -4566,37 +5766,37 @@
             <a:r>
               <a:rPr sz="1300" b="1">
                 <a:solidFill>
-                  <a:srgbClr val="F27E2E"/>
+                  <a:srgbClr val="9FC4E8"/>
                 </a:solidFill>
                 <a:latin typeface="Apple SD Gothic Neo"/>
               </a:rPr>
-              <a:t>핵심 메시지</a:t>
+              <a:t>환경 구성 요약</a:t>
             </a:r>
           </a:p>
           <a:p>
             <a:pPr algn="l">
               <a:lnSpc>
-                <a:spcPct val="105000"/>
+                <a:spcPct val="112000"/>
               </a:lnSpc>
               <a:spcAft>
                 <a:spcPts val="200"/>
               </a:spcAft>
             </a:pPr>
             <a:r>
-              <a:rPr sz="1180" b="0">
-                <a:solidFill>
-                  <a:srgbClr val="444A55"/>
+              <a:rPr sz="1150" b="0">
+                <a:solidFill>
+                  <a:srgbClr val="FFFFFF"/>
                 </a:solidFill>
                 <a:latin typeface="Apple SD Gothic Neo"/>
               </a:rPr>
-              <a:t>보안 부담 없이 쓸 수 있는 사내 AI 보조 도구이지만, 외부 AI·외부 도구처럼 자유롭고 빠른 환경은 아닙니다.</a:t>
-            </a:r>
-          </a:p>
-        </p:txBody>
-      </p:sp>
-      <p:sp>
-        <p:nvSpPr>
-          <p:cNvPr id="36" name="TextBox 35"/>
+              <a:t>VS Code(IDE) + Cline SR(에이전트) + Gauss(사내 LLM) / Ollama(로컬 LLM) + GitHub Enterprise(사내 저장소)</a:t>
+            </a:r>
+          </a:p>
+        </p:txBody>
+      </p:sp>
+      <p:sp>
+        <p:nvSpPr>
+          <p:cNvPr id="63" name="TextBox 62"/>
           <p:cNvSpPr txBox="1"/>
           <p:nvPr/>
         </p:nvSpPr>
@@ -4787,7 +5987,7 @@
                 </a:solidFill>
                 <a:latin typeface="Apple SD Gothic Neo"/>
               </a:rPr>
-              <a:t>삼성전자 스마트폰 HW 개발팀 AI 활용 방안  (2/4)</a:t>
+              <a:t>NC HW 개발팀  |  사내 AI 환경 (VS Code · Cline SR · Gauss · Ollama · GitHub Enterprise)  (2/4)</a:t>
             </a:r>
           </a:p>
         </p:txBody>
@@ -4887,7 +6087,7 @@
         <p:spPr>
           <a:xfrm>
             <a:off x="612648" y="1060704"/>
-            <a:ext cx="7315200" cy="329184"/>
+            <a:ext cx="10972800" cy="329184"/>
           </a:xfrm>
           <a:prstGeom prst="rect">
             <a:avLst/>
@@ -4915,7 +6115,7 @@
                 </a:solidFill>
                 <a:latin typeface="Apple SD Gothic Neo"/>
               </a:rPr>
-              <a:t>3. 스마트폰 HW 개발 업무 예시</a:t>
+              <a:t>즉시 적용 가능 (보안 검토 완료 환경 기준)</a:t>
             </a:r>
           </a:p>
         </p:txBody>
@@ -4929,7 +6129,7 @@
         <p:spPr>
           <a:xfrm>
             <a:off x="502920" y="1444752"/>
-            <a:ext cx="1325880" cy="566928"/>
+            <a:ext cx="1417320" cy="530352"/>
           </a:xfrm>
           <a:prstGeom prst="rect">
             <a:avLst/>
@@ -4975,7 +6175,7 @@
         <p:spPr>
           <a:xfrm>
             <a:off x="502920" y="1444752"/>
-            <a:ext cx="1325880" cy="566928"/>
+            <a:ext cx="1417320" cy="530352"/>
           </a:xfrm>
           <a:prstGeom prst="rect">
             <a:avLst/>
@@ -4997,7 +6197,7 @@
               </a:spcAft>
             </a:pPr>
             <a:r>
-              <a:rPr sz="1200" b="1">
+              <a:rPr sz="1150" b="1">
                 <a:solidFill>
                   <a:srgbClr val="FFFFFF"/>
                 </a:solidFill>
@@ -5016,8 +6216,8 @@
         </p:nvSpPr>
         <p:spPr>
           <a:xfrm>
-            <a:off x="1828800" y="1444752"/>
-            <a:ext cx="2514600" cy="566928"/>
+            <a:off x="1920240" y="1444752"/>
+            <a:ext cx="2880360" cy="530352"/>
           </a:xfrm>
           <a:prstGeom prst="rect">
             <a:avLst/>
@@ -5062,8 +6262,8 @@
         </p:nvSpPr>
         <p:spPr>
           <a:xfrm>
-            <a:off x="1828800" y="1444752"/>
-            <a:ext cx="2514600" cy="566928"/>
+            <a:off x="1920240" y="1444752"/>
+            <a:ext cx="2880360" cy="530352"/>
           </a:xfrm>
           <a:prstGeom prst="rect">
             <a:avLst/>
@@ -5085,7 +6285,7 @@
               </a:spcAft>
             </a:pPr>
             <a:r>
-              <a:rPr sz="1200" b="1">
+              <a:rPr sz="1150" b="1">
                 <a:solidFill>
                   <a:srgbClr val="FFFFFF"/>
                 </a:solidFill>
@@ -5104,8 +6304,8 @@
         </p:nvSpPr>
         <p:spPr>
           <a:xfrm>
-            <a:off x="4343400" y="1444752"/>
-            <a:ext cx="6903720" cy="566928"/>
+            <a:off x="4800600" y="1444752"/>
+            <a:ext cx="6903720" cy="530352"/>
           </a:xfrm>
           <a:prstGeom prst="rect">
             <a:avLst/>
@@ -5150,8 +6350,8 @@
         </p:nvSpPr>
         <p:spPr>
           <a:xfrm>
-            <a:off x="4343400" y="1444752"/>
-            <a:ext cx="6903720" cy="566928"/>
+            <a:off x="4800600" y="1444752"/>
+            <a:ext cx="6903720" cy="530352"/>
           </a:xfrm>
           <a:prstGeom prst="rect">
             <a:avLst/>
@@ -5173,13 +6373,13 @@
               </a:spcAft>
             </a:pPr>
             <a:r>
-              <a:rPr sz="1200" b="1">
+              <a:rPr sz="1150" b="1">
                 <a:solidFill>
                   <a:srgbClr val="FFFFFF"/>
                 </a:solidFill>
                 <a:latin typeface="Apple SD Gothic Neo"/>
               </a:rPr>
-              <a:t>스마트폰 HW 개발 예시</a:t>
+              <a:t>HW 개발 예시</a:t>
             </a:r>
           </a:p>
         </p:txBody>
@@ -5192,8 +6392,8 @@
         </p:nvSpPr>
         <p:spPr>
           <a:xfrm>
-            <a:off x="502920" y="2011680"/>
-            <a:ext cx="1325880" cy="566928"/>
+            <a:off x="502920" y="1975104"/>
+            <a:ext cx="1417320" cy="530352"/>
           </a:xfrm>
           <a:prstGeom prst="rect">
             <a:avLst/>
@@ -5238,8 +6438,8 @@
         </p:nvSpPr>
         <p:spPr>
           <a:xfrm>
-            <a:off x="553720" y="2011680"/>
-            <a:ext cx="1224280" cy="566928"/>
+            <a:off x="541020" y="1975104"/>
+            <a:ext cx="1341120" cy="530352"/>
           </a:xfrm>
           <a:prstGeom prst="rect">
             <a:avLst/>
@@ -5254,20 +6454,20 @@
           <a:p>
             <a:pPr algn="ctr">
               <a:lnSpc>
-                <a:spcPct val="95000"/>
+                <a:spcPct val="92000"/>
               </a:lnSpc>
               <a:spcAft>
                 <a:spcPts val="400"/>
               </a:spcAft>
             </a:pPr>
             <a:r>
-              <a:rPr sz="1140" b="0">
+              <a:rPr sz="1100" b="0">
                 <a:solidFill>
                   <a:srgbClr val="444A55"/>
                 </a:solidFill>
                 <a:latin typeface="Apple SD Gothic Neo"/>
               </a:rPr>
-              <a:t>부품 제어</a:t>
+              <a:t>코드 초안</a:t>
             </a:r>
           </a:p>
         </p:txBody>
@@ -5280,8 +6480,8 @@
         </p:nvSpPr>
         <p:spPr>
           <a:xfrm>
-            <a:off x="1828800" y="2011680"/>
-            <a:ext cx="2514600" cy="566928"/>
+            <a:off x="1920240" y="1975104"/>
+            <a:ext cx="2880360" cy="530352"/>
           </a:xfrm>
           <a:prstGeom prst="rect">
             <a:avLst/>
@@ -5326,8 +6526,8 @@
         </p:nvSpPr>
         <p:spPr>
           <a:xfrm>
-            <a:off x="1879600" y="2011680"/>
-            <a:ext cx="2413000" cy="566928"/>
+            <a:off x="1958340" y="1975104"/>
+            <a:ext cx="2804160" cy="530352"/>
           </a:xfrm>
           <a:prstGeom prst="rect">
             <a:avLst/>
@@ -5340,22 +6540,22 @@
           </a:bodyPr>
           <a:lstStyle/>
           <a:p>
-            <a:pPr algn="l">
+            <a:pPr algn="ctr">
               <a:lnSpc>
-                <a:spcPct val="95000"/>
+                <a:spcPct val="92000"/>
               </a:lnSpc>
               <a:spcAft>
                 <a:spcPts val="400"/>
               </a:spcAft>
             </a:pPr>
             <a:r>
-              <a:rPr sz="1140" b="0">
+              <a:rPr sz="1100" b="0">
                 <a:solidFill>
                   <a:srgbClr val="444A55"/>
                 </a:solidFill>
                 <a:latin typeface="Apple SD Gothic Neo"/>
               </a:rPr>
-              <a:t>코드 초안 작성</a:t>
+              <a:t>Cline SR이 파일 단위로 작성·수정</a:t>
             </a:r>
           </a:p>
         </p:txBody>
@@ -5368,8 +6568,8 @@
         </p:nvSpPr>
         <p:spPr>
           <a:xfrm>
-            <a:off x="4343400" y="2011680"/>
-            <a:ext cx="6903720" cy="566928"/>
+            <a:off x="4800600" y="1975104"/>
+            <a:ext cx="6903720" cy="530352"/>
           </a:xfrm>
           <a:prstGeom prst="rect">
             <a:avLst/>
@@ -5414,8 +6614,8 @@
         </p:nvSpPr>
         <p:spPr>
           <a:xfrm>
-            <a:off x="4394200" y="2011680"/>
-            <a:ext cx="6802120" cy="566928"/>
+            <a:off x="4838700" y="1975104"/>
+            <a:ext cx="6827520" cy="530352"/>
           </a:xfrm>
           <a:prstGeom prst="rect">
             <a:avLst/>
@@ -5428,22 +6628,22 @@
           </a:bodyPr>
           <a:lstStyle/>
           <a:p>
-            <a:pPr algn="l">
+            <a:pPr algn="ctr">
               <a:lnSpc>
-                <a:spcPct val="95000"/>
+                <a:spcPct val="92000"/>
               </a:lnSpc>
               <a:spcAft>
                 <a:spcPts val="400"/>
               </a:spcAft>
             </a:pPr>
             <a:r>
-              <a:rPr sz="1140" b="0">
+              <a:rPr sz="1100" b="0">
                 <a:solidFill>
                   <a:srgbClr val="444A55"/>
                 </a:solidFill>
                 <a:latin typeface="Apple SD Gothic Neo"/>
               </a:rPr>
-              <a:t>센서·전원 IC·충전 IC 설정 코드를 먼저 만들어 보고, 개발자가 검토</a:t>
+              <a:t>센서·PMIC·충전 IC 드라이버·HAL 초안</a:t>
             </a:r>
           </a:p>
         </p:txBody>
@@ -5456,8 +6656,8 @@
         </p:nvSpPr>
         <p:spPr>
           <a:xfrm>
-            <a:off x="502920" y="2578608"/>
-            <a:ext cx="1325880" cy="566928"/>
+            <a:off x="502920" y="2505456"/>
+            <a:ext cx="1417320" cy="530352"/>
           </a:xfrm>
           <a:prstGeom prst="rect">
             <a:avLst/>
@@ -5502,8 +6702,8 @@
         </p:nvSpPr>
         <p:spPr>
           <a:xfrm>
-            <a:off x="553720" y="2578608"/>
-            <a:ext cx="1224280" cy="566928"/>
+            <a:off x="541020" y="2505456"/>
+            <a:ext cx="1341120" cy="530352"/>
           </a:xfrm>
           <a:prstGeom prst="rect">
             <a:avLst/>
@@ -5518,20 +6718,20 @@
           <a:p>
             <a:pPr algn="ctr">
               <a:lnSpc>
-                <a:spcPct val="95000"/>
+                <a:spcPct val="92000"/>
               </a:lnSpc>
               <a:spcAft>
                 <a:spcPts val="400"/>
               </a:spcAft>
             </a:pPr>
             <a:r>
-              <a:rPr sz="1140" b="0">
+              <a:rPr sz="1100" b="0">
                 <a:solidFill>
                   <a:srgbClr val="444A55"/>
                 </a:solidFill>
                 <a:latin typeface="Apple SD Gothic Neo"/>
               </a:rPr>
-              <a:t>부품 설명서</a:t>
+              <a:t>레지스터 맵</a:t>
             </a:r>
           </a:p>
         </p:txBody>
@@ -5544,8 +6744,8 @@
         </p:nvSpPr>
         <p:spPr>
           <a:xfrm>
-            <a:off x="1828800" y="2578608"/>
-            <a:ext cx="2514600" cy="566928"/>
+            <a:off x="1920240" y="2505456"/>
+            <a:ext cx="2880360" cy="530352"/>
           </a:xfrm>
           <a:prstGeom prst="rect">
             <a:avLst/>
@@ -5590,8 +6790,8 @@
         </p:nvSpPr>
         <p:spPr>
           <a:xfrm>
-            <a:off x="1879600" y="2578608"/>
-            <a:ext cx="2413000" cy="566928"/>
+            <a:off x="1958340" y="2505456"/>
+            <a:ext cx="2804160" cy="530352"/>
           </a:xfrm>
           <a:prstGeom prst="rect">
             <a:avLst/>
@@ -5604,22 +6804,22 @@
           </a:bodyPr>
           <a:lstStyle/>
           <a:p>
-            <a:pPr algn="l">
+            <a:pPr algn="ctr">
               <a:lnSpc>
-                <a:spcPct val="95000"/>
+                <a:spcPct val="92000"/>
               </a:lnSpc>
               <a:spcAft>
                 <a:spcPts val="400"/>
               </a:spcAft>
             </a:pPr>
             <a:r>
-              <a:rPr sz="1140" b="0">
+              <a:rPr sz="1100" b="0">
                 <a:solidFill>
                   <a:srgbClr val="444A55"/>
                 </a:solidFill>
                 <a:latin typeface="Apple SD Gothic Neo"/>
               </a:rPr>
-              <a:t>데이터시트 정리</a:t>
+              <a:t>표 기반 헤더·초기화 코드 생성</a:t>
             </a:r>
           </a:p>
         </p:txBody>
@@ -5632,8 +6832,8 @@
         </p:nvSpPr>
         <p:spPr>
           <a:xfrm>
-            <a:off x="4343400" y="2578608"/>
-            <a:ext cx="6903720" cy="566928"/>
+            <a:off x="4800600" y="2505456"/>
+            <a:ext cx="6903720" cy="530352"/>
           </a:xfrm>
           <a:prstGeom prst="rect">
             <a:avLst/>
@@ -5678,8 +6878,8 @@
         </p:nvSpPr>
         <p:spPr>
           <a:xfrm>
-            <a:off x="4394200" y="2578608"/>
-            <a:ext cx="6802120" cy="566928"/>
+            <a:off x="4838700" y="2505456"/>
+            <a:ext cx="6827520" cy="530352"/>
           </a:xfrm>
           <a:prstGeom prst="rect">
             <a:avLst/>
@@ -5692,22 +6892,22 @@
           </a:bodyPr>
           <a:lstStyle/>
           <a:p>
-            <a:pPr algn="l">
+            <a:pPr algn="ctr">
               <a:lnSpc>
-                <a:spcPct val="95000"/>
+                <a:spcPct val="92000"/>
               </a:lnSpc>
               <a:spcAft>
                 <a:spcPts val="400"/>
               </a:spcAft>
             </a:pPr>
             <a:r>
-              <a:rPr sz="1140" b="0">
+              <a:rPr sz="1100" b="0">
                 <a:solidFill>
                   <a:srgbClr val="444A55"/>
                 </a:solidFill>
                 <a:latin typeface="Apple SD Gothic Neo"/>
               </a:rPr>
-              <a:t>복잡한 설정값 표를 사람이 보기 쉬운 요약표로 정리</a:t>
+              <a:t>데이터시트 레지스터 정의 → .h 변환</a:t>
             </a:r>
           </a:p>
         </p:txBody>
@@ -5720,8 +6920,8 @@
         </p:nvSpPr>
         <p:spPr>
           <a:xfrm>
-            <a:off x="502920" y="3145536"/>
-            <a:ext cx="1325880" cy="566928"/>
+            <a:off x="502920" y="3035808"/>
+            <a:ext cx="1417320" cy="530352"/>
           </a:xfrm>
           <a:prstGeom prst="rect">
             <a:avLst/>
@@ -5766,8 +6966,8 @@
         </p:nvSpPr>
         <p:spPr>
           <a:xfrm>
-            <a:off x="553720" y="3145536"/>
-            <a:ext cx="1224280" cy="566928"/>
+            <a:off x="541020" y="3035808"/>
+            <a:ext cx="1341120" cy="530352"/>
           </a:xfrm>
           <a:prstGeom prst="rect">
             <a:avLst/>
@@ -5782,20 +6982,20 @@
           <a:p>
             <a:pPr algn="ctr">
               <a:lnSpc>
-                <a:spcPct val="95000"/>
+                <a:spcPct val="92000"/>
               </a:lnSpc>
               <a:spcAft>
                 <a:spcPts val="400"/>
               </a:spcAft>
             </a:pPr>
             <a:r>
-              <a:rPr sz="1140" b="0">
+              <a:rPr sz="1100" b="0">
                 <a:solidFill>
                   <a:srgbClr val="444A55"/>
                 </a:solidFill>
                 <a:latin typeface="Apple SD Gothic Neo"/>
               </a:rPr>
-              <a:t>측정</a:t>
+              <a:t>측정 스크립트</a:t>
             </a:r>
           </a:p>
         </p:txBody>
@@ -5808,8 +7008,8 @@
         </p:nvSpPr>
         <p:spPr>
           <a:xfrm>
-            <a:off x="1828800" y="3145536"/>
-            <a:ext cx="2514600" cy="566928"/>
+            <a:off x="1920240" y="3035808"/>
+            <a:ext cx="2880360" cy="530352"/>
           </a:xfrm>
           <a:prstGeom prst="rect">
             <a:avLst/>
@@ -5854,8 +7054,8 @@
         </p:nvSpPr>
         <p:spPr>
           <a:xfrm>
-            <a:off x="1879600" y="3145536"/>
-            <a:ext cx="2413000" cy="566928"/>
+            <a:off x="1958340" y="3035808"/>
+            <a:ext cx="2804160" cy="530352"/>
           </a:xfrm>
           <a:prstGeom prst="rect">
             <a:avLst/>
@@ -5868,22 +7068,22 @@
           </a:bodyPr>
           <a:lstStyle/>
           <a:p>
-            <a:pPr algn="l">
+            <a:pPr algn="ctr">
               <a:lnSpc>
-                <a:spcPct val="95000"/>
+                <a:spcPct val="92000"/>
               </a:lnSpc>
               <a:spcAft>
                 <a:spcPts val="400"/>
               </a:spcAft>
             </a:pPr>
             <a:r>
-              <a:rPr sz="1140" b="0">
+              <a:rPr sz="1100" b="0">
                 <a:solidFill>
                   <a:srgbClr val="444A55"/>
                 </a:solidFill>
                 <a:latin typeface="Apple SD Gothic Neo"/>
               </a:rPr>
-              <a:t>자동화 코드 작성</a:t>
+              <a:t>Python·SCPI 자동화 코드</a:t>
             </a:r>
           </a:p>
         </p:txBody>
@@ -5896,8 +7096,8 @@
         </p:nvSpPr>
         <p:spPr>
           <a:xfrm>
-            <a:off x="4343400" y="3145536"/>
-            <a:ext cx="6903720" cy="566928"/>
+            <a:off x="4800600" y="3035808"/>
+            <a:ext cx="6903720" cy="530352"/>
           </a:xfrm>
           <a:prstGeom prst="rect">
             <a:avLst/>
@@ -5942,8 +7142,8 @@
         </p:nvSpPr>
         <p:spPr>
           <a:xfrm>
-            <a:off x="4394200" y="3145536"/>
-            <a:ext cx="6802120" cy="566928"/>
+            <a:off x="4838700" y="3035808"/>
+            <a:ext cx="6827520" cy="530352"/>
           </a:xfrm>
           <a:prstGeom prst="rect">
             <a:avLst/>
@@ -5956,22 +7156,22 @@
           </a:bodyPr>
           <a:lstStyle/>
           <a:p>
-            <a:pPr algn="l">
+            <a:pPr algn="ctr">
               <a:lnSpc>
-                <a:spcPct val="95000"/>
+                <a:spcPct val="92000"/>
               </a:lnSpc>
               <a:spcAft>
                 <a:spcPts val="400"/>
               </a:spcAft>
             </a:pPr>
             <a:r>
-              <a:rPr sz="1140" b="0">
+              <a:rPr sz="1100" b="0">
                 <a:solidFill>
                   <a:srgbClr val="444A55"/>
                 </a:solidFill>
                 <a:latin typeface="Apple SD Gothic Neo"/>
               </a:rPr>
-              <a:t>전압·전류·온도·소비전력 측정 스크립트 초안 작성</a:t>
+              <a:t>전압·전류·온도·소비전력 측정 루프</a:t>
             </a:r>
           </a:p>
         </p:txBody>
@@ -5984,8 +7184,8 @@
         </p:nvSpPr>
         <p:spPr>
           <a:xfrm>
-            <a:off x="502920" y="3712464"/>
-            <a:ext cx="1325880" cy="566928"/>
+            <a:off x="502920" y="3566160"/>
+            <a:ext cx="1417320" cy="530352"/>
           </a:xfrm>
           <a:prstGeom prst="rect">
             <a:avLst/>
@@ -6030,8 +7230,8 @@
         </p:nvSpPr>
         <p:spPr>
           <a:xfrm>
-            <a:off x="553720" y="3712464"/>
-            <a:ext cx="1224280" cy="566928"/>
+            <a:off x="541020" y="3566160"/>
+            <a:ext cx="1341120" cy="530352"/>
           </a:xfrm>
           <a:prstGeom prst="rect">
             <a:avLst/>
@@ -6046,20 +7246,20 @@
           <a:p>
             <a:pPr algn="ctr">
               <a:lnSpc>
-                <a:spcPct val="95000"/>
+                <a:spcPct val="92000"/>
               </a:lnSpc>
               <a:spcAft>
                 <a:spcPts val="400"/>
               </a:spcAft>
             </a:pPr>
             <a:r>
-              <a:rPr sz="1140" b="0">
+              <a:rPr sz="1100" b="0">
                 <a:solidFill>
                   <a:srgbClr val="444A55"/>
                 </a:solidFill>
                 <a:latin typeface="Apple SD Gothic Neo"/>
               </a:rPr>
-              <a:t>데이터</a:t>
+              <a:t>로그·데이터 정리</a:t>
             </a:r>
           </a:p>
         </p:txBody>
@@ -6072,8 +7272,8 @@
         </p:nvSpPr>
         <p:spPr>
           <a:xfrm>
-            <a:off x="1828800" y="3712464"/>
-            <a:ext cx="2514600" cy="566928"/>
+            <a:off x="1920240" y="3566160"/>
+            <a:ext cx="2880360" cy="530352"/>
           </a:xfrm>
           <a:prstGeom prst="rect">
             <a:avLst/>
@@ -6118,8 +7318,8 @@
         </p:nvSpPr>
         <p:spPr>
           <a:xfrm>
-            <a:off x="1879600" y="3712464"/>
-            <a:ext cx="2413000" cy="566928"/>
+            <a:off x="1958340" y="3566160"/>
+            <a:ext cx="2804160" cy="530352"/>
           </a:xfrm>
           <a:prstGeom prst="rect">
             <a:avLst/>
@@ -6132,22 +7332,22 @@
           </a:bodyPr>
           <a:lstStyle/>
           <a:p>
-            <a:pPr algn="l">
+            <a:pPr algn="ctr">
               <a:lnSpc>
-                <a:spcPct val="95000"/>
+                <a:spcPct val="92000"/>
               </a:lnSpc>
               <a:spcAft>
                 <a:spcPts val="400"/>
               </a:spcAft>
             </a:pPr>
             <a:r>
-              <a:rPr sz="1140" b="0">
+              <a:rPr sz="1100" b="0">
                 <a:solidFill>
                   <a:srgbClr val="444A55"/>
                 </a:solidFill>
                 <a:latin typeface="Apple SD Gothic Neo"/>
               </a:rPr>
-              <a:t>로그·측정값 정리</a:t>
+              <a:t>파싱·표·요약 문장 생성</a:t>
             </a:r>
           </a:p>
         </p:txBody>
@@ -6160,8 +7360,8 @@
         </p:nvSpPr>
         <p:spPr>
           <a:xfrm>
-            <a:off x="4343400" y="3712464"/>
-            <a:ext cx="6903720" cy="566928"/>
+            <a:off x="4800600" y="3566160"/>
+            <a:ext cx="6903720" cy="530352"/>
           </a:xfrm>
           <a:prstGeom prst="rect">
             <a:avLst/>
@@ -6206,8 +7406,8 @@
         </p:nvSpPr>
         <p:spPr>
           <a:xfrm>
-            <a:off x="4394200" y="3712464"/>
-            <a:ext cx="6802120" cy="566928"/>
+            <a:off x="4838700" y="3566160"/>
+            <a:ext cx="6827520" cy="530352"/>
           </a:xfrm>
           <a:prstGeom prst="rect">
             <a:avLst/>
@@ -6220,22 +7420,22 @@
           </a:bodyPr>
           <a:lstStyle/>
           <a:p>
-            <a:pPr algn="l">
+            <a:pPr algn="ctr">
               <a:lnSpc>
-                <a:spcPct val="95000"/>
+                <a:spcPct val="92000"/>
               </a:lnSpc>
               <a:spcAft>
                 <a:spcPts val="400"/>
               </a:spcAft>
             </a:pPr>
             <a:r>
-              <a:rPr sz="1140" b="0">
+              <a:rPr sz="1100" b="0">
                 <a:solidFill>
                   <a:srgbClr val="444A55"/>
                 </a:solidFill>
                 <a:latin typeface="Apple SD Gothic Neo"/>
               </a:rPr>
-              <a:t>측정 결과를 표, 그래프, 원인 후보 문장으로 정리</a:t>
+              <a:t>시험 로그·CSV → 보고용 표·그래프</a:t>
             </a:r>
           </a:p>
         </p:txBody>
@@ -6248,8 +7448,8 @@
         </p:nvSpPr>
         <p:spPr>
           <a:xfrm>
-            <a:off x="502920" y="4279392"/>
-            <a:ext cx="1325880" cy="566928"/>
+            <a:off x="502920" y="4096512"/>
+            <a:ext cx="1417320" cy="530352"/>
           </a:xfrm>
           <a:prstGeom prst="rect">
             <a:avLst/>
@@ -6294,8 +7494,8 @@
         </p:nvSpPr>
         <p:spPr>
           <a:xfrm>
-            <a:off x="553720" y="4279392"/>
-            <a:ext cx="1224280" cy="566928"/>
+            <a:off x="541020" y="4096512"/>
+            <a:ext cx="1341120" cy="530352"/>
           </a:xfrm>
           <a:prstGeom prst="rect">
             <a:avLst/>
@@ -6310,20 +7510,20 @@
           <a:p>
             <a:pPr algn="ctr">
               <a:lnSpc>
-                <a:spcPct val="95000"/>
+                <a:spcPct val="92000"/>
               </a:lnSpc>
               <a:spcAft>
                 <a:spcPts val="400"/>
               </a:spcAft>
             </a:pPr>
             <a:r>
-              <a:rPr sz="1140" b="0">
+              <a:rPr sz="1100" b="0">
                 <a:solidFill>
                   <a:srgbClr val="444A55"/>
                 </a:solidFill>
                 <a:latin typeface="Apple SD Gothic Neo"/>
               </a:rPr>
-              <a:t>품질</a:t>
+              <a:t>문서 초안</a:t>
             </a:r>
           </a:p>
         </p:txBody>
@@ -6336,8 +7536,8 @@
         </p:nvSpPr>
         <p:spPr>
           <a:xfrm>
-            <a:off x="1828800" y="4279392"/>
-            <a:ext cx="2514600" cy="566928"/>
+            <a:off x="1920240" y="4096512"/>
+            <a:ext cx="2880360" cy="530352"/>
           </a:xfrm>
           <a:prstGeom prst="rect">
             <a:avLst/>
@@ -6382,8 +7582,8 @@
         </p:nvSpPr>
         <p:spPr>
           <a:xfrm>
-            <a:off x="1879600" y="4279392"/>
-            <a:ext cx="2413000" cy="566928"/>
+            <a:off x="1958340" y="4096512"/>
+            <a:ext cx="2804160" cy="530352"/>
           </a:xfrm>
           <a:prstGeom prst="rect">
             <a:avLst/>
@@ -6396,22 +7596,22 @@
           </a:bodyPr>
           <a:lstStyle/>
           <a:p>
-            <a:pPr algn="l">
+            <a:pPr algn="ctr">
               <a:lnSpc>
-                <a:spcPct val="95000"/>
+                <a:spcPct val="92000"/>
               </a:lnSpc>
               <a:spcAft>
                 <a:spcPts val="400"/>
               </a:spcAft>
             </a:pPr>
             <a:r>
-              <a:rPr sz="1140" b="0">
+              <a:rPr sz="1100" b="0">
                 <a:solidFill>
                   <a:srgbClr val="444A55"/>
                 </a:solidFill>
                 <a:latin typeface="Apple SD Gothic Neo"/>
               </a:rPr>
-              <a:t>코드 점검</a:t>
+              <a:t>코드·이슈 기반 문서화</a:t>
             </a:r>
           </a:p>
         </p:txBody>
@@ -6424,8 +7624,8 @@
         </p:nvSpPr>
         <p:spPr>
           <a:xfrm>
-            <a:off x="4343400" y="4279392"/>
-            <a:ext cx="6903720" cy="566928"/>
+            <a:off x="4800600" y="4096512"/>
+            <a:ext cx="6903720" cy="530352"/>
           </a:xfrm>
           <a:prstGeom prst="rect">
             <a:avLst/>
@@ -6470,8 +7670,8 @@
         </p:nvSpPr>
         <p:spPr>
           <a:xfrm>
-            <a:off x="4394200" y="4279392"/>
-            <a:ext cx="6802120" cy="566928"/>
+            <a:off x="4838700" y="4096512"/>
+            <a:ext cx="6827520" cy="530352"/>
           </a:xfrm>
           <a:prstGeom prst="rect">
             <a:avLst/>
@@ -6484,22 +7684,22 @@
           </a:bodyPr>
           <a:lstStyle/>
           <a:p>
-            <a:pPr algn="l">
+            <a:pPr algn="ctr">
               <a:lnSpc>
-                <a:spcPct val="95000"/>
+                <a:spcPct val="92000"/>
               </a:lnSpc>
               <a:spcAft>
                 <a:spcPts val="400"/>
               </a:spcAft>
             </a:pPr>
             <a:r>
-              <a:rPr sz="1140" b="0">
+              <a:rPr sz="1100" b="0">
                 <a:solidFill>
                   <a:srgbClr val="444A55"/>
                 </a:solidFill>
                 <a:latin typeface="Apple SD Gothic Neo"/>
               </a:rPr>
-              <a:t>빠진 예외처리, 반복 코드, 위험해 보이는 부분 확인</a:t>
+              <a:t>시험 결과·회의록·개발 가이드 초안</a:t>
             </a:r>
           </a:p>
         </p:txBody>
@@ -6512,8 +7712,8 @@
         </p:nvSpPr>
         <p:spPr>
           <a:xfrm>
-            <a:off x="502920" y="4846320"/>
-            <a:ext cx="1325880" cy="566928"/>
+            <a:off x="502920" y="4626864"/>
+            <a:ext cx="1417320" cy="530352"/>
           </a:xfrm>
           <a:prstGeom prst="rect">
             <a:avLst/>
@@ -6558,8 +7758,8 @@
         </p:nvSpPr>
         <p:spPr>
           <a:xfrm>
-            <a:off x="553720" y="4846320"/>
-            <a:ext cx="1224280" cy="566928"/>
+            <a:off x="541020" y="4626864"/>
+            <a:ext cx="1341120" cy="530352"/>
           </a:xfrm>
           <a:prstGeom prst="rect">
             <a:avLst/>
@@ -6574,20 +7774,20 @@
           <a:p>
             <a:pPr algn="ctr">
               <a:lnSpc>
-                <a:spcPct val="95000"/>
+                <a:spcPct val="92000"/>
               </a:lnSpc>
               <a:spcAft>
                 <a:spcPts val="400"/>
               </a:spcAft>
             </a:pPr>
             <a:r>
-              <a:rPr sz="1140" b="0">
+              <a:rPr sz="1100" b="0">
                 <a:solidFill>
                   <a:srgbClr val="444A55"/>
                 </a:solidFill>
                 <a:latin typeface="Apple SD Gothic Neo"/>
               </a:rPr>
-              <a:t>문서</a:t>
+              <a:t>코드 점검</a:t>
             </a:r>
           </a:p>
         </p:txBody>
@@ -6600,8 +7800,8 @@
         </p:nvSpPr>
         <p:spPr>
           <a:xfrm>
-            <a:off x="1828800" y="4846320"/>
-            <a:ext cx="2514600" cy="566928"/>
+            <a:off x="1920240" y="4626864"/>
+            <a:ext cx="2880360" cy="530352"/>
           </a:xfrm>
           <a:prstGeom prst="rect">
             <a:avLst/>
@@ -6646,8 +7846,8 @@
         </p:nvSpPr>
         <p:spPr>
           <a:xfrm>
-            <a:off x="1879600" y="4846320"/>
-            <a:ext cx="2413000" cy="566928"/>
+            <a:off x="1958340" y="4626864"/>
+            <a:ext cx="2804160" cy="530352"/>
           </a:xfrm>
           <a:prstGeom prst="rect">
             <a:avLst/>
@@ -6660,22 +7860,22 @@
           </a:bodyPr>
           <a:lstStyle/>
           <a:p>
-            <a:pPr algn="l">
+            <a:pPr algn="ctr">
               <a:lnSpc>
-                <a:spcPct val="95000"/>
+                <a:spcPct val="92000"/>
               </a:lnSpc>
               <a:spcAft>
                 <a:spcPts val="400"/>
               </a:spcAft>
             </a:pPr>
             <a:r>
-              <a:rPr sz="1140" b="0">
+              <a:rPr sz="1100" b="0">
                 <a:solidFill>
                   <a:srgbClr val="444A55"/>
                 </a:solidFill>
                 <a:latin typeface="Apple SD Gothic Neo"/>
               </a:rPr>
-              <a:t>보고서 초안 작성</a:t>
+              <a:t>규칙·패턴·누락 검토</a:t>
             </a:r>
           </a:p>
         </p:txBody>
@@ -6688,8 +7888,8 @@
         </p:nvSpPr>
         <p:spPr>
           <a:xfrm>
-            <a:off x="4343400" y="4846320"/>
-            <a:ext cx="6903720" cy="566928"/>
+            <a:off x="4800600" y="4626864"/>
+            <a:ext cx="6903720" cy="530352"/>
           </a:xfrm>
           <a:prstGeom prst="rect">
             <a:avLst/>
@@ -6734,8 +7934,8 @@
         </p:nvSpPr>
         <p:spPr>
           <a:xfrm>
-            <a:off x="4394200" y="4846320"/>
-            <a:ext cx="6802120" cy="566928"/>
+            <a:off x="4838700" y="4626864"/>
+            <a:ext cx="6827520" cy="530352"/>
           </a:xfrm>
           <a:prstGeom prst="rect">
             <a:avLst/>
@@ -6748,36 +7948,300 @@
           </a:bodyPr>
           <a:lstStyle/>
           <a:p>
-            <a:pPr algn="l">
+            <a:pPr algn="ctr">
               <a:lnSpc>
-                <a:spcPct val="95000"/>
+                <a:spcPct val="92000"/>
               </a:lnSpc>
               <a:spcAft>
                 <a:spcPts val="400"/>
               </a:spcAft>
             </a:pPr>
             <a:r>
-              <a:rPr sz="1140" b="0">
+              <a:rPr sz="1100" b="0">
                 <a:solidFill>
                   <a:srgbClr val="444A55"/>
                 </a:solidFill>
                 <a:latin typeface="Apple SD Gothic Neo"/>
               </a:rPr>
-              <a:t>시험 결과, 이슈 분석, 회의 정리, 개발 가이드 초안 작성</a:t>
-            </a:r>
-          </a:p>
-        </p:txBody>
-      </p:sp>
-      <p:sp>
-        <p:nvSpPr>
-          <p:cNvPr id="50" name="Rounded Rectangle 49"/>
+              <a:t>예외처리·매직넘버·중복 코드 지적</a:t>
+            </a:r>
+          </a:p>
+        </p:txBody>
+      </p:sp>
+      <p:sp>
+        <p:nvSpPr>
+          <p:cNvPr id="50" name="Rectangle 49"/>
           <p:cNvSpPr/>
           <p:nvPr/>
         </p:nvSpPr>
         <p:spPr>
           <a:xfrm>
-            <a:off x="502920" y="5230368"/>
-            <a:ext cx="3611880" cy="1170432"/>
+            <a:off x="502920" y="5157216"/>
+            <a:ext cx="1417320" cy="530352"/>
+          </a:xfrm>
+          <a:prstGeom prst="rect">
+            <a:avLst/>
+          </a:prstGeom>
+          <a:solidFill>
+            <a:srgbClr val="FFFFFF"/>
+          </a:solidFill>
+          <a:ln w="9525">
+            <a:solidFill>
+              <a:srgbClr val="D5DDE6"/>
+            </a:solidFill>
+          </a:ln>
+          <a:effectLst/>
+        </p:spPr>
+        <p:style>
+          <a:lnRef idx="1">
+            <a:schemeClr val="accent1"/>
+          </a:lnRef>
+          <a:fillRef idx="3">
+            <a:schemeClr val="accent1"/>
+          </a:fillRef>
+          <a:effectRef idx="2">
+            <a:schemeClr val="accent1"/>
+          </a:effectRef>
+          <a:fontRef idx="minor">
+            <a:schemeClr val="lt1"/>
+          </a:fontRef>
+        </p:style>
+        <p:txBody>
+          <a:bodyPr rtlCol="0" anchor="ctr"/>
+          <a:lstStyle/>
+          <a:p>
+            <a:pPr algn="ctr"/>
+          </a:p>
+        </p:txBody>
+      </p:sp>
+      <p:sp>
+        <p:nvSpPr>
+          <p:cNvPr id="51" name="TextBox 50"/>
+          <p:cNvSpPr txBox="1"/>
+          <p:nvPr/>
+        </p:nvSpPr>
+        <p:spPr>
+          <a:xfrm>
+            <a:off x="541020" y="5157216"/>
+            <a:ext cx="1341120" cy="530352"/>
+          </a:xfrm>
+          <a:prstGeom prst="rect">
+            <a:avLst/>
+          </a:prstGeom>
+          <a:noFill/>
+        </p:spPr>
+        <p:txBody>
+          <a:bodyPr wrap="square" anchor="ctr" lIns="25400" rIns="25400" tIns="25400" bIns="25400">
+            <a:spAutoFit/>
+          </a:bodyPr>
+          <a:lstStyle/>
+          <a:p>
+            <a:pPr algn="ctr">
+              <a:lnSpc>
+                <a:spcPct val="92000"/>
+              </a:lnSpc>
+              <a:spcAft>
+                <a:spcPts val="400"/>
+              </a:spcAft>
+            </a:pPr>
+            <a:r>
+              <a:rPr sz="1100" b="0">
+                <a:solidFill>
+                  <a:srgbClr val="444A55"/>
+                </a:solidFill>
+                <a:latin typeface="Apple SD Gothic Neo"/>
+              </a:rPr>
+              <a:t>Git 워크플로</a:t>
+            </a:r>
+          </a:p>
+        </p:txBody>
+      </p:sp>
+      <p:sp>
+        <p:nvSpPr>
+          <p:cNvPr id="52" name="Rectangle 51"/>
+          <p:cNvSpPr/>
+          <p:nvPr/>
+        </p:nvSpPr>
+        <p:spPr>
+          <a:xfrm>
+            <a:off x="1920240" y="5157216"/>
+            <a:ext cx="2880360" cy="530352"/>
+          </a:xfrm>
+          <a:prstGeom prst="rect">
+            <a:avLst/>
+          </a:prstGeom>
+          <a:solidFill>
+            <a:srgbClr val="FFFFFF"/>
+          </a:solidFill>
+          <a:ln w="9525">
+            <a:solidFill>
+              <a:srgbClr val="D5DDE6"/>
+            </a:solidFill>
+          </a:ln>
+          <a:effectLst/>
+        </p:spPr>
+        <p:style>
+          <a:lnRef idx="1">
+            <a:schemeClr val="accent1"/>
+          </a:lnRef>
+          <a:fillRef idx="3">
+            <a:schemeClr val="accent1"/>
+          </a:fillRef>
+          <a:effectRef idx="2">
+            <a:schemeClr val="accent1"/>
+          </a:effectRef>
+          <a:fontRef idx="minor">
+            <a:schemeClr val="lt1"/>
+          </a:fontRef>
+        </p:style>
+        <p:txBody>
+          <a:bodyPr rtlCol="0" anchor="ctr"/>
+          <a:lstStyle/>
+          <a:p>
+            <a:pPr algn="ctr"/>
+          </a:p>
+        </p:txBody>
+      </p:sp>
+      <p:sp>
+        <p:nvSpPr>
+          <p:cNvPr id="53" name="TextBox 52"/>
+          <p:cNvSpPr txBox="1"/>
+          <p:nvPr/>
+        </p:nvSpPr>
+        <p:spPr>
+          <a:xfrm>
+            <a:off x="1958340" y="5157216"/>
+            <a:ext cx="2804160" cy="530352"/>
+          </a:xfrm>
+          <a:prstGeom prst="rect">
+            <a:avLst/>
+          </a:prstGeom>
+          <a:noFill/>
+        </p:spPr>
+        <p:txBody>
+          <a:bodyPr wrap="square" anchor="ctr" lIns="25400" rIns="25400" tIns="25400" bIns="25400">
+            <a:spAutoFit/>
+          </a:bodyPr>
+          <a:lstStyle/>
+          <a:p>
+            <a:pPr algn="ctr">
+              <a:lnSpc>
+                <a:spcPct val="92000"/>
+              </a:lnSpc>
+              <a:spcAft>
+                <a:spcPts val="400"/>
+              </a:spcAft>
+            </a:pPr>
+            <a:r>
+              <a:rPr sz="1100" b="0">
+                <a:solidFill>
+                  <a:srgbClr val="444A55"/>
+                </a:solidFill>
+                <a:latin typeface="Apple SD Gothic Neo"/>
+              </a:rPr>
+              <a:t>PR·이슈·코드 검색</a:t>
+            </a:r>
+          </a:p>
+        </p:txBody>
+      </p:sp>
+      <p:sp>
+        <p:nvSpPr>
+          <p:cNvPr id="54" name="Rectangle 53"/>
+          <p:cNvSpPr/>
+          <p:nvPr/>
+        </p:nvSpPr>
+        <p:spPr>
+          <a:xfrm>
+            <a:off x="4800600" y="5157216"/>
+            <a:ext cx="6903720" cy="530352"/>
+          </a:xfrm>
+          <a:prstGeom prst="rect">
+            <a:avLst/>
+          </a:prstGeom>
+          <a:solidFill>
+            <a:srgbClr val="FFFFFF"/>
+          </a:solidFill>
+          <a:ln w="9525">
+            <a:solidFill>
+              <a:srgbClr val="D5DDE6"/>
+            </a:solidFill>
+          </a:ln>
+          <a:effectLst/>
+        </p:spPr>
+        <p:style>
+          <a:lnRef idx="1">
+            <a:schemeClr val="accent1"/>
+          </a:lnRef>
+          <a:fillRef idx="3">
+            <a:schemeClr val="accent1"/>
+          </a:fillRef>
+          <a:effectRef idx="2">
+            <a:schemeClr val="accent1"/>
+          </a:effectRef>
+          <a:fontRef idx="minor">
+            <a:schemeClr val="lt1"/>
+          </a:fontRef>
+        </p:style>
+        <p:txBody>
+          <a:bodyPr rtlCol="0" anchor="ctr"/>
+          <a:lstStyle/>
+          <a:p>
+            <a:pPr algn="ctr"/>
+          </a:p>
+        </p:txBody>
+      </p:sp>
+      <p:sp>
+        <p:nvSpPr>
+          <p:cNvPr id="55" name="TextBox 54"/>
+          <p:cNvSpPr txBox="1"/>
+          <p:nvPr/>
+        </p:nvSpPr>
+        <p:spPr>
+          <a:xfrm>
+            <a:off x="4838700" y="5157216"/>
+            <a:ext cx="6827520" cy="530352"/>
+          </a:xfrm>
+          <a:prstGeom prst="rect">
+            <a:avLst/>
+          </a:prstGeom>
+          <a:noFill/>
+        </p:spPr>
+        <p:txBody>
+          <a:bodyPr wrap="square" anchor="ctr" lIns="25400" rIns="25400" tIns="25400" bIns="25400">
+            <a:spAutoFit/>
+          </a:bodyPr>
+          <a:lstStyle/>
+          <a:p>
+            <a:pPr algn="ctr">
+              <a:lnSpc>
+                <a:spcPct val="92000"/>
+              </a:lnSpc>
+              <a:spcAft>
+                <a:spcPts val="400"/>
+              </a:spcAft>
+            </a:pPr>
+            <a:r>
+              <a:rPr sz="1100" b="0">
+                <a:solidFill>
+                  <a:srgbClr val="444A55"/>
+                </a:solidFill>
+                <a:latin typeface="Apple SD Gothic Neo"/>
+              </a:rPr>
+              <a:t>브랜치 관리·리뷰·이력 추적 (GitHub Enterprise)</a:t>
+            </a:r>
+          </a:p>
+        </p:txBody>
+      </p:sp>
+      <p:sp>
+        <p:nvSpPr>
+          <p:cNvPr id="56" name="Rounded Rectangle 55"/>
+          <p:cNvSpPr/>
+          <p:nvPr/>
+        </p:nvSpPr>
+        <p:spPr>
+          <a:xfrm>
+            <a:off x="502920" y="4892040"/>
+            <a:ext cx="5486400" cy="1234440"/>
           </a:xfrm>
           <a:prstGeom prst="roundRect">
             <a:avLst/>
@@ -6816,14 +8280,14 @@
       </p:sp>
       <p:sp>
         <p:nvSpPr>
-          <p:cNvPr id="51" name="TextBox 50"/>
+          <p:cNvPr id="57" name="TextBox 56"/>
           <p:cNvSpPr txBox="1"/>
           <p:nvPr/>
         </p:nvSpPr>
         <p:spPr>
           <a:xfrm>
-            <a:off x="713232" y="5340096"/>
-            <a:ext cx="3246120" cy="960120"/>
+            <a:off x="713232" y="4892040"/>
+            <a:ext cx="5074920" cy="1234440"/>
           </a:xfrm>
           <a:prstGeom prst="rect">
             <a:avLst/>
@@ -6831,14 +8295,14 @@
           <a:noFill/>
         </p:spPr>
         <p:txBody>
-          <a:bodyPr wrap="square" anchor="t" lIns="25400" rIns="25400" tIns="25400" bIns="25400">
+          <a:bodyPr wrap="square" anchor="ctr" lIns="25400" rIns="25400" tIns="25400" bIns="25400">
             <a:spAutoFit/>
           </a:bodyPr>
           <a:lstStyle/>
           <a:p>
             <a:pPr algn="l">
               <a:lnSpc>
-                <a:spcPct val="108000"/>
+                <a:spcPct val="110000"/>
               </a:lnSpc>
               <a:spcAft>
                 <a:spcPts val="200"/>
@@ -6851,185 +8315,78 @@
                 </a:solidFill>
                 <a:latin typeface="Apple SD Gothic Neo"/>
               </a:rPr>
-              <a:t>잘 맞는 일</a:t>
+              <a:t>권장 운영</a:t>
             </a:r>
           </a:p>
           <a:p>
             <a:pPr algn="l">
               <a:lnSpc>
-                <a:spcPct val="108000"/>
+                <a:spcPct val="110000"/>
               </a:lnSpc>
               <a:spcAft>
                 <a:spcPts val="200"/>
               </a:spcAft>
             </a:pPr>
             <a:r>
-              <a:rPr sz="1160" b="0">
+              <a:rPr sz="1150" b="0">
                 <a:solidFill>
                   <a:srgbClr val="444A55"/>
                 </a:solidFill>
                 <a:latin typeface="Apple SD Gothic Neo"/>
               </a:rPr>
-              <a:t>반복되는 코드·문서·정리 작업</a:t>
+              <a:t>• Gauss: 일반 코딩·문서 (고성능)</a:t>
             </a:r>
           </a:p>
           <a:p>
             <a:pPr algn="l">
               <a:lnSpc>
-                <a:spcPct val="108000"/>
+                <a:spcPct val="110000"/>
               </a:lnSpc>
               <a:spcAft>
                 <a:spcPts val="200"/>
               </a:spcAft>
             </a:pPr>
             <a:r>
-              <a:rPr sz="1120" b="0">
+              <a:rPr sz="1150" b="0">
                 <a:solidFill>
                   <a:srgbClr val="444A55"/>
                 </a:solidFill>
                 <a:latin typeface="Apple SD Gothic Neo"/>
               </a:rPr>
-              <a:t>예: 측정 로그 정리, 코드 초안</a:t>
-            </a:r>
-          </a:p>
-        </p:txBody>
-      </p:sp>
-      <p:sp>
-        <p:nvSpPr>
-          <p:cNvPr id="52" name="Rounded Rectangle 51"/>
-          <p:cNvSpPr/>
-          <p:nvPr/>
-        </p:nvSpPr>
-        <p:spPr>
-          <a:xfrm>
-            <a:off x="4297680" y="5230368"/>
-            <a:ext cx="3611880" cy="1170432"/>
-          </a:xfrm>
-          <a:prstGeom prst="roundRect">
-            <a:avLst/>
-          </a:prstGeom>
-          <a:solidFill>
-            <a:srgbClr val="FEF1E6"/>
-          </a:solidFill>
-          <a:ln w="12700">
-            <a:solidFill>
-              <a:srgbClr val="F27E2E"/>
-            </a:solidFill>
-          </a:ln>
-          <a:effectLst/>
-        </p:spPr>
-        <p:style>
-          <a:lnRef idx="1">
-            <a:schemeClr val="accent1"/>
-          </a:lnRef>
-          <a:fillRef idx="3">
-            <a:schemeClr val="accent1"/>
-          </a:fillRef>
-          <a:effectRef idx="2">
-            <a:schemeClr val="accent1"/>
-          </a:effectRef>
-          <a:fontRef idx="minor">
-            <a:schemeClr val="lt1"/>
-          </a:fontRef>
-        </p:style>
-        <p:txBody>
-          <a:bodyPr rtlCol="0" anchor="ctr"/>
-          <a:lstStyle/>
-          <a:p>
-            <a:pPr algn="ctr"/>
-          </a:p>
-        </p:txBody>
-      </p:sp>
-      <p:sp>
-        <p:nvSpPr>
-          <p:cNvPr id="53" name="TextBox 52"/>
-          <p:cNvSpPr txBox="1"/>
-          <p:nvPr/>
-        </p:nvSpPr>
-        <p:spPr>
-          <a:xfrm>
-            <a:off x="4507992" y="5340096"/>
-            <a:ext cx="3246120" cy="960120"/>
-          </a:xfrm>
-          <a:prstGeom prst="rect">
-            <a:avLst/>
-          </a:prstGeom>
-          <a:noFill/>
-        </p:spPr>
-        <p:txBody>
-          <a:bodyPr wrap="square" anchor="t" lIns="25400" rIns="25400" tIns="25400" bIns="25400">
-            <a:spAutoFit/>
-          </a:bodyPr>
-          <a:lstStyle/>
+              <a:t>• Ollama: 망분리·고민감 자료 (로컬)</a:t>
+            </a:r>
+          </a:p>
           <a:p>
             <a:pPr algn="l">
               <a:lnSpc>
-                <a:spcPct val="108000"/>
+                <a:spcPct val="110000"/>
               </a:lnSpc>
               <a:spcAft>
                 <a:spcPts val="200"/>
               </a:spcAft>
             </a:pPr>
             <a:r>
-              <a:rPr sz="1300" b="1">
-                <a:solidFill>
-                  <a:srgbClr val="F27E2E"/>
+              <a:rPr sz="1150" b="0">
+                <a:solidFill>
+                  <a:srgbClr val="444A55"/>
                 </a:solidFill>
                 <a:latin typeface="Apple SD Gothic Neo"/>
               </a:rPr>
-              <a:t>주의할 일</a:t>
-            </a:r>
-          </a:p>
-          <a:p>
-            <a:pPr algn="l">
-              <a:lnSpc>
-                <a:spcPct val="108000"/>
-              </a:lnSpc>
-              <a:spcAft>
-                <a:spcPts val="200"/>
-              </a:spcAft>
-            </a:pPr>
-            <a:r>
-              <a:rPr sz="1160" b="0">
-                <a:solidFill>
-                  <a:srgbClr val="444A55"/>
-                </a:solidFill>
-                <a:latin typeface="Apple SD Gothic Neo"/>
-              </a:rPr>
-              <a:t>회로 판단·불량 원인 확정</a:t>
-            </a:r>
-          </a:p>
-          <a:p>
-            <a:pPr algn="l">
-              <a:lnSpc>
-                <a:spcPct val="108000"/>
-              </a:lnSpc>
-              <a:spcAft>
-                <a:spcPts val="200"/>
-              </a:spcAft>
-            </a:pPr>
-            <a:r>
-              <a:rPr sz="1120" b="0">
-                <a:solidFill>
-                  <a:srgbClr val="444A55"/>
-                </a:solidFill>
-                <a:latin typeface="Apple SD Gothic Neo"/>
-              </a:rPr>
-              <a:t>예: 부품 최종 선정, 양산 영향 판단</a:t>
-            </a:r>
-          </a:p>
-        </p:txBody>
-      </p:sp>
-      <p:sp>
-        <p:nvSpPr>
-          <p:cNvPr id="54" name="Rounded Rectangle 53"/>
+              <a:t>• 긴 작업은 짧은 단위로 분할 요청</a:t>
+            </a:r>
+          </a:p>
+        </p:txBody>
+      </p:sp>
+      <p:sp>
+        <p:nvSpPr>
+          <p:cNvPr id="58" name="Rounded Rectangle 57"/>
           <p:cNvSpPr/>
           <p:nvPr/>
         </p:nvSpPr>
         <p:spPr>
           <a:xfrm>
-            <a:off x="8092440" y="5230368"/>
-            <a:ext cx="3611880" cy="1170432"/>
+            <a:off x="6172200" y="4892040"/>
+            <a:ext cx="5532120" cy="1234440"/>
           </a:xfrm>
           <a:prstGeom prst="roundRect">
             <a:avLst/>
@@ -7066,14 +8423,14 @@
       </p:sp>
       <p:sp>
         <p:nvSpPr>
-          <p:cNvPr id="55" name="TextBox 54"/>
+          <p:cNvPr id="59" name="TextBox 58"/>
           <p:cNvSpPr txBox="1"/>
           <p:nvPr/>
         </p:nvSpPr>
         <p:spPr>
           <a:xfrm>
-            <a:off x="8302752" y="5340096"/>
-            <a:ext cx="3246120" cy="960120"/>
+            <a:off x="6382512" y="4892040"/>
+            <a:ext cx="5120640" cy="1234440"/>
           </a:xfrm>
           <a:prstGeom prst="rect">
             <a:avLst/>
@@ -7081,14 +8438,14 @@
           <a:noFill/>
         </p:spPr>
         <p:txBody>
-          <a:bodyPr wrap="square" anchor="t" lIns="25400" rIns="25400" tIns="25400" bIns="25400">
+          <a:bodyPr wrap="square" anchor="ctr" lIns="25400" rIns="25400" tIns="25400" bIns="25400">
             <a:spAutoFit/>
           </a:bodyPr>
           <a:lstStyle/>
           <a:p>
             <a:pPr algn="l">
               <a:lnSpc>
-                <a:spcPct val="108000"/>
+                <a:spcPct val="110000"/>
               </a:lnSpc>
               <a:spcAft>
                 <a:spcPts val="200"/>
@@ -7101,52 +8458,71 @@
                 </a:solidFill>
                 <a:latin typeface="Apple SD Gothic Neo"/>
               </a:rPr>
-              <a:t>한 줄 결론</a:t>
+              <a:t>기대 효과</a:t>
             </a:r>
           </a:p>
           <a:p>
             <a:pPr algn="l">
               <a:lnSpc>
-                <a:spcPct val="108000"/>
+                <a:spcPct val="110000"/>
               </a:lnSpc>
               <a:spcAft>
                 <a:spcPts val="200"/>
               </a:spcAft>
             </a:pPr>
             <a:r>
-              <a:rPr sz="1140" b="0">
+              <a:rPr sz="1150" b="0">
                 <a:solidFill>
                   <a:srgbClr val="FFFFFF"/>
                 </a:solidFill>
                 <a:latin typeface="Apple SD Gothic Neo"/>
               </a:rPr>
-              <a:t>AI가 HW를 대신 설계하는 것이 아니라,</a:t>
+              <a:t>반복·정형 업무 시간 단축</a:t>
             </a:r>
           </a:p>
           <a:p>
             <a:pPr algn="l">
               <a:lnSpc>
-                <a:spcPct val="108000"/>
+                <a:spcPct val="110000"/>
               </a:lnSpc>
               <a:spcAft>
                 <a:spcPts val="200"/>
               </a:spcAft>
             </a:pPr>
             <a:r>
-              <a:rPr sz="1140" b="0">
+              <a:rPr sz="1150" b="0">
                 <a:solidFill>
                   <a:srgbClr val="FFFFFF"/>
                 </a:solidFill>
                 <a:latin typeface="Apple SD Gothic Neo"/>
               </a:rPr>
-              <a:t>개발자의 반복 업무를 줄이는 도구</a:t>
-            </a:r>
-          </a:p>
-        </p:txBody>
-      </p:sp>
-      <p:sp>
-        <p:nvSpPr>
-          <p:cNvPr id="56" name="TextBox 55"/>
+              <a:t>개발자는 설계·실측·검증에 집중</a:t>
+            </a:r>
+          </a:p>
+          <a:p>
+            <a:pPr algn="l">
+              <a:lnSpc>
+                <a:spcPct val="110000"/>
+              </a:lnSpc>
+              <a:spcAft>
+                <a:spcPts val="200"/>
+              </a:spcAft>
+            </a:pPr>
+            <a:r>
+              <a:rPr sz="1150" b="0">
+                <a:solidFill>
+                  <a:srgbClr val="FFFFFF"/>
+                </a:solidFill>
+                <a:latin typeface="Apple SD Gothic Neo"/>
+              </a:rPr>
+              <a:t>사내 망 내 데이터 유출 없음</a:t>
+            </a:r>
+          </a:p>
+        </p:txBody>
+      </p:sp>
+      <p:sp>
+        <p:nvSpPr>
+          <p:cNvPr id="60" name="TextBox 59"/>
           <p:cNvSpPr txBox="1"/>
           <p:nvPr/>
         </p:nvSpPr>
@@ -7337,7 +8713,7 @@
                 </a:solidFill>
                 <a:latin typeface="Apple SD Gothic Neo"/>
               </a:rPr>
-              <a:t>삼성전자 스마트폰 HW 개발팀 AI 활용 방안  (3/4)</a:t>
+              <a:t>NC HW 개발팀  |  사내 AI 환경 (VS Code · Cline SR · Gauss · Ollama · GitHub Enterprise)  (3/4)</a:t>
             </a:r>
           </a:p>
         </p:txBody>
@@ -7379,27 +8755,73 @@
                 </a:solidFill>
                 <a:latin typeface="Apple SD Gothic Neo"/>
               </a:rPr>
-              <a:t>현재 조건에서의 한계</a:t>
-            </a:r>
-          </a:p>
-        </p:txBody>
-      </p:sp>
-      <p:sp>
-        <p:nvSpPr>
-          <p:cNvPr id="6" name="Rectangle 5"/>
+              <a:t>현재 사내 조건의 한계</a:t>
+            </a:r>
+          </a:p>
+        </p:txBody>
+      </p:sp>
+      <p:sp>
+        <p:nvSpPr>
+          <p:cNvPr id="6" name="Rounded Rectangle 5"/>
           <p:cNvSpPr/>
           <p:nvPr/>
         </p:nvSpPr>
         <p:spPr>
           <a:xfrm>
-            <a:off x="502920" y="1078992"/>
-            <a:ext cx="63500" cy="292608"/>
-          </a:xfrm>
-          <a:prstGeom prst="rect">
+            <a:off x="457200" y="1389888"/>
+            <a:ext cx="11292840" cy="804672"/>
+          </a:xfrm>
+          <a:prstGeom prst="roundRect">
             <a:avLst/>
           </a:prstGeom>
           <a:solidFill>
-            <a:srgbClr val="1F6FB2"/>
+            <a:srgbClr val="FEF1E6"/>
+          </a:solidFill>
+          <a:ln w="12700">
+            <a:solidFill>
+              <a:srgbClr val="F27E2E"/>
+            </a:solidFill>
+          </a:ln>
+          <a:effectLst/>
+        </p:spPr>
+        <p:style>
+          <a:lnRef idx="1">
+            <a:schemeClr val="accent1"/>
+          </a:lnRef>
+          <a:fillRef idx="3">
+            <a:schemeClr val="accent1"/>
+          </a:fillRef>
+          <a:effectRef idx="2">
+            <a:schemeClr val="accent1"/>
+          </a:effectRef>
+          <a:fontRef idx="minor">
+            <a:schemeClr val="lt1"/>
+          </a:fontRef>
+        </p:style>
+        <p:txBody>
+          <a:bodyPr rtlCol="0" anchor="ctr"/>
+          <a:lstStyle/>
+          <a:p>
+            <a:pPr algn="ctr"/>
+          </a:p>
+        </p:txBody>
+      </p:sp>
+      <p:sp>
+        <p:nvSpPr>
+          <p:cNvPr id="7" name="Rectangle 6"/>
+          <p:cNvSpPr/>
+          <p:nvPr/>
+        </p:nvSpPr>
+        <p:spPr>
+          <a:xfrm>
+            <a:off x="457200" y="1389888"/>
+            <a:ext cx="76200" cy="804672"/>
+          </a:xfrm>
+          <a:prstGeom prst="rect">
+            <a:avLst/>
+          </a:prstGeom>
+          <a:solidFill>
+            <a:srgbClr val="F27E2E"/>
           </a:solidFill>
           <a:ln>
             <a:noFill/>
@@ -7430,14 +8852,14 @@
       </p:sp>
       <p:sp>
         <p:nvSpPr>
-          <p:cNvPr id="7" name="TextBox 6"/>
+          <p:cNvPr id="8" name="TextBox 7"/>
           <p:cNvSpPr txBox="1"/>
           <p:nvPr/>
         </p:nvSpPr>
         <p:spPr>
           <a:xfrm>
-            <a:off x="612648" y="1060704"/>
-            <a:ext cx="7315200" cy="329184"/>
+            <a:off x="658368" y="1481328"/>
+            <a:ext cx="2880360" cy="292608"/>
           </a:xfrm>
           <a:prstGeom prst="rect">
             <a:avLst/>
@@ -7459,27 +8881,69 @@
               </a:spcAft>
             </a:pPr>
             <a:r>
-              <a:rPr sz="1450" b="1">
+              <a:rPr sz="1200" b="1">
                 <a:solidFill>
                   <a:srgbClr val="142A4A"/>
                 </a:solidFill>
                 <a:latin typeface="Apple SD Gothic Neo"/>
               </a:rPr>
-              <a:t>4. 지금 조건에서 어려운 점</a:t>
-            </a:r>
-          </a:p>
-        </p:txBody>
-      </p:sp>
-      <p:sp>
-        <p:nvSpPr>
-          <p:cNvPr id="8" name="Rounded Rectangle 7"/>
+              <a:t>외부 MCP·API 사용 제한</a:t>
+            </a:r>
+          </a:p>
+        </p:txBody>
+      </p:sp>
+      <p:sp>
+        <p:nvSpPr>
+          <p:cNvPr id="9" name="TextBox 8"/>
+          <p:cNvSpPr txBox="1"/>
+          <p:nvPr/>
+        </p:nvSpPr>
+        <p:spPr>
+          <a:xfrm>
+            <a:off x="3611880" y="1481328"/>
+            <a:ext cx="8001000" cy="621792"/>
+          </a:xfrm>
+          <a:prstGeom prst="rect">
+            <a:avLst/>
+          </a:prstGeom>
+          <a:noFill/>
+        </p:spPr>
+        <p:txBody>
+          <a:bodyPr wrap="square" anchor="t" lIns="25400" rIns="25400" tIns="25400" bIns="25400">
+            <a:spAutoFit/>
+          </a:bodyPr>
+          <a:lstStyle/>
+          <a:p>
+            <a:pPr algn="l">
+              <a:lnSpc>
+                <a:spcPct val="105000"/>
+              </a:lnSpc>
+              <a:spcAft>
+                <a:spcPts val="400"/>
+              </a:spcAft>
+            </a:pPr>
+            <a:r>
+              <a:rPr sz="1080" b="0">
+                <a:solidFill>
+                  <a:srgbClr val="444A55"/>
+                </a:solidFill>
+                <a:latin typeface="Apple SD Gothic Neo"/>
+              </a:rPr>
+              <a:t>외부 문서 검색·외부 저장소·외부 분석 도구 자동 연동 불가. Cline SR이 스스로 최신 공개 자료·외부 API를 호출할 수 없음.</a:t>
+            </a:r>
+          </a:p>
+        </p:txBody>
+      </p:sp>
+      <p:sp>
+        <p:nvSpPr>
+          <p:cNvPr id="10" name="Rounded Rectangle 9"/>
           <p:cNvSpPr/>
           <p:nvPr/>
         </p:nvSpPr>
         <p:spPr>
           <a:xfrm>
-            <a:off x="502920" y="1444752"/>
-            <a:ext cx="11201400" cy="749808"/>
+            <a:off x="457200" y="2286000"/>
+            <a:ext cx="11292840" cy="804672"/>
           </a:xfrm>
           <a:prstGeom prst="roundRect">
             <a:avLst/>
@@ -7487,7 +8951,7 @@
           <a:solidFill>
             <a:srgbClr val="FEF1E6"/>
           </a:solidFill>
-          <a:ln w="13970">
+          <a:ln w="12700">
             <a:solidFill>
               <a:srgbClr val="F27E2E"/>
             </a:solidFill>
@@ -7518,14 +8982,14 @@
       </p:sp>
       <p:sp>
         <p:nvSpPr>
-          <p:cNvPr id="9" name="Rectangle 8"/>
+          <p:cNvPr id="11" name="Rectangle 10"/>
           <p:cNvSpPr/>
           <p:nvPr/>
         </p:nvSpPr>
         <p:spPr>
           <a:xfrm>
-            <a:off x="502920" y="1444752"/>
-            <a:ext cx="76200" cy="749808"/>
+            <a:off x="457200" y="2286000"/>
+            <a:ext cx="76200" cy="804672"/>
           </a:xfrm>
           <a:prstGeom prst="rect">
             <a:avLst/>
@@ -7562,14 +9026,14 @@
       </p:sp>
       <p:sp>
         <p:nvSpPr>
-          <p:cNvPr id="10" name="TextBox 9"/>
+          <p:cNvPr id="12" name="TextBox 11"/>
           <p:cNvSpPr txBox="1"/>
           <p:nvPr/>
         </p:nvSpPr>
         <p:spPr>
           <a:xfrm>
-            <a:off x="731520" y="1508760"/>
-            <a:ext cx="2743200" cy="320040"/>
+            <a:off x="658368" y="2377440"/>
+            <a:ext cx="2880360" cy="292608"/>
           </a:xfrm>
           <a:prstGeom prst="rect">
             <a:avLst/>
@@ -7591,27 +9055,159 @@
               </a:spcAft>
             </a:pPr>
             <a:r>
-              <a:rPr sz="1220" b="1">
+              <a:rPr sz="1200" b="1">
                 <a:solidFill>
                   <a:srgbClr val="142A4A"/>
                 </a:solidFill>
                 <a:latin typeface="Apple SD Gothic Neo"/>
               </a:rPr>
-              <a:t>외부 MCP·API 도구 사용 제한</a:t>
-            </a:r>
-          </a:p>
-        </p:txBody>
-      </p:sp>
-      <p:sp>
-        <p:nvSpPr>
-          <p:cNvPr id="11" name="TextBox 10"/>
+              <a:t>임베딩·청킹 성능 제한</a:t>
+            </a:r>
+          </a:p>
+        </p:txBody>
+      </p:sp>
+      <p:sp>
+        <p:nvSpPr>
+          <p:cNvPr id="13" name="TextBox 12"/>
           <p:cNvSpPr txBox="1"/>
           <p:nvPr/>
         </p:nvSpPr>
         <p:spPr>
           <a:xfrm>
-            <a:off x="3566160" y="1517904"/>
-            <a:ext cx="8229600" cy="548640"/>
+            <a:off x="3611880" y="2377440"/>
+            <a:ext cx="8001000" cy="621792"/>
+          </a:xfrm>
+          <a:prstGeom prst="rect">
+            <a:avLst/>
+          </a:prstGeom>
+          <a:noFill/>
+        </p:spPr>
+        <p:txBody>
+          <a:bodyPr wrap="square" anchor="t" lIns="25400" rIns="25400" tIns="25400" bIns="25400">
+            <a:spAutoFit/>
+          </a:bodyPr>
+          <a:lstStyle/>
+          <a:p>
+            <a:pPr algn="l">
+              <a:lnSpc>
+                <a:spcPct val="105000"/>
+              </a:lnSpc>
+              <a:spcAft>
+                <a:spcPts val="400"/>
+              </a:spcAft>
+            </a:pPr>
+            <a:r>
+              <a:rPr sz="1080" b="0">
+                <a:solidFill>
+                  <a:srgbClr val="444A55"/>
+                </a:solidFill>
+                <a:latin typeface="Apple SD Gothic Neo"/>
+              </a:rPr>
+              <a:t>장문 데이터시트·설계서의 의미 기반 검색·분할 처리 품질이 낮음. 수백 페이지 사양서에서 특정 설정값을 정확히 찾기 어려움.</a:t>
+            </a:r>
+          </a:p>
+        </p:txBody>
+      </p:sp>
+      <p:sp>
+        <p:nvSpPr>
+          <p:cNvPr id="14" name="Rounded Rectangle 13"/>
+          <p:cNvSpPr/>
+          <p:nvPr/>
+        </p:nvSpPr>
+        <p:spPr>
+          <a:xfrm>
+            <a:off x="457200" y="3182112"/>
+            <a:ext cx="11292840" cy="804672"/>
+          </a:xfrm>
+          <a:prstGeom prst="roundRect">
+            <a:avLst/>
+          </a:prstGeom>
+          <a:solidFill>
+            <a:srgbClr val="FEF1E6"/>
+          </a:solidFill>
+          <a:ln w="12700">
+            <a:solidFill>
+              <a:srgbClr val="F27E2E"/>
+            </a:solidFill>
+          </a:ln>
+          <a:effectLst/>
+        </p:spPr>
+        <p:style>
+          <a:lnRef idx="1">
+            <a:schemeClr val="accent1"/>
+          </a:lnRef>
+          <a:fillRef idx="3">
+            <a:schemeClr val="accent1"/>
+          </a:fillRef>
+          <a:effectRef idx="2">
+            <a:schemeClr val="accent1"/>
+          </a:effectRef>
+          <a:fontRef idx="minor">
+            <a:schemeClr val="lt1"/>
+          </a:fontRef>
+        </p:style>
+        <p:txBody>
+          <a:bodyPr rtlCol="0" anchor="ctr"/>
+          <a:lstStyle/>
+          <a:p>
+            <a:pPr algn="ctr"/>
+          </a:p>
+        </p:txBody>
+      </p:sp>
+      <p:sp>
+        <p:nvSpPr>
+          <p:cNvPr id="15" name="Rectangle 14"/>
+          <p:cNvSpPr/>
+          <p:nvPr/>
+        </p:nvSpPr>
+        <p:spPr>
+          <a:xfrm>
+            <a:off x="457200" y="3182112"/>
+            <a:ext cx="76200" cy="804672"/>
+          </a:xfrm>
+          <a:prstGeom prst="rect">
+            <a:avLst/>
+          </a:prstGeom>
+          <a:solidFill>
+            <a:srgbClr val="F27E2E"/>
+          </a:solidFill>
+          <a:ln>
+            <a:noFill/>
+          </a:ln>
+          <a:effectLst/>
+        </p:spPr>
+        <p:style>
+          <a:lnRef idx="1">
+            <a:schemeClr val="accent1"/>
+          </a:lnRef>
+          <a:fillRef idx="3">
+            <a:schemeClr val="accent1"/>
+          </a:fillRef>
+          <a:effectRef idx="2">
+            <a:schemeClr val="accent1"/>
+          </a:effectRef>
+          <a:fontRef idx="minor">
+            <a:schemeClr val="lt1"/>
+          </a:fontRef>
+        </p:style>
+        <p:txBody>
+          <a:bodyPr rtlCol="0" anchor="ctr"/>
+          <a:lstStyle/>
+          <a:p>
+            <a:pPr algn="ctr"/>
+          </a:p>
+        </p:txBody>
+      </p:sp>
+      <p:sp>
+        <p:nvSpPr>
+          <p:cNvPr id="16" name="TextBox 15"/>
+          <p:cNvSpPr txBox="1"/>
+          <p:nvPr/>
+        </p:nvSpPr>
+        <p:spPr>
+          <a:xfrm>
+            <a:off x="658368" y="3273552"/>
+            <a:ext cx="2880360" cy="292608"/>
           </a:xfrm>
           <a:prstGeom prst="rect">
             <a:avLst/>
@@ -7633,27 +9229,69 @@
               </a:spcAft>
             </a:pPr>
             <a:r>
-              <a:rPr sz="1060" b="0">
-                <a:solidFill>
-                  <a:srgbClr val="444A55"/>
+              <a:rPr sz="1200" b="1">
+                <a:solidFill>
+                  <a:srgbClr val="142A4A"/>
                 </a:solidFill>
                 <a:latin typeface="Apple SD Gothic Neo"/>
               </a:rPr>
-              <a:t>외부 문서 검색, 외부 코드 저장소, 외부 분석 도구와 자동 연결이 어렵습니다. 예: AI가 스스로 최신 부품 예제나 외부 자료실을 찾아오지 못함.</a:t>
-            </a:r>
-          </a:p>
-        </p:txBody>
-      </p:sp>
-      <p:sp>
-        <p:nvSpPr>
-          <p:cNvPr id="12" name="Rounded Rectangle 11"/>
+              <a:t>OCR 성능 제한</a:t>
+            </a:r>
+          </a:p>
+        </p:txBody>
+      </p:sp>
+      <p:sp>
+        <p:nvSpPr>
+          <p:cNvPr id="17" name="TextBox 16"/>
+          <p:cNvSpPr txBox="1"/>
+          <p:nvPr/>
+        </p:nvSpPr>
+        <p:spPr>
+          <a:xfrm>
+            <a:off x="3611880" y="3273552"/>
+            <a:ext cx="8001000" cy="621792"/>
+          </a:xfrm>
+          <a:prstGeom prst="rect">
+            <a:avLst/>
+          </a:prstGeom>
+          <a:noFill/>
+        </p:spPr>
+        <p:txBody>
+          <a:bodyPr wrap="square" anchor="t" lIns="25400" rIns="25400" tIns="25400" bIns="25400">
+            <a:spAutoFit/>
+          </a:bodyPr>
+          <a:lstStyle/>
+          <a:p>
+            <a:pPr algn="l">
+              <a:lnSpc>
+                <a:spcPct val="105000"/>
+              </a:lnSpc>
+              <a:spcAft>
+                <a:spcPts val="400"/>
+              </a:spcAft>
+            </a:pPr>
+            <a:r>
+              <a:rPr sz="1080" b="0">
+                <a:solidFill>
+                  <a:srgbClr val="444A55"/>
+                </a:solidFill>
+                <a:latin typeface="Apple SD Gothic Neo"/>
+              </a:rPr>
+              <a:t>스캔 PDF·회로도 캡처·이미지 내 텍스트 인식 품질이 낮음. 도면·스캔 자료를 바로 구조화·분석하기 어려움.</a:t>
+            </a:r>
+          </a:p>
+        </p:txBody>
+      </p:sp>
+      <p:sp>
+        <p:nvSpPr>
+          <p:cNvPr id="18" name="Rounded Rectangle 17"/>
           <p:cNvSpPr/>
           <p:nvPr/>
         </p:nvSpPr>
         <p:spPr>
           <a:xfrm>
-            <a:off x="502920" y="2276856"/>
-            <a:ext cx="11201400" cy="749808"/>
+            <a:off x="457200" y="4078224"/>
+            <a:ext cx="11292840" cy="804672"/>
           </a:xfrm>
           <a:prstGeom prst="roundRect">
             <a:avLst/>
@@ -7661,7 +9299,7 @@
           <a:solidFill>
             <a:srgbClr val="FEF1E6"/>
           </a:solidFill>
-          <a:ln w="13970">
+          <a:ln w="12700">
             <a:solidFill>
               <a:srgbClr val="F27E2E"/>
             </a:solidFill>
@@ -7692,14 +9330,14 @@
       </p:sp>
       <p:sp>
         <p:nvSpPr>
-          <p:cNvPr id="13" name="Rectangle 12"/>
+          <p:cNvPr id="19" name="Rectangle 18"/>
           <p:cNvSpPr/>
           <p:nvPr/>
         </p:nvSpPr>
         <p:spPr>
           <a:xfrm>
-            <a:off x="502920" y="2276856"/>
-            <a:ext cx="76200" cy="749808"/>
+            <a:off x="457200" y="4078224"/>
+            <a:ext cx="76200" cy="804672"/>
           </a:xfrm>
           <a:prstGeom prst="rect">
             <a:avLst/>
@@ -7736,14 +9374,14 @@
       </p:sp>
       <p:sp>
         <p:nvSpPr>
-          <p:cNvPr id="14" name="TextBox 13"/>
+          <p:cNvPr id="20" name="TextBox 19"/>
           <p:cNvSpPr txBox="1"/>
           <p:nvPr/>
         </p:nvSpPr>
         <p:spPr>
           <a:xfrm>
-            <a:off x="731520" y="2340864"/>
-            <a:ext cx="2743200" cy="320040"/>
+            <a:off x="658368" y="4169664"/>
+            <a:ext cx="2880360" cy="292608"/>
           </a:xfrm>
           <a:prstGeom prst="rect">
             <a:avLst/>
@@ -7765,27 +9403,159 @@
               </a:spcAft>
             </a:pPr>
             <a:r>
-              <a:rPr sz="1220" b="1">
+              <a:rPr sz="1200" b="1">
                 <a:solidFill>
                   <a:srgbClr val="142A4A"/>
                 </a:solidFill>
                 <a:latin typeface="Apple SD Gothic Neo"/>
               </a:rPr>
-              <a:t>임베딩·청킹 특화 모델 제한</a:t>
-            </a:r>
-          </a:p>
-        </p:txBody>
-      </p:sp>
-      <p:sp>
-        <p:nvSpPr>
-          <p:cNvPr id="15" name="TextBox 14"/>
+              <a:t>Gauss API 호출 제한</a:t>
+            </a:r>
+          </a:p>
+        </p:txBody>
+      </p:sp>
+      <p:sp>
+        <p:nvSpPr>
+          <p:cNvPr id="21" name="TextBox 20"/>
           <p:cNvSpPr txBox="1"/>
           <p:nvPr/>
         </p:nvSpPr>
         <p:spPr>
           <a:xfrm>
-            <a:off x="3566160" y="2350008"/>
-            <a:ext cx="8229600" cy="548640"/>
+            <a:off x="3611880" y="4169664"/>
+            <a:ext cx="8001000" cy="621792"/>
+          </a:xfrm>
+          <a:prstGeom prst="rect">
+            <a:avLst/>
+          </a:prstGeom>
+          <a:noFill/>
+        </p:spPr>
+        <p:txBody>
+          <a:bodyPr wrap="square" anchor="t" lIns="25400" rIns="25400" tIns="25400" bIns="25400">
+            <a:spAutoFit/>
+          </a:bodyPr>
+          <a:lstStyle/>
+          <a:p>
+            <a:pPr algn="l">
+              <a:lnSpc>
+                <a:spcPct val="105000"/>
+              </a:lnSpc>
+              <a:spcAft>
+                <a:spcPts val="400"/>
+              </a:spcAft>
+            </a:pPr>
+            <a:r>
+              <a:rPr sz="1080" b="0">
+                <a:solidFill>
+                  <a:srgbClr val="444A55"/>
+                </a:solidFill>
+                <a:latin typeface="Apple SD Gothic Neo"/>
+              </a:rPr>
+              <a:t>분당 약 3~4회 호출 제한. Cline SR의 다단계·다회 수정 작업 시 대기 시간이 누적되어 작업 속도 저하.</a:t>
+            </a:r>
+          </a:p>
+        </p:txBody>
+      </p:sp>
+      <p:sp>
+        <p:nvSpPr>
+          <p:cNvPr id="22" name="Rounded Rectangle 21"/>
+          <p:cNvSpPr/>
+          <p:nvPr/>
+        </p:nvSpPr>
+        <p:spPr>
+          <a:xfrm>
+            <a:off x="457200" y="4974336"/>
+            <a:ext cx="11292840" cy="804672"/>
+          </a:xfrm>
+          <a:prstGeom prst="roundRect">
+            <a:avLst/>
+          </a:prstGeom>
+          <a:solidFill>
+            <a:srgbClr val="FEF1E6"/>
+          </a:solidFill>
+          <a:ln w="12700">
+            <a:solidFill>
+              <a:srgbClr val="F27E2E"/>
+            </a:solidFill>
+          </a:ln>
+          <a:effectLst/>
+        </p:spPr>
+        <p:style>
+          <a:lnRef idx="1">
+            <a:schemeClr val="accent1"/>
+          </a:lnRef>
+          <a:fillRef idx="3">
+            <a:schemeClr val="accent1"/>
+          </a:fillRef>
+          <a:effectRef idx="2">
+            <a:schemeClr val="accent1"/>
+          </a:effectRef>
+          <a:fontRef idx="minor">
+            <a:schemeClr val="lt1"/>
+          </a:fontRef>
+        </p:style>
+        <p:txBody>
+          <a:bodyPr rtlCol="0" anchor="ctr"/>
+          <a:lstStyle/>
+          <a:p>
+            <a:pPr algn="ctr"/>
+          </a:p>
+        </p:txBody>
+      </p:sp>
+      <p:sp>
+        <p:nvSpPr>
+          <p:cNvPr id="23" name="Rectangle 22"/>
+          <p:cNvSpPr/>
+          <p:nvPr/>
+        </p:nvSpPr>
+        <p:spPr>
+          <a:xfrm>
+            <a:off x="457200" y="4974336"/>
+            <a:ext cx="76200" cy="804672"/>
+          </a:xfrm>
+          <a:prstGeom prst="rect">
+            <a:avLst/>
+          </a:prstGeom>
+          <a:solidFill>
+            <a:srgbClr val="F27E2E"/>
+          </a:solidFill>
+          <a:ln>
+            <a:noFill/>
+          </a:ln>
+          <a:effectLst/>
+        </p:spPr>
+        <p:style>
+          <a:lnRef idx="1">
+            <a:schemeClr val="accent1"/>
+          </a:lnRef>
+          <a:fillRef idx="3">
+            <a:schemeClr val="accent1"/>
+          </a:fillRef>
+          <a:effectRef idx="2">
+            <a:schemeClr val="accent1"/>
+          </a:effectRef>
+          <a:fontRef idx="minor">
+            <a:schemeClr val="lt1"/>
+          </a:fontRef>
+        </p:style>
+        <p:txBody>
+          <a:bodyPr rtlCol="0" anchor="ctr"/>
+          <a:lstStyle/>
+          <a:p>
+            <a:pPr algn="ctr"/>
+          </a:p>
+        </p:txBody>
+      </p:sp>
+      <p:sp>
+        <p:nvSpPr>
+          <p:cNvPr id="24" name="TextBox 23"/>
+          <p:cNvSpPr txBox="1"/>
+          <p:nvPr/>
+        </p:nvSpPr>
+        <p:spPr>
+          <a:xfrm>
+            <a:off x="658368" y="5065776"/>
+            <a:ext cx="2880360" cy="292608"/>
           </a:xfrm>
           <a:prstGeom prst="rect">
             <a:avLst/>
@@ -7807,117 +9577,27 @@
               </a:spcAft>
             </a:pPr>
             <a:r>
-              <a:rPr sz="1060" b="0">
-                <a:solidFill>
-                  <a:srgbClr val="444A55"/>
+              <a:rPr sz="1200" b="1">
+                <a:solidFill>
+                  <a:srgbClr val="142A4A"/>
                 </a:solidFill>
                 <a:latin typeface="Apple SD Gothic Neo"/>
               </a:rPr>
-              <a:t>긴 데이터시트·회로 설명서를 잘게 나누고 의미별로 찾는 고급 문서 검색 품질이 제한됩니다. 예: 500페이지 사양서에서 필요한 설정값을 정확히 찾는 능력이 부족할 수 있음.</a:t>
-            </a:r>
-          </a:p>
-        </p:txBody>
-      </p:sp>
-      <p:sp>
-        <p:nvSpPr>
-          <p:cNvPr id="16" name="Rounded Rectangle 15"/>
-          <p:cNvSpPr/>
-          <p:nvPr/>
-        </p:nvSpPr>
-        <p:spPr>
-          <a:xfrm>
-            <a:off x="502920" y="3108960"/>
-            <a:ext cx="11201400" cy="749808"/>
-          </a:xfrm>
-          <a:prstGeom prst="roundRect">
-            <a:avLst/>
-          </a:prstGeom>
-          <a:solidFill>
-            <a:srgbClr val="FEF1E6"/>
-          </a:solidFill>
-          <a:ln w="13970">
-            <a:solidFill>
-              <a:srgbClr val="F27E2E"/>
-            </a:solidFill>
-          </a:ln>
-          <a:effectLst/>
-        </p:spPr>
-        <p:style>
-          <a:lnRef idx="1">
-            <a:schemeClr val="accent1"/>
-          </a:lnRef>
-          <a:fillRef idx="3">
-            <a:schemeClr val="accent1"/>
-          </a:fillRef>
-          <a:effectRef idx="2">
-            <a:schemeClr val="accent1"/>
-          </a:effectRef>
-          <a:fontRef idx="minor">
-            <a:schemeClr val="lt1"/>
-          </a:fontRef>
-        </p:style>
-        <p:txBody>
-          <a:bodyPr rtlCol="0" anchor="ctr"/>
-          <a:lstStyle/>
-          <a:p>
-            <a:pPr algn="ctr"/>
-          </a:p>
-        </p:txBody>
-      </p:sp>
-      <p:sp>
-        <p:nvSpPr>
-          <p:cNvPr id="17" name="Rectangle 16"/>
-          <p:cNvSpPr/>
-          <p:nvPr/>
-        </p:nvSpPr>
-        <p:spPr>
-          <a:xfrm>
-            <a:off x="502920" y="3108960"/>
-            <a:ext cx="76200" cy="749808"/>
-          </a:xfrm>
-          <a:prstGeom prst="rect">
-            <a:avLst/>
-          </a:prstGeom>
-          <a:solidFill>
-            <a:srgbClr val="F27E2E"/>
-          </a:solidFill>
-          <a:ln>
-            <a:noFill/>
-          </a:ln>
-          <a:effectLst/>
-        </p:spPr>
-        <p:style>
-          <a:lnRef idx="1">
-            <a:schemeClr val="accent1"/>
-          </a:lnRef>
-          <a:fillRef idx="3">
-            <a:schemeClr val="accent1"/>
-          </a:fillRef>
-          <a:effectRef idx="2">
-            <a:schemeClr val="accent1"/>
-          </a:effectRef>
-          <a:fontRef idx="minor">
-            <a:schemeClr val="lt1"/>
-          </a:fontRef>
-        </p:style>
-        <p:txBody>
-          <a:bodyPr rtlCol="0" anchor="ctr"/>
-          <a:lstStyle/>
-          <a:p>
-            <a:pPr algn="ctr"/>
-          </a:p>
-        </p:txBody>
-      </p:sp>
-      <p:sp>
-        <p:nvSpPr>
-          <p:cNvPr id="18" name="TextBox 17"/>
+              <a:t>Ollama 로컬 성능 제한</a:t>
+            </a:r>
+          </a:p>
+        </p:txBody>
+      </p:sp>
+      <p:sp>
+        <p:nvSpPr>
+          <p:cNvPr id="25" name="TextBox 24"/>
           <p:cNvSpPr txBox="1"/>
           <p:nvPr/>
         </p:nvSpPr>
         <p:spPr>
           <a:xfrm>
-            <a:off x="731520" y="3172968"/>
-            <a:ext cx="2743200" cy="320040"/>
+            <a:off x="3611880" y="5065776"/>
+            <a:ext cx="8001000" cy="621792"/>
           </a:xfrm>
           <a:prstGeom prst="rect">
             <a:avLst/>
@@ -7932,598 +9612,34 @@
           <a:p>
             <a:pPr algn="l">
               <a:lnSpc>
-                <a:spcPct val="100000"/>
+                <a:spcPct val="105000"/>
               </a:lnSpc>
               <a:spcAft>
                 <a:spcPts val="400"/>
               </a:spcAft>
             </a:pPr>
             <a:r>
-              <a:rPr sz="1220" b="1">
-                <a:solidFill>
-                  <a:srgbClr val="142A4A"/>
+              <a:rPr sz="1080" b="0">
+                <a:solidFill>
+                  <a:srgbClr val="444A55"/>
                 </a:solidFill>
                 <a:latin typeface="Apple SD Gothic Neo"/>
               </a:rPr>
-              <a:t>OCR 특화 도구 제한</a:t>
-            </a:r>
-          </a:p>
-        </p:txBody>
-      </p:sp>
-      <p:sp>
-        <p:nvSpPr>
-          <p:cNvPr id="19" name="TextBox 18"/>
-          <p:cNvSpPr txBox="1"/>
-          <p:nvPr/>
-        </p:nvSpPr>
-        <p:spPr>
-          <a:xfrm>
-            <a:off x="3566160" y="3182112"/>
-            <a:ext cx="8229600" cy="548640"/>
-          </a:xfrm>
-          <a:prstGeom prst="rect">
-            <a:avLst/>
-          </a:prstGeom>
-          <a:noFill/>
-        </p:spPr>
-        <p:txBody>
-          <a:bodyPr wrap="square" anchor="t" lIns="25400" rIns="25400" tIns="25400" bIns="25400">
-            <a:spAutoFit/>
-          </a:bodyPr>
-          <a:lstStyle/>
-          <a:p>
-            <a:pPr algn="l">
-              <a:lnSpc>
-                <a:spcPct val="100000"/>
-              </a:lnSpc>
-              <a:spcAft>
-                <a:spcPts val="400"/>
-              </a:spcAft>
-            </a:pPr>
-            <a:r>
-              <a:rPr sz="1060" b="0">
-                <a:solidFill>
-                  <a:srgbClr val="444A55"/>
-                </a:solidFill>
-                <a:latin typeface="Apple SD Gothic Neo"/>
-              </a:rPr>
-              <a:t>이미지, 스캔 PDF, 회로도 캡처 속 글자를 읽는 성능이 제한됩니다. 예: 캡처된 회로도나 스캔 데이터시트를 바로 읽어 정리하기 어려움.</a:t>
-            </a:r>
-          </a:p>
-        </p:txBody>
-      </p:sp>
-      <p:sp>
-        <p:nvSpPr>
-          <p:cNvPr id="20" name="Rounded Rectangle 19"/>
+              <a:t>개인 PC에 GPU가 없으면 응답·추론 속도가 현저히 느림. 대용량 코드·장문 분석은 실무 적용이 어려움.</a:t>
+            </a:r>
+          </a:p>
+        </p:txBody>
+      </p:sp>
+      <p:sp>
+        <p:nvSpPr>
+          <p:cNvPr id="26" name="Rounded Rectangle 25"/>
           <p:cNvSpPr/>
           <p:nvPr/>
         </p:nvSpPr>
         <p:spPr>
           <a:xfrm>
-            <a:off x="502920" y="3941064"/>
-            <a:ext cx="11201400" cy="749808"/>
-          </a:xfrm>
-          <a:prstGeom prst="roundRect">
-            <a:avLst/>
-          </a:prstGeom>
-          <a:solidFill>
-            <a:srgbClr val="FEF1E6"/>
-          </a:solidFill>
-          <a:ln w="13970">
-            <a:solidFill>
-              <a:srgbClr val="F27E2E"/>
-            </a:solidFill>
-          </a:ln>
-          <a:effectLst/>
-        </p:spPr>
-        <p:style>
-          <a:lnRef idx="1">
-            <a:schemeClr val="accent1"/>
-          </a:lnRef>
-          <a:fillRef idx="3">
-            <a:schemeClr val="accent1"/>
-          </a:fillRef>
-          <a:effectRef idx="2">
-            <a:schemeClr val="accent1"/>
-          </a:effectRef>
-          <a:fontRef idx="minor">
-            <a:schemeClr val="lt1"/>
-          </a:fontRef>
-        </p:style>
-        <p:txBody>
-          <a:bodyPr rtlCol="0" anchor="ctr"/>
-          <a:lstStyle/>
-          <a:p>
-            <a:pPr algn="ctr"/>
-          </a:p>
-        </p:txBody>
-      </p:sp>
-      <p:sp>
-        <p:nvSpPr>
-          <p:cNvPr id="21" name="Rectangle 20"/>
-          <p:cNvSpPr/>
-          <p:nvPr/>
-        </p:nvSpPr>
-        <p:spPr>
-          <a:xfrm>
-            <a:off x="502920" y="3941064"/>
-            <a:ext cx="76200" cy="749808"/>
-          </a:xfrm>
-          <a:prstGeom prst="rect">
-            <a:avLst/>
-          </a:prstGeom>
-          <a:solidFill>
-            <a:srgbClr val="F27E2E"/>
-          </a:solidFill>
-          <a:ln>
-            <a:noFill/>
-          </a:ln>
-          <a:effectLst/>
-        </p:spPr>
-        <p:style>
-          <a:lnRef idx="1">
-            <a:schemeClr val="accent1"/>
-          </a:lnRef>
-          <a:fillRef idx="3">
-            <a:schemeClr val="accent1"/>
-          </a:fillRef>
-          <a:effectRef idx="2">
-            <a:schemeClr val="accent1"/>
-          </a:effectRef>
-          <a:fontRef idx="minor">
-            <a:schemeClr val="lt1"/>
-          </a:fontRef>
-        </p:style>
-        <p:txBody>
-          <a:bodyPr rtlCol="0" anchor="ctr"/>
-          <a:lstStyle/>
-          <a:p>
-            <a:pPr algn="ctr"/>
-          </a:p>
-        </p:txBody>
-      </p:sp>
-      <p:sp>
-        <p:nvSpPr>
-          <p:cNvPr id="22" name="TextBox 21"/>
-          <p:cNvSpPr txBox="1"/>
-          <p:nvPr/>
-        </p:nvSpPr>
-        <p:spPr>
-          <a:xfrm>
-            <a:off x="731520" y="4005072"/>
-            <a:ext cx="2743200" cy="320040"/>
-          </a:xfrm>
-          <a:prstGeom prst="rect">
-            <a:avLst/>
-          </a:prstGeom>
-          <a:noFill/>
-        </p:spPr>
-        <p:txBody>
-          <a:bodyPr wrap="square" anchor="t" lIns="25400" rIns="25400" tIns="25400" bIns="25400">
-            <a:spAutoFit/>
-          </a:bodyPr>
-          <a:lstStyle/>
-          <a:p>
-            <a:pPr algn="l">
-              <a:lnSpc>
-                <a:spcPct val="100000"/>
-              </a:lnSpc>
-              <a:spcAft>
-                <a:spcPts val="400"/>
-              </a:spcAft>
-            </a:pPr>
-            <a:r>
-              <a:rPr sz="1220" b="1">
-                <a:solidFill>
-                  <a:srgbClr val="142A4A"/>
-                </a:solidFill>
-                <a:latin typeface="Apple SD Gothic Neo"/>
-              </a:rPr>
-              <a:t>Gauss API 호출 제한</a:t>
-            </a:r>
-          </a:p>
-        </p:txBody>
-      </p:sp>
-      <p:sp>
-        <p:nvSpPr>
-          <p:cNvPr id="23" name="TextBox 22"/>
-          <p:cNvSpPr txBox="1"/>
-          <p:nvPr/>
-        </p:nvSpPr>
-        <p:spPr>
-          <a:xfrm>
-            <a:off x="3566160" y="4014216"/>
-            <a:ext cx="8229600" cy="548640"/>
-          </a:xfrm>
-          <a:prstGeom prst="rect">
-            <a:avLst/>
-          </a:prstGeom>
-          <a:noFill/>
-        </p:spPr>
-        <p:txBody>
-          <a:bodyPr wrap="square" anchor="t" lIns="25400" rIns="25400" tIns="25400" bIns="25400">
-            <a:spAutoFit/>
-          </a:bodyPr>
-          <a:lstStyle/>
-          <a:p>
-            <a:pPr algn="l">
-              <a:lnSpc>
-                <a:spcPct val="100000"/>
-              </a:lnSpc>
-              <a:spcAft>
-                <a:spcPts val="400"/>
-              </a:spcAft>
-            </a:pPr>
-            <a:r>
-              <a:rPr sz="1060" b="0">
-                <a:solidFill>
-                  <a:srgbClr val="444A55"/>
-                </a:solidFill>
-                <a:latin typeface="Apple SD Gothic Neo"/>
-              </a:rPr>
-              <a:t>분당 약 3~4회만 AI를 부를 수 있어 Cline SR이 여러 번 생각하고 수정하는 긴 작업에서 속도가 느려집니다.</a:t>
-            </a:r>
-          </a:p>
-        </p:txBody>
-      </p:sp>
-      <p:sp>
-        <p:nvSpPr>
-          <p:cNvPr id="24" name="Rounded Rectangle 23"/>
-          <p:cNvSpPr/>
-          <p:nvPr/>
-        </p:nvSpPr>
-        <p:spPr>
-          <a:xfrm>
-            <a:off x="502920" y="4773168"/>
-            <a:ext cx="11201400" cy="749808"/>
-          </a:xfrm>
-          <a:prstGeom prst="roundRect">
-            <a:avLst/>
-          </a:prstGeom>
-          <a:solidFill>
-            <a:srgbClr val="E8F1FA"/>
-          </a:solidFill>
-          <a:ln w="13970">
-            <a:solidFill>
-              <a:srgbClr val="D5DDE6"/>
-            </a:solidFill>
-          </a:ln>
-          <a:effectLst/>
-        </p:spPr>
-        <p:style>
-          <a:lnRef idx="1">
-            <a:schemeClr val="accent1"/>
-          </a:lnRef>
-          <a:fillRef idx="3">
-            <a:schemeClr val="accent1"/>
-          </a:fillRef>
-          <a:effectRef idx="2">
-            <a:schemeClr val="accent1"/>
-          </a:effectRef>
-          <a:fontRef idx="minor">
-            <a:schemeClr val="lt1"/>
-          </a:fontRef>
-        </p:style>
-        <p:txBody>
-          <a:bodyPr rtlCol="0" anchor="ctr"/>
-          <a:lstStyle/>
-          <a:p>
-            <a:pPr algn="ctr"/>
-          </a:p>
-        </p:txBody>
-      </p:sp>
-      <p:sp>
-        <p:nvSpPr>
-          <p:cNvPr id="25" name="Rectangle 24"/>
-          <p:cNvSpPr/>
-          <p:nvPr/>
-        </p:nvSpPr>
-        <p:spPr>
-          <a:xfrm>
-            <a:off x="502920" y="4773168"/>
-            <a:ext cx="76200" cy="749808"/>
-          </a:xfrm>
-          <a:prstGeom prst="rect">
-            <a:avLst/>
-          </a:prstGeom>
-          <a:solidFill>
-            <a:srgbClr val="1F6FB2"/>
-          </a:solidFill>
-          <a:ln>
-            <a:noFill/>
-          </a:ln>
-          <a:effectLst/>
-        </p:spPr>
-        <p:style>
-          <a:lnRef idx="1">
-            <a:schemeClr val="accent1"/>
-          </a:lnRef>
-          <a:fillRef idx="3">
-            <a:schemeClr val="accent1"/>
-          </a:fillRef>
-          <a:effectRef idx="2">
-            <a:schemeClr val="accent1"/>
-          </a:effectRef>
-          <a:fontRef idx="minor">
-            <a:schemeClr val="lt1"/>
-          </a:fontRef>
-        </p:style>
-        <p:txBody>
-          <a:bodyPr rtlCol="0" anchor="ctr"/>
-          <a:lstStyle/>
-          <a:p>
-            <a:pPr algn="ctr"/>
-          </a:p>
-        </p:txBody>
-      </p:sp>
-      <p:sp>
-        <p:nvSpPr>
-          <p:cNvPr id="26" name="TextBox 25"/>
-          <p:cNvSpPr txBox="1"/>
-          <p:nvPr/>
-        </p:nvSpPr>
-        <p:spPr>
-          <a:xfrm>
-            <a:off x="731520" y="4837176"/>
-            <a:ext cx="2743200" cy="320040"/>
-          </a:xfrm>
-          <a:prstGeom prst="rect">
-            <a:avLst/>
-          </a:prstGeom>
-          <a:noFill/>
-        </p:spPr>
-        <p:txBody>
-          <a:bodyPr wrap="square" anchor="t" lIns="25400" rIns="25400" tIns="25400" bIns="25400">
-            <a:spAutoFit/>
-          </a:bodyPr>
-          <a:lstStyle/>
-          <a:p>
-            <a:pPr algn="l">
-              <a:lnSpc>
-                <a:spcPct val="100000"/>
-              </a:lnSpc>
-              <a:spcAft>
-                <a:spcPts val="400"/>
-              </a:spcAft>
-            </a:pPr>
-            <a:r>
-              <a:rPr sz="1220" b="1">
-                <a:solidFill>
-                  <a:srgbClr val="142A4A"/>
-                </a:solidFill>
-                <a:latin typeface="Apple SD Gothic Neo"/>
-              </a:rPr>
-              <a:t>최신 정보 접근 제한</a:t>
-            </a:r>
-          </a:p>
-        </p:txBody>
-      </p:sp>
-      <p:sp>
-        <p:nvSpPr>
-          <p:cNvPr id="27" name="TextBox 26"/>
-          <p:cNvSpPr txBox="1"/>
-          <p:nvPr/>
-        </p:nvSpPr>
-        <p:spPr>
-          <a:xfrm>
-            <a:off x="3566160" y="4846320"/>
-            <a:ext cx="8229600" cy="548640"/>
-          </a:xfrm>
-          <a:prstGeom prst="rect">
-            <a:avLst/>
-          </a:prstGeom>
-          <a:noFill/>
-        </p:spPr>
-        <p:txBody>
-          <a:bodyPr wrap="square" anchor="t" lIns="25400" rIns="25400" tIns="25400" bIns="25400">
-            <a:spAutoFit/>
-          </a:bodyPr>
-          <a:lstStyle/>
-          <a:p>
-            <a:pPr algn="l">
-              <a:lnSpc>
-                <a:spcPct val="100000"/>
-              </a:lnSpc>
-              <a:spcAft>
-                <a:spcPts val="400"/>
-              </a:spcAft>
-            </a:pPr>
-            <a:r>
-              <a:rPr sz="1060" b="0">
-                <a:solidFill>
-                  <a:srgbClr val="444A55"/>
-                </a:solidFill>
-                <a:latin typeface="Apple SD Gothic Neo"/>
-              </a:rPr>
-              <a:t>외부 인터넷 검색이나 최신 예제 확인이 어렵습니다. 예: 새 부품의 공개 자료나 최신 오픈소스 예제를 바로 참고하기 어려움.</a:t>
-            </a:r>
-          </a:p>
-        </p:txBody>
-      </p:sp>
-      <p:sp>
-        <p:nvSpPr>
-          <p:cNvPr id="28" name="Rounded Rectangle 27"/>
-          <p:cNvSpPr/>
-          <p:nvPr/>
-        </p:nvSpPr>
-        <p:spPr>
-          <a:xfrm>
-            <a:off x="502920" y="5605272"/>
-            <a:ext cx="11201400" cy="749808"/>
-          </a:xfrm>
-          <a:prstGeom prst="roundRect">
-            <a:avLst/>
-          </a:prstGeom>
-          <a:solidFill>
-            <a:srgbClr val="E8F1FA"/>
-          </a:solidFill>
-          <a:ln w="13970">
-            <a:solidFill>
-              <a:srgbClr val="D5DDE6"/>
-            </a:solidFill>
-          </a:ln>
-          <a:effectLst/>
-        </p:spPr>
-        <p:style>
-          <a:lnRef idx="1">
-            <a:schemeClr val="accent1"/>
-          </a:lnRef>
-          <a:fillRef idx="3">
-            <a:schemeClr val="accent1"/>
-          </a:fillRef>
-          <a:effectRef idx="2">
-            <a:schemeClr val="accent1"/>
-          </a:effectRef>
-          <a:fontRef idx="minor">
-            <a:schemeClr val="lt1"/>
-          </a:fontRef>
-        </p:style>
-        <p:txBody>
-          <a:bodyPr rtlCol="0" anchor="ctr"/>
-          <a:lstStyle/>
-          <a:p>
-            <a:pPr algn="ctr"/>
-          </a:p>
-        </p:txBody>
-      </p:sp>
-      <p:sp>
-        <p:nvSpPr>
-          <p:cNvPr id="29" name="Rectangle 28"/>
-          <p:cNvSpPr/>
-          <p:nvPr/>
-        </p:nvSpPr>
-        <p:spPr>
-          <a:xfrm>
-            <a:off x="502920" y="5605272"/>
-            <a:ext cx="76200" cy="749808"/>
-          </a:xfrm>
-          <a:prstGeom prst="rect">
-            <a:avLst/>
-          </a:prstGeom>
-          <a:solidFill>
-            <a:srgbClr val="1F6FB2"/>
-          </a:solidFill>
-          <a:ln>
-            <a:noFill/>
-          </a:ln>
-          <a:effectLst/>
-        </p:spPr>
-        <p:style>
-          <a:lnRef idx="1">
-            <a:schemeClr val="accent1"/>
-          </a:lnRef>
-          <a:fillRef idx="3">
-            <a:schemeClr val="accent1"/>
-          </a:fillRef>
-          <a:effectRef idx="2">
-            <a:schemeClr val="accent1"/>
-          </a:effectRef>
-          <a:fontRef idx="minor">
-            <a:schemeClr val="lt1"/>
-          </a:fontRef>
-        </p:style>
-        <p:txBody>
-          <a:bodyPr rtlCol="0" anchor="ctr"/>
-          <a:lstStyle/>
-          <a:p>
-            <a:pPr algn="ctr"/>
-          </a:p>
-        </p:txBody>
-      </p:sp>
-      <p:sp>
-        <p:nvSpPr>
-          <p:cNvPr id="30" name="TextBox 29"/>
-          <p:cNvSpPr txBox="1"/>
-          <p:nvPr/>
-        </p:nvSpPr>
-        <p:spPr>
-          <a:xfrm>
-            <a:off x="731520" y="5669280"/>
-            <a:ext cx="2743200" cy="320040"/>
-          </a:xfrm>
-          <a:prstGeom prst="rect">
-            <a:avLst/>
-          </a:prstGeom>
-          <a:noFill/>
-        </p:spPr>
-        <p:txBody>
-          <a:bodyPr wrap="square" anchor="t" lIns="25400" rIns="25400" tIns="25400" bIns="25400">
-            <a:spAutoFit/>
-          </a:bodyPr>
-          <a:lstStyle/>
-          <a:p>
-            <a:pPr algn="l">
-              <a:lnSpc>
-                <a:spcPct val="100000"/>
-              </a:lnSpc>
-              <a:spcAft>
-                <a:spcPts val="400"/>
-              </a:spcAft>
-            </a:pPr>
-            <a:r>
-              <a:rPr sz="1220" b="1">
-                <a:solidFill>
-                  <a:srgbClr val="142A4A"/>
-                </a:solidFill>
-                <a:latin typeface="Apple SD Gothic Neo"/>
-              </a:rPr>
-              <a:t>AI 결과 검증 필요</a:t>
-            </a:r>
-          </a:p>
-        </p:txBody>
-      </p:sp>
-      <p:sp>
-        <p:nvSpPr>
-          <p:cNvPr id="31" name="TextBox 30"/>
-          <p:cNvSpPr txBox="1"/>
-          <p:nvPr/>
-        </p:nvSpPr>
-        <p:spPr>
-          <a:xfrm>
-            <a:off x="3566160" y="5678424"/>
-            <a:ext cx="8229600" cy="548640"/>
-          </a:xfrm>
-          <a:prstGeom prst="rect">
-            <a:avLst/>
-          </a:prstGeom>
-          <a:noFill/>
-        </p:spPr>
-        <p:txBody>
-          <a:bodyPr wrap="square" anchor="t" lIns="25400" rIns="25400" tIns="25400" bIns="25400">
-            <a:spAutoFit/>
-          </a:bodyPr>
-          <a:lstStyle/>
-          <a:p>
-            <a:pPr algn="l">
-              <a:lnSpc>
-                <a:spcPct val="100000"/>
-              </a:lnSpc>
-              <a:spcAft>
-                <a:spcPts val="400"/>
-              </a:spcAft>
-            </a:pPr>
-            <a:r>
-              <a:rPr sz="1060" b="0">
-                <a:solidFill>
-                  <a:srgbClr val="444A55"/>
-                </a:solidFill>
-                <a:latin typeface="Apple SD Gothic Neo"/>
-              </a:rPr>
-              <a:t>그럴듯하지만 틀린 답을 줄 수 있습니다. 예: 전원 시퀀스나 타이밍 조건은 반드시 개발자가 데이터시트와 실측으로 확인해야 함.</a:t>
-            </a:r>
-          </a:p>
-        </p:txBody>
-      </p:sp>
-      <p:sp>
-        <p:nvSpPr>
-          <p:cNvPr id="32" name="Rounded Rectangle 31"/>
-          <p:cNvSpPr/>
-          <p:nvPr/>
-        </p:nvSpPr>
-        <p:spPr>
-          <a:xfrm>
-            <a:off x="502920" y="6245352"/>
-            <a:ext cx="11201400" cy="384048"/>
+            <a:off x="457200" y="6144768"/>
+            <a:ext cx="11292840" cy="438912"/>
           </a:xfrm>
           <a:prstGeom prst="roundRect">
             <a:avLst/>
@@ -8560,14 +9676,14 @@
       </p:sp>
       <p:sp>
         <p:nvSpPr>
-          <p:cNvPr id="33" name="TextBox 32"/>
+          <p:cNvPr id="27" name="TextBox 26"/>
           <p:cNvSpPr txBox="1"/>
           <p:nvPr/>
         </p:nvSpPr>
         <p:spPr>
           <a:xfrm>
-            <a:off x="502920" y="6245352"/>
-            <a:ext cx="11201400" cy="384048"/>
+            <a:off x="457200" y="6144768"/>
+            <a:ext cx="11292840" cy="438912"/>
           </a:xfrm>
           <a:prstGeom prst="rect">
             <a:avLst/>
@@ -8589,20 +9705,20 @@
               </a:spcAft>
             </a:pPr>
             <a:r>
-              <a:rPr sz="1170" b="1">
+              <a:rPr sz="1120" b="1">
                 <a:solidFill>
                   <a:srgbClr val="FFFFFF"/>
                 </a:solidFill>
                 <a:latin typeface="Apple SD Gothic Neo"/>
               </a:rPr>
-              <a:t>핵심: 현재 조건에서는 '보안이 필요한 사내 보조 도구'로는 유용하지만, 외부 도구까지 연결된 완전 자동 개발 도우미는 아닙니다.</a:t>
-            </a:r>
-          </a:p>
-        </p:txBody>
-      </p:sp>
-      <p:sp>
-        <p:nvSpPr>
-          <p:cNvPr id="34" name="TextBox 33"/>
+              <a:t>핵심: 보안·망분리 환경에서는 유용하나, 외부 연동·고급 문서/OCR·고속 대량 호출은 현재 구조상 제약</a:t>
+            </a:r>
+          </a:p>
+        </p:txBody>
+      </p:sp>
+      <p:sp>
+        <p:nvSpPr>
+          <p:cNvPr id="28" name="TextBox 27"/>
           <p:cNvSpPr txBox="1"/>
           <p:nvPr/>
         </p:nvSpPr>
@@ -8793,7 +9909,7 @@
                 </a:solidFill>
                 <a:latin typeface="Apple SD Gothic Neo"/>
               </a:rPr>
-              <a:t>삼성전자 스마트폰 HW 개발팀 AI 활용 방안  (4/4)</a:t>
+              <a:t>NC HW 개발팀  |  사내 AI 환경 (VS Code · Cline SR · Gauss · Ollama · GitHub Enterprise)  (4/4)</a:t>
             </a:r>
           </a:p>
         </p:txBody>
@@ -8835,7 +9951,7 @@
                 </a:solidFill>
                 <a:latin typeface="Apple SD Gothic Neo"/>
               </a:rPr>
-              <a:t>결론 및 제언</a:t>
+              <a:t>사내 AI 환경 vs 외부 도구 — 대조 및 결론</a:t>
             </a:r>
           </a:p>
         </p:txBody>
@@ -8848,16 +9964,16 @@
         </p:nvSpPr>
         <p:spPr>
           <a:xfrm>
-            <a:off x="594360" y="1325880"/>
-            <a:ext cx="3611880" cy="3291840"/>
+            <a:off x="457200" y="1234440"/>
+            <a:ext cx="5532120" cy="4434840"/>
           </a:xfrm>
           <a:prstGeom prst="roundRect">
             <a:avLst/>
           </a:prstGeom>
           <a:solidFill>
-            <a:srgbClr val="FFFFFF"/>
+            <a:srgbClr val="E8F1FA"/>
           </a:solidFill>
-          <a:ln w="22860">
+          <a:ln w="25400">
             <a:solidFill>
               <a:srgbClr val="1F6FB2"/>
             </a:solidFill>
@@ -8894,8 +10010,8 @@
         </p:nvSpPr>
         <p:spPr>
           <a:xfrm>
-            <a:off x="594360" y="1325880"/>
-            <a:ext cx="3611880" cy="566928"/>
+            <a:off x="457200" y="1234440"/>
+            <a:ext cx="5532120" cy="457200"/>
           </a:xfrm>
           <a:prstGeom prst="roundRect">
             <a:avLst/>
@@ -8938,8 +10054,8 @@
         </p:nvSpPr>
         <p:spPr>
           <a:xfrm>
-            <a:off x="594360" y="1325880"/>
-            <a:ext cx="3611880" cy="566928"/>
+            <a:off x="457200" y="1234440"/>
+            <a:ext cx="5532120" cy="457200"/>
           </a:xfrm>
           <a:prstGeom prst="rect">
             <a:avLst/>
@@ -8961,13 +10077,13 @@
               </a:spcAft>
             </a:pPr>
             <a:r>
-              <a:rPr sz="1500" b="1">
+              <a:rPr sz="1400" b="1">
                 <a:solidFill>
                   <a:srgbClr val="FFFFFF"/>
                 </a:solidFill>
                 <a:latin typeface="Apple SD Gothic Neo"/>
               </a:rPr>
-              <a:t>당장 적용 가능</a:t>
+              <a:t>현재 사내 환경 (가능)</a:t>
             </a:r>
           </a:p>
         </p:txBody>
@@ -8980,8 +10096,8 @@
         </p:nvSpPr>
         <p:spPr>
           <a:xfrm>
-            <a:off x="850392" y="2148840"/>
-            <a:ext cx="3154680" cy="292608"/>
+            <a:off x="685800" y="1801368"/>
+            <a:ext cx="5120640" cy="347472"/>
           </a:xfrm>
           <a:prstGeom prst="rect">
             <a:avLst/>
@@ -9003,13 +10119,13 @@
               </a:spcAft>
             </a:pPr>
             <a:r>
-              <a:rPr sz="1170" b="0">
+              <a:rPr sz="1120" b="0">
                 <a:solidFill>
                   <a:srgbClr val="444A55"/>
                 </a:solidFill>
                 <a:latin typeface="Apple SD Gothic Neo"/>
               </a:rPr>
-              <a:t>- 코드 초안 작성</a:t>
+              <a:t>✓ 펌웨어·드라이버·HAL 코드 초안·수정</a:t>
             </a:r>
           </a:p>
         </p:txBody>
@@ -9022,8 +10138,8 @@
         </p:nvSpPr>
         <p:spPr>
           <a:xfrm>
-            <a:off x="850392" y="2587752"/>
-            <a:ext cx="3154680" cy="292608"/>
+            <a:off x="685800" y="2276856"/>
+            <a:ext cx="5120640" cy="347472"/>
           </a:xfrm>
           <a:prstGeom prst="rect">
             <a:avLst/>
@@ -9045,13 +10161,13 @@
               </a:spcAft>
             </a:pPr>
             <a:r>
-              <a:rPr sz="1170" b="0">
+              <a:rPr sz="1120" b="0">
                 <a:solidFill>
                   <a:srgbClr val="444A55"/>
                 </a:solidFill>
                 <a:latin typeface="Apple SD Gothic Neo"/>
               </a:rPr>
-              <a:t>- 문서 초안 작성</a:t>
+              <a:t>✓ 측정·검증 Python 스크립트 자동화</a:t>
             </a:r>
           </a:p>
         </p:txBody>
@@ -9064,8 +10180,8 @@
         </p:nvSpPr>
         <p:spPr>
           <a:xfrm>
-            <a:off x="850392" y="3026664"/>
-            <a:ext cx="3154680" cy="292608"/>
+            <a:off x="685800" y="2752344"/>
+            <a:ext cx="5120640" cy="347472"/>
           </a:xfrm>
           <a:prstGeom prst="rect">
             <a:avLst/>
@@ -9087,13 +10203,13 @@
               </a:spcAft>
             </a:pPr>
             <a:r>
-              <a:rPr sz="1170" b="0">
+              <a:rPr sz="1120" b="0">
                 <a:solidFill>
                   <a:srgbClr val="444A55"/>
                 </a:solidFill>
                 <a:latin typeface="Apple SD Gothic Neo"/>
               </a:rPr>
-              <a:t>- 측정 데이터 정리</a:t>
+              <a:t>✓ 로그·측정 데이터 파싱·표·요약</a:t>
             </a:r>
           </a:p>
         </p:txBody>
@@ -9106,8 +10222,8 @@
         </p:nvSpPr>
         <p:spPr>
           <a:xfrm>
-            <a:off x="850392" y="3465576"/>
-            <a:ext cx="3154680" cy="292608"/>
+            <a:off x="685800" y="3227832"/>
+            <a:ext cx="5120640" cy="347472"/>
           </a:xfrm>
           <a:prstGeom prst="rect">
             <a:avLst/>
@@ -9129,13 +10245,13 @@
               </a:spcAft>
             </a:pPr>
             <a:r>
-              <a:rPr sz="1170" b="0">
+              <a:rPr sz="1120" b="0">
                 <a:solidFill>
                   <a:srgbClr val="444A55"/>
                 </a:solidFill>
                 <a:latin typeface="Apple SD Gothic Neo"/>
               </a:rPr>
-              <a:t>- 로그 분석</a:t>
+              <a:t>✓ 시험·이슈·회의 문서 초안</a:t>
             </a:r>
           </a:p>
         </p:txBody>
@@ -9148,8 +10264,8 @@
         </p:nvSpPr>
         <p:spPr>
           <a:xfrm>
-            <a:off x="850392" y="3904488"/>
-            <a:ext cx="3154680" cy="292608"/>
+            <a:off x="685800" y="3703320"/>
+            <a:ext cx="5120640" cy="347472"/>
           </a:xfrm>
           <a:prstGeom prst="rect">
             <a:avLst/>
@@ -9171,37 +10287,121 @@
               </a:spcAft>
             </a:pPr>
             <a:r>
-              <a:rPr sz="1170" b="0">
+              <a:rPr sz="1120" b="0">
                 <a:solidFill>
                   <a:srgbClr val="444A55"/>
                 </a:solidFill>
                 <a:latin typeface="Apple SD Gothic Neo"/>
               </a:rPr>
-              <a:t>- 반복 업무 자동화</a:t>
-            </a:r>
-          </a:p>
-        </p:txBody>
-      </p:sp>
-      <p:sp>
-        <p:nvSpPr>
-          <p:cNvPr id="14" name="Rounded Rectangle 13"/>
+              <a:t>✓ 사내 코드·GitHub Enterprise 기반 리뷰</a:t>
+            </a:r>
+          </a:p>
+        </p:txBody>
+      </p:sp>
+      <p:sp>
+        <p:nvSpPr>
+          <p:cNvPr id="14" name="TextBox 13"/>
+          <p:cNvSpPr txBox="1"/>
+          <p:nvPr/>
+        </p:nvSpPr>
+        <p:spPr>
+          <a:xfrm>
+            <a:off x="685800" y="4178808"/>
+            <a:ext cx="5120640" cy="347472"/>
+          </a:xfrm>
+          <a:prstGeom prst="rect">
+            <a:avLst/>
+          </a:prstGeom>
+          <a:noFill/>
+        </p:spPr>
+        <p:txBody>
+          <a:bodyPr wrap="square" anchor="t" lIns="25400" rIns="25400" tIns="25400" bIns="25400">
+            <a:spAutoFit/>
+          </a:bodyPr>
+          <a:lstStyle/>
+          <a:p>
+            <a:pPr algn="l">
+              <a:lnSpc>
+                <a:spcPct val="100000"/>
+              </a:lnSpc>
+              <a:spcAft>
+                <a:spcPts val="400"/>
+              </a:spcAft>
+            </a:pPr>
+            <a:r>
+              <a:rPr sz="1120" b="0">
+                <a:solidFill>
+                  <a:srgbClr val="444A55"/>
+                </a:solidFill>
+                <a:latin typeface="Apple SD Gothic Neo"/>
+              </a:rPr>
+              <a:t>✓ 망분리·로컬(Ollama) 고민감 자료 처리</a:t>
+            </a:r>
+          </a:p>
+        </p:txBody>
+      </p:sp>
+      <p:sp>
+        <p:nvSpPr>
+          <p:cNvPr id="15" name="TextBox 14"/>
+          <p:cNvSpPr txBox="1"/>
+          <p:nvPr/>
+        </p:nvSpPr>
+        <p:spPr>
+          <a:xfrm>
+            <a:off x="685800" y="4654296"/>
+            <a:ext cx="5120640" cy="347472"/>
+          </a:xfrm>
+          <a:prstGeom prst="rect">
+            <a:avLst/>
+          </a:prstGeom>
+          <a:noFill/>
+        </p:spPr>
+        <p:txBody>
+          <a:bodyPr wrap="square" anchor="t" lIns="25400" rIns="25400" tIns="25400" bIns="25400">
+            <a:spAutoFit/>
+          </a:bodyPr>
+          <a:lstStyle/>
+          <a:p>
+            <a:pPr algn="l">
+              <a:lnSpc>
+                <a:spcPct val="100000"/>
+              </a:lnSpc>
+              <a:spcAft>
+                <a:spcPts val="400"/>
+              </a:spcAft>
+            </a:pPr>
+            <a:r>
+              <a:rPr sz="1120" b="0">
+                <a:solidFill>
+                  <a:srgbClr val="444A55"/>
+                </a:solidFill>
+                <a:latin typeface="Apple SD Gothic Neo"/>
+              </a:rPr>
+              <a:t>✓ Gauss·Cline SR 기반 다단계 코드 작업 (호출 한도 내)</a:t>
+            </a:r>
+          </a:p>
+        </p:txBody>
+      </p:sp>
+      <p:sp>
+        <p:nvSpPr>
+          <p:cNvPr id="16" name="Rounded Rectangle 15"/>
           <p:cNvSpPr/>
           <p:nvPr/>
         </p:nvSpPr>
         <p:spPr>
           <a:xfrm>
-            <a:off x="4434840" y="1325880"/>
-            <a:ext cx="3611880" cy="3291840"/>
+            <a:off x="6172200" y="1234440"/>
+            <a:ext cx="5532120" cy="4434840"/>
           </a:xfrm>
           <a:prstGeom prst="roundRect">
             <a:avLst/>
           </a:prstGeom>
           <a:solidFill>
-            <a:srgbClr val="FFFFFF"/>
+            <a:srgbClr val="FEF1E6"/>
           </a:solidFill>
-          <a:ln w="22860">
+          <a:ln w="25400">
             <a:solidFill>
-              <a:srgbClr val="F27E2E"/>
+              <a:srgbClr val="C0392B"/>
             </a:solidFill>
           </a:ln>
           <a:effectLst/>
@@ -9230,20 +10430,20 @@
       </p:sp>
       <p:sp>
         <p:nvSpPr>
-          <p:cNvPr id="15" name="Rounded Rectangle 14"/>
+          <p:cNvPr id="17" name="Rounded Rectangle 16"/>
           <p:cNvSpPr/>
           <p:nvPr/>
         </p:nvSpPr>
         <p:spPr>
           <a:xfrm>
-            <a:off x="4434840" y="1325880"/>
-            <a:ext cx="3611880" cy="566928"/>
+            <a:off x="6172200" y="1234440"/>
+            <a:ext cx="5532120" cy="457200"/>
           </a:xfrm>
           <a:prstGeom prst="roundRect">
             <a:avLst/>
           </a:prstGeom>
           <a:solidFill>
-            <a:srgbClr val="F27E2E"/>
+            <a:srgbClr val="C0392B"/>
           </a:solidFill>
           <a:ln>
             <a:noFill/>
@@ -9274,14 +10474,14 @@
       </p:sp>
       <p:sp>
         <p:nvSpPr>
-          <p:cNvPr id="16" name="TextBox 15"/>
+          <p:cNvPr id="18" name="TextBox 17"/>
           <p:cNvSpPr txBox="1"/>
           <p:nvPr/>
         </p:nvSpPr>
         <p:spPr>
           <a:xfrm>
-            <a:off x="4434840" y="1325880"/>
-            <a:ext cx="3611880" cy="566928"/>
+            <a:off x="6172200" y="1234440"/>
+            <a:ext cx="5532120" cy="457200"/>
           </a:xfrm>
           <a:prstGeom prst="rect">
             <a:avLst/>
@@ -9303,27 +10503,27 @@
               </a:spcAft>
             </a:pPr>
             <a:r>
-              <a:rPr sz="1500" b="1">
+              <a:rPr sz="1400" b="1">
                 <a:solidFill>
                   <a:srgbClr val="FFFFFF"/>
                 </a:solidFill>
                 <a:latin typeface="Apple SD Gothic Neo"/>
               </a:rPr>
-              <a:t>신중 적용</a:t>
-            </a:r>
-          </a:p>
-        </p:txBody>
-      </p:sp>
-      <p:sp>
-        <p:nvSpPr>
-          <p:cNvPr id="17" name="TextBox 16"/>
+              <a:t>외부 도구 (인증·정책 제약)</a:t>
+            </a:r>
+          </a:p>
+        </p:txBody>
+      </p:sp>
+      <p:sp>
+        <p:nvSpPr>
+          <p:cNvPr id="19" name="TextBox 18"/>
           <p:cNvSpPr txBox="1"/>
           <p:nvPr/>
         </p:nvSpPr>
         <p:spPr>
           <a:xfrm>
-            <a:off x="4690872" y="2148840"/>
-            <a:ext cx="3154680" cy="292608"/>
+            <a:off x="6400800" y="1801368"/>
+            <a:ext cx="5120640" cy="347472"/>
           </a:xfrm>
           <a:prstGeom prst="rect">
             <a:avLst/>
@@ -9345,27 +10545,27 @@
               </a:spcAft>
             </a:pPr>
             <a:r>
-              <a:rPr sz="1170" b="0">
+              <a:rPr sz="1120" b="0">
                 <a:solidFill>
                   <a:srgbClr val="444A55"/>
                 </a:solidFill>
                 <a:latin typeface="Apple SD Gothic Neo"/>
               </a:rPr>
-              <a:t>- 회로 동작 최종 판단</a:t>
-            </a:r>
-          </a:p>
-        </p:txBody>
-      </p:sp>
-      <p:sp>
-        <p:nvSpPr>
-          <p:cNvPr id="18" name="TextBox 17"/>
+              <a:t>✗ 외부 MCP·API·플러그인 자동 연동</a:t>
+            </a:r>
+          </a:p>
+        </p:txBody>
+      </p:sp>
+      <p:sp>
+        <p:nvSpPr>
+          <p:cNvPr id="20" name="TextBox 19"/>
           <p:cNvSpPr txBox="1"/>
           <p:nvPr/>
         </p:nvSpPr>
         <p:spPr>
           <a:xfrm>
-            <a:off x="4690872" y="2587752"/>
-            <a:ext cx="3154680" cy="292608"/>
+            <a:off x="6400800" y="2276856"/>
+            <a:ext cx="5120640" cy="347472"/>
           </a:xfrm>
           <a:prstGeom prst="rect">
             <a:avLst/>
@@ -9387,27 +10587,27 @@
               </a:spcAft>
             </a:pPr>
             <a:r>
-              <a:rPr sz="1170" b="0">
+              <a:rPr sz="1120" b="0">
                 <a:solidFill>
                   <a:srgbClr val="444A55"/>
                 </a:solidFill>
                 <a:latin typeface="Apple SD Gothic Neo"/>
               </a:rPr>
-              <a:t>- 부품 최종 선정</a:t>
-            </a:r>
-          </a:p>
-        </p:txBody>
-      </p:sp>
-      <p:sp>
-        <p:nvSpPr>
-          <p:cNvPr id="19" name="TextBox 18"/>
+              <a:t>✗ ChatGPT·Gemini·Claude 등 외부 LLM 직접 연동</a:t>
+            </a:r>
+          </a:p>
+        </p:txBody>
+      </p:sp>
+      <p:sp>
+        <p:nvSpPr>
+          <p:cNvPr id="21" name="TextBox 20"/>
           <p:cNvSpPr txBox="1"/>
           <p:nvPr/>
         </p:nvSpPr>
         <p:spPr>
           <a:xfrm>
-            <a:off x="4690872" y="3026664"/>
-            <a:ext cx="3154680" cy="292608"/>
+            <a:off x="6400800" y="2752344"/>
+            <a:ext cx="5120640" cy="347472"/>
           </a:xfrm>
           <a:prstGeom prst="rect">
             <a:avLst/>
@@ -9429,27 +10629,27 @@
               </a:spcAft>
             </a:pPr>
             <a:r>
-              <a:rPr sz="1170" b="0">
+              <a:rPr sz="1120" b="0">
                 <a:solidFill>
                   <a:srgbClr val="444A55"/>
                 </a:solidFill>
                 <a:latin typeface="Apple SD Gothic Neo"/>
               </a:rPr>
-              <a:t>- 실제 불량 원인 확정</a:t>
-            </a:r>
-          </a:p>
-        </p:txBody>
-      </p:sp>
-      <p:sp>
-        <p:nvSpPr>
-          <p:cNvPr id="20" name="TextBox 19"/>
+              <a:t>✗ 웹·최신 공개 자료 실시간 검색·인용</a:t>
+            </a:r>
+          </a:p>
+        </p:txBody>
+      </p:sp>
+      <p:sp>
+        <p:nvSpPr>
+          <p:cNvPr id="22" name="TextBox 21"/>
           <p:cNvSpPr txBox="1"/>
           <p:nvPr/>
         </p:nvSpPr>
         <p:spPr>
           <a:xfrm>
-            <a:off x="4690872" y="3465576"/>
-            <a:ext cx="3154680" cy="292608"/>
+            <a:off x="6400800" y="3227832"/>
+            <a:ext cx="5120640" cy="347472"/>
           </a:xfrm>
           <a:prstGeom prst="rect">
             <a:avLst/>
@@ -9471,27 +10671,27 @@
               </a:spcAft>
             </a:pPr>
             <a:r>
-              <a:rPr sz="1170" b="0">
+              <a:rPr sz="1120" b="0">
                 <a:solidFill>
                   <a:srgbClr val="444A55"/>
                 </a:solidFill>
                 <a:latin typeface="Apple SD Gothic Neo"/>
               </a:rPr>
-              <a:t>- 양산 영향 판단</a:t>
-            </a:r>
-          </a:p>
-        </p:txBody>
-      </p:sp>
-      <p:sp>
-        <p:nvSpPr>
-          <p:cNvPr id="21" name="TextBox 20"/>
+              <a:t>✗ 고품질 임베딩·장문 사양서 의미 검색</a:t>
+            </a:r>
+          </a:p>
+        </p:txBody>
+      </p:sp>
+      <p:sp>
+        <p:nvSpPr>
+          <p:cNvPr id="23" name="TextBox 22"/>
           <p:cNvSpPr txBox="1"/>
           <p:nvPr/>
         </p:nvSpPr>
         <p:spPr>
           <a:xfrm>
-            <a:off x="4690872" y="3904488"/>
-            <a:ext cx="3154680" cy="292608"/>
+            <a:off x="6400800" y="3703320"/>
+            <a:ext cx="5120640" cy="347472"/>
           </a:xfrm>
           <a:prstGeom prst="rect">
             <a:avLst/>
@@ -9513,104 +10713,14 @@
               </a:spcAft>
             </a:pPr>
             <a:r>
-              <a:rPr sz="1170" b="0">
+              <a:rPr sz="1120" b="0">
                 <a:solidFill>
                   <a:srgbClr val="444A55"/>
                 </a:solidFill>
                 <a:latin typeface="Apple SD Gothic Neo"/>
               </a:rPr>
-              <a:t>- 안전·품질 영향 큰 결정</a:t>
-            </a:r>
-          </a:p>
-        </p:txBody>
-      </p:sp>
-      <p:sp>
-        <p:nvSpPr>
-          <p:cNvPr id="22" name="Rounded Rectangle 21"/>
-          <p:cNvSpPr/>
-          <p:nvPr/>
-        </p:nvSpPr>
-        <p:spPr>
-          <a:xfrm>
-            <a:off x="8275320" y="1325880"/>
-            <a:ext cx="3611880" cy="3291840"/>
-          </a:xfrm>
-          <a:prstGeom prst="roundRect">
-            <a:avLst/>
-          </a:prstGeom>
-          <a:solidFill>
-            <a:srgbClr val="FFFFFF"/>
-          </a:solidFill>
-          <a:ln w="22860">
-            <a:solidFill>
-              <a:srgbClr val="C0392B"/>
-            </a:solidFill>
-          </a:ln>
-          <a:effectLst/>
-        </p:spPr>
-        <p:style>
-          <a:lnRef idx="1">
-            <a:schemeClr val="accent1"/>
-          </a:lnRef>
-          <a:fillRef idx="3">
-            <a:schemeClr val="accent1"/>
-          </a:fillRef>
-          <a:effectRef idx="2">
-            <a:schemeClr val="accent1"/>
-          </a:effectRef>
-          <a:fontRef idx="minor">
-            <a:schemeClr val="lt1"/>
-          </a:fontRef>
-        </p:style>
-        <p:txBody>
-          <a:bodyPr rtlCol="0" anchor="ctr"/>
-          <a:lstStyle/>
-          <a:p>
-            <a:pPr algn="ctr"/>
-          </a:p>
-        </p:txBody>
-      </p:sp>
-      <p:sp>
-        <p:nvSpPr>
-          <p:cNvPr id="23" name="Rounded Rectangle 22"/>
-          <p:cNvSpPr/>
-          <p:nvPr/>
-        </p:nvSpPr>
-        <p:spPr>
-          <a:xfrm>
-            <a:off x="8275320" y="1325880"/>
-            <a:ext cx="3611880" cy="566928"/>
-          </a:xfrm>
-          <a:prstGeom prst="roundRect">
-            <a:avLst/>
-          </a:prstGeom>
-          <a:solidFill>
-            <a:srgbClr val="C0392B"/>
-          </a:solidFill>
-          <a:ln>
-            <a:noFill/>
-          </a:ln>
-          <a:effectLst/>
-        </p:spPr>
-        <p:style>
-          <a:lnRef idx="1">
-            <a:schemeClr val="accent1"/>
-          </a:lnRef>
-          <a:fillRef idx="3">
-            <a:schemeClr val="accent1"/>
-          </a:fillRef>
-          <a:effectRef idx="2">
-            <a:schemeClr val="accent1"/>
-          </a:effectRef>
-          <a:fontRef idx="minor">
-            <a:schemeClr val="lt1"/>
-          </a:fontRef>
-        </p:style>
-        <p:txBody>
-          <a:bodyPr rtlCol="0" anchor="ctr"/>
-          <a:lstStyle/>
-          <a:p>
-            <a:pPr algn="ctr"/>
+              <a:t>✗ 고정밀 OCR (스캔 PDF·회로도)</a:t>
+            </a:r>
           </a:p>
         </p:txBody>
       </p:sp>
@@ -9622,8 +10732,92 @@
         </p:nvSpPr>
         <p:spPr>
           <a:xfrm>
-            <a:off x="8275320" y="1325880"/>
-            <a:ext cx="3611880" cy="566928"/>
+            <a:off x="6400800" y="4178808"/>
+            <a:ext cx="5120640" cy="347472"/>
+          </a:xfrm>
+          <a:prstGeom prst="rect">
+            <a:avLst/>
+          </a:prstGeom>
+          <a:noFill/>
+        </p:spPr>
+        <p:txBody>
+          <a:bodyPr wrap="square" anchor="t" lIns="25400" rIns="25400" tIns="25400" bIns="25400">
+            <a:spAutoFit/>
+          </a:bodyPr>
+          <a:lstStyle/>
+          <a:p>
+            <a:pPr algn="l">
+              <a:lnSpc>
+                <a:spcPct val="100000"/>
+              </a:lnSpc>
+              <a:spcAft>
+                <a:spcPts val="400"/>
+              </a:spcAft>
+            </a:pPr>
+            <a:r>
+              <a:rPr sz="1120" b="0">
+                <a:solidFill>
+                  <a:srgbClr val="444A55"/>
+                </a:solidFill>
+                <a:latin typeface="Apple SD Gothic Neo"/>
+              </a:rPr>
+              <a:t>✗ 대량·고속 API 호출 (분당 수십~수백 회)</a:t>
+            </a:r>
+          </a:p>
+        </p:txBody>
+      </p:sp>
+      <p:sp>
+        <p:nvSpPr>
+          <p:cNvPr id="25" name="TextBox 24"/>
+          <p:cNvSpPr txBox="1"/>
+          <p:nvPr/>
+        </p:nvSpPr>
+        <p:spPr>
+          <a:xfrm>
+            <a:off x="6400800" y="4654296"/>
+            <a:ext cx="5120640" cy="347472"/>
+          </a:xfrm>
+          <a:prstGeom prst="rect">
+            <a:avLst/>
+          </a:prstGeom>
+          <a:noFill/>
+        </p:spPr>
+        <p:txBody>
+          <a:bodyPr wrap="square" anchor="t" lIns="25400" rIns="25400" tIns="25400" bIns="25400">
+            <a:spAutoFit/>
+          </a:bodyPr>
+          <a:lstStyle/>
+          <a:p>
+            <a:pPr algn="l">
+              <a:lnSpc>
+                <a:spcPct val="100000"/>
+              </a:lnSpc>
+              <a:spcAft>
+                <a:spcPts val="400"/>
+              </a:spcAft>
+            </a:pPr>
+            <a:r>
+              <a:rPr sz="1120" b="0">
+                <a:solidFill>
+                  <a:srgbClr val="444A55"/>
+                </a:solidFill>
+                <a:latin typeface="Apple SD Gothic Neo"/>
+              </a:rPr>
+              <a:t>✗ 멀티모달·에이전트 클라우드 위임 (Codex 등)</a:t>
+            </a:r>
+          </a:p>
+        </p:txBody>
+      </p:sp>
+      <p:sp>
+        <p:nvSpPr>
+          <p:cNvPr id="26" name="TextBox 25"/>
+          <p:cNvSpPr txBox="1"/>
+          <p:nvPr/>
+        </p:nvSpPr>
+        <p:spPr>
+          <a:xfrm>
+            <a:off x="5806440" y="2926080"/>
+            <a:ext cx="594360" cy="457200"/>
           </a:xfrm>
           <a:prstGeom prst="rect">
             <a:avLst/>
@@ -9645,248 +10839,36 @@
               </a:spcAft>
             </a:pPr>
             <a:r>
-              <a:rPr sz="1500" b="1">
-                <a:solidFill>
-                  <a:srgbClr val="FFFFFF"/>
+              <a:rPr sz="1600" b="1">
+                <a:solidFill>
+                  <a:srgbClr val="F27E2E"/>
                 </a:solidFill>
                 <a:latin typeface="Apple SD Gothic Neo"/>
               </a:rPr>
-              <a:t>개선 필요</a:t>
-            </a:r>
-          </a:p>
-        </p:txBody>
-      </p:sp>
-      <p:sp>
-        <p:nvSpPr>
-          <p:cNvPr id="25" name="TextBox 24"/>
-          <p:cNvSpPr txBox="1"/>
-          <p:nvPr/>
-        </p:nvSpPr>
-        <p:spPr>
-          <a:xfrm>
-            <a:off x="8531352" y="2148840"/>
-            <a:ext cx="3154680" cy="292608"/>
-          </a:xfrm>
-          <a:prstGeom prst="rect">
-            <a:avLst/>
-          </a:prstGeom>
-          <a:noFill/>
-        </p:spPr>
-        <p:txBody>
-          <a:bodyPr wrap="square" anchor="t" lIns="25400" rIns="25400" tIns="25400" bIns="25400">
-            <a:spAutoFit/>
-          </a:bodyPr>
-          <a:lstStyle/>
-          <a:p>
-            <a:pPr algn="l">
-              <a:lnSpc>
-                <a:spcPct val="100000"/>
-              </a:lnSpc>
-              <a:spcAft>
-                <a:spcPts val="400"/>
-              </a:spcAft>
-            </a:pPr>
-            <a:r>
-              <a:rPr sz="1170" b="0">
-                <a:solidFill>
-                  <a:srgbClr val="444A55"/>
-                </a:solidFill>
-                <a:latin typeface="Apple SD Gothic Neo"/>
-              </a:rPr>
-              <a:t>- 외부 도구 연결 제한</a:t>
-            </a:r>
-          </a:p>
-        </p:txBody>
-      </p:sp>
-      <p:sp>
-        <p:nvSpPr>
-          <p:cNvPr id="26" name="TextBox 25"/>
-          <p:cNvSpPr txBox="1"/>
-          <p:nvPr/>
-        </p:nvSpPr>
-        <p:spPr>
-          <a:xfrm>
-            <a:off x="8531352" y="2587752"/>
-            <a:ext cx="3154680" cy="292608"/>
-          </a:xfrm>
-          <a:prstGeom prst="rect">
-            <a:avLst/>
-          </a:prstGeom>
-          <a:noFill/>
-        </p:spPr>
-        <p:txBody>
-          <a:bodyPr wrap="square" anchor="t" lIns="25400" rIns="25400" tIns="25400" bIns="25400">
-            <a:spAutoFit/>
-          </a:bodyPr>
-          <a:lstStyle/>
-          <a:p>
-            <a:pPr algn="l">
-              <a:lnSpc>
-                <a:spcPct val="100000"/>
-              </a:lnSpc>
-              <a:spcAft>
-                <a:spcPts val="400"/>
-              </a:spcAft>
-            </a:pPr>
-            <a:r>
-              <a:rPr sz="1170" b="0">
-                <a:solidFill>
-                  <a:srgbClr val="444A55"/>
-                </a:solidFill>
-                <a:latin typeface="Apple SD Gothic Neo"/>
-              </a:rPr>
-              <a:t>- 문서 검색 성능</a:t>
-            </a:r>
-          </a:p>
-        </p:txBody>
-      </p:sp>
-      <p:sp>
-        <p:nvSpPr>
-          <p:cNvPr id="27" name="TextBox 26"/>
-          <p:cNvSpPr txBox="1"/>
-          <p:nvPr/>
-        </p:nvSpPr>
-        <p:spPr>
-          <a:xfrm>
-            <a:off x="8531352" y="3026664"/>
-            <a:ext cx="3154680" cy="292608"/>
-          </a:xfrm>
-          <a:prstGeom prst="rect">
-            <a:avLst/>
-          </a:prstGeom>
-          <a:noFill/>
-        </p:spPr>
-        <p:txBody>
-          <a:bodyPr wrap="square" anchor="t" lIns="25400" rIns="25400" tIns="25400" bIns="25400">
-            <a:spAutoFit/>
-          </a:bodyPr>
-          <a:lstStyle/>
-          <a:p>
-            <a:pPr algn="l">
-              <a:lnSpc>
-                <a:spcPct val="100000"/>
-              </a:lnSpc>
-              <a:spcAft>
-                <a:spcPts val="400"/>
-              </a:spcAft>
-            </a:pPr>
-            <a:r>
-              <a:rPr sz="1170" b="0">
-                <a:solidFill>
-                  <a:srgbClr val="444A55"/>
-                </a:solidFill>
-                <a:latin typeface="Apple SD Gothic Neo"/>
-              </a:rPr>
-              <a:t>- OCR 성능</a:t>
-            </a:r>
-          </a:p>
-        </p:txBody>
-      </p:sp>
-      <p:sp>
-        <p:nvSpPr>
-          <p:cNvPr id="28" name="TextBox 27"/>
-          <p:cNvSpPr txBox="1"/>
-          <p:nvPr/>
-        </p:nvSpPr>
-        <p:spPr>
-          <a:xfrm>
-            <a:off x="8531352" y="3465576"/>
-            <a:ext cx="3154680" cy="292608"/>
-          </a:xfrm>
-          <a:prstGeom prst="rect">
-            <a:avLst/>
-          </a:prstGeom>
-          <a:noFill/>
-        </p:spPr>
-        <p:txBody>
-          <a:bodyPr wrap="square" anchor="t" lIns="25400" rIns="25400" tIns="25400" bIns="25400">
-            <a:spAutoFit/>
-          </a:bodyPr>
-          <a:lstStyle/>
-          <a:p>
-            <a:pPr algn="l">
-              <a:lnSpc>
-                <a:spcPct val="100000"/>
-              </a:lnSpc>
-              <a:spcAft>
-                <a:spcPts val="400"/>
-              </a:spcAft>
-            </a:pPr>
-            <a:r>
-              <a:rPr sz="1170" b="0">
-                <a:solidFill>
-                  <a:srgbClr val="444A55"/>
-                </a:solidFill>
-                <a:latin typeface="Apple SD Gothic Neo"/>
-              </a:rPr>
-              <a:t>- Gauss 호출 속도</a:t>
-            </a:r>
-          </a:p>
-        </p:txBody>
-      </p:sp>
-      <p:sp>
-        <p:nvSpPr>
-          <p:cNvPr id="29" name="TextBox 28"/>
-          <p:cNvSpPr txBox="1"/>
-          <p:nvPr/>
-        </p:nvSpPr>
-        <p:spPr>
-          <a:xfrm>
-            <a:off x="8531352" y="3904488"/>
-            <a:ext cx="3154680" cy="292608"/>
-          </a:xfrm>
-          <a:prstGeom prst="rect">
-            <a:avLst/>
-          </a:prstGeom>
-          <a:noFill/>
-        </p:spPr>
-        <p:txBody>
-          <a:bodyPr wrap="square" anchor="t" lIns="25400" rIns="25400" tIns="25400" bIns="25400">
-            <a:spAutoFit/>
-          </a:bodyPr>
-          <a:lstStyle/>
-          <a:p>
-            <a:pPr algn="l">
-              <a:lnSpc>
-                <a:spcPct val="100000"/>
-              </a:lnSpc>
-              <a:spcAft>
-                <a:spcPts val="400"/>
-              </a:spcAft>
-            </a:pPr>
-            <a:r>
-              <a:rPr sz="1170" b="0">
-                <a:solidFill>
-                  <a:srgbClr val="444A55"/>
-                </a:solidFill>
-                <a:latin typeface="Apple SD Gothic Neo"/>
-              </a:rPr>
-              <a:t>- 팀 공통 사용 가이드</a:t>
-            </a:r>
-          </a:p>
-        </p:txBody>
-      </p:sp>
-      <p:sp>
-        <p:nvSpPr>
-          <p:cNvPr id="30" name="Rounded Rectangle 29"/>
+              <a:t>VS</a:t>
+            </a:r>
+          </a:p>
+        </p:txBody>
+      </p:sp>
+      <p:sp>
+        <p:nvSpPr>
+          <p:cNvPr id="27" name="Rounded Rectangle 26"/>
           <p:cNvSpPr/>
           <p:nvPr/>
         </p:nvSpPr>
         <p:spPr>
           <a:xfrm>
-            <a:off x="594360" y="4892040"/>
-            <a:ext cx="11018520" cy="1234440"/>
+            <a:off x="457200" y="5833872"/>
+            <a:ext cx="11292840" cy="804672"/>
           </a:xfrm>
           <a:prstGeom prst="roundRect">
             <a:avLst/>
           </a:prstGeom>
           <a:solidFill>
-            <a:srgbClr val="E8F1FA"/>
+            <a:srgbClr val="142A4A"/>
           </a:solidFill>
-          <a:ln w="15240">
-            <a:solidFill>
-              <a:srgbClr val="D5DDE6"/>
-            </a:solidFill>
+          <a:ln>
+            <a:noFill/>
           </a:ln>
           <a:effectLst/>
         </p:spPr>
@@ -9914,14 +10896,14 @@
       </p:sp>
       <p:sp>
         <p:nvSpPr>
-          <p:cNvPr id="31" name="TextBox 30"/>
+          <p:cNvPr id="28" name="TextBox 27"/>
           <p:cNvSpPr txBox="1"/>
           <p:nvPr/>
         </p:nvSpPr>
         <p:spPr>
           <a:xfrm>
-            <a:off x="841248" y="5010912"/>
-            <a:ext cx="10515600" cy="960120"/>
+            <a:off x="685800" y="5833872"/>
+            <a:ext cx="10835640" cy="804672"/>
           </a:xfrm>
           <a:prstGeom prst="rect">
             <a:avLst/>
@@ -9929,53 +10911,108 @@
           <a:noFill/>
         </p:spPr>
         <p:txBody>
-          <a:bodyPr wrap="square" anchor="t" lIns="25400" rIns="25400" tIns="25400" bIns="25400">
+          <a:bodyPr wrap="square" anchor="ctr" lIns="25400" rIns="25400" tIns="25400" bIns="25400">
             <a:spAutoFit/>
           </a:bodyPr>
           <a:lstStyle/>
           <a:p>
             <a:pPr algn="l">
               <a:lnSpc>
-                <a:spcPct val="110000"/>
+                <a:spcPct val="115000"/>
               </a:lnSpc>
               <a:spcAft>
                 <a:spcPts val="200"/>
               </a:spcAft>
             </a:pPr>
             <a:r>
-              <a:rPr sz="1500" b="1">
-                <a:solidFill>
-                  <a:srgbClr val="142A4A"/>
+              <a:rPr sz="1400" b="1">
+                <a:solidFill>
+                  <a:srgbClr val="9FC4E8"/>
                 </a:solidFill>
                 <a:latin typeface="Apple SD Gothic Neo"/>
               </a:rPr>
-              <a:t>최종 결론</a:t>
+              <a:t>결론</a:t>
             </a:r>
           </a:p>
           <a:p>
             <a:pPr algn="l">
               <a:lnSpc>
-                <a:spcPct val="110000"/>
+                <a:spcPct val="115000"/>
               </a:lnSpc>
               <a:spcAft>
                 <a:spcPts val="200"/>
               </a:spcAft>
             </a:pPr>
             <a:r>
-              <a:rPr sz="1230" b="0">
-                <a:solidFill>
-                  <a:srgbClr val="444A55"/>
+              <a:rPr sz="1150" b="0">
+                <a:solidFill>
+                  <a:srgbClr val="FFFFFF"/>
                 </a:solidFill>
                 <a:latin typeface="Apple SD Gothic Neo"/>
               </a:rPr>
-              <a:t>Cline SR과 Gauss는 스마트폰 HW 개발자의 반복 업무를 줄이는 데 바로 쓸 수 있습니다. 다만 외부 도구 연결, 문서 검색/OCR, API 호출 제한 때문에 '완전 자동 개발'은 어렵습니다. 따라서 낮은 위험의 정리·초안·검토 업무부터 적용하고, 사내 전용 문서 검색·OCR·호출 제한 개선을 다음 과제로 검토하는 것이 현실적입니다.</a:t>
-            </a:r>
-          </a:p>
-        </p:txBody>
-      </p:sp>
-      <p:sp>
-        <p:nvSpPr>
-          <p:cNvPr id="32" name="TextBox 31"/>
+              <a:t>현재 사내 AI 환경에서 활용 가능한 부분은 </a:t>
+            </a:r>
+            <a:r>
+              <a:rPr sz="1150" b="1">
+                <a:solidFill>
+                  <a:srgbClr val="FFFFFF"/>
+                </a:solidFill>
+                <a:latin typeface="Apple SD Gothic Neo"/>
+              </a:rPr>
+              <a:t>코드·스크립트 초안, 측정·로그 정리, 문서 초안, 사내 Git 기반 협업, 망분리 로컬 처리</a:t>
+            </a:r>
+            <a:r>
+              <a:rPr sz="1150" b="0">
+                <a:solidFill>
+                  <a:srgbClr val="FFFFFF"/>
+                </a:solidFill>
+                <a:latin typeface="Apple SD Gothic Neo"/>
+              </a:rPr>
+              <a:t> 이다.</a:t>
+            </a:r>
+          </a:p>
+          <a:p>
+            <a:pPr algn="l">
+              <a:lnSpc>
+                <a:spcPct val="115000"/>
+              </a:lnSpc>
+              <a:spcAft>
+                <a:spcPts val="200"/>
+              </a:spcAft>
+            </a:pPr>
+            <a:r>
+              <a:rPr sz="1150" b="0">
+                <a:solidFill>
+                  <a:srgbClr val="FFFFFF"/>
+                </a:solidFill>
+                <a:latin typeface="Apple SD Gothic Neo"/>
+              </a:rPr>
+              <a:t>다만 사내 조건의 한계로 불가능하거나 어려운 부분은 </a:t>
+            </a:r>
+            <a:r>
+              <a:rPr sz="1150" b="1">
+                <a:solidFill>
+                  <a:srgbClr val="FFFFFF"/>
+                </a:solidFill>
+                <a:latin typeface="Apple SD Gothic Neo"/>
+              </a:rPr>
+              <a:t>외부 MCP·API 연동, 고품질 장문 검색·OCR, 대량 고속 호출, 외부 LLM·최신 웹 자료 자동 활용</a:t>
+            </a:r>
+            <a:r>
+              <a:rPr sz="1150" b="0">
+                <a:solidFill>
+                  <a:srgbClr val="FFFFFF"/>
+                </a:solidFill>
+                <a:latin typeface="Apple SD Gothic Neo"/>
+              </a:rPr>
+              <a:t> 이다.</a:t>
+            </a:r>
+          </a:p>
+        </p:txBody>
+      </p:sp>
+      <p:sp>
+        <p:nvSpPr>
+          <p:cNvPr id="29" name="TextBox 28"/>
           <p:cNvSpPr txBox="1"/>
           <p:nvPr/>
         </p:nvSpPr>

--- a/HW개발팀_AI활용방안_요약.pptx
+++ b/HW개발팀_AI활용방안_요약.pptx
@@ -3103,14 +3103,56 @@
       <p:grpSpPr/>
       <p:sp>
         <p:nvSpPr>
-          <p:cNvPr id="2" name="Rectangle 1"/>
+          <p:cNvPr id="2" name="TextBox 1"/>
+          <p:cNvSpPr txBox="1"/>
+          <p:nvPr/>
+        </p:nvSpPr>
+        <p:spPr>
+          <a:xfrm>
+            <a:off x="868680" y="2148840"/>
+            <a:ext cx="10515600" cy="1097280"/>
+          </a:xfrm>
+          <a:prstGeom prst="rect">
+            <a:avLst/>
+          </a:prstGeom>
+          <a:noFill/>
+        </p:spPr>
+        <p:txBody>
+          <a:bodyPr wrap="square" anchor="t" lIns="25400" rIns="25400" tIns="25400" bIns="25400">
+            <a:spAutoFit/>
+          </a:bodyPr>
+          <a:lstStyle/>
+          <a:p>
+            <a:pPr algn="l">
+              <a:lnSpc>
+                <a:spcPct val="100000"/>
+              </a:lnSpc>
+              <a:spcAft>
+                <a:spcPts val="400"/>
+              </a:spcAft>
+            </a:pPr>
+            <a:r>
+              <a:rPr sz="4200" b="1">
+                <a:solidFill>
+                  <a:srgbClr val="FFFFFF"/>
+                </a:solidFill>
+                <a:latin typeface="Apple SD Gothic Neo"/>
+              </a:rPr>
+              <a:t>Cline SR 사내 활용</a:t>
+            </a:r>
+          </a:p>
+        </p:txBody>
+      </p:sp>
+      <p:sp>
+        <p:nvSpPr>
+          <p:cNvPr id="3" name="Rectangle 2"/>
           <p:cNvSpPr/>
           <p:nvPr/>
         </p:nvSpPr>
         <p:spPr>
           <a:xfrm>
-            <a:off x="0" y="3566160"/>
-            <a:ext cx="12191695" cy="50800"/>
+            <a:off x="886968" y="3456432"/>
+            <a:ext cx="4206240" cy="50800"/>
           </a:xfrm>
           <a:prstGeom prst="rect">
             <a:avLst/>
@@ -3147,14 +3189,14 @@
       </p:sp>
       <p:sp>
         <p:nvSpPr>
-          <p:cNvPr id="3" name="TextBox 2"/>
+          <p:cNvPr id="4" name="TextBox 3"/>
           <p:cNvSpPr txBox="1"/>
           <p:nvPr/>
         </p:nvSpPr>
         <p:spPr>
           <a:xfrm>
-            <a:off x="822960" y="1828800"/>
-            <a:ext cx="10515600" cy="1280160"/>
+            <a:off x="886968" y="3749039"/>
+            <a:ext cx="10515600" cy="868680"/>
           </a:xfrm>
           <a:prstGeom prst="rect">
             <a:avLst/>
@@ -3169,68 +3211,26 @@
           <a:p>
             <a:pPr algn="l">
               <a:lnSpc>
-                <a:spcPct val="110000"/>
+                <a:spcPct val="125000"/>
               </a:lnSpc>
               <a:spcAft>
                 <a:spcPts val="400"/>
               </a:spcAft>
             </a:pPr>
             <a:r>
-              <a:rPr sz="4000" b="1">
-                <a:solidFill>
-                  <a:srgbClr val="FFFFFF"/>
-                </a:solidFill>
-                <a:latin typeface="Apple SD Gothic Neo"/>
-              </a:rPr>
-              <a:t>Cline SR 사내 활용</a:t>
-            </a:r>
-          </a:p>
-        </p:txBody>
-      </p:sp>
-      <p:sp>
-        <p:nvSpPr>
-          <p:cNvPr id="4" name="TextBox 3"/>
-          <p:cNvSpPr txBox="1"/>
-          <p:nvPr/>
-        </p:nvSpPr>
-        <p:spPr>
-          <a:xfrm>
-            <a:off x="841248" y="3977639"/>
-            <a:ext cx="10515600" cy="822960"/>
-          </a:xfrm>
-          <a:prstGeom prst="rect">
-            <a:avLst/>
-          </a:prstGeom>
-          <a:noFill/>
-        </p:spPr>
-        <p:txBody>
-          <a:bodyPr wrap="square" anchor="t" lIns="25400" rIns="25400" tIns="25400" bIns="25400">
-            <a:spAutoFit/>
-          </a:bodyPr>
-          <a:lstStyle/>
+              <a:rPr sz="1600" b="0">
+                <a:solidFill>
+                  <a:srgbClr val="C9D8EA"/>
+                </a:solidFill>
+                <a:latin typeface="Apple SD Gothic Neo"/>
+              </a:rPr>
+              <a:t>NC HW 개발팀  |  Gauss · Ollama · GitHub Enterprise 연계</a:t>
+            </a:r>
+          </a:p>
           <a:p>
             <a:pPr algn="l">
               <a:lnSpc>
-                <a:spcPct val="115000"/>
-              </a:lnSpc>
-              <a:spcAft>
-                <a:spcPts val="400"/>
-              </a:spcAft>
-            </a:pPr>
-            <a:r>
-              <a:rPr sz="1600" b="0">
-                <a:solidFill>
-                  <a:srgbClr val="C9D8EA"/>
-                </a:solidFill>
-                <a:latin typeface="Apple SD Gothic Neo"/>
-              </a:rPr>
-              <a:t>NC HW 개발팀  |  Gauss · Ollama · GitHub Enterprise 연계</a:t>
-            </a:r>
-          </a:p>
-          <a:p>
-            <a:pPr algn="l">
-              <a:lnSpc>
-                <a:spcPct val="115000"/>
+                <a:spcPct val="125000"/>
               </a:lnSpc>
               <a:spcAft>
                 <a:spcPts val="400"/>
@@ -3496,8 +3496,8 @@
         </p:nvSpPr>
         <p:spPr>
           <a:xfrm>
-            <a:off x="457200" y="1234440"/>
-            <a:ext cx="5532120" cy="2487168"/>
+            <a:off x="457200" y="1170432"/>
+            <a:ext cx="5550408" cy="2578608"/>
           </a:xfrm>
           <a:prstGeom prst="roundRect">
             <a:avLst/>
@@ -3542,8 +3542,8 @@
         </p:nvSpPr>
         <p:spPr>
           <a:xfrm>
-            <a:off x="457200" y="1234440"/>
-            <a:ext cx="5532120" cy="384048"/>
+            <a:off x="457200" y="1170432"/>
+            <a:ext cx="5550408" cy="420624"/>
           </a:xfrm>
           <a:prstGeom prst="roundRect">
             <a:avLst/>
@@ -3586,8 +3586,8 @@
         </p:nvSpPr>
         <p:spPr>
           <a:xfrm>
-            <a:off x="457200" y="1234440"/>
-            <a:ext cx="5532120" cy="384048"/>
+            <a:off x="457200" y="1170432"/>
+            <a:ext cx="5550408" cy="420624"/>
           </a:xfrm>
           <a:prstGeom prst="rect">
             <a:avLst/>
@@ -3609,7 +3609,7 @@
               </a:spcAft>
             </a:pPr>
             <a:r>
-              <a:rPr sz="1300" b="1">
+              <a:rPr sz="1350" b="1">
                 <a:solidFill>
                   <a:srgbClr val="FFFFFF"/>
                 </a:solidFill>
@@ -3628,8 +3628,8 @@
         </p:nvSpPr>
         <p:spPr>
           <a:xfrm>
-            <a:off x="594360" y="1691640"/>
-            <a:ext cx="5257800" cy="502920"/>
+            <a:off x="658368" y="1682496"/>
+            <a:ext cx="5148072" cy="566928"/>
           </a:xfrm>
           <a:prstGeom prst="rect">
             <a:avLst/>
@@ -3644,14 +3644,14 @@
           <a:p>
             <a:pPr algn="l">
               <a:lnSpc>
-                <a:spcPct val="105000"/>
+                <a:spcPct val="108000"/>
               </a:lnSpc>
               <a:spcAft>
                 <a:spcPts val="400"/>
               </a:spcAft>
             </a:pPr>
             <a:r>
-              <a:rPr sz="1019" b="0">
+              <a:rPr sz="1030" b="0">
                 <a:solidFill>
                   <a:srgbClr val="444A55"/>
                 </a:solidFill>
@@ -3664,14 +3664,58 @@
       </p:sp>
       <p:sp>
         <p:nvSpPr>
-          <p:cNvPr id="10" name="TextBox 9"/>
+          <p:cNvPr id="10" name="Rectangle 9"/>
+          <p:cNvSpPr/>
+          <p:nvPr/>
+        </p:nvSpPr>
+        <p:spPr>
+          <a:xfrm>
+            <a:off x="658368" y="2322576"/>
+            <a:ext cx="5148072" cy="12700"/>
+          </a:xfrm>
+          <a:prstGeom prst="rect">
+            <a:avLst/>
+          </a:prstGeom>
+          <a:solidFill>
+            <a:srgbClr val="D5DDE6"/>
+          </a:solidFill>
+          <a:ln>
+            <a:noFill/>
+          </a:ln>
+          <a:effectLst/>
+        </p:spPr>
+        <p:style>
+          <a:lnRef idx="1">
+            <a:schemeClr val="accent1"/>
+          </a:lnRef>
+          <a:fillRef idx="3">
+            <a:schemeClr val="accent1"/>
+          </a:fillRef>
+          <a:effectRef idx="2">
+            <a:schemeClr val="accent1"/>
+          </a:effectRef>
+          <a:fontRef idx="minor">
+            <a:schemeClr val="lt1"/>
+          </a:fontRef>
+        </p:style>
+        <p:txBody>
+          <a:bodyPr rtlCol="0" anchor="ctr"/>
+          <a:lstStyle/>
+          <a:p>
+            <a:pPr algn="ctr"/>
+          </a:p>
+        </p:txBody>
+      </p:sp>
+      <p:sp>
+        <p:nvSpPr>
+          <p:cNvPr id="11" name="TextBox 10"/>
           <p:cNvSpPr txBox="1"/>
           <p:nvPr/>
         </p:nvSpPr>
         <p:spPr>
           <a:xfrm>
-            <a:off x="594360" y="2194560"/>
-            <a:ext cx="5257800" cy="201168"/>
+            <a:off x="658368" y="2377440"/>
+            <a:ext cx="5148072" cy="219456"/>
           </a:xfrm>
           <a:prstGeom prst="rect">
             <a:avLst/>
@@ -3706,14 +3750,14 @@
       </p:sp>
       <p:sp>
         <p:nvSpPr>
-          <p:cNvPr id="11" name="TextBox 10"/>
+          <p:cNvPr id="12" name="TextBox 11"/>
           <p:cNvSpPr txBox="1"/>
           <p:nvPr/>
         </p:nvSpPr>
         <p:spPr>
           <a:xfrm>
-            <a:off x="621792" y="2404872"/>
-            <a:ext cx="5239512" cy="256032"/>
+            <a:off x="694944" y="2651760"/>
+            <a:ext cx="5093208" cy="237744"/>
           </a:xfrm>
           <a:prstGeom prst="rect">
             <a:avLst/>
@@ -3735,7 +3779,7 @@
               </a:spcAft>
             </a:pPr>
             <a:r>
-              <a:rPr sz="980" b="0">
+              <a:rPr sz="1000" b="0">
                 <a:solidFill>
                   <a:srgbClr val="444A55"/>
                 </a:solidFill>
@@ -3748,14 +3792,14 @@
       </p:sp>
       <p:sp>
         <p:nvSpPr>
-          <p:cNvPr id="12" name="TextBox 11"/>
+          <p:cNvPr id="13" name="TextBox 12"/>
           <p:cNvSpPr txBox="1"/>
           <p:nvPr/>
         </p:nvSpPr>
         <p:spPr>
           <a:xfrm>
-            <a:off x="621792" y="2679192"/>
-            <a:ext cx="5239512" cy="256032"/>
+            <a:off x="694944" y="2898648"/>
+            <a:ext cx="5093208" cy="237744"/>
           </a:xfrm>
           <a:prstGeom prst="rect">
             <a:avLst/>
@@ -3777,7 +3821,7 @@
               </a:spcAft>
             </a:pPr>
             <a:r>
-              <a:rPr sz="980" b="0">
+              <a:rPr sz="1000" b="0">
                 <a:solidFill>
                   <a:srgbClr val="444A55"/>
                 </a:solidFill>
@@ -3790,14 +3834,14 @@
       </p:sp>
       <p:sp>
         <p:nvSpPr>
-          <p:cNvPr id="13" name="TextBox 12"/>
+          <p:cNvPr id="14" name="TextBox 13"/>
           <p:cNvSpPr txBox="1"/>
           <p:nvPr/>
         </p:nvSpPr>
         <p:spPr>
           <a:xfrm>
-            <a:off x="621792" y="2953512"/>
-            <a:ext cx="5239512" cy="256032"/>
+            <a:off x="694944" y="3145536"/>
+            <a:ext cx="5093208" cy="237744"/>
           </a:xfrm>
           <a:prstGeom prst="rect">
             <a:avLst/>
@@ -3819,7 +3863,7 @@
               </a:spcAft>
             </a:pPr>
             <a:r>
-              <a:rPr sz="980" b="0">
+              <a:rPr sz="1000" b="0">
                 <a:solidFill>
                   <a:srgbClr val="444A55"/>
                 </a:solidFill>
@@ -3832,14 +3876,14 @@
       </p:sp>
       <p:sp>
         <p:nvSpPr>
-          <p:cNvPr id="14" name="TextBox 13"/>
+          <p:cNvPr id="15" name="TextBox 14"/>
           <p:cNvSpPr txBox="1"/>
           <p:nvPr/>
         </p:nvSpPr>
         <p:spPr>
           <a:xfrm>
-            <a:off x="621792" y="3227832"/>
-            <a:ext cx="5239512" cy="256032"/>
+            <a:off x="694944" y="3392424"/>
+            <a:ext cx="5093208" cy="237744"/>
           </a:xfrm>
           <a:prstGeom prst="rect">
             <a:avLst/>
@@ -3861,7 +3905,7 @@
               </a:spcAft>
             </a:pPr>
             <a:r>
-              <a:rPr sz="980" b="0">
+              <a:rPr sz="1000" b="0">
                 <a:solidFill>
                   <a:srgbClr val="444A55"/>
                 </a:solidFill>
@@ -3874,14 +3918,14 @@
       </p:sp>
       <p:sp>
         <p:nvSpPr>
-          <p:cNvPr id="15" name="Rounded Rectangle 14"/>
+          <p:cNvPr id="16" name="Rounded Rectangle 15"/>
           <p:cNvSpPr/>
           <p:nvPr/>
         </p:nvSpPr>
         <p:spPr>
           <a:xfrm>
-            <a:off x="6172200" y="1234440"/>
-            <a:ext cx="5532120" cy="2487168"/>
+            <a:off x="6199632" y="1170432"/>
+            <a:ext cx="5550408" cy="2578608"/>
           </a:xfrm>
           <a:prstGeom prst="roundRect">
             <a:avLst/>
@@ -3920,14 +3964,14 @@
       </p:sp>
       <p:sp>
         <p:nvSpPr>
-          <p:cNvPr id="16" name="Rounded Rectangle 15"/>
+          <p:cNvPr id="17" name="Rounded Rectangle 16"/>
           <p:cNvSpPr/>
           <p:nvPr/>
         </p:nvSpPr>
         <p:spPr>
           <a:xfrm>
-            <a:off x="6172200" y="1234440"/>
-            <a:ext cx="5532120" cy="384048"/>
+            <a:off x="6199632" y="1170432"/>
+            <a:ext cx="5550408" cy="420624"/>
           </a:xfrm>
           <a:prstGeom prst="roundRect">
             <a:avLst/>
@@ -3964,14 +4008,14 @@
       </p:sp>
       <p:sp>
         <p:nvSpPr>
-          <p:cNvPr id="17" name="TextBox 16"/>
+          <p:cNvPr id="18" name="TextBox 17"/>
           <p:cNvSpPr txBox="1"/>
           <p:nvPr/>
         </p:nvSpPr>
         <p:spPr>
           <a:xfrm>
-            <a:off x="6172200" y="1234440"/>
-            <a:ext cx="5532120" cy="384048"/>
+            <a:off x="6199632" y="1170432"/>
+            <a:ext cx="5550408" cy="420624"/>
           </a:xfrm>
           <a:prstGeom prst="rect">
             <a:avLst/>
@@ -3993,7 +4037,7 @@
               </a:spcAft>
             </a:pPr>
             <a:r>
-              <a:rPr sz="1300" b="1">
+              <a:rPr sz="1350" b="1">
                 <a:solidFill>
                   <a:srgbClr val="FFFFFF"/>
                 </a:solidFill>
@@ -4006,14 +4050,14 @@
       </p:sp>
       <p:sp>
         <p:nvSpPr>
-          <p:cNvPr id="18" name="TextBox 17"/>
+          <p:cNvPr id="19" name="TextBox 18"/>
           <p:cNvSpPr txBox="1"/>
           <p:nvPr/>
         </p:nvSpPr>
         <p:spPr>
           <a:xfrm>
-            <a:off x="6309360" y="1691640"/>
-            <a:ext cx="5257800" cy="502920"/>
+            <a:off x="6400800" y="1682496"/>
+            <a:ext cx="5148072" cy="566928"/>
           </a:xfrm>
           <a:prstGeom prst="rect">
             <a:avLst/>
@@ -4028,14 +4072,14 @@
           <a:p>
             <a:pPr algn="l">
               <a:lnSpc>
-                <a:spcPct val="105000"/>
+                <a:spcPct val="108000"/>
               </a:lnSpc>
               <a:spcAft>
                 <a:spcPts val="400"/>
               </a:spcAft>
             </a:pPr>
             <a:r>
-              <a:rPr sz="1019" b="0">
+              <a:rPr sz="1030" b="0">
                 <a:solidFill>
                   <a:srgbClr val="444A55"/>
                 </a:solidFill>
@@ -4048,14 +4092,58 @@
       </p:sp>
       <p:sp>
         <p:nvSpPr>
-          <p:cNvPr id="19" name="TextBox 18"/>
+          <p:cNvPr id="20" name="Rectangle 19"/>
+          <p:cNvSpPr/>
+          <p:nvPr/>
+        </p:nvSpPr>
+        <p:spPr>
+          <a:xfrm>
+            <a:off x="6400800" y="2322576"/>
+            <a:ext cx="5148072" cy="12700"/>
+          </a:xfrm>
+          <a:prstGeom prst="rect">
+            <a:avLst/>
+          </a:prstGeom>
+          <a:solidFill>
+            <a:srgbClr val="D5DDE6"/>
+          </a:solidFill>
+          <a:ln>
+            <a:noFill/>
+          </a:ln>
+          <a:effectLst/>
+        </p:spPr>
+        <p:style>
+          <a:lnRef idx="1">
+            <a:schemeClr val="accent1"/>
+          </a:lnRef>
+          <a:fillRef idx="3">
+            <a:schemeClr val="accent1"/>
+          </a:fillRef>
+          <a:effectRef idx="2">
+            <a:schemeClr val="accent1"/>
+          </a:effectRef>
+          <a:fontRef idx="minor">
+            <a:schemeClr val="lt1"/>
+          </a:fontRef>
+        </p:style>
+        <p:txBody>
+          <a:bodyPr rtlCol="0" anchor="ctr"/>
+          <a:lstStyle/>
+          <a:p>
+            <a:pPr algn="ctr"/>
+          </a:p>
+        </p:txBody>
+      </p:sp>
+      <p:sp>
+        <p:nvSpPr>
+          <p:cNvPr id="21" name="TextBox 20"/>
           <p:cNvSpPr txBox="1"/>
           <p:nvPr/>
         </p:nvSpPr>
         <p:spPr>
           <a:xfrm>
-            <a:off x="6309360" y="2194560"/>
-            <a:ext cx="5257800" cy="201168"/>
+            <a:off x="6400800" y="2377440"/>
+            <a:ext cx="5148072" cy="219456"/>
           </a:xfrm>
           <a:prstGeom prst="rect">
             <a:avLst/>
@@ -4090,14 +4178,14 @@
       </p:sp>
       <p:sp>
         <p:nvSpPr>
-          <p:cNvPr id="20" name="TextBox 19"/>
+          <p:cNvPr id="22" name="TextBox 21"/>
           <p:cNvSpPr txBox="1"/>
           <p:nvPr/>
         </p:nvSpPr>
         <p:spPr>
           <a:xfrm>
-            <a:off x="6336792" y="2404872"/>
-            <a:ext cx="5239512" cy="256032"/>
+            <a:off x="6437376" y="2651760"/>
+            <a:ext cx="5093208" cy="237744"/>
           </a:xfrm>
           <a:prstGeom prst="rect">
             <a:avLst/>
@@ -4119,7 +4207,7 @@
               </a:spcAft>
             </a:pPr>
             <a:r>
-              <a:rPr sz="980" b="0">
+              <a:rPr sz="1000" b="0">
                 <a:solidFill>
                   <a:srgbClr val="444A55"/>
                 </a:solidFill>
@@ -4132,14 +4220,14 @@
       </p:sp>
       <p:sp>
         <p:nvSpPr>
-          <p:cNvPr id="21" name="TextBox 20"/>
+          <p:cNvPr id="23" name="TextBox 22"/>
           <p:cNvSpPr txBox="1"/>
           <p:nvPr/>
         </p:nvSpPr>
         <p:spPr>
           <a:xfrm>
-            <a:off x="6336792" y="2679192"/>
-            <a:ext cx="5239512" cy="256032"/>
+            <a:off x="6437376" y="2898648"/>
+            <a:ext cx="5093208" cy="237744"/>
           </a:xfrm>
           <a:prstGeom prst="rect">
             <a:avLst/>
@@ -4161,7 +4249,7 @@
               </a:spcAft>
             </a:pPr>
             <a:r>
-              <a:rPr sz="980" b="0">
+              <a:rPr sz="1000" b="0">
                 <a:solidFill>
                   <a:srgbClr val="444A55"/>
                 </a:solidFill>
@@ -4174,14 +4262,14 @@
       </p:sp>
       <p:sp>
         <p:nvSpPr>
-          <p:cNvPr id="22" name="TextBox 21"/>
+          <p:cNvPr id="24" name="TextBox 23"/>
           <p:cNvSpPr txBox="1"/>
           <p:nvPr/>
         </p:nvSpPr>
         <p:spPr>
           <a:xfrm>
-            <a:off x="6336792" y="2953512"/>
-            <a:ext cx="5239512" cy="256032"/>
+            <a:off x="6437376" y="3145536"/>
+            <a:ext cx="5093208" cy="237744"/>
           </a:xfrm>
           <a:prstGeom prst="rect">
             <a:avLst/>
@@ -4203,7 +4291,7 @@
               </a:spcAft>
             </a:pPr>
             <a:r>
-              <a:rPr sz="980" b="0">
+              <a:rPr sz="1000" b="0">
                 <a:solidFill>
                   <a:srgbClr val="444A55"/>
                 </a:solidFill>
@@ -4216,14 +4304,14 @@
       </p:sp>
       <p:sp>
         <p:nvSpPr>
-          <p:cNvPr id="23" name="TextBox 22"/>
+          <p:cNvPr id="25" name="TextBox 24"/>
           <p:cNvSpPr txBox="1"/>
           <p:nvPr/>
         </p:nvSpPr>
         <p:spPr>
           <a:xfrm>
-            <a:off x="6336792" y="3227832"/>
-            <a:ext cx="5239512" cy="256032"/>
+            <a:off x="6437376" y="3392424"/>
+            <a:ext cx="5093208" cy="237744"/>
           </a:xfrm>
           <a:prstGeom prst="rect">
             <a:avLst/>
@@ -4245,7 +4333,7 @@
               </a:spcAft>
             </a:pPr>
             <a:r>
-              <a:rPr sz="980" b="0">
+              <a:rPr sz="1000" b="0">
                 <a:solidFill>
                   <a:srgbClr val="444A55"/>
                 </a:solidFill>
@@ -4258,14 +4346,14 @@
       </p:sp>
       <p:sp>
         <p:nvSpPr>
-          <p:cNvPr id="24" name="Rounded Rectangle 23"/>
+          <p:cNvPr id="26" name="Rounded Rectangle 25"/>
           <p:cNvSpPr/>
           <p:nvPr/>
         </p:nvSpPr>
         <p:spPr>
           <a:xfrm>
-            <a:off x="457200" y="3886200"/>
-            <a:ext cx="5532120" cy="2487168"/>
+            <a:off x="457200" y="3895344"/>
+            <a:ext cx="5550408" cy="2578608"/>
           </a:xfrm>
           <a:prstGeom prst="roundRect">
             <a:avLst/>
@@ -4304,14 +4392,14 @@
       </p:sp>
       <p:sp>
         <p:nvSpPr>
-          <p:cNvPr id="25" name="Rounded Rectangle 24"/>
+          <p:cNvPr id="27" name="Rounded Rectangle 26"/>
           <p:cNvSpPr/>
           <p:nvPr/>
         </p:nvSpPr>
         <p:spPr>
           <a:xfrm>
-            <a:off x="457200" y="3886200"/>
-            <a:ext cx="5532120" cy="384048"/>
+            <a:off x="457200" y="3895344"/>
+            <a:ext cx="5550408" cy="420624"/>
           </a:xfrm>
           <a:prstGeom prst="roundRect">
             <a:avLst/>
@@ -4348,14 +4436,14 @@
       </p:sp>
       <p:sp>
         <p:nvSpPr>
-          <p:cNvPr id="26" name="TextBox 25"/>
+          <p:cNvPr id="28" name="TextBox 27"/>
           <p:cNvSpPr txBox="1"/>
           <p:nvPr/>
         </p:nvSpPr>
         <p:spPr>
           <a:xfrm>
-            <a:off x="457200" y="3886200"/>
-            <a:ext cx="5532120" cy="384048"/>
+            <a:off x="457200" y="3895344"/>
+            <a:ext cx="5550408" cy="420624"/>
           </a:xfrm>
           <a:prstGeom prst="rect">
             <a:avLst/>
@@ -4377,7 +4465,7 @@
               </a:spcAft>
             </a:pPr>
             <a:r>
-              <a:rPr sz="1300" b="1">
+              <a:rPr sz="1350" b="1">
                 <a:solidFill>
                   <a:srgbClr val="FFFFFF"/>
                 </a:solidFill>
@@ -4390,14 +4478,14 @@
       </p:sp>
       <p:sp>
         <p:nvSpPr>
-          <p:cNvPr id="27" name="TextBox 26"/>
+          <p:cNvPr id="29" name="TextBox 28"/>
           <p:cNvSpPr txBox="1"/>
           <p:nvPr/>
         </p:nvSpPr>
         <p:spPr>
           <a:xfrm>
-            <a:off x="594360" y="4343400"/>
-            <a:ext cx="5257800" cy="502920"/>
+            <a:off x="658368" y="4407408"/>
+            <a:ext cx="5148072" cy="566928"/>
           </a:xfrm>
           <a:prstGeom prst="rect">
             <a:avLst/>
@@ -4412,14 +4500,14 @@
           <a:p>
             <a:pPr algn="l">
               <a:lnSpc>
-                <a:spcPct val="105000"/>
+                <a:spcPct val="108000"/>
               </a:lnSpc>
               <a:spcAft>
                 <a:spcPts val="400"/>
               </a:spcAft>
             </a:pPr>
             <a:r>
-              <a:rPr sz="1019" b="0">
+              <a:rPr sz="1030" b="0">
                 <a:solidFill>
                   <a:srgbClr val="444A55"/>
                 </a:solidFill>
@@ -4432,14 +4520,58 @@
       </p:sp>
       <p:sp>
         <p:nvSpPr>
-          <p:cNvPr id="28" name="TextBox 27"/>
+          <p:cNvPr id="30" name="Rectangle 29"/>
+          <p:cNvSpPr/>
+          <p:nvPr/>
+        </p:nvSpPr>
+        <p:spPr>
+          <a:xfrm>
+            <a:off x="658368" y="5047488"/>
+            <a:ext cx="5148072" cy="12700"/>
+          </a:xfrm>
+          <a:prstGeom prst="rect">
+            <a:avLst/>
+          </a:prstGeom>
+          <a:solidFill>
+            <a:srgbClr val="D5DDE6"/>
+          </a:solidFill>
+          <a:ln>
+            <a:noFill/>
+          </a:ln>
+          <a:effectLst/>
+        </p:spPr>
+        <p:style>
+          <a:lnRef idx="1">
+            <a:schemeClr val="accent1"/>
+          </a:lnRef>
+          <a:fillRef idx="3">
+            <a:schemeClr val="accent1"/>
+          </a:fillRef>
+          <a:effectRef idx="2">
+            <a:schemeClr val="accent1"/>
+          </a:effectRef>
+          <a:fontRef idx="minor">
+            <a:schemeClr val="lt1"/>
+          </a:fontRef>
+        </p:style>
+        <p:txBody>
+          <a:bodyPr rtlCol="0" anchor="ctr"/>
+          <a:lstStyle/>
+          <a:p>
+            <a:pPr algn="ctr"/>
+          </a:p>
+        </p:txBody>
+      </p:sp>
+      <p:sp>
+        <p:nvSpPr>
+          <p:cNvPr id="31" name="TextBox 30"/>
           <p:cNvSpPr txBox="1"/>
           <p:nvPr/>
         </p:nvSpPr>
         <p:spPr>
           <a:xfrm>
-            <a:off x="594360" y="4846320"/>
-            <a:ext cx="5257800" cy="201168"/>
+            <a:off x="658368" y="5102352"/>
+            <a:ext cx="5148072" cy="219456"/>
           </a:xfrm>
           <a:prstGeom prst="rect">
             <a:avLst/>
@@ -4474,14 +4606,14 @@
       </p:sp>
       <p:sp>
         <p:nvSpPr>
-          <p:cNvPr id="29" name="TextBox 28"/>
+          <p:cNvPr id="32" name="TextBox 31"/>
           <p:cNvSpPr txBox="1"/>
           <p:nvPr/>
         </p:nvSpPr>
         <p:spPr>
           <a:xfrm>
-            <a:off x="621792" y="5056632"/>
-            <a:ext cx="5239512" cy="256032"/>
+            <a:off x="694944" y="5376672"/>
+            <a:ext cx="5093208" cy="237744"/>
           </a:xfrm>
           <a:prstGeom prst="rect">
             <a:avLst/>
@@ -4503,7 +4635,7 @@
               </a:spcAft>
             </a:pPr>
             <a:r>
-              <a:rPr sz="980" b="0">
+              <a:rPr sz="1000" b="0">
                 <a:solidFill>
                   <a:srgbClr val="444A55"/>
                 </a:solidFill>
@@ -4516,14 +4648,14 @@
       </p:sp>
       <p:sp>
         <p:nvSpPr>
-          <p:cNvPr id="30" name="TextBox 29"/>
+          <p:cNvPr id="33" name="TextBox 32"/>
           <p:cNvSpPr txBox="1"/>
           <p:nvPr/>
         </p:nvSpPr>
         <p:spPr>
           <a:xfrm>
-            <a:off x="621792" y="5330952"/>
-            <a:ext cx="5239512" cy="256032"/>
+            <a:off x="694944" y="5623560"/>
+            <a:ext cx="5093208" cy="237744"/>
           </a:xfrm>
           <a:prstGeom prst="rect">
             <a:avLst/>
@@ -4545,7 +4677,7 @@
               </a:spcAft>
             </a:pPr>
             <a:r>
-              <a:rPr sz="980" b="0">
+              <a:rPr sz="1000" b="0">
                 <a:solidFill>
                   <a:srgbClr val="444A55"/>
                 </a:solidFill>
@@ -4558,14 +4690,14 @@
       </p:sp>
       <p:sp>
         <p:nvSpPr>
-          <p:cNvPr id="31" name="TextBox 30"/>
+          <p:cNvPr id="34" name="TextBox 33"/>
           <p:cNvSpPr txBox="1"/>
           <p:nvPr/>
         </p:nvSpPr>
         <p:spPr>
           <a:xfrm>
-            <a:off x="621792" y="5605272"/>
-            <a:ext cx="5239512" cy="256032"/>
+            <a:off x="694944" y="5870448"/>
+            <a:ext cx="5093208" cy="237744"/>
           </a:xfrm>
           <a:prstGeom prst="rect">
             <a:avLst/>
@@ -4587,7 +4719,7 @@
               </a:spcAft>
             </a:pPr>
             <a:r>
-              <a:rPr sz="980" b="0">
+              <a:rPr sz="1000" b="0">
                 <a:solidFill>
                   <a:srgbClr val="444A55"/>
                 </a:solidFill>
@@ -4600,14 +4732,14 @@
       </p:sp>
       <p:sp>
         <p:nvSpPr>
-          <p:cNvPr id="32" name="TextBox 31"/>
+          <p:cNvPr id="35" name="TextBox 34"/>
           <p:cNvSpPr txBox="1"/>
           <p:nvPr/>
         </p:nvSpPr>
         <p:spPr>
           <a:xfrm>
-            <a:off x="621792" y="5879592"/>
-            <a:ext cx="5239512" cy="256032"/>
+            <a:off x="694944" y="6117336"/>
+            <a:ext cx="5093208" cy="237744"/>
           </a:xfrm>
           <a:prstGeom prst="rect">
             <a:avLst/>
@@ -4629,7 +4761,7 @@
               </a:spcAft>
             </a:pPr>
             <a:r>
-              <a:rPr sz="980" b="0">
+              <a:rPr sz="1000" b="0">
                 <a:solidFill>
                   <a:srgbClr val="444A55"/>
                 </a:solidFill>
@@ -4642,14 +4774,14 @@
       </p:sp>
       <p:sp>
         <p:nvSpPr>
-          <p:cNvPr id="33" name="Rounded Rectangle 32"/>
+          <p:cNvPr id="36" name="Rounded Rectangle 35"/>
           <p:cNvSpPr/>
           <p:nvPr/>
         </p:nvSpPr>
         <p:spPr>
           <a:xfrm>
-            <a:off x="6172200" y="3886200"/>
-            <a:ext cx="5532120" cy="2487168"/>
+            <a:off x="6199632" y="3895344"/>
+            <a:ext cx="5550408" cy="2578608"/>
           </a:xfrm>
           <a:prstGeom prst="roundRect">
             <a:avLst/>
@@ -4688,14 +4820,14 @@
       </p:sp>
       <p:sp>
         <p:nvSpPr>
-          <p:cNvPr id="34" name="Rounded Rectangle 33"/>
+          <p:cNvPr id="37" name="Rounded Rectangle 36"/>
           <p:cNvSpPr/>
           <p:nvPr/>
         </p:nvSpPr>
         <p:spPr>
           <a:xfrm>
-            <a:off x="6172200" y="3886200"/>
-            <a:ext cx="5532120" cy="384048"/>
+            <a:off x="6199632" y="3895344"/>
+            <a:ext cx="5550408" cy="420624"/>
           </a:xfrm>
           <a:prstGeom prst="roundRect">
             <a:avLst/>
@@ -4732,14 +4864,14 @@
       </p:sp>
       <p:sp>
         <p:nvSpPr>
-          <p:cNvPr id="35" name="TextBox 34"/>
+          <p:cNvPr id="38" name="TextBox 37"/>
           <p:cNvSpPr txBox="1"/>
           <p:nvPr/>
         </p:nvSpPr>
         <p:spPr>
           <a:xfrm>
-            <a:off x="6172200" y="3886200"/>
-            <a:ext cx="5532120" cy="384048"/>
+            <a:off x="6199632" y="3895344"/>
+            <a:ext cx="5550408" cy="420624"/>
           </a:xfrm>
           <a:prstGeom prst="rect">
             <a:avLst/>
@@ -4761,7 +4893,7 @@
               </a:spcAft>
             </a:pPr>
             <a:r>
-              <a:rPr sz="1300" b="1">
+              <a:rPr sz="1350" b="1">
                 <a:solidFill>
                   <a:srgbClr val="FFFFFF"/>
                 </a:solidFill>
@@ -4774,14 +4906,14 @@
       </p:sp>
       <p:sp>
         <p:nvSpPr>
-          <p:cNvPr id="36" name="TextBox 35"/>
+          <p:cNvPr id="39" name="TextBox 38"/>
           <p:cNvSpPr txBox="1"/>
           <p:nvPr/>
         </p:nvSpPr>
         <p:spPr>
           <a:xfrm>
-            <a:off x="6309360" y="4343400"/>
-            <a:ext cx="5257800" cy="502920"/>
+            <a:off x="6400800" y="4407408"/>
+            <a:ext cx="5148072" cy="566928"/>
           </a:xfrm>
           <a:prstGeom prst="rect">
             <a:avLst/>
@@ -4796,14 +4928,14 @@
           <a:p>
             <a:pPr algn="l">
               <a:lnSpc>
-                <a:spcPct val="105000"/>
+                <a:spcPct val="108000"/>
               </a:lnSpc>
               <a:spcAft>
                 <a:spcPts val="400"/>
               </a:spcAft>
             </a:pPr>
             <a:r>
-              <a:rPr sz="1019" b="0">
+              <a:rPr sz="1030" b="0">
                 <a:solidFill>
                   <a:srgbClr val="444A55"/>
                 </a:solidFill>
@@ -4816,14 +4948,58 @@
       </p:sp>
       <p:sp>
         <p:nvSpPr>
-          <p:cNvPr id="37" name="TextBox 36"/>
+          <p:cNvPr id="40" name="Rectangle 39"/>
+          <p:cNvSpPr/>
+          <p:nvPr/>
+        </p:nvSpPr>
+        <p:spPr>
+          <a:xfrm>
+            <a:off x="6400800" y="5047488"/>
+            <a:ext cx="5148072" cy="12700"/>
+          </a:xfrm>
+          <a:prstGeom prst="rect">
+            <a:avLst/>
+          </a:prstGeom>
+          <a:solidFill>
+            <a:srgbClr val="D5DDE6"/>
+          </a:solidFill>
+          <a:ln>
+            <a:noFill/>
+          </a:ln>
+          <a:effectLst/>
+        </p:spPr>
+        <p:style>
+          <a:lnRef idx="1">
+            <a:schemeClr val="accent1"/>
+          </a:lnRef>
+          <a:fillRef idx="3">
+            <a:schemeClr val="accent1"/>
+          </a:fillRef>
+          <a:effectRef idx="2">
+            <a:schemeClr val="accent1"/>
+          </a:effectRef>
+          <a:fontRef idx="minor">
+            <a:schemeClr val="lt1"/>
+          </a:fontRef>
+        </p:style>
+        <p:txBody>
+          <a:bodyPr rtlCol="0" anchor="ctr"/>
+          <a:lstStyle/>
+          <a:p>
+            <a:pPr algn="ctr"/>
+          </a:p>
+        </p:txBody>
+      </p:sp>
+      <p:sp>
+        <p:nvSpPr>
+          <p:cNvPr id="41" name="TextBox 40"/>
           <p:cNvSpPr txBox="1"/>
           <p:nvPr/>
         </p:nvSpPr>
         <p:spPr>
           <a:xfrm>
-            <a:off x="6309360" y="4846320"/>
-            <a:ext cx="5257800" cy="201168"/>
+            <a:off x="6400800" y="5102352"/>
+            <a:ext cx="5148072" cy="219456"/>
           </a:xfrm>
           <a:prstGeom prst="rect">
             <a:avLst/>
@@ -4858,14 +5034,14 @@
       </p:sp>
       <p:sp>
         <p:nvSpPr>
-          <p:cNvPr id="38" name="TextBox 37"/>
+          <p:cNvPr id="42" name="TextBox 41"/>
           <p:cNvSpPr txBox="1"/>
           <p:nvPr/>
         </p:nvSpPr>
         <p:spPr>
           <a:xfrm>
-            <a:off x="6336792" y="5056632"/>
-            <a:ext cx="5239512" cy="256032"/>
+            <a:off x="6437376" y="5376672"/>
+            <a:ext cx="5093208" cy="237744"/>
           </a:xfrm>
           <a:prstGeom prst="rect">
             <a:avLst/>
@@ -4887,7 +5063,7 @@
               </a:spcAft>
             </a:pPr>
             <a:r>
-              <a:rPr sz="980" b="0">
+              <a:rPr sz="1000" b="0">
                 <a:solidFill>
                   <a:srgbClr val="444A55"/>
                 </a:solidFill>
@@ -4900,14 +5076,14 @@
       </p:sp>
       <p:sp>
         <p:nvSpPr>
-          <p:cNvPr id="39" name="TextBox 38"/>
+          <p:cNvPr id="43" name="TextBox 42"/>
           <p:cNvSpPr txBox="1"/>
           <p:nvPr/>
         </p:nvSpPr>
         <p:spPr>
           <a:xfrm>
-            <a:off x="6336792" y="5330952"/>
-            <a:ext cx="5239512" cy="256032"/>
+            <a:off x="6437376" y="5623560"/>
+            <a:ext cx="5093208" cy="237744"/>
           </a:xfrm>
           <a:prstGeom prst="rect">
             <a:avLst/>
@@ -4929,7 +5105,7 @@
               </a:spcAft>
             </a:pPr>
             <a:r>
-              <a:rPr sz="980" b="0">
+              <a:rPr sz="1000" b="0">
                 <a:solidFill>
                   <a:srgbClr val="444A55"/>
                 </a:solidFill>
@@ -4942,14 +5118,14 @@
       </p:sp>
       <p:sp>
         <p:nvSpPr>
-          <p:cNvPr id="40" name="TextBox 39"/>
+          <p:cNvPr id="44" name="TextBox 43"/>
           <p:cNvSpPr txBox="1"/>
           <p:nvPr/>
         </p:nvSpPr>
         <p:spPr>
           <a:xfrm>
-            <a:off x="6336792" y="5605272"/>
-            <a:ext cx="5239512" cy="256032"/>
+            <a:off x="6437376" y="5870448"/>
+            <a:ext cx="5093208" cy="237744"/>
           </a:xfrm>
           <a:prstGeom prst="rect">
             <a:avLst/>
@@ -4971,7 +5147,7 @@
               </a:spcAft>
             </a:pPr>
             <a:r>
-              <a:rPr sz="980" b="0">
+              <a:rPr sz="1000" b="0">
                 <a:solidFill>
                   <a:srgbClr val="444A55"/>
                 </a:solidFill>
@@ -4984,14 +5160,14 @@
       </p:sp>
       <p:sp>
         <p:nvSpPr>
-          <p:cNvPr id="41" name="TextBox 40"/>
+          <p:cNvPr id="45" name="TextBox 44"/>
           <p:cNvSpPr txBox="1"/>
           <p:nvPr/>
         </p:nvSpPr>
         <p:spPr>
           <a:xfrm>
-            <a:off x="6336792" y="5879592"/>
-            <a:ext cx="5239512" cy="256032"/>
+            <a:off x="6437376" y="6117336"/>
+            <a:ext cx="5093208" cy="237744"/>
           </a:xfrm>
           <a:prstGeom prst="rect">
             <a:avLst/>
@@ -5013,7 +5189,7 @@
               </a:spcAft>
             </a:pPr>
             <a:r>
-              <a:rPr sz="980" b="0">
+              <a:rPr sz="1000" b="0">
                 <a:solidFill>
                   <a:srgbClr val="444A55"/>
                 </a:solidFill>
@@ -5026,7 +5202,7 @@
       </p:sp>
       <p:sp>
         <p:nvSpPr>
-          <p:cNvPr id="42" name="TextBox 41"/>
+          <p:cNvPr id="46" name="TextBox 45"/>
           <p:cNvSpPr txBox="1"/>
           <p:nvPr/>
         </p:nvSpPr>
@@ -5272,8 +5448,8 @@
         </p:nvSpPr>
         <p:spPr>
           <a:xfrm>
-            <a:off x="502920" y="1051560"/>
-            <a:ext cx="11155680" cy="347472"/>
+            <a:off x="457200" y="1060704"/>
+            <a:ext cx="11247120" cy="329184"/>
           </a:xfrm>
           <a:prstGeom prst="rect">
             <a:avLst/>
@@ -5314,8 +5490,8 @@
         </p:nvSpPr>
         <p:spPr>
           <a:xfrm>
-            <a:off x="411480" y="1444752"/>
-            <a:ext cx="2148840" cy="475488"/>
+            <a:off x="457200" y="1463040"/>
+            <a:ext cx="2240280" cy="429768"/>
           </a:xfrm>
           <a:prstGeom prst="rect">
             <a:avLst/>
@@ -5360,8 +5536,8 @@
         </p:nvSpPr>
         <p:spPr>
           <a:xfrm>
-            <a:off x="411480" y="1444752"/>
-            <a:ext cx="2148840" cy="475488"/>
+            <a:off x="457200" y="1463040"/>
+            <a:ext cx="2240280" cy="429768"/>
           </a:xfrm>
           <a:prstGeom prst="rect">
             <a:avLst/>
@@ -5383,7 +5559,7 @@
               </a:spcAft>
             </a:pPr>
             <a:r>
-              <a:rPr sz="1100" b="1">
+              <a:rPr sz="1150" b="1">
                 <a:solidFill>
                   <a:srgbClr val="FFFFFF"/>
                 </a:solidFill>
@@ -5402,8 +5578,8 @@
         </p:nvSpPr>
         <p:spPr>
           <a:xfrm>
-            <a:off x="2560320" y="1444752"/>
-            <a:ext cx="5806440" cy="475488"/>
+            <a:off x="2697480" y="1463040"/>
+            <a:ext cx="5715000" cy="429768"/>
           </a:xfrm>
           <a:prstGeom prst="rect">
             <a:avLst/>
@@ -5448,8 +5624,8 @@
         </p:nvSpPr>
         <p:spPr>
           <a:xfrm>
-            <a:off x="2560320" y="1444752"/>
-            <a:ext cx="5806440" cy="475488"/>
+            <a:off x="2697480" y="1463040"/>
+            <a:ext cx="5715000" cy="429768"/>
           </a:xfrm>
           <a:prstGeom prst="rect">
             <a:avLst/>
@@ -5471,7 +5647,7 @@
               </a:spcAft>
             </a:pPr>
             <a:r>
-              <a:rPr sz="1100" b="1">
+              <a:rPr sz="1150" b="1">
                 <a:solidFill>
                   <a:srgbClr val="FFFFFF"/>
                 </a:solidFill>
@@ -5490,8 +5666,8 @@
         </p:nvSpPr>
         <p:spPr>
           <a:xfrm>
-            <a:off x="8366760" y="1444752"/>
-            <a:ext cx="3794760" cy="475488"/>
+            <a:off x="8412480" y="1463040"/>
+            <a:ext cx="3337560" cy="429768"/>
           </a:xfrm>
           <a:prstGeom prst="rect">
             <a:avLst/>
@@ -5536,8 +5712,8 @@
         </p:nvSpPr>
         <p:spPr>
           <a:xfrm>
-            <a:off x="8366760" y="1444752"/>
-            <a:ext cx="3794760" cy="475488"/>
+            <a:off x="8412480" y="1463040"/>
+            <a:ext cx="3337560" cy="429768"/>
           </a:xfrm>
           <a:prstGeom prst="rect">
             <a:avLst/>
@@ -5559,7 +5735,7 @@
               </a:spcAft>
             </a:pPr>
             <a:r>
-              <a:rPr sz="1100" b="1">
+              <a:rPr sz="1150" b="1">
                 <a:solidFill>
                   <a:srgbClr val="FFFFFF"/>
                 </a:solidFill>
@@ -5578,8 +5754,8 @@
         </p:nvSpPr>
         <p:spPr>
           <a:xfrm>
-            <a:off x="411480" y="1920240"/>
-            <a:ext cx="2148840" cy="475488"/>
+            <a:off x="457200" y="1892808"/>
+            <a:ext cx="2240280" cy="429768"/>
           </a:xfrm>
           <a:prstGeom prst="rect">
             <a:avLst/>
@@ -5624,8 +5800,8 @@
         </p:nvSpPr>
         <p:spPr>
           <a:xfrm>
-            <a:off x="449580" y="1920240"/>
-            <a:ext cx="2072640" cy="475488"/>
+            <a:off x="495300" y="1892808"/>
+            <a:ext cx="2164080" cy="429768"/>
           </a:xfrm>
           <a:prstGeom prst="rect">
             <a:avLst/>
@@ -5640,14 +5816,14 @@
           <a:p>
             <a:pPr algn="ctr">
               <a:lnSpc>
-                <a:spcPct val="92000"/>
+                <a:spcPct val="95000"/>
               </a:lnSpc>
               <a:spcAft>
                 <a:spcPts val="400"/>
               </a:spcAft>
             </a:pPr>
             <a:r>
-              <a:rPr sz="1019" b="0">
+              <a:rPr sz="1050" b="0">
                 <a:solidFill>
                   <a:srgbClr val="444A55"/>
                 </a:solidFill>
@@ -5666,8 +5842,8 @@
         </p:nvSpPr>
         <p:spPr>
           <a:xfrm>
-            <a:off x="2560320" y="1920240"/>
-            <a:ext cx="5806440" cy="475488"/>
+            <a:off x="2697480" y="1892808"/>
+            <a:ext cx="5715000" cy="429768"/>
           </a:xfrm>
           <a:prstGeom prst="rect">
             <a:avLst/>
@@ -5712,8 +5888,8 @@
         </p:nvSpPr>
         <p:spPr>
           <a:xfrm>
-            <a:off x="2598420" y="1920240"/>
-            <a:ext cx="5730240" cy="475488"/>
+            <a:off x="2824480" y="1892808"/>
+            <a:ext cx="5511800" cy="429768"/>
           </a:xfrm>
           <a:prstGeom prst="rect">
             <a:avLst/>
@@ -5726,16 +5902,16 @@
           </a:bodyPr>
           <a:lstStyle/>
           <a:p>
-            <a:pPr algn="ctr">
-              <a:lnSpc>
-                <a:spcPct val="92000"/>
+            <a:pPr algn="l">
+              <a:lnSpc>
+                <a:spcPct val="95000"/>
               </a:lnSpc>
               <a:spcAft>
                 <a:spcPts val="400"/>
               </a:spcAft>
             </a:pPr>
             <a:r>
-              <a:rPr sz="1019" b="0">
+              <a:rPr sz="1050" b="0">
                 <a:solidFill>
                   <a:srgbClr val="444A55"/>
                 </a:solidFill>
@@ -5754,8 +5930,8 @@
         </p:nvSpPr>
         <p:spPr>
           <a:xfrm>
-            <a:off x="8366760" y="1920240"/>
-            <a:ext cx="3794760" cy="475488"/>
+            <a:off x="8412480" y="1892808"/>
+            <a:ext cx="3337560" cy="429768"/>
           </a:xfrm>
           <a:prstGeom prst="rect">
             <a:avLst/>
@@ -5800,8 +5976,8 @@
         </p:nvSpPr>
         <p:spPr>
           <a:xfrm>
-            <a:off x="8404860" y="1920240"/>
-            <a:ext cx="3718560" cy="475488"/>
+            <a:off x="8450580" y="1892808"/>
+            <a:ext cx="3261360" cy="429768"/>
           </a:xfrm>
           <a:prstGeom prst="rect">
             <a:avLst/>
@@ -5816,20 +5992,20 @@
           <a:p>
             <a:pPr algn="ctr">
               <a:lnSpc>
-                <a:spcPct val="92000"/>
+                <a:spcPct val="95000"/>
               </a:lnSpc>
               <a:spcAft>
                 <a:spcPts val="400"/>
               </a:spcAft>
             </a:pPr>
             <a:r>
-              <a:rPr sz="1019" b="0">
+              <a:rPr sz="1050" b="0">
                 <a:solidFill>
                   <a:srgbClr val="444A55"/>
                 </a:solidFill>
                 <a:latin typeface="Apple SD Gothic Neo"/>
               </a:rPr>
-              <a:t>VS Code + Cline SR + Gauss</a:t>
+              <a:t>Cline SR + Gauss</a:t>
             </a:r>
           </a:p>
         </p:txBody>
@@ -5842,8 +6018,8 @@
         </p:nvSpPr>
         <p:spPr>
           <a:xfrm>
-            <a:off x="411480" y="2395728"/>
-            <a:ext cx="2148840" cy="475488"/>
+            <a:off x="457200" y="2322576"/>
+            <a:ext cx="2240280" cy="429768"/>
           </a:xfrm>
           <a:prstGeom prst="rect">
             <a:avLst/>
@@ -5888,8 +6064,8 @@
         </p:nvSpPr>
         <p:spPr>
           <a:xfrm>
-            <a:off x="449580" y="2395728"/>
-            <a:ext cx="2072640" cy="475488"/>
+            <a:off x="495300" y="2322576"/>
+            <a:ext cx="2164080" cy="429768"/>
           </a:xfrm>
           <a:prstGeom prst="rect">
             <a:avLst/>
@@ -5904,14 +6080,14 @@
           <a:p>
             <a:pPr algn="ctr">
               <a:lnSpc>
-                <a:spcPct val="92000"/>
+                <a:spcPct val="95000"/>
               </a:lnSpc>
               <a:spcAft>
                 <a:spcPts val="400"/>
               </a:spcAft>
             </a:pPr>
             <a:r>
-              <a:rPr sz="1019" b="0">
+              <a:rPr sz="1050" b="0">
                 <a:solidFill>
                   <a:srgbClr val="444A55"/>
                 </a:solidFill>
@@ -5930,8 +6106,8 @@
         </p:nvSpPr>
         <p:spPr>
           <a:xfrm>
-            <a:off x="2560320" y="2395728"/>
-            <a:ext cx="5806440" cy="475488"/>
+            <a:off x="2697480" y="2322576"/>
+            <a:ext cx="5715000" cy="429768"/>
           </a:xfrm>
           <a:prstGeom prst="rect">
             <a:avLst/>
@@ -5976,8 +6152,8 @@
         </p:nvSpPr>
         <p:spPr>
           <a:xfrm>
-            <a:off x="2598420" y="2395728"/>
-            <a:ext cx="5730240" cy="475488"/>
+            <a:off x="2824480" y="2322576"/>
+            <a:ext cx="5511800" cy="429768"/>
           </a:xfrm>
           <a:prstGeom prst="rect">
             <a:avLst/>
@@ -5990,16 +6166,16 @@
           </a:bodyPr>
           <a:lstStyle/>
           <a:p>
-            <a:pPr algn="ctr">
-              <a:lnSpc>
-                <a:spcPct val="92000"/>
+            <a:pPr algn="l">
+              <a:lnSpc>
+                <a:spcPct val="95000"/>
               </a:lnSpc>
               <a:spcAft>
                 <a:spcPts val="400"/>
               </a:spcAft>
             </a:pPr>
             <a:r>
-              <a:rPr sz="1019" b="0">
+              <a:rPr sz="1050" b="0">
                 <a:solidFill>
                   <a:srgbClr val="444A55"/>
                 </a:solidFill>
@@ -6018,8 +6194,8 @@
         </p:nvSpPr>
         <p:spPr>
           <a:xfrm>
-            <a:off x="8366760" y="2395728"/>
-            <a:ext cx="3794760" cy="475488"/>
+            <a:off x="8412480" y="2322576"/>
+            <a:ext cx="3337560" cy="429768"/>
           </a:xfrm>
           <a:prstGeom prst="rect">
             <a:avLst/>
@@ -6064,8 +6240,8 @@
         </p:nvSpPr>
         <p:spPr>
           <a:xfrm>
-            <a:off x="8404860" y="2395728"/>
-            <a:ext cx="3718560" cy="475488"/>
+            <a:off x="8450580" y="2322576"/>
+            <a:ext cx="3261360" cy="429768"/>
           </a:xfrm>
           <a:prstGeom prst="rect">
             <a:avLst/>
@@ -6080,14 +6256,14 @@
           <a:p>
             <a:pPr algn="ctr">
               <a:lnSpc>
-                <a:spcPct val="92000"/>
+                <a:spcPct val="95000"/>
               </a:lnSpc>
               <a:spcAft>
                 <a:spcPts val="400"/>
               </a:spcAft>
             </a:pPr>
             <a:r>
-              <a:rPr sz="1019" b="0">
+              <a:rPr sz="1050" b="0">
                 <a:solidFill>
                   <a:srgbClr val="444A55"/>
                 </a:solidFill>
@@ -6106,8 +6282,8 @@
         </p:nvSpPr>
         <p:spPr>
           <a:xfrm>
-            <a:off x="411480" y="2871216"/>
-            <a:ext cx="2148840" cy="475488"/>
+            <a:off x="457200" y="2752344"/>
+            <a:ext cx="2240280" cy="429768"/>
           </a:xfrm>
           <a:prstGeom prst="rect">
             <a:avLst/>
@@ -6152,8 +6328,8 @@
         </p:nvSpPr>
         <p:spPr>
           <a:xfrm>
-            <a:off x="449580" y="2871216"/>
-            <a:ext cx="2072640" cy="475488"/>
+            <a:off x="495300" y="2752344"/>
+            <a:ext cx="2164080" cy="429768"/>
           </a:xfrm>
           <a:prstGeom prst="rect">
             <a:avLst/>
@@ -6168,14 +6344,14 @@
           <a:p>
             <a:pPr algn="ctr">
               <a:lnSpc>
-                <a:spcPct val="92000"/>
+                <a:spcPct val="95000"/>
               </a:lnSpc>
               <a:spcAft>
                 <a:spcPts val="400"/>
               </a:spcAft>
             </a:pPr>
             <a:r>
-              <a:rPr sz="1019" b="0">
+              <a:rPr sz="1050" b="0">
                 <a:solidFill>
                   <a:srgbClr val="444A55"/>
                 </a:solidFill>
@@ -6194,8 +6370,8 @@
         </p:nvSpPr>
         <p:spPr>
           <a:xfrm>
-            <a:off x="2560320" y="2871216"/>
-            <a:ext cx="5806440" cy="475488"/>
+            <a:off x="2697480" y="2752344"/>
+            <a:ext cx="5715000" cy="429768"/>
           </a:xfrm>
           <a:prstGeom prst="rect">
             <a:avLst/>
@@ -6240,8 +6416,8 @@
         </p:nvSpPr>
         <p:spPr>
           <a:xfrm>
-            <a:off x="2598420" y="2871216"/>
-            <a:ext cx="5730240" cy="475488"/>
+            <a:off x="2824480" y="2752344"/>
+            <a:ext cx="5511800" cy="429768"/>
           </a:xfrm>
           <a:prstGeom prst="rect">
             <a:avLst/>
@@ -6254,16 +6430,16 @@
           </a:bodyPr>
           <a:lstStyle/>
           <a:p>
-            <a:pPr algn="ctr">
-              <a:lnSpc>
-                <a:spcPct val="92000"/>
+            <a:pPr algn="l">
+              <a:lnSpc>
+                <a:spcPct val="95000"/>
               </a:lnSpc>
               <a:spcAft>
                 <a:spcPts val="400"/>
               </a:spcAft>
             </a:pPr>
             <a:r>
-              <a:rPr sz="1019" b="0">
+              <a:rPr sz="1050" b="0">
                 <a:solidFill>
                   <a:srgbClr val="444A55"/>
                 </a:solidFill>
@@ -6282,8 +6458,8 @@
         </p:nvSpPr>
         <p:spPr>
           <a:xfrm>
-            <a:off x="8366760" y="2871216"/>
-            <a:ext cx="3794760" cy="475488"/>
+            <a:off x="8412480" y="2752344"/>
+            <a:ext cx="3337560" cy="429768"/>
           </a:xfrm>
           <a:prstGeom prst="rect">
             <a:avLst/>
@@ -6328,8 +6504,8 @@
         </p:nvSpPr>
         <p:spPr>
           <a:xfrm>
-            <a:off x="8404860" y="2871216"/>
-            <a:ext cx="3718560" cy="475488"/>
+            <a:off x="8450580" y="2752344"/>
+            <a:ext cx="3261360" cy="429768"/>
           </a:xfrm>
           <a:prstGeom prst="rect">
             <a:avLst/>
@@ -6344,20 +6520,20 @@
           <a:p>
             <a:pPr algn="ctr">
               <a:lnSpc>
-                <a:spcPct val="92000"/>
+                <a:spcPct val="95000"/>
               </a:lnSpc>
               <a:spcAft>
                 <a:spcPts val="400"/>
               </a:spcAft>
             </a:pPr>
             <a:r>
-              <a:rPr sz="1019" b="0">
+              <a:rPr sz="1050" b="0">
                 <a:solidFill>
                   <a:srgbClr val="444A55"/>
                 </a:solidFill>
                 <a:latin typeface="Apple SD Gothic Neo"/>
               </a:rPr>
-              <a:t>Cline SR + Gauss / Ollama</a:t>
+              <a:t>Cline SR + Gauss/Ollama</a:t>
             </a:r>
           </a:p>
         </p:txBody>
@@ -6370,8 +6546,8 @@
         </p:nvSpPr>
         <p:spPr>
           <a:xfrm>
-            <a:off x="411480" y="3346704"/>
-            <a:ext cx="2148840" cy="475488"/>
+            <a:off x="457200" y="3182112"/>
+            <a:ext cx="2240280" cy="429768"/>
           </a:xfrm>
           <a:prstGeom prst="rect">
             <a:avLst/>
@@ -6416,8 +6592,8 @@
         </p:nvSpPr>
         <p:spPr>
           <a:xfrm>
-            <a:off x="449580" y="3346704"/>
-            <a:ext cx="2072640" cy="475488"/>
+            <a:off x="495300" y="3182112"/>
+            <a:ext cx="2164080" cy="429768"/>
           </a:xfrm>
           <a:prstGeom prst="rect">
             <a:avLst/>
@@ -6432,14 +6608,14 @@
           <a:p>
             <a:pPr algn="ctr">
               <a:lnSpc>
-                <a:spcPct val="92000"/>
+                <a:spcPct val="95000"/>
               </a:lnSpc>
               <a:spcAft>
                 <a:spcPts val="400"/>
               </a:spcAft>
             </a:pPr>
             <a:r>
-              <a:rPr sz="1019" b="0">
+              <a:rPr sz="1050" b="0">
                 <a:solidFill>
                   <a:srgbClr val="444A55"/>
                 </a:solidFill>
@@ -6458,8 +6634,8 @@
         </p:nvSpPr>
         <p:spPr>
           <a:xfrm>
-            <a:off x="2560320" y="3346704"/>
-            <a:ext cx="5806440" cy="475488"/>
+            <a:off x="2697480" y="3182112"/>
+            <a:ext cx="5715000" cy="429768"/>
           </a:xfrm>
           <a:prstGeom prst="rect">
             <a:avLst/>
@@ -6504,8 +6680,8 @@
         </p:nvSpPr>
         <p:spPr>
           <a:xfrm>
-            <a:off x="2598420" y="3346704"/>
-            <a:ext cx="5730240" cy="475488"/>
+            <a:off x="2824480" y="3182112"/>
+            <a:ext cx="5511800" cy="429768"/>
           </a:xfrm>
           <a:prstGeom prst="rect">
             <a:avLst/>
@@ -6518,16 +6694,16 @@
           </a:bodyPr>
           <a:lstStyle/>
           <a:p>
-            <a:pPr algn="ctr">
-              <a:lnSpc>
-                <a:spcPct val="92000"/>
+            <a:pPr algn="l">
+              <a:lnSpc>
+                <a:spcPct val="95000"/>
               </a:lnSpc>
               <a:spcAft>
                 <a:spcPts val="400"/>
               </a:spcAft>
             </a:pPr>
             <a:r>
-              <a:rPr sz="1019" b="0">
+              <a:rPr sz="1050" b="0">
                 <a:solidFill>
                   <a:srgbClr val="444A55"/>
                 </a:solidFill>
@@ -6546,8 +6722,8 @@
         </p:nvSpPr>
         <p:spPr>
           <a:xfrm>
-            <a:off x="8366760" y="3346704"/>
-            <a:ext cx="3794760" cy="475488"/>
+            <a:off x="8412480" y="3182112"/>
+            <a:ext cx="3337560" cy="429768"/>
           </a:xfrm>
           <a:prstGeom prst="rect">
             <a:avLst/>
@@ -6592,8 +6768,8 @@
         </p:nvSpPr>
         <p:spPr>
           <a:xfrm>
-            <a:off x="8404860" y="3346704"/>
-            <a:ext cx="3718560" cy="475488"/>
+            <a:off x="8450580" y="3182112"/>
+            <a:ext cx="3261360" cy="429768"/>
           </a:xfrm>
           <a:prstGeom prst="rect">
             <a:avLst/>
@@ -6608,14 +6784,14 @@
           <a:p>
             <a:pPr algn="ctr">
               <a:lnSpc>
-                <a:spcPct val="92000"/>
+                <a:spcPct val="95000"/>
               </a:lnSpc>
               <a:spcAft>
                 <a:spcPts val="400"/>
               </a:spcAft>
             </a:pPr>
             <a:r>
-              <a:rPr sz="1019" b="0">
+              <a:rPr sz="1050" b="0">
                 <a:solidFill>
                   <a:srgbClr val="444A55"/>
                 </a:solidFill>
@@ -6634,8 +6810,8 @@
         </p:nvSpPr>
         <p:spPr>
           <a:xfrm>
-            <a:off x="411480" y="3822192"/>
-            <a:ext cx="2148840" cy="475488"/>
+            <a:off x="457200" y="3611880"/>
+            <a:ext cx="2240280" cy="429768"/>
           </a:xfrm>
           <a:prstGeom prst="rect">
             <a:avLst/>
@@ -6680,8 +6856,8 @@
         </p:nvSpPr>
         <p:spPr>
           <a:xfrm>
-            <a:off x="449580" y="3822192"/>
-            <a:ext cx="2072640" cy="475488"/>
+            <a:off x="495300" y="3611880"/>
+            <a:ext cx="2164080" cy="429768"/>
           </a:xfrm>
           <a:prstGeom prst="rect">
             <a:avLst/>
@@ -6696,14 +6872,14 @@
           <a:p>
             <a:pPr algn="ctr">
               <a:lnSpc>
-                <a:spcPct val="92000"/>
+                <a:spcPct val="95000"/>
               </a:lnSpc>
               <a:spcAft>
                 <a:spcPts val="400"/>
               </a:spcAft>
             </a:pPr>
             <a:r>
-              <a:rPr sz="1019" b="0">
+              <a:rPr sz="1050" b="0">
                 <a:solidFill>
                   <a:srgbClr val="444A55"/>
                 </a:solidFill>
@@ -6722,8 +6898,8 @@
         </p:nvSpPr>
         <p:spPr>
           <a:xfrm>
-            <a:off x="2560320" y="3822192"/>
-            <a:ext cx="5806440" cy="475488"/>
+            <a:off x="2697480" y="3611880"/>
+            <a:ext cx="5715000" cy="429768"/>
           </a:xfrm>
           <a:prstGeom prst="rect">
             <a:avLst/>
@@ -6768,8 +6944,8 @@
         </p:nvSpPr>
         <p:spPr>
           <a:xfrm>
-            <a:off x="2598420" y="3822192"/>
-            <a:ext cx="5730240" cy="475488"/>
+            <a:off x="2824480" y="3611880"/>
+            <a:ext cx="5511800" cy="429768"/>
           </a:xfrm>
           <a:prstGeom prst="rect">
             <a:avLst/>
@@ -6782,16 +6958,16 @@
           </a:bodyPr>
           <a:lstStyle/>
           <a:p>
-            <a:pPr algn="ctr">
-              <a:lnSpc>
-                <a:spcPct val="92000"/>
+            <a:pPr algn="l">
+              <a:lnSpc>
+                <a:spcPct val="95000"/>
               </a:lnSpc>
               <a:spcAft>
                 <a:spcPts val="400"/>
               </a:spcAft>
             </a:pPr>
             <a:r>
-              <a:rPr sz="1019" b="0">
+              <a:rPr sz="1050" b="0">
                 <a:solidFill>
                   <a:srgbClr val="444A55"/>
                 </a:solidFill>
@@ -6810,8 +6986,8 @@
         </p:nvSpPr>
         <p:spPr>
           <a:xfrm>
-            <a:off x="8366760" y="3822192"/>
-            <a:ext cx="3794760" cy="475488"/>
+            <a:off x="8412480" y="3611880"/>
+            <a:ext cx="3337560" cy="429768"/>
           </a:xfrm>
           <a:prstGeom prst="rect">
             <a:avLst/>
@@ -6856,8 +7032,8 @@
         </p:nvSpPr>
         <p:spPr>
           <a:xfrm>
-            <a:off x="8404860" y="3822192"/>
-            <a:ext cx="3718560" cy="475488"/>
+            <a:off x="8450580" y="3611880"/>
+            <a:ext cx="3261360" cy="429768"/>
           </a:xfrm>
           <a:prstGeom prst="rect">
             <a:avLst/>
@@ -6872,14 +7048,14 @@
           <a:p>
             <a:pPr algn="ctr">
               <a:lnSpc>
-                <a:spcPct val="92000"/>
+                <a:spcPct val="95000"/>
               </a:lnSpc>
               <a:spcAft>
                 <a:spcPts val="400"/>
               </a:spcAft>
             </a:pPr>
             <a:r>
-              <a:rPr sz="1019" b="0">
+              <a:rPr sz="1050" b="0">
                 <a:solidFill>
                   <a:srgbClr val="444A55"/>
                 </a:solidFill>
@@ -6898,8 +7074,8 @@
         </p:nvSpPr>
         <p:spPr>
           <a:xfrm>
-            <a:off x="411480" y="4297680"/>
-            <a:ext cx="2148840" cy="475488"/>
+            <a:off x="457200" y="4041648"/>
+            <a:ext cx="2240280" cy="429768"/>
           </a:xfrm>
           <a:prstGeom prst="rect">
             <a:avLst/>
@@ -6944,8 +7120,8 @@
         </p:nvSpPr>
         <p:spPr>
           <a:xfrm>
-            <a:off x="449580" y="4297680"/>
-            <a:ext cx="2072640" cy="475488"/>
+            <a:off x="495300" y="4041648"/>
+            <a:ext cx="2164080" cy="429768"/>
           </a:xfrm>
           <a:prstGeom prst="rect">
             <a:avLst/>
@@ -6960,14 +7136,14 @@
           <a:p>
             <a:pPr algn="ctr">
               <a:lnSpc>
-                <a:spcPct val="92000"/>
+                <a:spcPct val="95000"/>
               </a:lnSpc>
               <a:spcAft>
                 <a:spcPts val="400"/>
               </a:spcAft>
             </a:pPr>
             <a:r>
-              <a:rPr sz="1019" b="0">
+              <a:rPr sz="1050" b="0">
                 <a:solidFill>
                   <a:srgbClr val="444A55"/>
                 </a:solidFill>
@@ -6986,8 +7162,8 @@
         </p:nvSpPr>
         <p:spPr>
           <a:xfrm>
-            <a:off x="2560320" y="4297680"/>
-            <a:ext cx="5806440" cy="475488"/>
+            <a:off x="2697480" y="4041648"/>
+            <a:ext cx="5715000" cy="429768"/>
           </a:xfrm>
           <a:prstGeom prst="rect">
             <a:avLst/>
@@ -7032,8 +7208,8 @@
         </p:nvSpPr>
         <p:spPr>
           <a:xfrm>
-            <a:off x="2598420" y="4297680"/>
-            <a:ext cx="5730240" cy="475488"/>
+            <a:off x="2824480" y="4041648"/>
+            <a:ext cx="5511800" cy="429768"/>
           </a:xfrm>
           <a:prstGeom prst="rect">
             <a:avLst/>
@@ -7046,16 +7222,16 @@
           </a:bodyPr>
           <a:lstStyle/>
           <a:p>
-            <a:pPr algn="ctr">
-              <a:lnSpc>
-                <a:spcPct val="92000"/>
+            <a:pPr algn="l">
+              <a:lnSpc>
+                <a:spcPct val="95000"/>
               </a:lnSpc>
               <a:spcAft>
                 <a:spcPts val="400"/>
               </a:spcAft>
             </a:pPr>
             <a:r>
-              <a:rPr sz="1019" b="0">
+              <a:rPr sz="1050" b="0">
                 <a:solidFill>
                   <a:srgbClr val="444A55"/>
                 </a:solidFill>
@@ -7074,8 +7250,8 @@
         </p:nvSpPr>
         <p:spPr>
           <a:xfrm>
-            <a:off x="8366760" y="4297680"/>
-            <a:ext cx="3794760" cy="475488"/>
+            <a:off x="8412480" y="4041648"/>
+            <a:ext cx="3337560" cy="429768"/>
           </a:xfrm>
           <a:prstGeom prst="rect">
             <a:avLst/>
@@ -7120,8 +7296,8 @@
         </p:nvSpPr>
         <p:spPr>
           <a:xfrm>
-            <a:off x="8404860" y="4297680"/>
-            <a:ext cx="3718560" cy="475488"/>
+            <a:off x="8450580" y="4041648"/>
+            <a:ext cx="3261360" cy="429768"/>
           </a:xfrm>
           <a:prstGeom prst="rect">
             <a:avLst/>
@@ -7136,14 +7312,14 @@
           <a:p>
             <a:pPr algn="ctr">
               <a:lnSpc>
-                <a:spcPct val="92000"/>
+                <a:spcPct val="95000"/>
               </a:lnSpc>
               <a:spcAft>
                 <a:spcPts val="400"/>
               </a:spcAft>
             </a:pPr>
             <a:r>
-              <a:rPr sz="1019" b="0">
+              <a:rPr sz="1050" b="0">
                 <a:solidFill>
                   <a:srgbClr val="444A55"/>
                 </a:solidFill>
@@ -7162,8 +7338,8 @@
         </p:nvSpPr>
         <p:spPr>
           <a:xfrm>
-            <a:off x="411480" y="4773168"/>
-            <a:ext cx="2148840" cy="475488"/>
+            <a:off x="457200" y="4471416"/>
+            <a:ext cx="2240280" cy="429768"/>
           </a:xfrm>
           <a:prstGeom prst="rect">
             <a:avLst/>
@@ -7208,8 +7384,8 @@
         </p:nvSpPr>
         <p:spPr>
           <a:xfrm>
-            <a:off x="449580" y="4773168"/>
-            <a:ext cx="2072640" cy="475488"/>
+            <a:off x="495300" y="4471416"/>
+            <a:ext cx="2164080" cy="429768"/>
           </a:xfrm>
           <a:prstGeom prst="rect">
             <a:avLst/>
@@ -7224,14 +7400,14 @@
           <a:p>
             <a:pPr algn="ctr">
               <a:lnSpc>
-                <a:spcPct val="92000"/>
+                <a:spcPct val="95000"/>
               </a:lnSpc>
               <a:spcAft>
                 <a:spcPts val="400"/>
               </a:spcAft>
             </a:pPr>
             <a:r>
-              <a:rPr sz="1019" b="0">
+              <a:rPr sz="1050" b="0">
                 <a:solidFill>
                   <a:srgbClr val="444A55"/>
                 </a:solidFill>
@@ -7250,8 +7426,8 @@
         </p:nvSpPr>
         <p:spPr>
           <a:xfrm>
-            <a:off x="2560320" y="4773168"/>
-            <a:ext cx="5806440" cy="475488"/>
+            <a:off x="2697480" y="4471416"/>
+            <a:ext cx="5715000" cy="429768"/>
           </a:xfrm>
           <a:prstGeom prst="rect">
             <a:avLst/>
@@ -7296,8 +7472,8 @@
         </p:nvSpPr>
         <p:spPr>
           <a:xfrm>
-            <a:off x="2598420" y="4773168"/>
-            <a:ext cx="5730240" cy="475488"/>
+            <a:off x="2824480" y="4471416"/>
+            <a:ext cx="5511800" cy="429768"/>
           </a:xfrm>
           <a:prstGeom prst="rect">
             <a:avLst/>
@@ -7310,16 +7486,16 @@
           </a:bodyPr>
           <a:lstStyle/>
           <a:p>
-            <a:pPr algn="ctr">
-              <a:lnSpc>
-                <a:spcPct val="92000"/>
+            <a:pPr algn="l">
+              <a:lnSpc>
+                <a:spcPct val="95000"/>
               </a:lnSpc>
               <a:spcAft>
                 <a:spcPts val="400"/>
               </a:spcAft>
             </a:pPr>
             <a:r>
-              <a:rPr sz="1019" b="0">
+              <a:rPr sz="1050" b="0">
                 <a:solidFill>
                   <a:srgbClr val="444A55"/>
                 </a:solidFill>
@@ -7338,8 +7514,8 @@
         </p:nvSpPr>
         <p:spPr>
           <a:xfrm>
-            <a:off x="8366760" y="4773168"/>
-            <a:ext cx="3794760" cy="475488"/>
+            <a:off x="8412480" y="4471416"/>
+            <a:ext cx="3337560" cy="429768"/>
           </a:xfrm>
           <a:prstGeom prst="rect">
             <a:avLst/>
@@ -7384,8 +7560,8 @@
         </p:nvSpPr>
         <p:spPr>
           <a:xfrm>
-            <a:off x="8404860" y="4773168"/>
-            <a:ext cx="3718560" cy="475488"/>
+            <a:off x="8450580" y="4471416"/>
+            <a:ext cx="3261360" cy="429768"/>
           </a:xfrm>
           <a:prstGeom prst="rect">
             <a:avLst/>
@@ -7400,14 +7576,14 @@
           <a:p>
             <a:pPr algn="ctr">
               <a:lnSpc>
-                <a:spcPct val="92000"/>
+                <a:spcPct val="95000"/>
               </a:lnSpc>
               <a:spcAft>
                 <a:spcPts val="400"/>
               </a:spcAft>
             </a:pPr>
             <a:r>
-              <a:rPr sz="1019" b="0">
+              <a:rPr sz="1050" b="0">
                 <a:solidFill>
                   <a:srgbClr val="444A55"/>
                 </a:solidFill>
@@ -7426,8 +7602,8 @@
         </p:nvSpPr>
         <p:spPr>
           <a:xfrm>
-            <a:off x="411480" y="5248656"/>
-            <a:ext cx="2148840" cy="475488"/>
+            <a:off x="457200" y="4901184"/>
+            <a:ext cx="2240280" cy="429768"/>
           </a:xfrm>
           <a:prstGeom prst="rect">
             <a:avLst/>
@@ -7472,8 +7648,8 @@
         </p:nvSpPr>
         <p:spPr>
           <a:xfrm>
-            <a:off x="449580" y="5248656"/>
-            <a:ext cx="2072640" cy="475488"/>
+            <a:off x="495300" y="4901184"/>
+            <a:ext cx="2164080" cy="429768"/>
           </a:xfrm>
           <a:prstGeom prst="rect">
             <a:avLst/>
@@ -7488,14 +7664,14 @@
           <a:p>
             <a:pPr algn="ctr">
               <a:lnSpc>
-                <a:spcPct val="92000"/>
+                <a:spcPct val="95000"/>
               </a:lnSpc>
               <a:spcAft>
                 <a:spcPts val="400"/>
               </a:spcAft>
             </a:pPr>
             <a:r>
-              <a:rPr sz="1019" b="0">
+              <a:rPr sz="1050" b="0">
                 <a:solidFill>
                   <a:srgbClr val="444A55"/>
                 </a:solidFill>
@@ -7514,8 +7690,8 @@
         </p:nvSpPr>
         <p:spPr>
           <a:xfrm>
-            <a:off x="2560320" y="5248656"/>
-            <a:ext cx="5806440" cy="475488"/>
+            <a:off x="2697480" y="4901184"/>
+            <a:ext cx="5715000" cy="429768"/>
           </a:xfrm>
           <a:prstGeom prst="rect">
             <a:avLst/>
@@ -7560,8 +7736,8 @@
         </p:nvSpPr>
         <p:spPr>
           <a:xfrm>
-            <a:off x="2598420" y="5248656"/>
-            <a:ext cx="5730240" cy="475488"/>
+            <a:off x="2824480" y="4901184"/>
+            <a:ext cx="5511800" cy="429768"/>
           </a:xfrm>
           <a:prstGeom prst="rect">
             <a:avLst/>
@@ -7574,16 +7750,16 @@
           </a:bodyPr>
           <a:lstStyle/>
           <a:p>
-            <a:pPr algn="ctr">
-              <a:lnSpc>
-                <a:spcPct val="92000"/>
+            <a:pPr algn="l">
+              <a:lnSpc>
+                <a:spcPct val="95000"/>
               </a:lnSpc>
               <a:spcAft>
                 <a:spcPts val="400"/>
               </a:spcAft>
             </a:pPr>
             <a:r>
-              <a:rPr sz="1019" b="0">
+              <a:rPr sz="1050" b="0">
                 <a:solidFill>
                   <a:srgbClr val="444A55"/>
                 </a:solidFill>
@@ -7602,8 +7778,8 @@
         </p:nvSpPr>
         <p:spPr>
           <a:xfrm>
-            <a:off x="8366760" y="5248656"/>
-            <a:ext cx="3794760" cy="475488"/>
+            <a:off x="8412480" y="4901184"/>
+            <a:ext cx="3337560" cy="429768"/>
           </a:xfrm>
           <a:prstGeom prst="rect">
             <a:avLst/>
@@ -7648,8 +7824,8 @@
         </p:nvSpPr>
         <p:spPr>
           <a:xfrm>
-            <a:off x="8404860" y="5248656"/>
-            <a:ext cx="3718560" cy="475488"/>
+            <a:off x="8450580" y="4901184"/>
+            <a:ext cx="3261360" cy="429768"/>
           </a:xfrm>
           <a:prstGeom prst="rect">
             <a:avLst/>
@@ -7664,20 +7840,20 @@
           <a:p>
             <a:pPr algn="ctr">
               <a:lnSpc>
-                <a:spcPct val="92000"/>
+                <a:spcPct val="95000"/>
               </a:lnSpc>
               <a:spcAft>
                 <a:spcPts val="400"/>
               </a:spcAft>
             </a:pPr>
             <a:r>
-              <a:rPr sz="1019" b="0">
+              <a:rPr sz="1050" b="0">
                 <a:solidFill>
                   <a:srgbClr val="444A55"/>
                 </a:solidFill>
                 <a:latin typeface="Apple SD Gothic Neo"/>
               </a:rPr>
-              <a:t>Cline SR + Gauss / Ollama</a:t>
+              <a:t>Cline SR + Gauss/Ollama</a:t>
             </a:r>
           </a:p>
         </p:txBody>
@@ -7690,8 +7866,8 @@
         </p:nvSpPr>
         <p:spPr>
           <a:xfrm>
-            <a:off x="411480" y="5440680"/>
-            <a:ext cx="11338560" cy="960120"/>
+            <a:off x="457200" y="5486400"/>
+            <a:ext cx="11292840" cy="914400"/>
           </a:xfrm>
           <a:prstGeom prst="roundRect">
             <a:avLst/>
@@ -7734,8 +7910,8 @@
         </p:nvSpPr>
         <p:spPr>
           <a:xfrm>
-            <a:off x="640080" y="5440680"/>
-            <a:ext cx="10881360" cy="960120"/>
+            <a:off x="685800" y="5486400"/>
+            <a:ext cx="10835640" cy="914400"/>
           </a:xfrm>
           <a:prstGeom prst="rect">
             <a:avLst/>
@@ -7750,7 +7926,7 @@
           <a:p>
             <a:pPr algn="l">
               <a:lnSpc>
-                <a:spcPct val="112000"/>
+                <a:spcPct val="114000"/>
               </a:lnSpc>
               <a:spcAft>
                 <a:spcPts val="200"/>
@@ -7769,7 +7945,7 @@
           <a:p>
             <a:pPr algn="l">
               <a:lnSpc>
-                <a:spcPct val="112000"/>
+                <a:spcPct val="114000"/>
               </a:lnSpc>
               <a:spcAft>
                 <a:spcPts val="200"/>
@@ -8035,7 +8211,7 @@
         </p:nvSpPr>
         <p:spPr>
           <a:xfrm>
-            <a:off x="502920" y="1078992"/>
+            <a:off x="457200" y="1078992"/>
             <a:ext cx="63500" cy="292608"/>
           </a:xfrm>
           <a:prstGeom prst="rect">
@@ -8079,7 +8255,7 @@
         </p:nvSpPr>
         <p:spPr>
           <a:xfrm>
-            <a:off x="612648" y="1060704"/>
+            <a:off x="566928" y="1060704"/>
             <a:ext cx="10972800" cy="329184"/>
           </a:xfrm>
           <a:prstGeom prst="rect">
@@ -8121,8 +8297,8 @@
         </p:nvSpPr>
         <p:spPr>
           <a:xfrm>
-            <a:off x="502920" y="1444752"/>
-            <a:ext cx="1417320" cy="530352"/>
+            <a:off x="457200" y="1444752"/>
+            <a:ext cx="1463040" cy="457200"/>
           </a:xfrm>
           <a:prstGeom prst="rect">
             <a:avLst/>
@@ -8167,8 +8343,8 @@
         </p:nvSpPr>
         <p:spPr>
           <a:xfrm>
-            <a:off x="502920" y="1444752"/>
-            <a:ext cx="1417320" cy="530352"/>
+            <a:off x="457200" y="1444752"/>
+            <a:ext cx="1463040" cy="457200"/>
           </a:xfrm>
           <a:prstGeom prst="rect">
             <a:avLst/>
@@ -8210,7 +8386,7 @@
         <p:spPr>
           <a:xfrm>
             <a:off x="1920240" y="1444752"/>
-            <a:ext cx="2880360" cy="530352"/>
+            <a:ext cx="2971800" cy="457200"/>
           </a:xfrm>
           <a:prstGeom prst="rect">
             <a:avLst/>
@@ -8256,7 +8432,7 @@
         <p:spPr>
           <a:xfrm>
             <a:off x="1920240" y="1444752"/>
-            <a:ext cx="2880360" cy="530352"/>
+            <a:ext cx="2971800" cy="457200"/>
           </a:xfrm>
           <a:prstGeom prst="rect">
             <a:avLst/>
@@ -8297,8 +8473,8 @@
         </p:nvSpPr>
         <p:spPr>
           <a:xfrm>
-            <a:off x="4800600" y="1444752"/>
-            <a:ext cx="6903720" cy="530352"/>
+            <a:off x="4892040" y="1444752"/>
+            <a:ext cx="6766560" cy="457200"/>
           </a:xfrm>
           <a:prstGeom prst="rect">
             <a:avLst/>
@@ -8343,8 +8519,8 @@
         </p:nvSpPr>
         <p:spPr>
           <a:xfrm>
-            <a:off x="4800600" y="1444752"/>
-            <a:ext cx="6903720" cy="530352"/>
+            <a:off x="4892040" y="1444752"/>
+            <a:ext cx="6766560" cy="457200"/>
           </a:xfrm>
           <a:prstGeom prst="rect">
             <a:avLst/>
@@ -8385,8 +8561,8 @@
         </p:nvSpPr>
         <p:spPr>
           <a:xfrm>
-            <a:off x="502920" y="1975104"/>
-            <a:ext cx="1417320" cy="530352"/>
+            <a:off x="457200" y="1901952"/>
+            <a:ext cx="1463040" cy="457200"/>
           </a:xfrm>
           <a:prstGeom prst="rect">
             <a:avLst/>
@@ -8431,8 +8607,8 @@
         </p:nvSpPr>
         <p:spPr>
           <a:xfrm>
-            <a:off x="541020" y="1975104"/>
-            <a:ext cx="1341120" cy="530352"/>
+            <a:off x="495300" y="1901952"/>
+            <a:ext cx="1386840" cy="457200"/>
           </a:xfrm>
           <a:prstGeom prst="rect">
             <a:avLst/>
@@ -8447,7 +8623,7 @@
           <a:p>
             <a:pPr algn="ctr">
               <a:lnSpc>
-                <a:spcPct val="92000"/>
+                <a:spcPct val="95000"/>
               </a:lnSpc>
               <a:spcAft>
                 <a:spcPts val="400"/>
@@ -8473,8 +8649,8 @@
         </p:nvSpPr>
         <p:spPr>
           <a:xfrm>
-            <a:off x="1920240" y="1975104"/>
-            <a:ext cx="2880360" cy="530352"/>
+            <a:off x="1920240" y="1901952"/>
+            <a:ext cx="2971800" cy="457200"/>
           </a:xfrm>
           <a:prstGeom prst="rect">
             <a:avLst/>
@@ -8519,8 +8695,8 @@
         </p:nvSpPr>
         <p:spPr>
           <a:xfrm>
-            <a:off x="1958340" y="1975104"/>
-            <a:ext cx="2804160" cy="530352"/>
+            <a:off x="2047240" y="1901952"/>
+            <a:ext cx="2768600" cy="457200"/>
           </a:xfrm>
           <a:prstGeom prst="rect">
             <a:avLst/>
@@ -8533,9 +8709,9 @@
           </a:bodyPr>
           <a:lstStyle/>
           <a:p>
-            <a:pPr algn="ctr">
-              <a:lnSpc>
-                <a:spcPct val="92000"/>
+            <a:pPr algn="l">
+              <a:lnSpc>
+                <a:spcPct val="95000"/>
               </a:lnSpc>
               <a:spcAft>
                 <a:spcPts val="400"/>
@@ -8561,8 +8737,8 @@
         </p:nvSpPr>
         <p:spPr>
           <a:xfrm>
-            <a:off x="4800600" y="1975104"/>
-            <a:ext cx="6903720" cy="530352"/>
+            <a:off x="4892040" y="1901952"/>
+            <a:ext cx="6766560" cy="457200"/>
           </a:xfrm>
           <a:prstGeom prst="rect">
             <a:avLst/>
@@ -8607,8 +8783,8 @@
         </p:nvSpPr>
         <p:spPr>
           <a:xfrm>
-            <a:off x="4838700" y="1975104"/>
-            <a:ext cx="6827520" cy="530352"/>
+            <a:off x="5019040" y="1901952"/>
+            <a:ext cx="6563360" cy="457200"/>
           </a:xfrm>
           <a:prstGeom prst="rect">
             <a:avLst/>
@@ -8621,9 +8797,9 @@
           </a:bodyPr>
           <a:lstStyle/>
           <a:p>
-            <a:pPr algn="ctr">
-              <a:lnSpc>
-                <a:spcPct val="92000"/>
+            <a:pPr algn="l">
+              <a:lnSpc>
+                <a:spcPct val="95000"/>
               </a:lnSpc>
               <a:spcAft>
                 <a:spcPts val="400"/>
@@ -8649,8 +8825,8 @@
         </p:nvSpPr>
         <p:spPr>
           <a:xfrm>
-            <a:off x="502920" y="2505456"/>
-            <a:ext cx="1417320" cy="530352"/>
+            <a:off x="457200" y="2359152"/>
+            <a:ext cx="1463040" cy="457200"/>
           </a:xfrm>
           <a:prstGeom prst="rect">
             <a:avLst/>
@@ -8695,8 +8871,8 @@
         </p:nvSpPr>
         <p:spPr>
           <a:xfrm>
-            <a:off x="541020" y="2505456"/>
-            <a:ext cx="1341120" cy="530352"/>
+            <a:off x="495300" y="2359152"/>
+            <a:ext cx="1386840" cy="457200"/>
           </a:xfrm>
           <a:prstGeom prst="rect">
             <a:avLst/>
@@ -8711,7 +8887,7 @@
           <a:p>
             <a:pPr algn="ctr">
               <a:lnSpc>
-                <a:spcPct val="92000"/>
+                <a:spcPct val="95000"/>
               </a:lnSpc>
               <a:spcAft>
                 <a:spcPts val="400"/>
@@ -8737,8 +8913,8 @@
         </p:nvSpPr>
         <p:spPr>
           <a:xfrm>
-            <a:off x="1920240" y="2505456"/>
-            <a:ext cx="2880360" cy="530352"/>
+            <a:off x="1920240" y="2359152"/>
+            <a:ext cx="2971800" cy="457200"/>
           </a:xfrm>
           <a:prstGeom prst="rect">
             <a:avLst/>
@@ -8783,8 +8959,8 @@
         </p:nvSpPr>
         <p:spPr>
           <a:xfrm>
-            <a:off x="1958340" y="2505456"/>
-            <a:ext cx="2804160" cy="530352"/>
+            <a:off x="2047240" y="2359152"/>
+            <a:ext cx="2768600" cy="457200"/>
           </a:xfrm>
           <a:prstGeom prst="rect">
             <a:avLst/>
@@ -8797,9 +8973,9 @@
           </a:bodyPr>
           <a:lstStyle/>
           <a:p>
-            <a:pPr algn="ctr">
-              <a:lnSpc>
-                <a:spcPct val="92000"/>
+            <a:pPr algn="l">
+              <a:lnSpc>
+                <a:spcPct val="95000"/>
               </a:lnSpc>
               <a:spcAft>
                 <a:spcPts val="400"/>
@@ -8825,8 +9001,8 @@
         </p:nvSpPr>
         <p:spPr>
           <a:xfrm>
-            <a:off x="4800600" y="2505456"/>
-            <a:ext cx="6903720" cy="530352"/>
+            <a:off x="4892040" y="2359152"/>
+            <a:ext cx="6766560" cy="457200"/>
           </a:xfrm>
           <a:prstGeom prst="rect">
             <a:avLst/>
@@ -8871,8 +9047,8 @@
         </p:nvSpPr>
         <p:spPr>
           <a:xfrm>
-            <a:off x="4838700" y="2505456"/>
-            <a:ext cx="6827520" cy="530352"/>
+            <a:off x="5019040" y="2359152"/>
+            <a:ext cx="6563360" cy="457200"/>
           </a:xfrm>
           <a:prstGeom prst="rect">
             <a:avLst/>
@@ -8885,9 +9061,9 @@
           </a:bodyPr>
           <a:lstStyle/>
           <a:p>
-            <a:pPr algn="ctr">
-              <a:lnSpc>
-                <a:spcPct val="92000"/>
+            <a:pPr algn="l">
+              <a:lnSpc>
+                <a:spcPct val="95000"/>
               </a:lnSpc>
               <a:spcAft>
                 <a:spcPts val="400"/>
@@ -8913,8 +9089,8 @@
         </p:nvSpPr>
         <p:spPr>
           <a:xfrm>
-            <a:off x="502920" y="3035808"/>
-            <a:ext cx="1417320" cy="530352"/>
+            <a:off x="457200" y="2816352"/>
+            <a:ext cx="1463040" cy="457200"/>
           </a:xfrm>
           <a:prstGeom prst="rect">
             <a:avLst/>
@@ -8959,8 +9135,8 @@
         </p:nvSpPr>
         <p:spPr>
           <a:xfrm>
-            <a:off x="541020" y="3035808"/>
-            <a:ext cx="1341120" cy="530352"/>
+            <a:off x="495300" y="2816352"/>
+            <a:ext cx="1386840" cy="457200"/>
           </a:xfrm>
           <a:prstGeom prst="rect">
             <a:avLst/>
@@ -8975,7 +9151,7 @@
           <a:p>
             <a:pPr algn="ctr">
               <a:lnSpc>
-                <a:spcPct val="92000"/>
+                <a:spcPct val="95000"/>
               </a:lnSpc>
               <a:spcAft>
                 <a:spcPts val="400"/>
@@ -9001,8 +9177,8 @@
         </p:nvSpPr>
         <p:spPr>
           <a:xfrm>
-            <a:off x="1920240" y="3035808"/>
-            <a:ext cx="2880360" cy="530352"/>
+            <a:off x="1920240" y="2816352"/>
+            <a:ext cx="2971800" cy="457200"/>
           </a:xfrm>
           <a:prstGeom prst="rect">
             <a:avLst/>
@@ -9047,8 +9223,8 @@
         </p:nvSpPr>
         <p:spPr>
           <a:xfrm>
-            <a:off x="1958340" y="3035808"/>
-            <a:ext cx="2804160" cy="530352"/>
+            <a:off x="2047240" y="2816352"/>
+            <a:ext cx="2768600" cy="457200"/>
           </a:xfrm>
           <a:prstGeom prst="rect">
             <a:avLst/>
@@ -9061,9 +9237,9 @@
           </a:bodyPr>
           <a:lstStyle/>
           <a:p>
-            <a:pPr algn="ctr">
-              <a:lnSpc>
-                <a:spcPct val="92000"/>
+            <a:pPr algn="l">
+              <a:lnSpc>
+                <a:spcPct val="95000"/>
               </a:lnSpc>
               <a:spcAft>
                 <a:spcPts val="400"/>
@@ -9089,8 +9265,8 @@
         </p:nvSpPr>
         <p:spPr>
           <a:xfrm>
-            <a:off x="4800600" y="3035808"/>
-            <a:ext cx="6903720" cy="530352"/>
+            <a:off x="4892040" y="2816352"/>
+            <a:ext cx="6766560" cy="457200"/>
           </a:xfrm>
           <a:prstGeom prst="rect">
             <a:avLst/>
@@ -9135,8 +9311,8 @@
         </p:nvSpPr>
         <p:spPr>
           <a:xfrm>
-            <a:off x="4838700" y="3035808"/>
-            <a:ext cx="6827520" cy="530352"/>
+            <a:off x="5019040" y="2816352"/>
+            <a:ext cx="6563360" cy="457200"/>
           </a:xfrm>
           <a:prstGeom prst="rect">
             <a:avLst/>
@@ -9149,9 +9325,9 @@
           </a:bodyPr>
           <a:lstStyle/>
           <a:p>
-            <a:pPr algn="ctr">
-              <a:lnSpc>
-                <a:spcPct val="92000"/>
+            <a:pPr algn="l">
+              <a:lnSpc>
+                <a:spcPct val="95000"/>
               </a:lnSpc>
               <a:spcAft>
                 <a:spcPts val="400"/>
@@ -9177,8 +9353,8 @@
         </p:nvSpPr>
         <p:spPr>
           <a:xfrm>
-            <a:off x="502920" y="3566160"/>
-            <a:ext cx="1417320" cy="530352"/>
+            <a:off x="457200" y="3273552"/>
+            <a:ext cx="1463040" cy="457200"/>
           </a:xfrm>
           <a:prstGeom prst="rect">
             <a:avLst/>
@@ -9223,8 +9399,8 @@
         </p:nvSpPr>
         <p:spPr>
           <a:xfrm>
-            <a:off x="541020" y="3566160"/>
-            <a:ext cx="1341120" cy="530352"/>
+            <a:off x="495300" y="3273552"/>
+            <a:ext cx="1386840" cy="457200"/>
           </a:xfrm>
           <a:prstGeom prst="rect">
             <a:avLst/>
@@ -9239,7 +9415,7 @@
           <a:p>
             <a:pPr algn="ctr">
               <a:lnSpc>
-                <a:spcPct val="92000"/>
+                <a:spcPct val="95000"/>
               </a:lnSpc>
               <a:spcAft>
                 <a:spcPts val="400"/>
@@ -9265,8 +9441,8 @@
         </p:nvSpPr>
         <p:spPr>
           <a:xfrm>
-            <a:off x="1920240" y="3566160"/>
-            <a:ext cx="2880360" cy="530352"/>
+            <a:off x="1920240" y="3273552"/>
+            <a:ext cx="2971800" cy="457200"/>
           </a:xfrm>
           <a:prstGeom prst="rect">
             <a:avLst/>
@@ -9311,8 +9487,8 @@
         </p:nvSpPr>
         <p:spPr>
           <a:xfrm>
-            <a:off x="1958340" y="3566160"/>
-            <a:ext cx="2804160" cy="530352"/>
+            <a:off x="2047240" y="3273552"/>
+            <a:ext cx="2768600" cy="457200"/>
           </a:xfrm>
           <a:prstGeom prst="rect">
             <a:avLst/>
@@ -9325,9 +9501,9 @@
           </a:bodyPr>
           <a:lstStyle/>
           <a:p>
-            <a:pPr algn="ctr">
-              <a:lnSpc>
-                <a:spcPct val="92000"/>
+            <a:pPr algn="l">
+              <a:lnSpc>
+                <a:spcPct val="95000"/>
               </a:lnSpc>
               <a:spcAft>
                 <a:spcPts val="400"/>
@@ -9353,8 +9529,8 @@
         </p:nvSpPr>
         <p:spPr>
           <a:xfrm>
-            <a:off x="4800600" y="3566160"/>
-            <a:ext cx="6903720" cy="530352"/>
+            <a:off x="4892040" y="3273552"/>
+            <a:ext cx="6766560" cy="457200"/>
           </a:xfrm>
           <a:prstGeom prst="rect">
             <a:avLst/>
@@ -9399,8 +9575,8 @@
         </p:nvSpPr>
         <p:spPr>
           <a:xfrm>
-            <a:off x="4838700" y="3566160"/>
-            <a:ext cx="6827520" cy="530352"/>
+            <a:off x="5019040" y="3273552"/>
+            <a:ext cx="6563360" cy="457200"/>
           </a:xfrm>
           <a:prstGeom prst="rect">
             <a:avLst/>
@@ -9413,9 +9589,9 @@
           </a:bodyPr>
           <a:lstStyle/>
           <a:p>
-            <a:pPr algn="ctr">
-              <a:lnSpc>
-                <a:spcPct val="92000"/>
+            <a:pPr algn="l">
+              <a:lnSpc>
+                <a:spcPct val="95000"/>
               </a:lnSpc>
               <a:spcAft>
                 <a:spcPts val="400"/>
@@ -9441,8 +9617,8 @@
         </p:nvSpPr>
         <p:spPr>
           <a:xfrm>
-            <a:off x="502920" y="4096512"/>
-            <a:ext cx="1417320" cy="530352"/>
+            <a:off x="457200" y="3730752"/>
+            <a:ext cx="1463040" cy="457200"/>
           </a:xfrm>
           <a:prstGeom prst="rect">
             <a:avLst/>
@@ -9487,8 +9663,8 @@
         </p:nvSpPr>
         <p:spPr>
           <a:xfrm>
-            <a:off x="541020" y="4096512"/>
-            <a:ext cx="1341120" cy="530352"/>
+            <a:off x="495300" y="3730752"/>
+            <a:ext cx="1386840" cy="457200"/>
           </a:xfrm>
           <a:prstGeom prst="rect">
             <a:avLst/>
@@ -9503,7 +9679,7 @@
           <a:p>
             <a:pPr algn="ctr">
               <a:lnSpc>
-                <a:spcPct val="92000"/>
+                <a:spcPct val="95000"/>
               </a:lnSpc>
               <a:spcAft>
                 <a:spcPts val="400"/>
@@ -9529,8 +9705,8 @@
         </p:nvSpPr>
         <p:spPr>
           <a:xfrm>
-            <a:off x="1920240" y="4096512"/>
-            <a:ext cx="2880360" cy="530352"/>
+            <a:off x="1920240" y="3730752"/>
+            <a:ext cx="2971800" cy="457200"/>
           </a:xfrm>
           <a:prstGeom prst="rect">
             <a:avLst/>
@@ -9575,8 +9751,8 @@
         </p:nvSpPr>
         <p:spPr>
           <a:xfrm>
-            <a:off x="1958340" y="4096512"/>
-            <a:ext cx="2804160" cy="530352"/>
+            <a:off x="2047240" y="3730752"/>
+            <a:ext cx="2768600" cy="457200"/>
           </a:xfrm>
           <a:prstGeom prst="rect">
             <a:avLst/>
@@ -9589,9 +9765,9 @@
           </a:bodyPr>
           <a:lstStyle/>
           <a:p>
-            <a:pPr algn="ctr">
-              <a:lnSpc>
-                <a:spcPct val="92000"/>
+            <a:pPr algn="l">
+              <a:lnSpc>
+                <a:spcPct val="95000"/>
               </a:lnSpc>
               <a:spcAft>
                 <a:spcPts val="400"/>
@@ -9617,8 +9793,8 @@
         </p:nvSpPr>
         <p:spPr>
           <a:xfrm>
-            <a:off x="4800600" y="4096512"/>
-            <a:ext cx="6903720" cy="530352"/>
+            <a:off x="4892040" y="3730752"/>
+            <a:ext cx="6766560" cy="457200"/>
           </a:xfrm>
           <a:prstGeom prst="rect">
             <a:avLst/>
@@ -9663,8 +9839,8 @@
         </p:nvSpPr>
         <p:spPr>
           <a:xfrm>
-            <a:off x="4838700" y="4096512"/>
-            <a:ext cx="6827520" cy="530352"/>
+            <a:off x="5019040" y="3730752"/>
+            <a:ext cx="6563360" cy="457200"/>
           </a:xfrm>
           <a:prstGeom prst="rect">
             <a:avLst/>
@@ -9677,9 +9853,9 @@
           </a:bodyPr>
           <a:lstStyle/>
           <a:p>
-            <a:pPr algn="ctr">
-              <a:lnSpc>
-                <a:spcPct val="92000"/>
+            <a:pPr algn="l">
+              <a:lnSpc>
+                <a:spcPct val="95000"/>
               </a:lnSpc>
               <a:spcAft>
                 <a:spcPts val="400"/>
@@ -9705,8 +9881,8 @@
         </p:nvSpPr>
         <p:spPr>
           <a:xfrm>
-            <a:off x="502920" y="4626864"/>
-            <a:ext cx="1417320" cy="530352"/>
+            <a:off x="457200" y="4187952"/>
+            <a:ext cx="1463040" cy="457200"/>
           </a:xfrm>
           <a:prstGeom prst="rect">
             <a:avLst/>
@@ -9751,8 +9927,8 @@
         </p:nvSpPr>
         <p:spPr>
           <a:xfrm>
-            <a:off x="541020" y="4626864"/>
-            <a:ext cx="1341120" cy="530352"/>
+            <a:off x="495300" y="4187952"/>
+            <a:ext cx="1386840" cy="457200"/>
           </a:xfrm>
           <a:prstGeom prst="rect">
             <a:avLst/>
@@ -9767,7 +9943,7 @@
           <a:p>
             <a:pPr algn="ctr">
               <a:lnSpc>
-                <a:spcPct val="92000"/>
+                <a:spcPct val="95000"/>
               </a:lnSpc>
               <a:spcAft>
                 <a:spcPts val="400"/>
@@ -9793,8 +9969,8 @@
         </p:nvSpPr>
         <p:spPr>
           <a:xfrm>
-            <a:off x="1920240" y="4626864"/>
-            <a:ext cx="2880360" cy="530352"/>
+            <a:off x="1920240" y="4187952"/>
+            <a:ext cx="2971800" cy="457200"/>
           </a:xfrm>
           <a:prstGeom prst="rect">
             <a:avLst/>
@@ -9839,8 +10015,8 @@
         </p:nvSpPr>
         <p:spPr>
           <a:xfrm>
-            <a:off x="1958340" y="4626864"/>
-            <a:ext cx="2804160" cy="530352"/>
+            <a:off x="2047240" y="4187952"/>
+            <a:ext cx="2768600" cy="457200"/>
           </a:xfrm>
           <a:prstGeom prst="rect">
             <a:avLst/>
@@ -9853,9 +10029,9 @@
           </a:bodyPr>
           <a:lstStyle/>
           <a:p>
-            <a:pPr algn="ctr">
-              <a:lnSpc>
-                <a:spcPct val="92000"/>
+            <a:pPr algn="l">
+              <a:lnSpc>
+                <a:spcPct val="95000"/>
               </a:lnSpc>
               <a:spcAft>
                 <a:spcPts val="400"/>
@@ -9881,8 +10057,8 @@
         </p:nvSpPr>
         <p:spPr>
           <a:xfrm>
-            <a:off x="4800600" y="4626864"/>
-            <a:ext cx="6903720" cy="530352"/>
+            <a:off x="4892040" y="4187952"/>
+            <a:ext cx="6766560" cy="457200"/>
           </a:xfrm>
           <a:prstGeom prst="rect">
             <a:avLst/>
@@ -9927,8 +10103,8 @@
         </p:nvSpPr>
         <p:spPr>
           <a:xfrm>
-            <a:off x="4838700" y="4626864"/>
-            <a:ext cx="6827520" cy="530352"/>
+            <a:off x="5019040" y="4187952"/>
+            <a:ext cx="6563360" cy="457200"/>
           </a:xfrm>
           <a:prstGeom prst="rect">
             <a:avLst/>
@@ -9941,9 +10117,9 @@
           </a:bodyPr>
           <a:lstStyle/>
           <a:p>
-            <a:pPr algn="ctr">
-              <a:lnSpc>
-                <a:spcPct val="92000"/>
+            <a:pPr algn="l">
+              <a:lnSpc>
+                <a:spcPct val="95000"/>
               </a:lnSpc>
               <a:spcAft>
                 <a:spcPts val="400"/>
@@ -9969,8 +10145,8 @@
         </p:nvSpPr>
         <p:spPr>
           <a:xfrm>
-            <a:off x="502920" y="5157216"/>
-            <a:ext cx="1417320" cy="530352"/>
+            <a:off x="457200" y="4645152"/>
+            <a:ext cx="1463040" cy="457200"/>
           </a:xfrm>
           <a:prstGeom prst="rect">
             <a:avLst/>
@@ -10015,8 +10191,8 @@
         </p:nvSpPr>
         <p:spPr>
           <a:xfrm>
-            <a:off x="541020" y="5157216"/>
-            <a:ext cx="1341120" cy="530352"/>
+            <a:off x="495300" y="4645152"/>
+            <a:ext cx="1386840" cy="457200"/>
           </a:xfrm>
           <a:prstGeom prst="rect">
             <a:avLst/>
@@ -10031,7 +10207,7 @@
           <a:p>
             <a:pPr algn="ctr">
               <a:lnSpc>
-                <a:spcPct val="92000"/>
+                <a:spcPct val="95000"/>
               </a:lnSpc>
               <a:spcAft>
                 <a:spcPts val="400"/>
@@ -10057,8 +10233,8 @@
         </p:nvSpPr>
         <p:spPr>
           <a:xfrm>
-            <a:off x="1920240" y="5157216"/>
-            <a:ext cx="2880360" cy="530352"/>
+            <a:off x="1920240" y="4645152"/>
+            <a:ext cx="2971800" cy="457200"/>
           </a:xfrm>
           <a:prstGeom prst="rect">
             <a:avLst/>
@@ -10103,8 +10279,8 @@
         </p:nvSpPr>
         <p:spPr>
           <a:xfrm>
-            <a:off x="1958340" y="5157216"/>
-            <a:ext cx="2804160" cy="530352"/>
+            <a:off x="2047240" y="4645152"/>
+            <a:ext cx="2768600" cy="457200"/>
           </a:xfrm>
           <a:prstGeom prst="rect">
             <a:avLst/>
@@ -10117,9 +10293,9 @@
           </a:bodyPr>
           <a:lstStyle/>
           <a:p>
-            <a:pPr algn="ctr">
-              <a:lnSpc>
-                <a:spcPct val="92000"/>
+            <a:pPr algn="l">
+              <a:lnSpc>
+                <a:spcPct val="95000"/>
               </a:lnSpc>
               <a:spcAft>
                 <a:spcPts val="400"/>
@@ -10145,8 +10321,8 @@
         </p:nvSpPr>
         <p:spPr>
           <a:xfrm>
-            <a:off x="4800600" y="5157216"/>
-            <a:ext cx="6903720" cy="530352"/>
+            <a:off x="4892040" y="4645152"/>
+            <a:ext cx="6766560" cy="457200"/>
           </a:xfrm>
           <a:prstGeom prst="rect">
             <a:avLst/>
@@ -10191,8 +10367,8 @@
         </p:nvSpPr>
         <p:spPr>
           <a:xfrm>
-            <a:off x="4838700" y="5157216"/>
-            <a:ext cx="6827520" cy="530352"/>
+            <a:off x="5019040" y="4645152"/>
+            <a:ext cx="6563360" cy="457200"/>
           </a:xfrm>
           <a:prstGeom prst="rect">
             <a:avLst/>
@@ -10205,9 +10381,9 @@
           </a:bodyPr>
           <a:lstStyle/>
           <a:p>
-            <a:pPr algn="ctr">
-              <a:lnSpc>
-                <a:spcPct val="92000"/>
+            <a:pPr algn="l">
+              <a:lnSpc>
+                <a:spcPct val="95000"/>
               </a:lnSpc>
               <a:spcAft>
                 <a:spcPts val="400"/>
@@ -10233,8 +10409,8 @@
         </p:nvSpPr>
         <p:spPr>
           <a:xfrm>
-            <a:off x="502920" y="4892040"/>
-            <a:ext cx="5486400" cy="1234440"/>
+            <a:off x="457200" y="5138928"/>
+            <a:ext cx="5532120" cy="1207008"/>
           </a:xfrm>
           <a:prstGeom prst="roundRect">
             <a:avLst/>
@@ -10279,8 +10455,8 @@
         </p:nvSpPr>
         <p:spPr>
           <a:xfrm>
-            <a:off x="713232" y="4892040"/>
-            <a:ext cx="5074920" cy="1234440"/>
+            <a:off x="685800" y="5138928"/>
+            <a:ext cx="5120640" cy="1207008"/>
           </a:xfrm>
           <a:prstGeom prst="rect">
             <a:avLst/>
@@ -10295,10 +10471,10 @@
           <a:p>
             <a:pPr algn="l">
               <a:lnSpc>
-                <a:spcPct val="110000"/>
-              </a:lnSpc>
-              <a:spcAft>
-                <a:spcPts val="200"/>
+                <a:spcPct val="116000"/>
+              </a:lnSpc>
+              <a:spcAft>
+                <a:spcPts val="300"/>
               </a:spcAft>
             </a:pPr>
             <a:r>
@@ -10314,10 +10490,10 @@
           <a:p>
             <a:pPr algn="l">
               <a:lnSpc>
-                <a:spcPct val="110000"/>
-              </a:lnSpc>
-              <a:spcAft>
-                <a:spcPts val="200"/>
+                <a:spcPct val="116000"/>
+              </a:lnSpc>
+              <a:spcAft>
+                <a:spcPts val="300"/>
               </a:spcAft>
             </a:pPr>
             <a:r>
@@ -10333,10 +10509,10 @@
           <a:p>
             <a:pPr algn="l">
               <a:lnSpc>
-                <a:spcPct val="110000"/>
-              </a:lnSpc>
-              <a:spcAft>
-                <a:spcPts val="200"/>
+                <a:spcPct val="116000"/>
+              </a:lnSpc>
+              <a:spcAft>
+                <a:spcPts val="300"/>
               </a:spcAft>
             </a:pPr>
             <a:r>
@@ -10352,10 +10528,10 @@
           <a:p>
             <a:pPr algn="l">
               <a:lnSpc>
-                <a:spcPct val="110000"/>
-              </a:lnSpc>
-              <a:spcAft>
-                <a:spcPts val="200"/>
+                <a:spcPct val="116000"/>
+              </a:lnSpc>
+              <a:spcAft>
+                <a:spcPts val="300"/>
               </a:spcAft>
             </a:pPr>
             <a:r>
@@ -10378,8 +10554,8 @@
         </p:nvSpPr>
         <p:spPr>
           <a:xfrm>
-            <a:off x="6172200" y="4892040"/>
-            <a:ext cx="5532120" cy="1234440"/>
+            <a:off x="6217920" y="5138928"/>
+            <a:ext cx="5532120" cy="1207008"/>
           </a:xfrm>
           <a:prstGeom prst="roundRect">
             <a:avLst/>
@@ -10422,8 +10598,8 @@
         </p:nvSpPr>
         <p:spPr>
           <a:xfrm>
-            <a:off x="6382512" y="4892040"/>
-            <a:ext cx="5120640" cy="1234440"/>
+            <a:off x="6446520" y="5138928"/>
+            <a:ext cx="5074920" cy="1207008"/>
           </a:xfrm>
           <a:prstGeom prst="rect">
             <a:avLst/>
@@ -10438,10 +10614,10 @@
           <a:p>
             <a:pPr algn="l">
               <a:lnSpc>
-                <a:spcPct val="110000"/>
-              </a:lnSpc>
-              <a:spcAft>
-                <a:spcPts val="200"/>
+                <a:spcPct val="116000"/>
+              </a:lnSpc>
+              <a:spcAft>
+                <a:spcPts val="300"/>
               </a:spcAft>
             </a:pPr>
             <a:r>
@@ -10457,10 +10633,10 @@
           <a:p>
             <a:pPr algn="l">
               <a:lnSpc>
-                <a:spcPct val="110000"/>
-              </a:lnSpc>
-              <a:spcAft>
-                <a:spcPts val="200"/>
+                <a:spcPct val="116000"/>
+              </a:lnSpc>
+              <a:spcAft>
+                <a:spcPts val="300"/>
               </a:spcAft>
             </a:pPr>
             <a:r>
@@ -10470,16 +10646,16 @@
                 </a:solidFill>
                 <a:latin typeface="Apple SD Gothic Neo"/>
               </a:rPr>
-              <a:t>반복·정형 업무 시간 단축</a:t>
+              <a:t>• 반복·정형 업무 시간 단축</a:t>
             </a:r>
           </a:p>
           <a:p>
             <a:pPr algn="l">
               <a:lnSpc>
-                <a:spcPct val="110000"/>
-              </a:lnSpc>
-              <a:spcAft>
-                <a:spcPts val="200"/>
+                <a:spcPct val="116000"/>
+              </a:lnSpc>
+              <a:spcAft>
+                <a:spcPts val="300"/>
               </a:spcAft>
             </a:pPr>
             <a:r>
@@ -10489,16 +10665,16 @@
                 </a:solidFill>
                 <a:latin typeface="Apple SD Gothic Neo"/>
               </a:rPr>
-              <a:t>개발자는 설계·실측·검증에 집중</a:t>
+              <a:t>• 개발자는 설계·실측·검증에 집중</a:t>
             </a:r>
           </a:p>
           <a:p>
             <a:pPr algn="l">
               <a:lnSpc>
-                <a:spcPct val="110000"/>
-              </a:lnSpc>
-              <a:spcAft>
-                <a:spcPts val="200"/>
+                <a:spcPct val="116000"/>
+              </a:lnSpc>
+              <a:spcAft>
+                <a:spcPts val="300"/>
               </a:spcAft>
             </a:pPr>
             <a:r>
@@ -10508,7 +10684,7 @@
                 </a:solidFill>
                 <a:latin typeface="Apple SD Gothic Neo"/>
               </a:rPr>
-              <a:t>사내 망 내 데이터 유출 없음</a:t>
+              <a:t>• 사내 망 내 데이터 유출 없음</a:t>
             </a:r>
           </a:p>
         </p:txBody>
@@ -10755,14 +10931,100 @@
       </p:sp>
       <p:sp>
         <p:nvSpPr>
-          <p:cNvPr id="6" name="Rounded Rectangle 5"/>
+          <p:cNvPr id="6" name="Rectangle 5"/>
           <p:cNvSpPr/>
           <p:nvPr/>
         </p:nvSpPr>
         <p:spPr>
           <a:xfrm>
-            <a:off x="457200" y="1389888"/>
-            <a:ext cx="11292840" cy="804672"/>
+            <a:off x="457200" y="1060704"/>
+            <a:ext cx="63500" cy="292608"/>
+          </a:xfrm>
+          <a:prstGeom prst="rect">
+            <a:avLst/>
+          </a:prstGeom>
+          <a:solidFill>
+            <a:srgbClr val="1F6FB2"/>
+          </a:solidFill>
+          <a:ln>
+            <a:noFill/>
+          </a:ln>
+          <a:effectLst/>
+        </p:spPr>
+        <p:style>
+          <a:lnRef idx="1">
+            <a:schemeClr val="accent1"/>
+          </a:lnRef>
+          <a:fillRef idx="3">
+            <a:schemeClr val="accent1"/>
+          </a:fillRef>
+          <a:effectRef idx="2">
+            <a:schemeClr val="accent1"/>
+          </a:effectRef>
+          <a:fontRef idx="minor">
+            <a:schemeClr val="lt1"/>
+          </a:fontRef>
+        </p:style>
+        <p:txBody>
+          <a:bodyPr rtlCol="0" anchor="ctr"/>
+          <a:lstStyle/>
+          <a:p>
+            <a:pPr algn="ctr"/>
+          </a:p>
+        </p:txBody>
+      </p:sp>
+      <p:sp>
+        <p:nvSpPr>
+          <p:cNvPr id="7" name="TextBox 6"/>
+          <p:cNvSpPr txBox="1"/>
+          <p:nvPr/>
+        </p:nvSpPr>
+        <p:spPr>
+          <a:xfrm>
+            <a:off x="566928" y="1042416"/>
+            <a:ext cx="10972800" cy="329184"/>
+          </a:xfrm>
+          <a:prstGeom prst="rect">
+            <a:avLst/>
+          </a:prstGeom>
+          <a:noFill/>
+        </p:spPr>
+        <p:txBody>
+          <a:bodyPr wrap="square" anchor="t" lIns="25400" rIns="25400" tIns="25400" bIns="25400">
+            <a:spAutoFit/>
+          </a:bodyPr>
+          <a:lstStyle/>
+          <a:p>
+            <a:pPr algn="l">
+              <a:lnSpc>
+                <a:spcPct val="100000"/>
+              </a:lnSpc>
+              <a:spcAft>
+                <a:spcPts val="400"/>
+              </a:spcAft>
+            </a:pPr>
+            <a:r>
+              <a:rPr sz="1450" b="1">
+                <a:solidFill>
+                  <a:srgbClr val="142A4A"/>
+                </a:solidFill>
+                <a:latin typeface="Apple SD Gothic Neo"/>
+              </a:rPr>
+              <a:t>현재 환경에서 제약이 있는 영역</a:t>
+            </a:r>
+          </a:p>
+        </p:txBody>
+      </p:sp>
+      <p:sp>
+        <p:nvSpPr>
+          <p:cNvPr id="8" name="Rounded Rectangle 7"/>
+          <p:cNvSpPr/>
+          <p:nvPr/>
+        </p:nvSpPr>
+        <p:spPr>
+          <a:xfrm>
+            <a:off x="457200" y="1463040"/>
+            <a:ext cx="11292840" cy="768096"/>
           </a:xfrm>
           <a:prstGeom prst="roundRect">
             <a:avLst/>
@@ -10801,14 +11063,14 @@
       </p:sp>
       <p:sp>
         <p:nvSpPr>
-          <p:cNvPr id="7" name="Rectangle 6"/>
+          <p:cNvPr id="9" name="Rectangle 8"/>
           <p:cNvSpPr/>
           <p:nvPr/>
         </p:nvSpPr>
         <p:spPr>
           <a:xfrm>
-            <a:off x="457200" y="1389888"/>
-            <a:ext cx="76200" cy="804672"/>
+            <a:off x="457200" y="1463040"/>
+            <a:ext cx="76200" cy="768096"/>
           </a:xfrm>
           <a:prstGeom prst="rect">
             <a:avLst/>
@@ -10845,14 +11107,14 @@
       </p:sp>
       <p:sp>
         <p:nvSpPr>
-          <p:cNvPr id="8" name="TextBox 7"/>
+          <p:cNvPr id="10" name="TextBox 9"/>
           <p:cNvSpPr txBox="1"/>
           <p:nvPr/>
         </p:nvSpPr>
         <p:spPr>
           <a:xfrm>
-            <a:off x="658368" y="1481328"/>
-            <a:ext cx="2880360" cy="292608"/>
+            <a:off x="685800" y="1463040"/>
+            <a:ext cx="2926080" cy="768096"/>
           </a:xfrm>
           <a:prstGeom prst="rect">
             <a:avLst/>
@@ -10860,7 +11122,7 @@
           <a:noFill/>
         </p:spPr>
         <p:txBody>
-          <a:bodyPr wrap="square" anchor="t" lIns="25400" rIns="25400" tIns="25400" bIns="25400">
+          <a:bodyPr wrap="square" anchor="ctr" lIns="25400" rIns="25400" tIns="25400" bIns="25400">
             <a:spAutoFit/>
           </a:bodyPr>
           <a:lstStyle/>
@@ -10887,14 +11149,58 @@
       </p:sp>
       <p:sp>
         <p:nvSpPr>
-          <p:cNvPr id="9" name="TextBox 8"/>
+          <p:cNvPr id="11" name="Rectangle 10"/>
+          <p:cNvSpPr/>
+          <p:nvPr/>
+        </p:nvSpPr>
+        <p:spPr>
+          <a:xfrm>
+            <a:off x="3566160" y="1609344"/>
+            <a:ext cx="12700" cy="475488"/>
+          </a:xfrm>
+          <a:prstGeom prst="rect">
+            <a:avLst/>
+          </a:prstGeom>
+          <a:solidFill>
+            <a:srgbClr val="F27E2E"/>
+          </a:solidFill>
+          <a:ln>
+            <a:noFill/>
+          </a:ln>
+          <a:effectLst/>
+        </p:spPr>
+        <p:style>
+          <a:lnRef idx="1">
+            <a:schemeClr val="accent1"/>
+          </a:lnRef>
+          <a:fillRef idx="3">
+            <a:schemeClr val="accent1"/>
+          </a:fillRef>
+          <a:effectRef idx="2">
+            <a:schemeClr val="accent1"/>
+          </a:effectRef>
+          <a:fontRef idx="minor">
+            <a:schemeClr val="lt1"/>
+          </a:fontRef>
+        </p:style>
+        <p:txBody>
+          <a:bodyPr rtlCol="0" anchor="ctr"/>
+          <a:lstStyle/>
+          <a:p>
+            <a:pPr algn="ctr"/>
+          </a:p>
+        </p:txBody>
+      </p:sp>
+      <p:sp>
+        <p:nvSpPr>
+          <p:cNvPr id="12" name="TextBox 11"/>
           <p:cNvSpPr txBox="1"/>
           <p:nvPr/>
         </p:nvSpPr>
         <p:spPr>
           <a:xfrm>
-            <a:off x="3611880" y="1481328"/>
-            <a:ext cx="8001000" cy="621792"/>
+            <a:off x="3749040" y="1463040"/>
+            <a:ext cx="7818120" cy="768096"/>
           </a:xfrm>
           <a:prstGeom prst="rect">
             <a:avLst/>
@@ -10902,14 +11208,14 @@
           <a:noFill/>
         </p:spPr>
         <p:txBody>
-          <a:bodyPr wrap="square" anchor="t" lIns="25400" rIns="25400" tIns="25400" bIns="25400">
+          <a:bodyPr wrap="square" anchor="ctr" lIns="25400" rIns="25400" tIns="25400" bIns="25400">
             <a:spAutoFit/>
           </a:bodyPr>
           <a:lstStyle/>
           <a:p>
             <a:pPr algn="l">
               <a:lnSpc>
-                <a:spcPct val="105000"/>
+                <a:spcPct val="108000"/>
               </a:lnSpc>
               <a:spcAft>
                 <a:spcPts val="400"/>
@@ -10929,14 +11235,14 @@
       </p:sp>
       <p:sp>
         <p:nvSpPr>
-          <p:cNvPr id="10" name="Rounded Rectangle 9"/>
+          <p:cNvPr id="13" name="Rounded Rectangle 12"/>
           <p:cNvSpPr/>
           <p:nvPr/>
         </p:nvSpPr>
         <p:spPr>
           <a:xfrm>
-            <a:off x="457200" y="2286000"/>
-            <a:ext cx="11292840" cy="804672"/>
+            <a:off x="457200" y="2322576"/>
+            <a:ext cx="11292840" cy="768096"/>
           </a:xfrm>
           <a:prstGeom prst="roundRect">
             <a:avLst/>
@@ -10975,14 +11281,14 @@
       </p:sp>
       <p:sp>
         <p:nvSpPr>
-          <p:cNvPr id="11" name="Rectangle 10"/>
+          <p:cNvPr id="14" name="Rectangle 13"/>
           <p:cNvSpPr/>
           <p:nvPr/>
         </p:nvSpPr>
         <p:spPr>
           <a:xfrm>
-            <a:off x="457200" y="2286000"/>
-            <a:ext cx="76200" cy="804672"/>
+            <a:off x="457200" y="2322576"/>
+            <a:ext cx="76200" cy="768096"/>
           </a:xfrm>
           <a:prstGeom prst="rect">
             <a:avLst/>
@@ -11019,14 +11325,14 @@
       </p:sp>
       <p:sp>
         <p:nvSpPr>
-          <p:cNvPr id="12" name="TextBox 11"/>
+          <p:cNvPr id="15" name="TextBox 14"/>
           <p:cNvSpPr txBox="1"/>
           <p:nvPr/>
         </p:nvSpPr>
         <p:spPr>
           <a:xfrm>
-            <a:off x="658368" y="2377440"/>
-            <a:ext cx="2880360" cy="292608"/>
+            <a:off x="685800" y="2322576"/>
+            <a:ext cx="2926080" cy="768096"/>
           </a:xfrm>
           <a:prstGeom prst="rect">
             <a:avLst/>
@@ -11034,7 +11340,7 @@
           <a:noFill/>
         </p:spPr>
         <p:txBody>
-          <a:bodyPr wrap="square" anchor="t" lIns="25400" rIns="25400" tIns="25400" bIns="25400">
+          <a:bodyPr wrap="square" anchor="ctr" lIns="25400" rIns="25400" tIns="25400" bIns="25400">
             <a:spAutoFit/>
           </a:bodyPr>
           <a:lstStyle/>
@@ -11061,14 +11367,58 @@
       </p:sp>
       <p:sp>
         <p:nvSpPr>
-          <p:cNvPr id="13" name="TextBox 12"/>
+          <p:cNvPr id="16" name="Rectangle 15"/>
+          <p:cNvSpPr/>
+          <p:nvPr/>
+        </p:nvSpPr>
+        <p:spPr>
+          <a:xfrm>
+            <a:off x="3566160" y="2468880"/>
+            <a:ext cx="12700" cy="475488"/>
+          </a:xfrm>
+          <a:prstGeom prst="rect">
+            <a:avLst/>
+          </a:prstGeom>
+          <a:solidFill>
+            <a:srgbClr val="F27E2E"/>
+          </a:solidFill>
+          <a:ln>
+            <a:noFill/>
+          </a:ln>
+          <a:effectLst/>
+        </p:spPr>
+        <p:style>
+          <a:lnRef idx="1">
+            <a:schemeClr val="accent1"/>
+          </a:lnRef>
+          <a:fillRef idx="3">
+            <a:schemeClr val="accent1"/>
+          </a:fillRef>
+          <a:effectRef idx="2">
+            <a:schemeClr val="accent1"/>
+          </a:effectRef>
+          <a:fontRef idx="minor">
+            <a:schemeClr val="lt1"/>
+          </a:fontRef>
+        </p:style>
+        <p:txBody>
+          <a:bodyPr rtlCol="0" anchor="ctr"/>
+          <a:lstStyle/>
+          <a:p>
+            <a:pPr algn="ctr"/>
+          </a:p>
+        </p:txBody>
+      </p:sp>
+      <p:sp>
+        <p:nvSpPr>
+          <p:cNvPr id="17" name="TextBox 16"/>
           <p:cNvSpPr txBox="1"/>
           <p:nvPr/>
         </p:nvSpPr>
         <p:spPr>
           <a:xfrm>
-            <a:off x="3611880" y="2377440"/>
-            <a:ext cx="8001000" cy="621792"/>
+            <a:off x="3749040" y="2322576"/>
+            <a:ext cx="7818120" cy="768096"/>
           </a:xfrm>
           <a:prstGeom prst="rect">
             <a:avLst/>
@@ -11076,14 +11426,14 @@
           <a:noFill/>
         </p:spPr>
         <p:txBody>
-          <a:bodyPr wrap="square" anchor="t" lIns="25400" rIns="25400" tIns="25400" bIns="25400">
+          <a:bodyPr wrap="square" anchor="ctr" lIns="25400" rIns="25400" tIns="25400" bIns="25400">
             <a:spAutoFit/>
           </a:bodyPr>
           <a:lstStyle/>
           <a:p>
             <a:pPr algn="l">
               <a:lnSpc>
-                <a:spcPct val="105000"/>
+                <a:spcPct val="108000"/>
               </a:lnSpc>
               <a:spcAft>
                 <a:spcPts val="400"/>
@@ -11103,14 +11453,14 @@
       </p:sp>
       <p:sp>
         <p:nvSpPr>
-          <p:cNvPr id="14" name="Rounded Rectangle 13"/>
+          <p:cNvPr id="18" name="Rounded Rectangle 17"/>
           <p:cNvSpPr/>
           <p:nvPr/>
         </p:nvSpPr>
         <p:spPr>
           <a:xfrm>
             <a:off x="457200" y="3182112"/>
-            <a:ext cx="11292840" cy="804672"/>
+            <a:ext cx="11292840" cy="768096"/>
           </a:xfrm>
           <a:prstGeom prst="roundRect">
             <a:avLst/>
@@ -11149,14 +11499,14 @@
       </p:sp>
       <p:sp>
         <p:nvSpPr>
-          <p:cNvPr id="15" name="Rectangle 14"/>
+          <p:cNvPr id="19" name="Rectangle 18"/>
           <p:cNvSpPr/>
           <p:nvPr/>
         </p:nvSpPr>
         <p:spPr>
           <a:xfrm>
             <a:off x="457200" y="3182112"/>
-            <a:ext cx="76200" cy="804672"/>
+            <a:ext cx="76200" cy="768096"/>
           </a:xfrm>
           <a:prstGeom prst="rect">
             <a:avLst/>
@@ -11193,14 +11543,14 @@
       </p:sp>
       <p:sp>
         <p:nvSpPr>
-          <p:cNvPr id="16" name="TextBox 15"/>
+          <p:cNvPr id="20" name="TextBox 19"/>
           <p:cNvSpPr txBox="1"/>
           <p:nvPr/>
         </p:nvSpPr>
         <p:spPr>
           <a:xfrm>
-            <a:off x="658368" y="3273552"/>
-            <a:ext cx="2880360" cy="292608"/>
+            <a:off x="685800" y="3182112"/>
+            <a:ext cx="2926080" cy="768096"/>
           </a:xfrm>
           <a:prstGeom prst="rect">
             <a:avLst/>
@@ -11208,7 +11558,7 @@
           <a:noFill/>
         </p:spPr>
         <p:txBody>
-          <a:bodyPr wrap="square" anchor="t" lIns="25400" rIns="25400" tIns="25400" bIns="25400">
+          <a:bodyPr wrap="square" anchor="ctr" lIns="25400" rIns="25400" tIns="25400" bIns="25400">
             <a:spAutoFit/>
           </a:bodyPr>
           <a:lstStyle/>
@@ -11235,14 +11585,58 @@
       </p:sp>
       <p:sp>
         <p:nvSpPr>
-          <p:cNvPr id="17" name="TextBox 16"/>
+          <p:cNvPr id="21" name="Rectangle 20"/>
+          <p:cNvSpPr/>
+          <p:nvPr/>
+        </p:nvSpPr>
+        <p:spPr>
+          <a:xfrm>
+            <a:off x="3566160" y="3328416"/>
+            <a:ext cx="12700" cy="475488"/>
+          </a:xfrm>
+          <a:prstGeom prst="rect">
+            <a:avLst/>
+          </a:prstGeom>
+          <a:solidFill>
+            <a:srgbClr val="F27E2E"/>
+          </a:solidFill>
+          <a:ln>
+            <a:noFill/>
+          </a:ln>
+          <a:effectLst/>
+        </p:spPr>
+        <p:style>
+          <a:lnRef idx="1">
+            <a:schemeClr val="accent1"/>
+          </a:lnRef>
+          <a:fillRef idx="3">
+            <a:schemeClr val="accent1"/>
+          </a:fillRef>
+          <a:effectRef idx="2">
+            <a:schemeClr val="accent1"/>
+          </a:effectRef>
+          <a:fontRef idx="minor">
+            <a:schemeClr val="lt1"/>
+          </a:fontRef>
+        </p:style>
+        <p:txBody>
+          <a:bodyPr rtlCol="0" anchor="ctr"/>
+          <a:lstStyle/>
+          <a:p>
+            <a:pPr algn="ctr"/>
+          </a:p>
+        </p:txBody>
+      </p:sp>
+      <p:sp>
+        <p:nvSpPr>
+          <p:cNvPr id="22" name="TextBox 21"/>
           <p:cNvSpPr txBox="1"/>
           <p:nvPr/>
         </p:nvSpPr>
         <p:spPr>
           <a:xfrm>
-            <a:off x="3611880" y="3273552"/>
-            <a:ext cx="8001000" cy="621792"/>
+            <a:off x="3749040" y="3182112"/>
+            <a:ext cx="7818120" cy="768096"/>
           </a:xfrm>
           <a:prstGeom prst="rect">
             <a:avLst/>
@@ -11250,14 +11644,14 @@
           <a:noFill/>
         </p:spPr>
         <p:txBody>
-          <a:bodyPr wrap="square" anchor="t" lIns="25400" rIns="25400" tIns="25400" bIns="25400">
+          <a:bodyPr wrap="square" anchor="ctr" lIns="25400" rIns="25400" tIns="25400" bIns="25400">
             <a:spAutoFit/>
           </a:bodyPr>
           <a:lstStyle/>
           <a:p>
             <a:pPr algn="l">
               <a:lnSpc>
-                <a:spcPct val="105000"/>
+                <a:spcPct val="108000"/>
               </a:lnSpc>
               <a:spcAft>
                 <a:spcPts val="400"/>
@@ -11277,14 +11671,14 @@
       </p:sp>
       <p:sp>
         <p:nvSpPr>
-          <p:cNvPr id="18" name="Rounded Rectangle 17"/>
+          <p:cNvPr id="23" name="Rounded Rectangle 22"/>
           <p:cNvSpPr/>
           <p:nvPr/>
         </p:nvSpPr>
         <p:spPr>
           <a:xfrm>
-            <a:off x="457200" y="4078224"/>
-            <a:ext cx="11292840" cy="804672"/>
+            <a:off x="457200" y="4041648"/>
+            <a:ext cx="11292840" cy="768096"/>
           </a:xfrm>
           <a:prstGeom prst="roundRect">
             <a:avLst/>
@@ -11323,14 +11717,14 @@
       </p:sp>
       <p:sp>
         <p:nvSpPr>
-          <p:cNvPr id="19" name="Rectangle 18"/>
+          <p:cNvPr id="24" name="Rectangle 23"/>
           <p:cNvSpPr/>
           <p:nvPr/>
         </p:nvSpPr>
         <p:spPr>
           <a:xfrm>
-            <a:off x="457200" y="4078224"/>
-            <a:ext cx="76200" cy="804672"/>
+            <a:off x="457200" y="4041648"/>
+            <a:ext cx="76200" cy="768096"/>
           </a:xfrm>
           <a:prstGeom prst="rect">
             <a:avLst/>
@@ -11367,14 +11761,14 @@
       </p:sp>
       <p:sp>
         <p:nvSpPr>
-          <p:cNvPr id="20" name="TextBox 19"/>
+          <p:cNvPr id="25" name="TextBox 24"/>
           <p:cNvSpPr txBox="1"/>
           <p:nvPr/>
         </p:nvSpPr>
         <p:spPr>
           <a:xfrm>
-            <a:off x="658368" y="4169664"/>
-            <a:ext cx="2880360" cy="292608"/>
+            <a:off x="685800" y="4041648"/>
+            <a:ext cx="2926080" cy="768096"/>
           </a:xfrm>
           <a:prstGeom prst="rect">
             <a:avLst/>
@@ -11382,7 +11776,7 @@
           <a:noFill/>
         </p:spPr>
         <p:txBody>
-          <a:bodyPr wrap="square" anchor="t" lIns="25400" rIns="25400" tIns="25400" bIns="25400">
+          <a:bodyPr wrap="square" anchor="ctr" lIns="25400" rIns="25400" tIns="25400" bIns="25400">
             <a:spAutoFit/>
           </a:bodyPr>
           <a:lstStyle/>
@@ -11409,14 +11803,58 @@
       </p:sp>
       <p:sp>
         <p:nvSpPr>
-          <p:cNvPr id="21" name="TextBox 20"/>
+          <p:cNvPr id="26" name="Rectangle 25"/>
+          <p:cNvSpPr/>
+          <p:nvPr/>
+        </p:nvSpPr>
+        <p:spPr>
+          <a:xfrm>
+            <a:off x="3566160" y="4187952"/>
+            <a:ext cx="12700" cy="475488"/>
+          </a:xfrm>
+          <a:prstGeom prst="rect">
+            <a:avLst/>
+          </a:prstGeom>
+          <a:solidFill>
+            <a:srgbClr val="F27E2E"/>
+          </a:solidFill>
+          <a:ln>
+            <a:noFill/>
+          </a:ln>
+          <a:effectLst/>
+        </p:spPr>
+        <p:style>
+          <a:lnRef idx="1">
+            <a:schemeClr val="accent1"/>
+          </a:lnRef>
+          <a:fillRef idx="3">
+            <a:schemeClr val="accent1"/>
+          </a:fillRef>
+          <a:effectRef idx="2">
+            <a:schemeClr val="accent1"/>
+          </a:effectRef>
+          <a:fontRef idx="minor">
+            <a:schemeClr val="lt1"/>
+          </a:fontRef>
+        </p:style>
+        <p:txBody>
+          <a:bodyPr rtlCol="0" anchor="ctr"/>
+          <a:lstStyle/>
+          <a:p>
+            <a:pPr algn="ctr"/>
+          </a:p>
+        </p:txBody>
+      </p:sp>
+      <p:sp>
+        <p:nvSpPr>
+          <p:cNvPr id="27" name="TextBox 26"/>
           <p:cNvSpPr txBox="1"/>
           <p:nvPr/>
         </p:nvSpPr>
         <p:spPr>
           <a:xfrm>
-            <a:off x="3611880" y="4169664"/>
-            <a:ext cx="8001000" cy="621792"/>
+            <a:off x="3749040" y="4041648"/>
+            <a:ext cx="7818120" cy="768096"/>
           </a:xfrm>
           <a:prstGeom prst="rect">
             <a:avLst/>
@@ -11424,14 +11862,14 @@
           <a:noFill/>
         </p:spPr>
         <p:txBody>
-          <a:bodyPr wrap="square" anchor="t" lIns="25400" rIns="25400" tIns="25400" bIns="25400">
+          <a:bodyPr wrap="square" anchor="ctr" lIns="25400" rIns="25400" tIns="25400" bIns="25400">
             <a:spAutoFit/>
           </a:bodyPr>
           <a:lstStyle/>
           <a:p>
             <a:pPr algn="l">
               <a:lnSpc>
-                <a:spcPct val="105000"/>
+                <a:spcPct val="108000"/>
               </a:lnSpc>
               <a:spcAft>
                 <a:spcPts val="400"/>
@@ -11451,14 +11889,14 @@
       </p:sp>
       <p:sp>
         <p:nvSpPr>
-          <p:cNvPr id="22" name="Rounded Rectangle 21"/>
+          <p:cNvPr id="28" name="Rounded Rectangle 27"/>
           <p:cNvSpPr/>
           <p:nvPr/>
         </p:nvSpPr>
         <p:spPr>
           <a:xfrm>
-            <a:off x="457200" y="4974336"/>
-            <a:ext cx="11292840" cy="804672"/>
+            <a:off x="457200" y="4901184"/>
+            <a:ext cx="11292840" cy="768096"/>
           </a:xfrm>
           <a:prstGeom prst="roundRect">
             <a:avLst/>
@@ -11497,14 +11935,14 @@
       </p:sp>
       <p:sp>
         <p:nvSpPr>
-          <p:cNvPr id="23" name="Rectangle 22"/>
+          <p:cNvPr id="29" name="Rectangle 28"/>
           <p:cNvSpPr/>
           <p:nvPr/>
         </p:nvSpPr>
         <p:spPr>
           <a:xfrm>
-            <a:off x="457200" y="4974336"/>
-            <a:ext cx="76200" cy="804672"/>
+            <a:off x="457200" y="4901184"/>
+            <a:ext cx="76200" cy="768096"/>
           </a:xfrm>
           <a:prstGeom prst="rect">
             <a:avLst/>
@@ -11541,14 +11979,14 @@
       </p:sp>
       <p:sp>
         <p:nvSpPr>
-          <p:cNvPr id="24" name="TextBox 23"/>
+          <p:cNvPr id="30" name="TextBox 29"/>
           <p:cNvSpPr txBox="1"/>
           <p:nvPr/>
         </p:nvSpPr>
         <p:spPr>
           <a:xfrm>
-            <a:off x="658368" y="5065776"/>
-            <a:ext cx="2880360" cy="292608"/>
+            <a:off x="685800" y="4901184"/>
+            <a:ext cx="2926080" cy="768096"/>
           </a:xfrm>
           <a:prstGeom prst="rect">
             <a:avLst/>
@@ -11556,7 +11994,7 @@
           <a:noFill/>
         </p:spPr>
         <p:txBody>
-          <a:bodyPr wrap="square" anchor="t" lIns="25400" rIns="25400" tIns="25400" bIns="25400">
+          <a:bodyPr wrap="square" anchor="ctr" lIns="25400" rIns="25400" tIns="25400" bIns="25400">
             <a:spAutoFit/>
           </a:bodyPr>
           <a:lstStyle/>
@@ -11583,14 +12021,58 @@
       </p:sp>
       <p:sp>
         <p:nvSpPr>
-          <p:cNvPr id="25" name="TextBox 24"/>
+          <p:cNvPr id="31" name="Rectangle 30"/>
+          <p:cNvSpPr/>
+          <p:nvPr/>
+        </p:nvSpPr>
+        <p:spPr>
+          <a:xfrm>
+            <a:off x="3566160" y="5047488"/>
+            <a:ext cx="12700" cy="475488"/>
+          </a:xfrm>
+          <a:prstGeom prst="rect">
+            <a:avLst/>
+          </a:prstGeom>
+          <a:solidFill>
+            <a:srgbClr val="F27E2E"/>
+          </a:solidFill>
+          <a:ln>
+            <a:noFill/>
+          </a:ln>
+          <a:effectLst/>
+        </p:spPr>
+        <p:style>
+          <a:lnRef idx="1">
+            <a:schemeClr val="accent1"/>
+          </a:lnRef>
+          <a:fillRef idx="3">
+            <a:schemeClr val="accent1"/>
+          </a:fillRef>
+          <a:effectRef idx="2">
+            <a:schemeClr val="accent1"/>
+          </a:effectRef>
+          <a:fontRef idx="minor">
+            <a:schemeClr val="lt1"/>
+          </a:fontRef>
+        </p:style>
+        <p:txBody>
+          <a:bodyPr rtlCol="0" anchor="ctr"/>
+          <a:lstStyle/>
+          <a:p>
+            <a:pPr algn="ctr"/>
+          </a:p>
+        </p:txBody>
+      </p:sp>
+      <p:sp>
+        <p:nvSpPr>
+          <p:cNvPr id="32" name="TextBox 31"/>
           <p:cNvSpPr txBox="1"/>
           <p:nvPr/>
         </p:nvSpPr>
         <p:spPr>
           <a:xfrm>
-            <a:off x="3611880" y="5065776"/>
-            <a:ext cx="8001000" cy="621792"/>
+            <a:off x="3749040" y="4901184"/>
+            <a:ext cx="7818120" cy="768096"/>
           </a:xfrm>
           <a:prstGeom prst="rect">
             <a:avLst/>
@@ -11598,14 +12080,14 @@
           <a:noFill/>
         </p:spPr>
         <p:txBody>
-          <a:bodyPr wrap="square" anchor="t" lIns="25400" rIns="25400" tIns="25400" bIns="25400">
+          <a:bodyPr wrap="square" anchor="ctr" lIns="25400" rIns="25400" tIns="25400" bIns="25400">
             <a:spAutoFit/>
           </a:bodyPr>
           <a:lstStyle/>
           <a:p>
             <a:pPr algn="l">
               <a:lnSpc>
-                <a:spcPct val="105000"/>
+                <a:spcPct val="108000"/>
               </a:lnSpc>
               <a:spcAft>
                 <a:spcPts val="400"/>
@@ -11625,14 +12107,14 @@
       </p:sp>
       <p:sp>
         <p:nvSpPr>
-          <p:cNvPr id="26" name="Rounded Rectangle 25"/>
+          <p:cNvPr id="33" name="Rounded Rectangle 32"/>
           <p:cNvSpPr/>
           <p:nvPr/>
         </p:nvSpPr>
         <p:spPr>
           <a:xfrm>
-            <a:off x="457200" y="6144768"/>
-            <a:ext cx="11292840" cy="438912"/>
+            <a:off x="457200" y="6053328"/>
+            <a:ext cx="11292840" cy="475488"/>
           </a:xfrm>
           <a:prstGeom prst="roundRect">
             <a:avLst/>
@@ -11669,14 +12151,14 @@
       </p:sp>
       <p:sp>
         <p:nvSpPr>
-          <p:cNvPr id="27" name="TextBox 26"/>
+          <p:cNvPr id="34" name="TextBox 33"/>
           <p:cNvSpPr txBox="1"/>
           <p:nvPr/>
         </p:nvSpPr>
         <p:spPr>
           <a:xfrm>
-            <a:off x="457200" y="6144768"/>
-            <a:ext cx="11292840" cy="438912"/>
+            <a:off x="457200" y="6053328"/>
+            <a:ext cx="11292840" cy="475488"/>
           </a:xfrm>
           <a:prstGeom prst="rect">
             <a:avLst/>
@@ -11711,7 +12193,7 @@
       </p:sp>
       <p:sp>
         <p:nvSpPr>
-          <p:cNvPr id="28" name="TextBox 27"/>
+          <p:cNvPr id="35" name="TextBox 34"/>
           <p:cNvSpPr txBox="1"/>
           <p:nvPr/>
         </p:nvSpPr>
@@ -11957,8 +12439,8 @@
         </p:nvSpPr>
         <p:spPr>
           <a:xfrm>
-            <a:off x="457200" y="1234440"/>
-            <a:ext cx="5532120" cy="4434840"/>
+            <a:off x="457200" y="1207008"/>
+            <a:ext cx="5504688" cy="4114800"/>
           </a:xfrm>
           <a:prstGeom prst="roundRect">
             <a:avLst/>
@@ -12003,8 +12485,8 @@
         </p:nvSpPr>
         <p:spPr>
           <a:xfrm>
-            <a:off x="457200" y="1234440"/>
-            <a:ext cx="5532120" cy="457200"/>
+            <a:off x="457200" y="1207008"/>
+            <a:ext cx="5504688" cy="475488"/>
           </a:xfrm>
           <a:prstGeom prst="roundRect">
             <a:avLst/>
@@ -12047,8 +12529,8 @@
         </p:nvSpPr>
         <p:spPr>
           <a:xfrm>
-            <a:off x="457200" y="1234440"/>
-            <a:ext cx="5532120" cy="457200"/>
+            <a:off x="457200" y="1207008"/>
+            <a:ext cx="5504688" cy="475488"/>
           </a:xfrm>
           <a:prstGeom prst="rect">
             <a:avLst/>
@@ -12070,13 +12552,13 @@
               </a:spcAft>
             </a:pPr>
             <a:r>
-              <a:rPr sz="1400" b="1">
+              <a:rPr sz="1350" b="1">
                 <a:solidFill>
                   <a:srgbClr val="FFFFFF"/>
                 </a:solidFill>
                 <a:latin typeface="Apple SD Gothic Neo"/>
               </a:rPr>
-              <a:t>현재 사내 환경 (가능)</a:t>
+              <a:t>현재 사내 환경 (활용 가능)</a:t>
             </a:r>
           </a:p>
         </p:txBody>
@@ -12089,8 +12571,8 @@
         </p:nvSpPr>
         <p:spPr>
           <a:xfrm>
-            <a:off x="685800" y="1801368"/>
-            <a:ext cx="5120640" cy="347472"/>
+            <a:off x="713232" y="1810512"/>
+            <a:ext cx="5047488" cy="443484"/>
           </a:xfrm>
           <a:prstGeom prst="rect">
             <a:avLst/>
@@ -12112,13 +12594,22 @@
               </a:spcAft>
             </a:pPr>
             <a:r>
-              <a:rPr sz="1120" b="0">
+              <a:rPr sz="1100" b="1">
+                <a:solidFill>
+                  <a:srgbClr val="27AE60"/>
+                </a:solidFill>
+                <a:latin typeface="Apple SD Gothic Neo"/>
+              </a:rPr>
+              <a:t>✓  </a:t>
+            </a:r>
+            <a:r>
+              <a:rPr sz="1100" b="0">
                 <a:solidFill>
                   <a:srgbClr val="444A55"/>
                 </a:solidFill>
                 <a:latin typeface="Apple SD Gothic Neo"/>
               </a:rPr>
-              <a:t>✓ 펌웨어·드라이버·HAL 코드 초안·수정</a:t>
+              <a:t>펌웨어·드라이버·HAL 코드 초안·수정</a:t>
             </a:r>
           </a:p>
         </p:txBody>
@@ -12131,8 +12622,8 @@
         </p:nvSpPr>
         <p:spPr>
           <a:xfrm>
-            <a:off x="685800" y="2276856"/>
-            <a:ext cx="5120640" cy="347472"/>
+            <a:off x="713232" y="2253996"/>
+            <a:ext cx="5047488" cy="443484"/>
           </a:xfrm>
           <a:prstGeom prst="rect">
             <a:avLst/>
@@ -12154,13 +12645,22 @@
               </a:spcAft>
             </a:pPr>
             <a:r>
-              <a:rPr sz="1120" b="0">
+              <a:rPr sz="1100" b="1">
+                <a:solidFill>
+                  <a:srgbClr val="27AE60"/>
+                </a:solidFill>
+                <a:latin typeface="Apple SD Gothic Neo"/>
+              </a:rPr>
+              <a:t>✓  </a:t>
+            </a:r>
+            <a:r>
+              <a:rPr sz="1100" b="0">
                 <a:solidFill>
                   <a:srgbClr val="444A55"/>
                 </a:solidFill>
                 <a:latin typeface="Apple SD Gothic Neo"/>
               </a:rPr>
-              <a:t>✓ 측정·검증 Python 스크립트 자동화</a:t>
+              <a:t>측정·검증 Python 스크립트 자동화</a:t>
             </a:r>
           </a:p>
         </p:txBody>
@@ -12173,8 +12673,8 @@
         </p:nvSpPr>
         <p:spPr>
           <a:xfrm>
-            <a:off x="685800" y="2752344"/>
-            <a:ext cx="5120640" cy="347472"/>
+            <a:off x="713232" y="2697480"/>
+            <a:ext cx="5047488" cy="443484"/>
           </a:xfrm>
           <a:prstGeom prst="rect">
             <a:avLst/>
@@ -12196,13 +12696,22 @@
               </a:spcAft>
             </a:pPr>
             <a:r>
-              <a:rPr sz="1120" b="0">
+              <a:rPr sz="1100" b="1">
+                <a:solidFill>
+                  <a:srgbClr val="27AE60"/>
+                </a:solidFill>
+                <a:latin typeface="Apple SD Gothic Neo"/>
+              </a:rPr>
+              <a:t>✓  </a:t>
+            </a:r>
+            <a:r>
+              <a:rPr sz="1100" b="0">
                 <a:solidFill>
                   <a:srgbClr val="444A55"/>
                 </a:solidFill>
                 <a:latin typeface="Apple SD Gothic Neo"/>
               </a:rPr>
-              <a:t>✓ 로그·측정 데이터 파싱·표·요약</a:t>
+              <a:t>로그·측정 데이터 파싱·표·요약</a:t>
             </a:r>
           </a:p>
         </p:txBody>
@@ -12215,8 +12724,8 @@
         </p:nvSpPr>
         <p:spPr>
           <a:xfrm>
-            <a:off x="685800" y="3227832"/>
-            <a:ext cx="5120640" cy="347472"/>
+            <a:off x="713232" y="3140964"/>
+            <a:ext cx="5047488" cy="443484"/>
           </a:xfrm>
           <a:prstGeom prst="rect">
             <a:avLst/>
@@ -12238,13 +12747,22 @@
               </a:spcAft>
             </a:pPr>
             <a:r>
-              <a:rPr sz="1120" b="0">
+              <a:rPr sz="1100" b="1">
+                <a:solidFill>
+                  <a:srgbClr val="27AE60"/>
+                </a:solidFill>
+                <a:latin typeface="Apple SD Gothic Neo"/>
+              </a:rPr>
+              <a:t>✓  </a:t>
+            </a:r>
+            <a:r>
+              <a:rPr sz="1100" b="0">
                 <a:solidFill>
                   <a:srgbClr val="444A55"/>
                 </a:solidFill>
                 <a:latin typeface="Apple SD Gothic Neo"/>
               </a:rPr>
-              <a:t>✓ 시험·이슈·회의 문서 초안</a:t>
+              <a:t>시험·이슈·회의 문서 초안</a:t>
             </a:r>
           </a:p>
         </p:txBody>
@@ -12257,8 +12775,8 @@
         </p:nvSpPr>
         <p:spPr>
           <a:xfrm>
-            <a:off x="685800" y="3703320"/>
-            <a:ext cx="5120640" cy="347472"/>
+            <a:off x="713232" y="3584448"/>
+            <a:ext cx="5047488" cy="443484"/>
           </a:xfrm>
           <a:prstGeom prst="rect">
             <a:avLst/>
@@ -12280,13 +12798,22 @@
               </a:spcAft>
             </a:pPr>
             <a:r>
-              <a:rPr sz="1120" b="0">
+              <a:rPr sz="1100" b="1">
+                <a:solidFill>
+                  <a:srgbClr val="27AE60"/>
+                </a:solidFill>
+                <a:latin typeface="Apple SD Gothic Neo"/>
+              </a:rPr>
+              <a:t>✓  </a:t>
+            </a:r>
+            <a:r>
+              <a:rPr sz="1100" b="0">
                 <a:solidFill>
                   <a:srgbClr val="444A55"/>
                 </a:solidFill>
                 <a:latin typeface="Apple SD Gothic Neo"/>
               </a:rPr>
-              <a:t>✓ 사내 코드·GitHub Enterprise 기반 리뷰</a:t>
+              <a:t>GitHub Enterprise 기반 코드 리뷰·협업</a:t>
             </a:r>
           </a:p>
         </p:txBody>
@@ -12299,8 +12826,8 @@
         </p:nvSpPr>
         <p:spPr>
           <a:xfrm>
-            <a:off x="685800" y="4178808"/>
-            <a:ext cx="5120640" cy="347472"/>
+            <a:off x="713232" y="4027932"/>
+            <a:ext cx="5047488" cy="443484"/>
           </a:xfrm>
           <a:prstGeom prst="rect">
             <a:avLst/>
@@ -12322,13 +12849,22 @@
               </a:spcAft>
             </a:pPr>
             <a:r>
-              <a:rPr sz="1120" b="0">
+              <a:rPr sz="1100" b="1">
+                <a:solidFill>
+                  <a:srgbClr val="27AE60"/>
+                </a:solidFill>
+                <a:latin typeface="Apple SD Gothic Neo"/>
+              </a:rPr>
+              <a:t>✓  </a:t>
+            </a:r>
+            <a:r>
+              <a:rPr sz="1100" b="0">
                 <a:solidFill>
                   <a:srgbClr val="444A55"/>
                 </a:solidFill>
                 <a:latin typeface="Apple SD Gothic Neo"/>
               </a:rPr>
-              <a:t>✓ 망분리·로컬(Ollama) 고민감 자료 처리</a:t>
+              <a:t>망분리·로컬(Ollama) 고민감 자료 처리</a:t>
             </a:r>
           </a:p>
         </p:txBody>
@@ -12341,8 +12877,8 @@
         </p:nvSpPr>
         <p:spPr>
           <a:xfrm>
-            <a:off x="685800" y="4654296"/>
-            <a:ext cx="5120640" cy="347472"/>
+            <a:off x="713232" y="4471416"/>
+            <a:ext cx="5047488" cy="443484"/>
           </a:xfrm>
           <a:prstGeom prst="rect">
             <a:avLst/>
@@ -12364,13 +12900,22 @@
               </a:spcAft>
             </a:pPr>
             <a:r>
-              <a:rPr sz="1120" b="0">
+              <a:rPr sz="1100" b="1">
+                <a:solidFill>
+                  <a:srgbClr val="27AE60"/>
+                </a:solidFill>
+                <a:latin typeface="Apple SD Gothic Neo"/>
+              </a:rPr>
+              <a:t>✓  </a:t>
+            </a:r>
+            <a:r>
+              <a:rPr sz="1100" b="0">
                 <a:solidFill>
                   <a:srgbClr val="444A55"/>
                 </a:solidFill>
                 <a:latin typeface="Apple SD Gothic Neo"/>
               </a:rPr>
-              <a:t>✓ Gauss·Cline SR 기반 다단계 코드 작업 (호출 한도 내)</a:t>
+              <a:t>Gauss·Cline SR 다단계 작업 (호출 한도 내)</a:t>
             </a:r>
           </a:p>
         </p:txBody>
@@ -12383,8 +12928,8 @@
         </p:nvSpPr>
         <p:spPr>
           <a:xfrm>
-            <a:off x="6172200" y="1234440"/>
-            <a:ext cx="5532120" cy="4434840"/>
+            <a:off x="6245352" y="1207008"/>
+            <a:ext cx="5504688" cy="4114800"/>
           </a:xfrm>
           <a:prstGeom prst="roundRect">
             <a:avLst/>
@@ -12429,8 +12974,8 @@
         </p:nvSpPr>
         <p:spPr>
           <a:xfrm>
-            <a:off x="6172200" y="1234440"/>
-            <a:ext cx="5532120" cy="457200"/>
+            <a:off x="6245352" y="1207008"/>
+            <a:ext cx="5504688" cy="475488"/>
           </a:xfrm>
           <a:prstGeom prst="roundRect">
             <a:avLst/>
@@ -12473,8 +13018,8 @@
         </p:nvSpPr>
         <p:spPr>
           <a:xfrm>
-            <a:off x="6172200" y="1234440"/>
-            <a:ext cx="5532120" cy="457200"/>
+            <a:off x="6245352" y="1207008"/>
+            <a:ext cx="5504688" cy="475488"/>
           </a:xfrm>
           <a:prstGeom prst="rect">
             <a:avLst/>
@@ -12496,7 +13041,7 @@
               </a:spcAft>
             </a:pPr>
             <a:r>
-              <a:rPr sz="1400" b="1">
+              <a:rPr sz="1350" b="1">
                 <a:solidFill>
                   <a:srgbClr val="FFFFFF"/>
                 </a:solidFill>
@@ -12515,8 +13060,8 @@
         </p:nvSpPr>
         <p:spPr>
           <a:xfrm>
-            <a:off x="6400800" y="1801368"/>
-            <a:ext cx="5120640" cy="347472"/>
+            <a:off x="6501384" y="1810512"/>
+            <a:ext cx="5047488" cy="443484"/>
           </a:xfrm>
           <a:prstGeom prst="rect">
             <a:avLst/>
@@ -12538,13 +13083,22 @@
               </a:spcAft>
             </a:pPr>
             <a:r>
-              <a:rPr sz="1120" b="0">
+              <a:rPr sz="1100" b="1">
+                <a:solidFill>
+                  <a:srgbClr val="C0392B"/>
+                </a:solidFill>
+                <a:latin typeface="Apple SD Gothic Neo"/>
+              </a:rPr>
+              <a:t>✗  </a:t>
+            </a:r>
+            <a:r>
+              <a:rPr sz="1100" b="0">
                 <a:solidFill>
                   <a:srgbClr val="444A55"/>
                 </a:solidFill>
                 <a:latin typeface="Apple SD Gothic Neo"/>
               </a:rPr>
-              <a:t>✗ 외부 MCP·API·플러그인 자동 연동</a:t>
+              <a:t>외부 MCP·API·플러그인 자동 연동</a:t>
             </a:r>
           </a:p>
         </p:txBody>
@@ -12557,8 +13111,8 @@
         </p:nvSpPr>
         <p:spPr>
           <a:xfrm>
-            <a:off x="6400800" y="2276856"/>
-            <a:ext cx="5120640" cy="347472"/>
+            <a:off x="6501384" y="2253996"/>
+            <a:ext cx="5047488" cy="443484"/>
           </a:xfrm>
           <a:prstGeom prst="rect">
             <a:avLst/>
@@ -12580,13 +13134,22 @@
               </a:spcAft>
             </a:pPr>
             <a:r>
-              <a:rPr sz="1120" b="0">
+              <a:rPr sz="1100" b="1">
+                <a:solidFill>
+                  <a:srgbClr val="C0392B"/>
+                </a:solidFill>
+                <a:latin typeface="Apple SD Gothic Neo"/>
+              </a:rPr>
+              <a:t>✗  </a:t>
+            </a:r>
+            <a:r>
+              <a:rPr sz="1100" b="0">
                 <a:solidFill>
                   <a:srgbClr val="444A55"/>
                 </a:solidFill>
                 <a:latin typeface="Apple SD Gothic Neo"/>
               </a:rPr>
-              <a:t>✗ ChatGPT·Gemini·Claude 등 외부 LLM 직접 연동</a:t>
+              <a:t>ChatGPT·Gemini·Claude 외부 LLM 연동</a:t>
             </a:r>
           </a:p>
         </p:txBody>
@@ -12599,8 +13162,8 @@
         </p:nvSpPr>
         <p:spPr>
           <a:xfrm>
-            <a:off x="6400800" y="2752344"/>
-            <a:ext cx="5120640" cy="347472"/>
+            <a:off x="6501384" y="2697480"/>
+            <a:ext cx="5047488" cy="443484"/>
           </a:xfrm>
           <a:prstGeom prst="rect">
             <a:avLst/>
@@ -12622,13 +13185,22 @@
               </a:spcAft>
             </a:pPr>
             <a:r>
-              <a:rPr sz="1120" b="0">
+              <a:rPr sz="1100" b="1">
+                <a:solidFill>
+                  <a:srgbClr val="C0392B"/>
+                </a:solidFill>
+                <a:latin typeface="Apple SD Gothic Neo"/>
+              </a:rPr>
+              <a:t>✗  </a:t>
+            </a:r>
+            <a:r>
+              <a:rPr sz="1100" b="0">
                 <a:solidFill>
                   <a:srgbClr val="444A55"/>
                 </a:solidFill>
                 <a:latin typeface="Apple SD Gothic Neo"/>
               </a:rPr>
-              <a:t>✗ 웹·최신 공개 자료 실시간 검색·인용</a:t>
+              <a:t>웹·최신 공개 자료 실시간 검색·인용</a:t>
             </a:r>
           </a:p>
         </p:txBody>
@@ -12641,8 +13213,8 @@
         </p:nvSpPr>
         <p:spPr>
           <a:xfrm>
-            <a:off x="6400800" y="3227832"/>
-            <a:ext cx="5120640" cy="347472"/>
+            <a:off x="6501384" y="3140964"/>
+            <a:ext cx="5047488" cy="443484"/>
           </a:xfrm>
           <a:prstGeom prst="rect">
             <a:avLst/>
@@ -12664,13 +13236,22 @@
               </a:spcAft>
             </a:pPr>
             <a:r>
-              <a:rPr sz="1120" b="0">
+              <a:rPr sz="1100" b="1">
+                <a:solidFill>
+                  <a:srgbClr val="C0392B"/>
+                </a:solidFill>
+                <a:latin typeface="Apple SD Gothic Neo"/>
+              </a:rPr>
+              <a:t>✗  </a:t>
+            </a:r>
+            <a:r>
+              <a:rPr sz="1100" b="0">
                 <a:solidFill>
                   <a:srgbClr val="444A55"/>
                 </a:solidFill>
                 <a:latin typeface="Apple SD Gothic Neo"/>
               </a:rPr>
-              <a:t>✗ 고품질 임베딩·장문 사양서 의미 검색</a:t>
+              <a:t>고품질 임베딩·장문 사양서 의미 검색</a:t>
             </a:r>
           </a:p>
         </p:txBody>
@@ -12683,8 +13264,8 @@
         </p:nvSpPr>
         <p:spPr>
           <a:xfrm>
-            <a:off x="6400800" y="3703320"/>
-            <a:ext cx="5120640" cy="347472"/>
+            <a:off x="6501384" y="3584448"/>
+            <a:ext cx="5047488" cy="443484"/>
           </a:xfrm>
           <a:prstGeom prst="rect">
             <a:avLst/>
@@ -12706,13 +13287,22 @@
               </a:spcAft>
             </a:pPr>
             <a:r>
-              <a:rPr sz="1120" b="0">
+              <a:rPr sz="1100" b="1">
+                <a:solidFill>
+                  <a:srgbClr val="C0392B"/>
+                </a:solidFill>
+                <a:latin typeface="Apple SD Gothic Neo"/>
+              </a:rPr>
+              <a:t>✗  </a:t>
+            </a:r>
+            <a:r>
+              <a:rPr sz="1100" b="0">
                 <a:solidFill>
                   <a:srgbClr val="444A55"/>
                 </a:solidFill>
                 <a:latin typeface="Apple SD Gothic Neo"/>
               </a:rPr>
-              <a:t>✗ 고정밀 OCR (스캔 PDF·회로도)</a:t>
+              <a:t>고정밀 OCR (스캔 PDF·회로도)</a:t>
             </a:r>
           </a:p>
         </p:txBody>
@@ -12725,8 +13315,8 @@
         </p:nvSpPr>
         <p:spPr>
           <a:xfrm>
-            <a:off x="6400800" y="4178808"/>
-            <a:ext cx="5120640" cy="347472"/>
+            <a:off x="6501384" y="4027932"/>
+            <a:ext cx="5047488" cy="443484"/>
           </a:xfrm>
           <a:prstGeom prst="rect">
             <a:avLst/>
@@ -12748,13 +13338,22 @@
               </a:spcAft>
             </a:pPr>
             <a:r>
-              <a:rPr sz="1120" b="0">
+              <a:rPr sz="1100" b="1">
+                <a:solidFill>
+                  <a:srgbClr val="C0392B"/>
+                </a:solidFill>
+                <a:latin typeface="Apple SD Gothic Neo"/>
+              </a:rPr>
+              <a:t>✗  </a:t>
+            </a:r>
+            <a:r>
+              <a:rPr sz="1100" b="0">
                 <a:solidFill>
                   <a:srgbClr val="444A55"/>
                 </a:solidFill>
                 <a:latin typeface="Apple SD Gothic Neo"/>
               </a:rPr>
-              <a:t>✗ 대량·고속 API 호출 (분당 수십~수백 회)</a:t>
+              <a:t>대량·고속 API 호출 (분당 수십~수백 회)</a:t>
             </a:r>
           </a:p>
         </p:txBody>
@@ -12767,8 +13366,8 @@
         </p:nvSpPr>
         <p:spPr>
           <a:xfrm>
-            <a:off x="6400800" y="4654296"/>
-            <a:ext cx="5120640" cy="347472"/>
+            <a:off x="6501384" y="4471416"/>
+            <a:ext cx="5047488" cy="443484"/>
           </a:xfrm>
           <a:prstGeom prst="rect">
             <a:avLst/>
@@ -12790,27 +13389,80 @@
               </a:spcAft>
             </a:pPr>
             <a:r>
-              <a:rPr sz="1120" b="0">
+              <a:rPr sz="1100" b="1">
+                <a:solidFill>
+                  <a:srgbClr val="C0392B"/>
+                </a:solidFill>
+                <a:latin typeface="Apple SD Gothic Neo"/>
+              </a:rPr>
+              <a:t>✗  </a:t>
+            </a:r>
+            <a:r>
+              <a:rPr sz="1100" b="0">
                 <a:solidFill>
                   <a:srgbClr val="444A55"/>
                 </a:solidFill>
                 <a:latin typeface="Apple SD Gothic Neo"/>
               </a:rPr>
-              <a:t>✗ 멀티모달·에이전트 클라우드 위임 (Codex 등)</a:t>
-            </a:r>
-          </a:p>
-        </p:txBody>
-      </p:sp>
-      <p:sp>
-        <p:nvSpPr>
-          <p:cNvPr id="26" name="TextBox 25"/>
+              <a:t>멀티모달·에이전트 클라우드 위임 (Codex 등)</a:t>
+            </a:r>
+          </a:p>
+        </p:txBody>
+      </p:sp>
+      <p:sp>
+        <p:nvSpPr>
+          <p:cNvPr id="26" name="Rounded Rectangle 25"/>
+          <p:cNvSpPr/>
+          <p:nvPr/>
+        </p:nvSpPr>
+        <p:spPr>
+          <a:xfrm>
+            <a:off x="5829300" y="2971800"/>
+            <a:ext cx="548640" cy="548640"/>
+          </a:xfrm>
+          <a:prstGeom prst="roundRect">
+            <a:avLst/>
+          </a:prstGeom>
+          <a:solidFill>
+            <a:srgbClr val="F27E2E"/>
+          </a:solidFill>
+          <a:ln>
+            <a:noFill/>
+          </a:ln>
+          <a:effectLst/>
+        </p:spPr>
+        <p:style>
+          <a:lnRef idx="1">
+            <a:schemeClr val="accent1"/>
+          </a:lnRef>
+          <a:fillRef idx="3">
+            <a:schemeClr val="accent1"/>
+          </a:fillRef>
+          <a:effectRef idx="2">
+            <a:schemeClr val="accent1"/>
+          </a:effectRef>
+          <a:fontRef idx="minor">
+            <a:schemeClr val="lt1"/>
+          </a:fontRef>
+        </p:style>
+        <p:txBody>
+          <a:bodyPr rtlCol="0" anchor="ctr"/>
+          <a:lstStyle/>
+          <a:p>
+            <a:pPr algn="ctr"/>
+          </a:p>
+        </p:txBody>
+      </p:sp>
+      <p:sp>
+        <p:nvSpPr>
+          <p:cNvPr id="27" name="TextBox 26"/>
           <p:cNvSpPr txBox="1"/>
           <p:nvPr/>
         </p:nvSpPr>
         <p:spPr>
           <a:xfrm>
-            <a:off x="5806440" y="2926080"/>
-            <a:ext cx="594360" cy="457200"/>
+            <a:off x="5829300" y="2971800"/>
+            <a:ext cx="548640" cy="548640"/>
           </a:xfrm>
           <a:prstGeom prst="rect">
             <a:avLst/>
@@ -12832,9 +13484,9 @@
               </a:spcAft>
             </a:pPr>
             <a:r>
-              <a:rPr sz="1600" b="1">
-                <a:solidFill>
-                  <a:srgbClr val="F27E2E"/>
+              <a:rPr sz="1400" b="1">
+                <a:solidFill>
+                  <a:srgbClr val="FFFFFF"/>
                 </a:solidFill>
                 <a:latin typeface="Apple SD Gothic Neo"/>
               </a:rPr>
@@ -12845,14 +13497,14 @@
       </p:sp>
       <p:sp>
         <p:nvSpPr>
-          <p:cNvPr id="27" name="Rounded Rectangle 26"/>
+          <p:cNvPr id="28" name="Rounded Rectangle 27"/>
           <p:cNvSpPr/>
           <p:nvPr/>
         </p:nvSpPr>
         <p:spPr>
           <a:xfrm>
-            <a:off x="457200" y="5833872"/>
-            <a:ext cx="11292840" cy="804672"/>
+            <a:off x="457200" y="5486400"/>
+            <a:ext cx="11292840" cy="1097280"/>
           </a:xfrm>
           <a:prstGeom prst="roundRect">
             <a:avLst/>
@@ -12889,14 +13541,14 @@
       </p:sp>
       <p:sp>
         <p:nvSpPr>
-          <p:cNvPr id="28" name="TextBox 27"/>
+          <p:cNvPr id="29" name="TextBox 28"/>
           <p:cNvSpPr txBox="1"/>
           <p:nvPr/>
         </p:nvSpPr>
         <p:spPr>
           <a:xfrm>
-            <a:off x="685800" y="5833872"/>
-            <a:ext cx="10835640" cy="804672"/>
+            <a:off x="713232" y="5486400"/>
+            <a:ext cx="10789920" cy="1097280"/>
           </a:xfrm>
           <a:prstGeom prst="rect">
             <a:avLst/>
@@ -12911,14 +13563,14 @@
           <a:p>
             <a:pPr algn="l">
               <a:lnSpc>
-                <a:spcPct val="115000"/>
-              </a:lnSpc>
-              <a:spcAft>
-                <a:spcPts val="200"/>
-              </a:spcAft>
-            </a:pPr>
-            <a:r>
-              <a:rPr sz="1400" b="1">
+                <a:spcPct val="120000"/>
+              </a:lnSpc>
+              <a:spcAft>
+                <a:spcPts val="300"/>
+              </a:spcAft>
+            </a:pPr>
+            <a:r>
+              <a:rPr sz="1350" b="1">
                 <a:solidFill>
                   <a:srgbClr val="9FC4E8"/>
                 </a:solidFill>
@@ -12930,82 +13582,64 @@
           <a:p>
             <a:pPr algn="l">
               <a:lnSpc>
-                <a:spcPct val="115000"/>
-              </a:lnSpc>
-              <a:spcAft>
-                <a:spcPts val="200"/>
-              </a:spcAft>
-            </a:pPr>
-            <a:r>
-              <a:rPr sz="1150" b="0">
+                <a:spcPct val="120000"/>
+              </a:lnSpc>
+              <a:spcAft>
+                <a:spcPts val="300"/>
+              </a:spcAft>
+            </a:pPr>
+            <a:r>
+              <a:rPr sz="1130" b="1">
+                <a:solidFill>
+                  <a:srgbClr val="9FC4E8"/>
+                </a:solidFill>
+                <a:latin typeface="Apple SD Gothic Neo"/>
+              </a:rPr>
+              <a:t>• 활용 가능: </a:t>
+            </a:r>
+            <a:r>
+              <a:rPr sz="1130" b="0">
                 <a:solidFill>
                   <a:srgbClr val="FFFFFF"/>
                 </a:solidFill>
                 <a:latin typeface="Apple SD Gothic Neo"/>
               </a:rPr>
-              <a:t>현재 사내 AI 환경에서 활용 가능한 부분은 </a:t>
-            </a:r>
-            <a:r>
-              <a:rPr sz="1150" b="1">
+              <a:t>코드·스크립트 초안, 측정·로그 정리, 문서 초안, 사내 Git 협업, 망분리 로컬 처리</a:t>
+            </a:r>
+          </a:p>
+          <a:p>
+            <a:pPr algn="l">
+              <a:lnSpc>
+                <a:spcPct val="120000"/>
+              </a:lnSpc>
+              <a:spcAft>
+                <a:spcPts val="300"/>
+              </a:spcAft>
+            </a:pPr>
+            <a:r>
+              <a:rPr sz="1130" b="1">
+                <a:solidFill>
+                  <a:srgbClr val="F2B08A"/>
+                </a:solidFill>
+                <a:latin typeface="Apple SD Gothic Neo"/>
+              </a:rPr>
+              <a:t>• 한계로 불가: </a:t>
+            </a:r>
+            <a:r>
+              <a:rPr sz="1130" b="0">
                 <a:solidFill>
                   <a:srgbClr val="FFFFFF"/>
                 </a:solidFill>
                 <a:latin typeface="Apple SD Gothic Neo"/>
               </a:rPr>
-              <a:t>코드·스크립트 초안, 측정·로그 정리, 문서 초안, 사내 Git 기반 협업, 망분리 로컬 처리</a:t>
-            </a:r>
-            <a:r>
-              <a:rPr sz="1150" b="0">
-                <a:solidFill>
-                  <a:srgbClr val="FFFFFF"/>
-                </a:solidFill>
-                <a:latin typeface="Apple SD Gothic Neo"/>
-              </a:rPr>
-              <a:t> 이다.</a:t>
-            </a:r>
-          </a:p>
-          <a:p>
-            <a:pPr algn="l">
-              <a:lnSpc>
-                <a:spcPct val="115000"/>
-              </a:lnSpc>
-              <a:spcAft>
-                <a:spcPts val="200"/>
-              </a:spcAft>
-            </a:pPr>
-            <a:r>
-              <a:rPr sz="1150" b="0">
-                <a:solidFill>
-                  <a:srgbClr val="FFFFFF"/>
-                </a:solidFill>
-                <a:latin typeface="Apple SD Gothic Neo"/>
-              </a:rPr>
-              <a:t>다만 사내 조건의 한계로 불가능하거나 어려운 부분은 </a:t>
-            </a:r>
-            <a:r>
-              <a:rPr sz="1150" b="1">
-                <a:solidFill>
-                  <a:srgbClr val="FFFFFF"/>
-                </a:solidFill>
-                <a:latin typeface="Apple SD Gothic Neo"/>
-              </a:rPr>
               <a:t>외부 MCP·API 연동, 고품질 장문 검색·OCR, 대량 고속 호출, 외부 LLM·최신 웹 자료 자동 활용</a:t>
             </a:r>
-            <a:r>
-              <a:rPr sz="1150" b="0">
-                <a:solidFill>
-                  <a:srgbClr val="FFFFFF"/>
-                </a:solidFill>
-                <a:latin typeface="Apple SD Gothic Neo"/>
-              </a:rPr>
-              <a:t> 이다.</a:t>
-            </a:r>
-          </a:p>
-        </p:txBody>
-      </p:sp>
-      <p:sp>
-        <p:nvSpPr>
-          <p:cNvPr id="29" name="TextBox 28"/>
+          </a:p>
+        </p:txBody>
+      </p:sp>
+      <p:sp>
+        <p:nvSpPr>
+          <p:cNvPr id="30" name="TextBox 29"/>
           <p:cNvSpPr txBox="1"/>
           <p:nvPr/>
         </p:nvSpPr>
